--- a/CertOps_Studio_Demo_Day.pptx
+++ b/CertOps_Studio_Demo_Day.pptx
@@ -5,21 +5,18 @@
     <p:sldMasterId id="2147483689" r:id="rId1"/>
   </p:sldMasterIdLst>
   <p:notesMasterIdLst>
-    <p:notesMasterId r:id="rId14"/>
+    <p:notesMasterId r:id="rId11"/>
   </p:notesMasterIdLst>
   <p:sldIdLst>
     <p:sldId id="256" r:id="rId2"/>
     <p:sldId id="269" r:id="rId3"/>
     <p:sldId id="2147483418" r:id="rId4"/>
     <p:sldId id="2147483422" r:id="rId5"/>
-    <p:sldId id="268" r:id="rId6"/>
-    <p:sldId id="2147483424" r:id="rId7"/>
-    <p:sldId id="2147483425" r:id="rId8"/>
-    <p:sldId id="2147483427" r:id="rId9"/>
-    <p:sldId id="2147483423" r:id="rId10"/>
-    <p:sldId id="2147483426" r:id="rId11"/>
-    <p:sldId id="265" r:id="rId12"/>
-    <p:sldId id="267" r:id="rId13"/>
+    <p:sldId id="2147483427" r:id="rId6"/>
+    <p:sldId id="268" r:id="rId7"/>
+    <p:sldId id="2147483428" r:id="rId8"/>
+    <p:sldId id="2147483426" r:id="rId9"/>
+    <p:sldId id="265" r:id="rId10"/>
   </p:sldIdLst>
   <p:sldSz cx="9144000" cy="5143500" type="screen16x9"/>
   <p:notesSz cx="5143500" cy="9144000"/>
@@ -129,7 +126,7 @@
 <file path=ppt/revisionInfo.xml><?xml version="1.0" encoding="utf-8"?>
 <p1510:revInfo xmlns:a="http://schemas.openxmlformats.org/drawingml/2006/main" xmlns:r="http://schemas.openxmlformats.org/officeDocument/2006/relationships" xmlns:p1510="http://schemas.microsoft.com/office/powerpoint/2015/10/main">
   <p1510:revLst>
-    <p1510:client id="{0DB14627-278E-1D46-8892-43F72A674C91}" v="624" dt="2026-03-18T03:15:23.809"/>
+    <p1510:client id="{0DB14627-278E-1D46-8892-43F72A674C91}" v="636" dt="2026-03-19T02:44:13.925"/>
   </p1510:revLst>
 </p1510:revInfo>
 </file>
@@ -139,7 +136,7 @@
   <pc:docChgLst>
     <pc:chgData name="Joseph Mata" userId="7bc4e0a3-43fe-410e-ab0b-dd6ac2ed59a7" providerId="ADAL" clId="{20AA238B-BA4D-59F0-BE88-0BD221C4FFE9}"/>
     <pc:docChg chg="undo custSel mod addSld delSld modSld sldOrd">
-      <pc:chgData name="Joseph Mata" userId="7bc4e0a3-43fe-410e-ab0b-dd6ac2ed59a7" providerId="ADAL" clId="{20AA238B-BA4D-59F0-BE88-0BD221C4FFE9}" dt="2026-03-18T03:16:24.839" v="2679" actId="5793"/>
+      <pc:chgData name="Joseph Mata" userId="7bc4e0a3-43fe-410e-ab0b-dd6ac2ed59a7" providerId="ADAL" clId="{20AA238B-BA4D-59F0-BE88-0BD221C4FFE9}" dt="2026-03-19T02:45:41.395" v="5148" actId="20577"/>
       <pc:docMkLst>
         <pc:docMk/>
       </pc:docMkLst>
@@ -165,28 +162,12 @@
             <ac:spMk id="3" creationId="{00000000-0000-0000-0000-000000000000}"/>
           </ac:spMkLst>
         </pc:spChg>
-        <pc:spChg chg="del mod">
-          <ac:chgData name="Joseph Mata" userId="7bc4e0a3-43fe-410e-ab0b-dd6ac2ed59a7" providerId="ADAL" clId="{20AA238B-BA4D-59F0-BE88-0BD221C4FFE9}" dt="2026-03-17T11:08:56.131" v="198" actId="478"/>
-          <ac:spMkLst>
-            <pc:docMk/>
-            <pc:sldMk cId="0" sldId="256"/>
-            <ac:spMk id="4" creationId="{00000000-0000-0000-0000-000000000000}"/>
-          </ac:spMkLst>
-        </pc:spChg>
         <pc:spChg chg="mod">
           <ac:chgData name="Joseph Mata" userId="7bc4e0a3-43fe-410e-ab0b-dd6ac2ed59a7" providerId="ADAL" clId="{20AA238B-BA4D-59F0-BE88-0BD221C4FFE9}" dt="2026-03-17T11:09:33.386" v="223" actId="1076"/>
           <ac:spMkLst>
             <pc:docMk/>
             <pc:sldMk cId="0" sldId="256"/>
             <ac:spMk id="5" creationId="{00000000-0000-0000-0000-000000000000}"/>
-          </ac:spMkLst>
-        </pc:spChg>
-        <pc:spChg chg="add del mod">
-          <ac:chgData name="Joseph Mata" userId="7bc4e0a3-43fe-410e-ab0b-dd6ac2ed59a7" providerId="ADAL" clId="{20AA238B-BA4D-59F0-BE88-0BD221C4FFE9}" dt="2026-03-17T11:09:37.551" v="225"/>
-          <ac:spMkLst>
-            <pc:docMk/>
-            <pc:sldMk cId="0" sldId="256"/>
-            <ac:spMk id="6" creationId="{8E466A05-161F-FDEB-BF8D-5C64A079E1EC}"/>
           </ac:spMkLst>
         </pc:spChg>
         <pc:spChg chg="add del mod">
@@ -197,113 +178,9 @@
             <ac:spMk id="7" creationId="{18E37404-1177-E0E4-2BB7-59EF8136A294}"/>
           </ac:spMkLst>
         </pc:spChg>
-        <pc:spChg chg="add mod">
-          <ac:chgData name="Joseph Mata" userId="7bc4e0a3-43fe-410e-ab0b-dd6ac2ed59a7" providerId="ADAL" clId="{20AA238B-BA4D-59F0-BE88-0BD221C4FFE9}" dt="2026-03-17T11:09:47.530" v="231" actId="571"/>
-          <ac:spMkLst>
-            <pc:docMk/>
-            <pc:sldMk cId="0" sldId="256"/>
-            <ac:spMk id="8" creationId="{48A818AF-F424-8980-FA76-D80A92C87EEE}"/>
-          </ac:spMkLst>
-        </pc:spChg>
-        <pc:spChg chg="add del">
-          <ac:chgData name="Joseph Mata" userId="7bc4e0a3-43fe-410e-ab0b-dd6ac2ed59a7" providerId="ADAL" clId="{20AA238B-BA4D-59F0-BE88-0BD221C4FFE9}" dt="2026-03-17T11:04:43.437" v="125" actId="26606"/>
-          <ac:spMkLst>
-            <pc:docMk/>
-            <pc:sldMk cId="0" sldId="256"/>
-            <ac:spMk id="10" creationId="{934F1179-B481-4F9E-BCA3-AFB972070F83}"/>
-          </ac:spMkLst>
-        </pc:spChg>
-        <pc:spChg chg="add del">
-          <ac:chgData name="Joseph Mata" userId="7bc4e0a3-43fe-410e-ab0b-dd6ac2ed59a7" providerId="ADAL" clId="{20AA238B-BA4D-59F0-BE88-0BD221C4FFE9}" dt="2026-03-17T11:04:43.437" v="125" actId="26606"/>
-          <ac:spMkLst>
-            <pc:docMk/>
-            <pc:sldMk cId="0" sldId="256"/>
-            <ac:spMk id="12" creationId="{827DC2C4-B485-428A-BF4A-472D2967F47F}"/>
-          </ac:spMkLst>
-        </pc:spChg>
-        <pc:spChg chg="add del">
-          <ac:chgData name="Joseph Mata" userId="7bc4e0a3-43fe-410e-ab0b-dd6ac2ed59a7" providerId="ADAL" clId="{20AA238B-BA4D-59F0-BE88-0BD221C4FFE9}" dt="2026-03-17T11:04:43.437" v="125" actId="26606"/>
-          <ac:spMkLst>
-            <pc:docMk/>
-            <pc:sldMk cId="0" sldId="256"/>
-            <ac:spMk id="14" creationId="{EE04B5EB-F158-4507-90DD-BD23620C7CC9}"/>
-          </ac:spMkLst>
-        </pc:spChg>
-      </pc:sldChg>
-      <pc:sldChg chg="del">
-        <pc:chgData name="Joseph Mata" userId="7bc4e0a3-43fe-410e-ab0b-dd6ac2ed59a7" providerId="ADAL" clId="{20AA238B-BA4D-59F0-BE88-0BD221C4FFE9}" dt="2026-03-17T21:25:21.327" v="1812" actId="2696"/>
-        <pc:sldMkLst>
-          <pc:docMk/>
-          <pc:sldMk cId="0" sldId="257"/>
-        </pc:sldMkLst>
-      </pc:sldChg>
-      <pc:sldChg chg="del">
-        <pc:chgData name="Joseph Mata" userId="7bc4e0a3-43fe-410e-ab0b-dd6ac2ed59a7" providerId="ADAL" clId="{20AA238B-BA4D-59F0-BE88-0BD221C4FFE9}" dt="2026-03-17T21:25:17.885" v="1811" actId="2696"/>
-        <pc:sldMkLst>
-          <pc:docMk/>
-          <pc:sldMk cId="0" sldId="258"/>
-        </pc:sldMkLst>
-      </pc:sldChg>
-      <pc:sldChg chg="del">
-        <pc:chgData name="Joseph Mata" userId="7bc4e0a3-43fe-410e-ab0b-dd6ac2ed59a7" providerId="ADAL" clId="{20AA238B-BA4D-59F0-BE88-0BD221C4FFE9}" dt="2026-03-17T21:25:12.448" v="1810" actId="2696"/>
-        <pc:sldMkLst>
-          <pc:docMk/>
-          <pc:sldMk cId="0" sldId="259"/>
-        </pc:sldMkLst>
-      </pc:sldChg>
-      <pc:sldChg chg="addSp delSp modSp del mod">
-        <pc:chgData name="Joseph Mata" userId="7bc4e0a3-43fe-410e-ab0b-dd6ac2ed59a7" providerId="ADAL" clId="{20AA238B-BA4D-59F0-BE88-0BD221C4FFE9}" dt="2026-03-17T21:36:19.077" v="1976" actId="2696"/>
-        <pc:sldMkLst>
-          <pc:docMk/>
-          <pc:sldMk cId="0" sldId="260"/>
-        </pc:sldMkLst>
-        <pc:spChg chg="add del mod">
-          <ac:chgData name="Joseph Mata" userId="7bc4e0a3-43fe-410e-ab0b-dd6ac2ed59a7" providerId="ADAL" clId="{20AA238B-BA4D-59F0-BE88-0BD221C4FFE9}" dt="2026-03-17T11:04:02.059" v="121"/>
-          <ac:spMkLst>
-            <pc:docMk/>
-            <pc:sldMk cId="0" sldId="260"/>
-            <ac:spMk id="4" creationId="{8C0A7AE9-4801-369A-3E98-D6D08936E6E6}"/>
-          </ac:spMkLst>
-        </pc:spChg>
-        <pc:spChg chg="add del mod">
-          <ac:chgData name="Joseph Mata" userId="7bc4e0a3-43fe-410e-ab0b-dd6ac2ed59a7" providerId="ADAL" clId="{20AA238B-BA4D-59F0-BE88-0BD221C4FFE9}" dt="2026-03-17T11:04:03.321" v="123"/>
-          <ac:spMkLst>
-            <pc:docMk/>
-            <pc:sldMk cId="0" sldId="260"/>
-            <ac:spMk id="5" creationId="{16B5581F-F1AD-F7F2-7B6A-9828461A6127}"/>
-          </ac:spMkLst>
-        </pc:spChg>
-      </pc:sldChg>
-      <pc:sldChg chg="del">
-        <pc:chgData name="Joseph Mata" userId="7bc4e0a3-43fe-410e-ab0b-dd6ac2ed59a7" providerId="ADAL" clId="{20AA238B-BA4D-59F0-BE88-0BD221C4FFE9}" dt="2026-03-17T21:25:08.298" v="1809" actId="2696"/>
-        <pc:sldMkLst>
-          <pc:docMk/>
-          <pc:sldMk cId="0" sldId="261"/>
-        </pc:sldMkLst>
-      </pc:sldChg>
-      <pc:sldChg chg="modSp del mod">
-        <pc:chgData name="Joseph Mata" userId="7bc4e0a3-43fe-410e-ab0b-dd6ac2ed59a7" providerId="ADAL" clId="{20AA238B-BA4D-59F0-BE88-0BD221C4FFE9}" dt="2026-03-17T21:35:21.252" v="1949" actId="2696"/>
-        <pc:sldMkLst>
-          <pc:docMk/>
-          <pc:sldMk cId="0" sldId="262"/>
-        </pc:sldMkLst>
-      </pc:sldChg>
-      <pc:sldChg chg="del">
-        <pc:chgData name="Joseph Mata" userId="7bc4e0a3-43fe-410e-ab0b-dd6ac2ed59a7" providerId="ADAL" clId="{20AA238B-BA4D-59F0-BE88-0BD221C4FFE9}" dt="2026-03-17T21:25:04.048" v="1808" actId="2696"/>
-        <pc:sldMkLst>
-          <pc:docMk/>
-          <pc:sldMk cId="0" sldId="263"/>
-        </pc:sldMkLst>
-      </pc:sldChg>
-      <pc:sldChg chg="del">
-        <pc:chgData name="Joseph Mata" userId="7bc4e0a3-43fe-410e-ab0b-dd6ac2ed59a7" providerId="ADAL" clId="{20AA238B-BA4D-59F0-BE88-0BD221C4FFE9}" dt="2026-03-17T21:06:55.204" v="1539" actId="2696"/>
-        <pc:sldMkLst>
-          <pc:docMk/>
-          <pc:sldMk cId="0" sldId="264"/>
-        </pc:sldMkLst>
       </pc:sldChg>
       <pc:sldChg chg="delSp modSp mod setBg">
-        <pc:chgData name="Joseph Mata" userId="7bc4e0a3-43fe-410e-ab0b-dd6ac2ed59a7" providerId="ADAL" clId="{20AA238B-BA4D-59F0-BE88-0BD221C4FFE9}" dt="2026-03-17T21:36:03.395" v="1974"/>
+        <pc:chgData name="Joseph Mata" userId="7bc4e0a3-43fe-410e-ab0b-dd6ac2ed59a7" providerId="ADAL" clId="{20AA238B-BA4D-59F0-BE88-0BD221C4FFE9}" dt="2026-03-18T04:34:00.641" v="2743" actId="478"/>
         <pc:sldMkLst>
           <pc:docMk/>
           <pc:sldMk cId="0" sldId="265"/>
@@ -317,200 +194,33 @@
           </ac:spMkLst>
         </pc:spChg>
         <pc:spChg chg="del">
-          <ac:chgData name="Joseph Mata" userId="7bc4e0a3-43fe-410e-ab0b-dd6ac2ed59a7" providerId="ADAL" clId="{20AA238B-BA4D-59F0-BE88-0BD221C4FFE9}" dt="2026-03-17T21:35:51.087" v="1971" actId="478"/>
+          <ac:chgData name="Joseph Mata" userId="7bc4e0a3-43fe-410e-ab0b-dd6ac2ed59a7" providerId="ADAL" clId="{20AA238B-BA4D-59F0-BE88-0BD221C4FFE9}" dt="2026-03-18T04:34:00.641" v="2743" actId="478"/>
           <ac:spMkLst>
             <pc:docMk/>
             <pc:sldMk cId="0" sldId="265"/>
-            <ac:spMk id="4" creationId="{00000000-0000-0000-0000-000000000000}"/>
-          </ac:spMkLst>
-        </pc:spChg>
-        <pc:spChg chg="del">
-          <ac:chgData name="Joseph Mata" userId="7bc4e0a3-43fe-410e-ab0b-dd6ac2ed59a7" providerId="ADAL" clId="{20AA238B-BA4D-59F0-BE88-0BD221C4FFE9}" dt="2026-03-17T21:35:53.431" v="1972" actId="478"/>
-          <ac:spMkLst>
-            <pc:docMk/>
-            <pc:sldMk cId="0" sldId="265"/>
-            <ac:spMk id="5" creationId="{00000000-0000-0000-0000-000000000000}"/>
+            <ac:spMk id="3" creationId="{00000000-0000-0000-0000-000000000000}"/>
           </ac:spMkLst>
         </pc:spChg>
       </pc:sldChg>
-      <pc:sldChg chg="addSp delSp modSp add del mod setBg">
-        <pc:chgData name="Joseph Mata" userId="7bc4e0a3-43fe-410e-ab0b-dd6ac2ed59a7" providerId="ADAL" clId="{20AA238B-BA4D-59F0-BE88-0BD221C4FFE9}" dt="2026-03-17T21:25:24.424" v="1813" actId="2696"/>
-        <pc:sldMkLst>
-          <pc:docMk/>
-          <pc:sldMk cId="1843555247" sldId="266"/>
-        </pc:sldMkLst>
-      </pc:sldChg>
-      <pc:sldChg chg="addSp delSp modSp add mod ord setBg">
-        <pc:chgData name="Joseph Mata" userId="7bc4e0a3-43fe-410e-ab0b-dd6ac2ed59a7" providerId="ADAL" clId="{20AA238B-BA4D-59F0-BE88-0BD221C4FFE9}" dt="2026-03-17T21:37:29.610" v="1981"/>
+      <pc:sldChg chg="addSp delSp modSp add del mod ord setBg">
+        <pc:chgData name="Joseph Mata" userId="7bc4e0a3-43fe-410e-ab0b-dd6ac2ed59a7" providerId="ADAL" clId="{20AA238B-BA4D-59F0-BE88-0BD221C4FFE9}" dt="2026-03-18T04:33:54.597" v="2742" actId="2696"/>
         <pc:sldMkLst>
           <pc:docMk/>
           <pc:sldMk cId="243306271" sldId="267"/>
         </pc:sldMkLst>
-        <pc:spChg chg="add mod">
-          <ac:chgData name="Joseph Mata" userId="7bc4e0a3-43fe-410e-ab0b-dd6ac2ed59a7" providerId="ADAL" clId="{20AA238B-BA4D-59F0-BE88-0BD221C4FFE9}" dt="2026-03-17T20:11:10.510" v="1204" actId="1076"/>
-          <ac:spMkLst>
-            <pc:docMk/>
-            <pc:sldMk cId="243306271" sldId="267"/>
-            <ac:spMk id="2" creationId="{39E73F47-5AFB-1223-9419-52001A83374D}"/>
-          </ac:spMkLst>
-        </pc:spChg>
-        <pc:spChg chg="mod">
-          <ac:chgData name="Joseph Mata" userId="7bc4e0a3-43fe-410e-ab0b-dd6ac2ed59a7" providerId="ADAL" clId="{20AA238B-BA4D-59F0-BE88-0BD221C4FFE9}" dt="2026-03-17T12:01:10.417" v="916"/>
-          <ac:spMkLst>
-            <pc:docMk/>
-            <pc:sldMk cId="243306271" sldId="267"/>
-            <ac:spMk id="4" creationId="{AA57F91F-3217-0920-610D-B74EF3BBD11A}"/>
-          </ac:spMkLst>
-        </pc:spChg>
-        <pc:spChg chg="mod">
-          <ac:chgData name="Joseph Mata" userId="7bc4e0a3-43fe-410e-ab0b-dd6ac2ed59a7" providerId="ADAL" clId="{20AA238B-BA4D-59F0-BE88-0BD221C4FFE9}" dt="2026-03-17T12:01:10.417" v="916"/>
-          <ac:spMkLst>
-            <pc:docMk/>
-            <pc:sldMk cId="243306271" sldId="267"/>
-            <ac:spMk id="5" creationId="{1CA7F34A-F9ED-C471-B77E-5E91438D142A}"/>
-          </ac:spMkLst>
-        </pc:spChg>
-        <pc:spChg chg="mod">
-          <ac:chgData name="Joseph Mata" userId="7bc4e0a3-43fe-410e-ab0b-dd6ac2ed59a7" providerId="ADAL" clId="{20AA238B-BA4D-59F0-BE88-0BD221C4FFE9}" dt="2026-03-17T12:01:10.417" v="916"/>
-          <ac:spMkLst>
-            <pc:docMk/>
-            <pc:sldMk cId="243306271" sldId="267"/>
-            <ac:spMk id="7" creationId="{8F3CC2E3-812C-D3E5-D6C8-CCB4AF989889}"/>
-          </ac:spMkLst>
-        </pc:spChg>
-        <pc:spChg chg="mod">
-          <ac:chgData name="Joseph Mata" userId="7bc4e0a3-43fe-410e-ab0b-dd6ac2ed59a7" providerId="ADAL" clId="{20AA238B-BA4D-59F0-BE88-0BD221C4FFE9}" dt="2026-03-17T12:01:10.417" v="916"/>
-          <ac:spMkLst>
-            <pc:docMk/>
-            <pc:sldMk cId="243306271" sldId="267"/>
-            <ac:spMk id="8" creationId="{8CEF66D4-67BC-88D2-06FF-CC7A5ACAB40C}"/>
-          </ac:spMkLst>
-        </pc:spChg>
-        <pc:spChg chg="mod">
-          <ac:chgData name="Joseph Mata" userId="7bc4e0a3-43fe-410e-ab0b-dd6ac2ed59a7" providerId="ADAL" clId="{20AA238B-BA4D-59F0-BE88-0BD221C4FFE9}" dt="2026-03-17T12:01:10.417" v="916"/>
-          <ac:spMkLst>
-            <pc:docMk/>
-            <pc:sldMk cId="243306271" sldId="267"/>
-            <ac:spMk id="9" creationId="{B7701AA3-726E-285E-09B7-17A94E1980D6}"/>
-          </ac:spMkLst>
-        </pc:spChg>
-        <pc:spChg chg="mod">
-          <ac:chgData name="Joseph Mata" userId="7bc4e0a3-43fe-410e-ab0b-dd6ac2ed59a7" providerId="ADAL" clId="{20AA238B-BA4D-59F0-BE88-0BD221C4FFE9}" dt="2026-03-17T12:01:10.417" v="916"/>
-          <ac:spMkLst>
-            <pc:docMk/>
-            <pc:sldMk cId="243306271" sldId="267"/>
-            <ac:spMk id="10" creationId="{FFA7DED3-A03F-7F06-E4A2-3A835020279D}"/>
-          </ac:spMkLst>
-        </pc:spChg>
-        <pc:spChg chg="mod">
-          <ac:chgData name="Joseph Mata" userId="7bc4e0a3-43fe-410e-ab0b-dd6ac2ed59a7" providerId="ADAL" clId="{20AA238B-BA4D-59F0-BE88-0BD221C4FFE9}" dt="2026-03-17T12:01:10.417" v="916"/>
-          <ac:spMkLst>
-            <pc:docMk/>
-            <pc:sldMk cId="243306271" sldId="267"/>
-            <ac:spMk id="11" creationId="{8B0A0095-CBDF-EDCE-53D4-E052A9681564}"/>
-          </ac:spMkLst>
-        </pc:spChg>
-        <pc:spChg chg="mod">
-          <ac:chgData name="Joseph Mata" userId="7bc4e0a3-43fe-410e-ab0b-dd6ac2ed59a7" providerId="ADAL" clId="{20AA238B-BA4D-59F0-BE88-0BD221C4FFE9}" dt="2026-03-17T12:01:10.417" v="916"/>
-          <ac:spMkLst>
-            <pc:docMk/>
-            <pc:sldMk cId="243306271" sldId="267"/>
-            <ac:spMk id="12" creationId="{D9E20228-30AB-166A-8116-F975C5AB1B30}"/>
-          </ac:spMkLst>
-        </pc:spChg>
-        <pc:spChg chg="mod">
-          <ac:chgData name="Joseph Mata" userId="7bc4e0a3-43fe-410e-ab0b-dd6ac2ed59a7" providerId="ADAL" clId="{20AA238B-BA4D-59F0-BE88-0BD221C4FFE9}" dt="2026-03-17T12:01:10.417" v="916"/>
-          <ac:spMkLst>
-            <pc:docMk/>
-            <pc:sldMk cId="243306271" sldId="267"/>
-            <ac:spMk id="13" creationId="{C936E11D-AE75-7DC6-071B-A60E65B3D506}"/>
-          </ac:spMkLst>
-        </pc:spChg>
-        <pc:spChg chg="mod">
-          <ac:chgData name="Joseph Mata" userId="7bc4e0a3-43fe-410e-ab0b-dd6ac2ed59a7" providerId="ADAL" clId="{20AA238B-BA4D-59F0-BE88-0BD221C4FFE9}" dt="2026-03-17T12:01:10.417" v="916"/>
-          <ac:spMkLst>
-            <pc:docMk/>
-            <pc:sldMk cId="243306271" sldId="267"/>
-            <ac:spMk id="14" creationId="{643B147C-0B2C-1903-5126-86C2DC36E662}"/>
-          </ac:spMkLst>
-        </pc:spChg>
-        <pc:spChg chg="add mod">
-          <ac:chgData name="Joseph Mata" userId="7bc4e0a3-43fe-410e-ab0b-dd6ac2ed59a7" providerId="ADAL" clId="{20AA238B-BA4D-59F0-BE88-0BD221C4FFE9}" dt="2026-03-17T21:37:29.610" v="1981"/>
-          <ac:spMkLst>
-            <pc:docMk/>
-            <pc:sldMk cId="243306271" sldId="267"/>
-            <ac:spMk id="16" creationId="{7E870609-F3F9-9349-F024-ACB4436AB602}"/>
-          </ac:spMkLst>
-        </pc:spChg>
-        <pc:grpChg chg="mod">
-          <ac:chgData name="Joseph Mata" userId="7bc4e0a3-43fe-410e-ab0b-dd6ac2ed59a7" providerId="ADAL" clId="{20AA238B-BA4D-59F0-BE88-0BD221C4FFE9}" dt="2026-03-17T20:11:01.080" v="1202" actId="1076"/>
-          <ac:grpSpMkLst>
-            <pc:docMk/>
-            <pc:sldMk cId="243306271" sldId="267"/>
-            <ac:grpSpMk id="3" creationId="{73ACECE8-8FE5-2A7C-49FE-893DB2474BA2}"/>
-          </ac:grpSpMkLst>
-        </pc:grpChg>
-        <pc:picChg chg="del mod">
-          <ac:chgData name="Joseph Mata" userId="7bc4e0a3-43fe-410e-ab0b-dd6ac2ed59a7" providerId="ADAL" clId="{20AA238B-BA4D-59F0-BE88-0BD221C4FFE9}" dt="2026-03-17T11:58:13.979" v="913" actId="478"/>
-          <ac:picMkLst>
-            <pc:docMk/>
-            <pc:sldMk cId="243306271" sldId="267"/>
-            <ac:picMk id="6" creationId="{AF967185-A4A9-7E05-D890-AD17BBC96A7B}"/>
-          </ac:picMkLst>
-        </pc:picChg>
-        <pc:picChg chg="add mod">
-          <ac:chgData name="Joseph Mata" userId="7bc4e0a3-43fe-410e-ab0b-dd6ac2ed59a7" providerId="ADAL" clId="{20AA238B-BA4D-59F0-BE88-0BD221C4FFE9}" dt="2026-03-17T21:37:29.610" v="1981"/>
-          <ac:picMkLst>
-            <pc:docMk/>
-            <pc:sldMk cId="243306271" sldId="267"/>
-            <ac:picMk id="15" creationId="{A750E607-98DE-01DA-9AD5-F145F29255E1}"/>
-          </ac:picMkLst>
-        </pc:picChg>
       </pc:sldChg>
-      <pc:sldChg chg="addSp delSp modSp add mod setBg modAnim">
-        <pc:chgData name="Joseph Mata" userId="7bc4e0a3-43fe-410e-ab0b-dd6ac2ed59a7" providerId="ADAL" clId="{20AA238B-BA4D-59F0-BE88-0BD221C4FFE9}" dt="2026-03-17T22:38:56.781" v="2037"/>
+      <pc:sldChg chg="addSp delSp modSp add mod setBg delAnim modAnim">
+        <pc:chgData name="Joseph Mata" userId="7bc4e0a3-43fe-410e-ab0b-dd6ac2ed59a7" providerId="ADAL" clId="{20AA238B-BA4D-59F0-BE88-0BD221C4FFE9}" dt="2026-03-18T03:57:24.033" v="2687" actId="14100"/>
         <pc:sldMkLst>
           <pc:docMk/>
           <pc:sldMk cId="4148440160" sldId="268"/>
         </pc:sldMkLst>
-        <pc:picChg chg="add del mod">
-          <ac:chgData name="Joseph Mata" userId="7bc4e0a3-43fe-410e-ab0b-dd6ac2ed59a7" providerId="ADAL" clId="{20AA238B-BA4D-59F0-BE88-0BD221C4FFE9}" dt="2026-03-17T20:54:21.034" v="1359" actId="478"/>
-          <ac:picMkLst>
-            <pc:docMk/>
-            <pc:sldMk cId="4148440160" sldId="268"/>
-            <ac:picMk id="3" creationId="{F5014EBB-AE2E-4151-0ECE-9A2328385B99}"/>
-          </ac:picMkLst>
-        </pc:picChg>
-        <pc:picChg chg="add del mod">
-          <ac:chgData name="Joseph Mata" userId="7bc4e0a3-43fe-410e-ab0b-dd6ac2ed59a7" providerId="ADAL" clId="{20AA238B-BA4D-59F0-BE88-0BD221C4FFE9}" dt="2026-03-17T20:55:48.518" v="1362" actId="478"/>
-          <ac:picMkLst>
-            <pc:docMk/>
-            <pc:sldMk cId="4148440160" sldId="268"/>
-            <ac:picMk id="4" creationId="{5EF07543-2373-02DD-DBBE-C90961C65EF0}"/>
-          </ac:picMkLst>
-        </pc:picChg>
-        <pc:picChg chg="add del mod">
-          <ac:chgData name="Joseph Mata" userId="7bc4e0a3-43fe-410e-ab0b-dd6ac2ed59a7" providerId="ADAL" clId="{20AA238B-BA4D-59F0-BE88-0BD221C4FFE9}" dt="2026-03-17T20:55:50.376" v="1363" actId="478"/>
-          <ac:picMkLst>
-            <pc:docMk/>
-            <pc:sldMk cId="4148440160" sldId="268"/>
-            <ac:picMk id="6" creationId="{091D6D70-C474-BCD9-F3E5-2D5607865E32}"/>
-          </ac:picMkLst>
-        </pc:picChg>
-        <pc:picChg chg="add mod modCrop">
-          <ac:chgData name="Joseph Mata" userId="7bc4e0a3-43fe-410e-ab0b-dd6ac2ed59a7" providerId="ADAL" clId="{20AA238B-BA4D-59F0-BE88-0BD221C4FFE9}" dt="2026-03-17T21:00:19.028" v="1519" actId="1076"/>
+        <pc:picChg chg="add del mod modCrop">
+          <ac:chgData name="Joseph Mata" userId="7bc4e0a3-43fe-410e-ab0b-dd6ac2ed59a7" providerId="ADAL" clId="{20AA238B-BA4D-59F0-BE88-0BD221C4FFE9}" dt="2026-03-18T03:55:54.302" v="2680" actId="478"/>
           <ac:picMkLst>
             <pc:docMk/>
             <pc:sldMk cId="4148440160" sldId="268"/>
             <ac:picMk id="8" creationId="{D13EDA46-1535-4F57-15B1-8131E6B1EE5B}"/>
-          </ac:picMkLst>
-        </pc:picChg>
-        <pc:picChg chg="add del mod modCrop">
-          <ac:chgData name="Joseph Mata" userId="7bc4e0a3-43fe-410e-ab0b-dd6ac2ed59a7" providerId="ADAL" clId="{20AA238B-BA4D-59F0-BE88-0BD221C4FFE9}" dt="2026-03-17T22:38:55.650" v="2036" actId="478"/>
-          <ac:picMkLst>
-            <pc:docMk/>
-            <pc:sldMk cId="4148440160" sldId="268"/>
-            <ac:picMk id="9" creationId="{3B0D2E2D-450E-45AE-FEDD-22BD23128681}"/>
           </ac:picMkLst>
         </pc:picChg>
         <pc:picChg chg="add mod">
@@ -521,45 +231,21 @@
             <ac:picMk id="10" creationId="{AD8DF6D9-9172-4468-9FBC-D9A62497CC86}"/>
           </ac:picMkLst>
         </pc:picChg>
+        <pc:picChg chg="add mod modCrop">
+          <ac:chgData name="Joseph Mata" userId="7bc4e0a3-43fe-410e-ab0b-dd6ac2ed59a7" providerId="ADAL" clId="{20AA238B-BA4D-59F0-BE88-0BD221C4FFE9}" dt="2026-03-18T03:57:24.033" v="2687" actId="14100"/>
+          <ac:picMkLst>
+            <pc:docMk/>
+            <pc:sldMk cId="4148440160" sldId="268"/>
+            <ac:picMk id="12" creationId="{B0AD99A7-EB42-97AD-DD87-6F6A9D8219D2}"/>
+          </ac:picMkLst>
+        </pc:picChg>
       </pc:sldChg>
       <pc:sldChg chg="addSp delSp modSp add mod delAnim modAnim modNotesTx">
-        <pc:chgData name="Joseph Mata" userId="7bc4e0a3-43fe-410e-ab0b-dd6ac2ed59a7" providerId="ADAL" clId="{20AA238B-BA4D-59F0-BE88-0BD221C4FFE9}" dt="2026-03-18T02:24:56.062" v="2094" actId="20577"/>
+        <pc:chgData name="Joseph Mata" userId="7bc4e0a3-43fe-410e-ab0b-dd6ac2ed59a7" providerId="ADAL" clId="{20AA238B-BA4D-59F0-BE88-0BD221C4FFE9}" dt="2026-03-18T23:20:20.222" v="2756" actId="20577"/>
         <pc:sldMkLst>
           <pc:docMk/>
           <pc:sldMk cId="746043015" sldId="269"/>
         </pc:sldMkLst>
-        <pc:spChg chg="del mod">
-          <ac:chgData name="Joseph Mata" userId="7bc4e0a3-43fe-410e-ab0b-dd6ac2ed59a7" providerId="ADAL" clId="{20AA238B-BA4D-59F0-BE88-0BD221C4FFE9}" dt="2026-03-17T11:34:54.844" v="430" actId="478"/>
-          <ac:spMkLst>
-            <pc:docMk/>
-            <pc:sldMk cId="746043015" sldId="269"/>
-            <ac:spMk id="2" creationId="{8A752684-CF80-4B85-2929-4A79AE34BB77}"/>
-          </ac:spMkLst>
-        </pc:spChg>
-        <pc:spChg chg="del mod">
-          <ac:chgData name="Joseph Mata" userId="7bc4e0a3-43fe-410e-ab0b-dd6ac2ed59a7" providerId="ADAL" clId="{20AA238B-BA4D-59F0-BE88-0BD221C4FFE9}" dt="2026-03-17T23:55:00.039" v="2062" actId="478"/>
-          <ac:spMkLst>
-            <pc:docMk/>
-            <pc:sldMk cId="746043015" sldId="269"/>
-            <ac:spMk id="3" creationId="{45C8412A-3C81-22A3-ADD5-61D1B2A5916E}"/>
-          </ac:spMkLst>
-        </pc:spChg>
-        <pc:spChg chg="del">
-          <ac:chgData name="Joseph Mata" userId="7bc4e0a3-43fe-410e-ab0b-dd6ac2ed59a7" providerId="ADAL" clId="{20AA238B-BA4D-59F0-BE88-0BD221C4FFE9}" dt="2026-03-17T11:38:41.812" v="589" actId="478"/>
-          <ac:spMkLst>
-            <pc:docMk/>
-            <pc:sldMk cId="746043015" sldId="269"/>
-            <ac:spMk id="5" creationId="{E5E1CD56-9364-7A3C-B049-01ABA59B6353}"/>
-          </ac:spMkLst>
-        </pc:spChg>
-        <pc:spChg chg="del mod topLvl">
-          <ac:chgData name="Joseph Mata" userId="7bc4e0a3-43fe-410e-ab0b-dd6ac2ed59a7" providerId="ADAL" clId="{20AA238B-BA4D-59F0-BE88-0BD221C4FFE9}" dt="2026-03-17T11:28:31.338" v="400" actId="478"/>
-          <ac:spMkLst>
-            <pc:docMk/>
-            <pc:sldMk cId="746043015" sldId="269"/>
-            <ac:spMk id="6" creationId="{02B5C6E9-9E9F-C693-69EB-3DE6DAD5BE77}"/>
-          </ac:spMkLst>
-        </pc:spChg>
         <pc:spChg chg="add mod">
           <ac:chgData name="Joseph Mata" userId="7bc4e0a3-43fe-410e-ab0b-dd6ac2ed59a7" providerId="ADAL" clId="{20AA238B-BA4D-59F0-BE88-0BD221C4FFE9}" dt="2026-03-17T21:23:42.061" v="1768" actId="207"/>
           <ac:spMkLst>
@@ -584,14 +270,6 @@
             <ac:spMk id="15" creationId="{7303E6C0-D30A-A365-C05A-7B8F84C4935C}"/>
           </ac:spMkLst>
         </pc:spChg>
-        <pc:grpChg chg="add del mod">
-          <ac:chgData name="Joseph Mata" userId="7bc4e0a3-43fe-410e-ab0b-dd6ac2ed59a7" providerId="ADAL" clId="{20AA238B-BA4D-59F0-BE88-0BD221C4FFE9}" dt="2026-03-17T11:28:31.338" v="400" actId="478"/>
-          <ac:grpSpMkLst>
-            <pc:docMk/>
-            <pc:sldMk cId="746043015" sldId="269"/>
-            <ac:grpSpMk id="4" creationId="{E0F67736-C02C-5FCC-E026-9660AC95476A}"/>
-          </ac:grpSpMkLst>
-        </pc:grpChg>
         <pc:grpChg chg="mod topLvl">
           <ac:chgData name="Joseph Mata" userId="7bc4e0a3-43fe-410e-ab0b-dd6ac2ed59a7" providerId="ADAL" clId="{20AA238B-BA4D-59F0-BE88-0BD221C4FFE9}" dt="2026-03-17T11:28:59.967" v="416" actId="164"/>
           <ac:grpSpMkLst>
@@ -633,50 +311,12 @@
           </ac:picMkLst>
         </pc:picChg>
       </pc:sldChg>
-      <pc:sldChg chg="delSp modSp add del mod delAnim">
-        <pc:chgData name="Joseph Mata" userId="7bc4e0a3-43fe-410e-ab0b-dd6ac2ed59a7" providerId="ADAL" clId="{20AA238B-BA4D-59F0-BE88-0BD221C4FFE9}" dt="2026-03-17T21:06:36.790" v="1537" actId="2696"/>
-        <pc:sldMkLst>
-          <pc:docMk/>
-          <pc:sldMk cId="1630550334" sldId="2147483416"/>
-        </pc:sldMkLst>
-        <pc:picChg chg="mod">
-          <ac:chgData name="Joseph Mata" userId="7bc4e0a3-43fe-410e-ab0b-dd6ac2ed59a7" providerId="ADAL" clId="{20AA238B-BA4D-59F0-BE88-0BD221C4FFE9}" dt="2026-03-17T11:26:22.726" v="391"/>
-          <ac:picMkLst>
-            <pc:docMk/>
-            <pc:sldMk cId="1630550334" sldId="2147483416"/>
-            <ac:picMk id="41" creationId="{2920B59B-4E52-991D-F594-475B531F2927}"/>
-          </ac:picMkLst>
-        </pc:picChg>
-        <pc:picChg chg="del">
-          <ac:chgData name="Joseph Mata" userId="7bc4e0a3-43fe-410e-ab0b-dd6ac2ed59a7" providerId="ADAL" clId="{20AA238B-BA4D-59F0-BE88-0BD221C4FFE9}" dt="2026-03-17T11:13:34.194" v="236" actId="478"/>
-          <ac:picMkLst>
-            <pc:docMk/>
-            <pc:sldMk cId="1630550334" sldId="2147483416"/>
-            <ac:picMk id="93" creationId="{050815F9-9F8C-F6CC-0381-EA075E9A4FC9}"/>
-          </ac:picMkLst>
-        </pc:picChg>
-      </pc:sldChg>
-      <pc:sldChg chg="add del ord">
-        <pc:chgData name="Joseph Mata" userId="7bc4e0a3-43fe-410e-ab0b-dd6ac2ed59a7" providerId="ADAL" clId="{20AA238B-BA4D-59F0-BE88-0BD221C4FFE9}" dt="2026-03-17T21:36:40.456" v="1977" actId="2696"/>
-        <pc:sldMkLst>
-          <pc:docMk/>
-          <pc:sldMk cId="2882757074" sldId="2147483417"/>
-        </pc:sldMkLst>
-      </pc:sldChg>
       <pc:sldChg chg="addSp delSp modSp add mod modAnim modNotesTx">
-        <pc:chgData name="Joseph Mata" userId="7bc4e0a3-43fe-410e-ab0b-dd6ac2ed59a7" providerId="ADAL" clId="{20AA238B-BA4D-59F0-BE88-0BD221C4FFE9}" dt="2026-03-18T03:15:04.549" v="2637" actId="20577"/>
+        <pc:chgData name="Joseph Mata" userId="7bc4e0a3-43fe-410e-ab0b-dd6ac2ed59a7" providerId="ADAL" clId="{20AA238B-BA4D-59F0-BE88-0BD221C4FFE9}" dt="2026-03-19T02:45:41.395" v="5148" actId="20577"/>
         <pc:sldMkLst>
           <pc:docMk/>
           <pc:sldMk cId="229041283" sldId="2147483418"/>
         </pc:sldMkLst>
-        <pc:spChg chg="del mod">
-          <ac:chgData name="Joseph Mata" userId="7bc4e0a3-43fe-410e-ab0b-dd6ac2ed59a7" providerId="ADAL" clId="{20AA238B-BA4D-59F0-BE88-0BD221C4FFE9}" dt="2026-03-17T21:17:39.613" v="1686" actId="478"/>
-          <ac:spMkLst>
-            <pc:docMk/>
-            <pc:sldMk cId="229041283" sldId="2147483418"/>
-            <ac:spMk id="3" creationId="{9FF896F4-E6D8-EE62-1EA8-8FA1C22CC65F}"/>
-          </ac:spMkLst>
-        </pc:spChg>
         <pc:spChg chg="mod">
           <ac:chgData name="Joseph Mata" userId="7bc4e0a3-43fe-410e-ab0b-dd6ac2ed59a7" providerId="ADAL" clId="{20AA238B-BA4D-59F0-BE88-0BD221C4FFE9}" dt="2026-03-17T11:41:22.863" v="615"/>
           <ac:spMkLst>
@@ -701,28 +341,12 @@
             <ac:spMk id="6" creationId="{E85EAE25-FEE3-6C5D-4F5E-3C0F394B074B}"/>
           </ac:spMkLst>
         </pc:spChg>
-        <pc:spChg chg="del">
-          <ac:chgData name="Joseph Mata" userId="7bc4e0a3-43fe-410e-ab0b-dd6ac2ed59a7" providerId="ADAL" clId="{20AA238B-BA4D-59F0-BE88-0BD221C4FFE9}" dt="2026-03-17T11:40:11.033" v="612" actId="478"/>
-          <ac:spMkLst>
-            <pc:docMk/>
-            <pc:sldMk cId="229041283" sldId="2147483418"/>
-            <ac:spMk id="13" creationId="{26C985ED-C294-C298-E04B-1E1C158888E4}"/>
-          </ac:spMkLst>
-        </pc:spChg>
         <pc:spChg chg="mod">
           <ac:chgData name="Joseph Mata" userId="7bc4e0a3-43fe-410e-ab0b-dd6ac2ed59a7" providerId="ADAL" clId="{20AA238B-BA4D-59F0-BE88-0BD221C4FFE9}" dt="2026-03-17T21:34:25.503" v="1937" actId="20577"/>
           <ac:spMkLst>
             <pc:docMk/>
             <pc:sldMk cId="229041283" sldId="2147483418"/>
             <ac:spMk id="14" creationId="{DFDDE935-EA22-48AD-E33A-5CBA1A69475A}"/>
-          </ac:spMkLst>
-        </pc:spChg>
-        <pc:spChg chg="del mod">
-          <ac:chgData name="Joseph Mata" userId="7bc4e0a3-43fe-410e-ab0b-dd6ac2ed59a7" providerId="ADAL" clId="{20AA238B-BA4D-59F0-BE88-0BD221C4FFE9}" dt="2026-03-17T20:17:12.105" v="1217" actId="478"/>
-          <ac:spMkLst>
-            <pc:docMk/>
-            <pc:sldMk cId="229041283" sldId="2147483418"/>
-            <ac:spMk id="15" creationId="{41FE6A3A-C881-F71D-58A3-A1E4FCECB0C3}"/>
           </ac:spMkLst>
         </pc:spChg>
         <pc:spChg chg="mod">
@@ -1077,30 +701,6 @@
             <ac:spMk id="69" creationId="{A51E62F6-BA08-55BF-6B78-21BC150EF4C5}"/>
           </ac:spMkLst>
         </pc:spChg>
-        <pc:spChg chg="mod">
-          <ac:chgData name="Joseph Mata" userId="7bc4e0a3-43fe-410e-ab0b-dd6ac2ed59a7" providerId="ADAL" clId="{20AA238B-BA4D-59F0-BE88-0BD221C4FFE9}" dt="2026-03-17T11:47:48.834" v="720"/>
-          <ac:spMkLst>
-            <pc:docMk/>
-            <pc:sldMk cId="229041283" sldId="2147483418"/>
-            <ac:spMk id="71" creationId="{D3681600-6622-4E09-9F06-B825983A9E50}"/>
-          </ac:spMkLst>
-        </pc:spChg>
-        <pc:spChg chg="mod">
-          <ac:chgData name="Joseph Mata" userId="7bc4e0a3-43fe-410e-ab0b-dd6ac2ed59a7" providerId="ADAL" clId="{20AA238B-BA4D-59F0-BE88-0BD221C4FFE9}" dt="2026-03-17T11:47:48.834" v="720"/>
-          <ac:spMkLst>
-            <pc:docMk/>
-            <pc:sldMk cId="229041283" sldId="2147483418"/>
-            <ac:spMk id="72" creationId="{51121457-8994-4FCD-C9D0-BE664F160A66}"/>
-          </ac:spMkLst>
-        </pc:spChg>
-        <pc:spChg chg="del mod">
-          <ac:chgData name="Joseph Mata" userId="7bc4e0a3-43fe-410e-ab0b-dd6ac2ed59a7" providerId="ADAL" clId="{20AA238B-BA4D-59F0-BE88-0BD221C4FFE9}" dt="2026-03-17T11:47:50.756" v="721" actId="478"/>
-          <ac:spMkLst>
-            <pc:docMk/>
-            <pc:sldMk cId="229041283" sldId="2147483418"/>
-            <ac:spMk id="73" creationId="{502C2EAD-6D65-C035-24D4-7D1F04A15C39}"/>
-          </ac:spMkLst>
-        </pc:spChg>
         <pc:spChg chg="add mod">
           <ac:chgData name="Joseph Mata" userId="7bc4e0a3-43fe-410e-ab0b-dd6ac2ed59a7" providerId="ADAL" clId="{20AA238B-BA4D-59F0-BE88-0BD221C4FFE9}" dt="2026-03-17T23:53:14.523" v="2044" actId="164"/>
           <ac:spMkLst>
@@ -1165,30 +765,6 @@
             <ac:spMk id="81" creationId="{E6106DCF-9AD0-625A-7343-1C846C26EFAC}"/>
           </ac:spMkLst>
         </pc:spChg>
-        <pc:spChg chg="add del mod">
-          <ac:chgData name="Joseph Mata" userId="7bc4e0a3-43fe-410e-ab0b-dd6ac2ed59a7" providerId="ADAL" clId="{20AA238B-BA4D-59F0-BE88-0BD221C4FFE9}" dt="2026-03-17T21:28:36.623" v="1901" actId="478"/>
-          <ac:spMkLst>
-            <pc:docMk/>
-            <pc:sldMk cId="229041283" sldId="2147483418"/>
-            <ac:spMk id="82" creationId="{B1844D71-5512-1CE5-E8FE-A18C0E6186CD}"/>
-          </ac:spMkLst>
-        </pc:spChg>
-        <pc:spChg chg="add del mod">
-          <ac:chgData name="Joseph Mata" userId="7bc4e0a3-43fe-410e-ab0b-dd6ac2ed59a7" providerId="ADAL" clId="{20AA238B-BA4D-59F0-BE88-0BD221C4FFE9}" dt="2026-03-17T20:23:07.310" v="1268" actId="478"/>
-          <ac:spMkLst>
-            <pc:docMk/>
-            <pc:sldMk cId="229041283" sldId="2147483418"/>
-            <ac:spMk id="83" creationId="{ADD54991-0F09-20C1-8EA6-9B0384BC4E46}"/>
-          </ac:spMkLst>
-        </pc:spChg>
-        <pc:spChg chg="add del mod">
-          <ac:chgData name="Joseph Mata" userId="7bc4e0a3-43fe-410e-ab0b-dd6ac2ed59a7" providerId="ADAL" clId="{20AA238B-BA4D-59F0-BE88-0BD221C4FFE9}" dt="2026-03-17T20:23:10.027" v="1269" actId="478"/>
-          <ac:spMkLst>
-            <pc:docMk/>
-            <pc:sldMk cId="229041283" sldId="2147483418"/>
-            <ac:spMk id="84" creationId="{6B43BDFD-7102-3FD8-B8F2-9667EB29E4D8}"/>
-          </ac:spMkLst>
-        </pc:spChg>
         <pc:spChg chg="del mod">
           <ac:chgData name="Joseph Mata" userId="7bc4e0a3-43fe-410e-ab0b-dd6ac2ed59a7" providerId="ADAL" clId="{20AA238B-BA4D-59F0-BE88-0BD221C4FFE9}" dt="2026-03-18T02:49:43.711" v="2282" actId="478"/>
           <ac:spMkLst>
@@ -1229,14 +805,6 @@
             <ac:grpSpMk id="2" creationId="{5CFF00FD-870A-5FE4-5F81-77C6E6F7D18F}"/>
           </ac:grpSpMkLst>
         </pc:grpChg>
-        <pc:grpChg chg="del">
-          <ac:chgData name="Joseph Mata" userId="7bc4e0a3-43fe-410e-ab0b-dd6ac2ed59a7" providerId="ADAL" clId="{20AA238B-BA4D-59F0-BE88-0BD221C4FFE9}" dt="2026-03-17T11:40:20.541" v="614" actId="478"/>
-          <ac:grpSpMkLst>
-            <pc:docMk/>
-            <pc:sldMk cId="229041283" sldId="2147483418"/>
-            <ac:grpSpMk id="12" creationId="{6CE5DF8C-9826-1E47-A7BB-66C11DD995C6}"/>
-          </ac:grpSpMkLst>
-        </pc:grpChg>
         <pc:grpChg chg="mod">
           <ac:chgData name="Joseph Mata" userId="7bc4e0a3-43fe-410e-ab0b-dd6ac2ed59a7" providerId="ADAL" clId="{20AA238B-BA4D-59F0-BE88-0BD221C4FFE9}" dt="2026-03-17T21:16:57.646" v="1635" actId="164"/>
           <ac:grpSpMkLst>
@@ -1275,22 +843,6 @@
             <pc:docMk/>
             <pc:sldMk cId="229041283" sldId="2147483418"/>
             <ac:grpSpMk id="66" creationId="{5CC801C1-1A47-5DA9-CD0A-2589CCF80B7D}"/>
-          </ac:grpSpMkLst>
-        </pc:grpChg>
-        <pc:grpChg chg="add del mod">
-          <ac:chgData name="Joseph Mata" userId="7bc4e0a3-43fe-410e-ab0b-dd6ac2ed59a7" providerId="ADAL" clId="{20AA238B-BA4D-59F0-BE88-0BD221C4FFE9}" dt="2026-03-17T11:48:59.389" v="766" actId="478"/>
-          <ac:grpSpMkLst>
-            <pc:docMk/>
-            <pc:sldMk cId="229041283" sldId="2147483418"/>
-            <ac:grpSpMk id="70" creationId="{CCCD781A-C69F-CA2B-985B-5F405086C346}"/>
-          </ac:grpSpMkLst>
-        </pc:grpChg>
-        <pc:grpChg chg="add mod">
-          <ac:chgData name="Joseph Mata" userId="7bc4e0a3-43fe-410e-ab0b-dd6ac2ed59a7" providerId="ADAL" clId="{20AA238B-BA4D-59F0-BE88-0BD221C4FFE9}" dt="2026-03-17T21:18:02" v="1689" actId="1076"/>
-          <ac:grpSpMkLst>
-            <pc:docMk/>
-            <pc:sldMk cId="229041283" sldId="2147483418"/>
-            <ac:grpSpMk id="85" creationId="{2142EBBF-255F-EE00-BD73-E7542439AC25}"/>
           </ac:grpSpMkLst>
         </pc:grpChg>
         <pc:grpChg chg="add mod">
@@ -1350,14 +902,6 @@
           </ac:grpSpMkLst>
         </pc:grpChg>
         <pc:grpChg chg="add mod">
-          <ac:chgData name="Joseph Mata" userId="7bc4e0a3-43fe-410e-ab0b-dd6ac2ed59a7" providerId="ADAL" clId="{20AA238B-BA4D-59F0-BE88-0BD221C4FFE9}" dt="2026-03-17T21:33:37.493" v="1915" actId="164"/>
-          <ac:grpSpMkLst>
-            <pc:docMk/>
-            <pc:sldMk cId="229041283" sldId="2147483418"/>
-            <ac:grpSpMk id="101" creationId="{CA783EE2-E72E-B917-6EB0-D4C8A27D223E}"/>
-          </ac:grpSpMkLst>
-        </pc:grpChg>
-        <pc:grpChg chg="add mod">
           <ac:chgData name="Joseph Mata" userId="7bc4e0a3-43fe-410e-ab0b-dd6ac2ed59a7" providerId="ADAL" clId="{20AA238B-BA4D-59F0-BE88-0BD221C4FFE9}" dt="2026-03-17T23:53:14.523" v="2044" actId="164"/>
           <ac:grpSpMkLst>
             <pc:docMk/>
@@ -1405,14 +949,6 @@
             <ac:picMk id="87" creationId="{0621B4A0-B469-DD11-51E8-63EF4AD3843B}"/>
           </ac:picMkLst>
         </pc:picChg>
-        <pc:picChg chg="add del">
-          <ac:chgData name="Joseph Mata" userId="7bc4e0a3-43fe-410e-ab0b-dd6ac2ed59a7" providerId="ADAL" clId="{20AA238B-BA4D-59F0-BE88-0BD221C4FFE9}" dt="2026-03-17T20:20:49.151" v="1249" actId="478"/>
-          <ac:picMkLst>
-            <pc:docMk/>
-            <pc:sldMk cId="229041283" sldId="2147483418"/>
-            <ac:picMk id="1026" creationId="{4515449E-61AC-8A40-F229-C855ECF809F9}"/>
-          </ac:picMkLst>
-        </pc:picChg>
         <pc:cxnChg chg="add mod">
           <ac:chgData name="Joseph Mata" userId="7bc4e0a3-43fe-410e-ab0b-dd6ac2ed59a7" providerId="ADAL" clId="{20AA238B-BA4D-59F0-BE88-0BD221C4FFE9}" dt="2026-03-18T02:27:55.344" v="2102" actId="1076"/>
           <ac:cxnSpMkLst>
@@ -1430,118 +966,33 @@
           </ac:cxnSpMkLst>
         </pc:cxnChg>
       </pc:sldChg>
-      <pc:sldChg chg="add del">
-        <pc:chgData name="Joseph Mata" userId="7bc4e0a3-43fe-410e-ab0b-dd6ac2ed59a7" providerId="ADAL" clId="{20AA238B-BA4D-59F0-BE88-0BD221C4FFE9}" dt="2026-03-17T21:06:56.931" v="1540" actId="2696"/>
-        <pc:sldMkLst>
-          <pc:docMk/>
-          <pc:sldMk cId="755072292" sldId="2147483419"/>
-        </pc:sldMkLst>
-      </pc:sldChg>
-      <pc:sldChg chg="add del">
-        <pc:chgData name="Joseph Mata" userId="7bc4e0a3-43fe-410e-ab0b-dd6ac2ed59a7" providerId="ADAL" clId="{20AA238B-BA4D-59F0-BE88-0BD221C4FFE9}" dt="2026-03-17T21:36:06.293" v="1975" actId="2696"/>
-        <pc:sldMkLst>
-          <pc:docMk/>
-          <pc:sldMk cId="3358425312" sldId="2147483420"/>
-        </pc:sldMkLst>
-      </pc:sldChg>
-      <pc:sldChg chg="add del">
-        <pc:chgData name="Joseph Mata" userId="7bc4e0a3-43fe-410e-ab0b-dd6ac2ed59a7" providerId="ADAL" clId="{20AA238B-BA4D-59F0-BE88-0BD221C4FFE9}" dt="2026-03-17T21:36:45.210" v="1978" actId="2696"/>
-        <pc:sldMkLst>
-          <pc:docMk/>
-          <pc:sldMk cId="2497943167" sldId="2147483421"/>
-        </pc:sldMkLst>
-      </pc:sldChg>
       <pc:sldChg chg="add ord modNotesTx">
-        <pc:chgData name="Joseph Mata" userId="7bc4e0a3-43fe-410e-ab0b-dd6ac2ed59a7" providerId="ADAL" clId="{20AA238B-BA4D-59F0-BE88-0BD221C4FFE9}" dt="2026-03-18T03:16:24.839" v="2679" actId="5793"/>
+        <pc:chgData name="Joseph Mata" userId="7bc4e0a3-43fe-410e-ab0b-dd6ac2ed59a7" providerId="ADAL" clId="{20AA238B-BA4D-59F0-BE88-0BD221C4FFE9}" dt="2026-03-19T00:50:52.299" v="2908" actId="20577"/>
         <pc:sldMkLst>
           <pc:docMk/>
           <pc:sldMk cId="468562430" sldId="2147483422"/>
         </pc:sldMkLst>
       </pc:sldChg>
-      <pc:sldChg chg="delSp modSp add mod ord">
-        <pc:chgData name="Joseph Mata" userId="7bc4e0a3-43fe-410e-ab0b-dd6ac2ed59a7" providerId="ADAL" clId="{20AA238B-BA4D-59F0-BE88-0BD221C4FFE9}" dt="2026-03-17T21:38:01.523" v="1986" actId="20578"/>
+      <pc:sldChg chg="delSp modSp add del mod ord">
+        <pc:chgData name="Joseph Mata" userId="7bc4e0a3-43fe-410e-ab0b-dd6ac2ed59a7" providerId="ADAL" clId="{20AA238B-BA4D-59F0-BE88-0BD221C4FFE9}" dt="2026-03-18T04:33:50.821" v="2741" actId="2696"/>
         <pc:sldMkLst>
           <pc:docMk/>
           <pc:sldMk cId="2111548839" sldId="2147483423"/>
         </pc:sldMkLst>
-        <pc:spChg chg="del">
-          <ac:chgData name="Joseph Mata" userId="7bc4e0a3-43fe-410e-ab0b-dd6ac2ed59a7" providerId="ADAL" clId="{20AA238B-BA4D-59F0-BE88-0BD221C4FFE9}" dt="2026-03-17T21:37:38.853" v="1983" actId="478"/>
-          <ac:spMkLst>
-            <pc:docMk/>
-            <pc:sldMk cId="2111548839" sldId="2147483423"/>
-            <ac:spMk id="2" creationId="{7B8500F4-8E79-ACD8-C40E-27370FAD8C4F}"/>
-          </ac:spMkLst>
-        </pc:spChg>
-        <pc:spChg chg="mod">
-          <ac:chgData name="Joseph Mata" userId="7bc4e0a3-43fe-410e-ab0b-dd6ac2ed59a7" providerId="ADAL" clId="{20AA238B-BA4D-59F0-BE88-0BD221C4FFE9}" dt="2026-03-17T21:37:53.815" v="1985" actId="1076"/>
-          <ac:spMkLst>
-            <pc:docMk/>
-            <pc:sldMk cId="2111548839" sldId="2147483423"/>
-            <ac:spMk id="16" creationId="{7A04B7E3-4873-9F1B-B2B0-D016176D0BC0}"/>
-          </ac:spMkLst>
-        </pc:spChg>
-        <pc:grpChg chg="del">
-          <ac:chgData name="Joseph Mata" userId="7bc4e0a3-43fe-410e-ab0b-dd6ac2ed59a7" providerId="ADAL" clId="{20AA238B-BA4D-59F0-BE88-0BD221C4FFE9}" dt="2026-03-17T21:37:43.627" v="1984" actId="478"/>
-          <ac:grpSpMkLst>
-            <pc:docMk/>
-            <pc:sldMk cId="2111548839" sldId="2147483423"/>
-            <ac:grpSpMk id="3" creationId="{BDA0F9F6-C756-FC1C-0B56-DE70FEBFD1BD}"/>
-          </ac:grpSpMkLst>
-        </pc:grpChg>
-        <pc:picChg chg="mod">
-          <ac:chgData name="Joseph Mata" userId="7bc4e0a3-43fe-410e-ab0b-dd6ac2ed59a7" providerId="ADAL" clId="{20AA238B-BA4D-59F0-BE88-0BD221C4FFE9}" dt="2026-03-17T21:37:53.815" v="1985" actId="1076"/>
-          <ac:picMkLst>
-            <pc:docMk/>
-            <pc:sldMk cId="2111548839" sldId="2147483423"/>
-            <ac:picMk id="15" creationId="{D02F25E2-AA80-93DE-0025-FC07E44B2EB6}"/>
-          </ac:picMkLst>
-        </pc:picChg>
       </pc:sldChg>
-      <pc:sldChg chg="addSp delSp modSp add mod modTransition modAnim">
-        <pc:chgData name="Joseph Mata" userId="7bc4e0a3-43fe-410e-ab0b-dd6ac2ed59a7" providerId="ADAL" clId="{20AA238B-BA4D-59F0-BE88-0BD221C4FFE9}" dt="2026-03-17T22:39:25.023" v="2041" actId="732"/>
+      <pc:sldChg chg="addSp delSp modSp add del mod modTransition modAnim">
+        <pc:chgData name="Joseph Mata" userId="7bc4e0a3-43fe-410e-ab0b-dd6ac2ed59a7" providerId="ADAL" clId="{20AA238B-BA4D-59F0-BE88-0BD221C4FFE9}" dt="2026-03-18T04:32:43.890" v="2713" actId="2696"/>
         <pc:sldMkLst>
           <pc:docMk/>
           <pc:sldMk cId="1990532883" sldId="2147483424"/>
         </pc:sldMkLst>
-        <pc:picChg chg="add mod">
-          <ac:chgData name="Joseph Mata" userId="7bc4e0a3-43fe-410e-ab0b-dd6ac2ed59a7" providerId="ADAL" clId="{20AA238B-BA4D-59F0-BE88-0BD221C4FFE9}" dt="2026-03-17T22:39:00.691" v="2039"/>
-          <ac:picMkLst>
-            <pc:docMk/>
-            <pc:sldMk cId="1990532883" sldId="2147483424"/>
-            <ac:picMk id="2" creationId="{A07970D8-0946-0AC7-6F88-DF80EE6ED979}"/>
-          </ac:picMkLst>
-        </pc:picChg>
-        <pc:picChg chg="mod modCrop">
-          <ac:chgData name="Joseph Mata" userId="7bc4e0a3-43fe-410e-ab0b-dd6ac2ed59a7" providerId="ADAL" clId="{20AA238B-BA4D-59F0-BE88-0BD221C4FFE9}" dt="2026-03-17T22:39:25.023" v="2041" actId="732"/>
-          <ac:picMkLst>
-            <pc:docMk/>
-            <pc:sldMk cId="1990532883" sldId="2147483424"/>
-            <ac:picMk id="8" creationId="{1E9D1B04-AD45-1D14-C48D-45CAB1CFCE79}"/>
-          </ac:picMkLst>
-        </pc:picChg>
-        <pc:picChg chg="del mod">
-          <ac:chgData name="Joseph Mata" userId="7bc4e0a3-43fe-410e-ab0b-dd6ac2ed59a7" providerId="ADAL" clId="{20AA238B-BA4D-59F0-BE88-0BD221C4FFE9}" dt="2026-03-17T22:38:59.660" v="2038" actId="478"/>
-          <ac:picMkLst>
-            <pc:docMk/>
-            <pc:sldMk cId="1990532883" sldId="2147483424"/>
-            <ac:picMk id="9" creationId="{2C6BBF8A-33A6-2975-4993-14836074B25B}"/>
-          </ac:picMkLst>
-        </pc:picChg>
       </pc:sldChg>
-      <pc:sldChg chg="modSp add mod modAnim">
-        <pc:chgData name="Joseph Mata" userId="7bc4e0a3-43fe-410e-ab0b-dd6ac2ed59a7" providerId="ADAL" clId="{20AA238B-BA4D-59F0-BE88-0BD221C4FFE9}" dt="2026-03-17T22:38:02.147" v="2034"/>
+      <pc:sldChg chg="modSp add del mod modAnim">
+        <pc:chgData name="Joseph Mata" userId="7bc4e0a3-43fe-410e-ab0b-dd6ac2ed59a7" providerId="ADAL" clId="{20AA238B-BA4D-59F0-BE88-0BD221C4FFE9}" dt="2026-03-18T04:32:44.384" v="2714" actId="2696"/>
         <pc:sldMkLst>
           <pc:docMk/>
           <pc:sldMk cId="4175983484" sldId="2147483425"/>
         </pc:sldMkLst>
-        <pc:picChg chg="mod modCrop">
-          <ac:chgData name="Joseph Mata" userId="7bc4e0a3-43fe-410e-ab0b-dd6ac2ed59a7" providerId="ADAL" clId="{20AA238B-BA4D-59F0-BE88-0BD221C4FFE9}" dt="2026-03-17T22:35:59.268" v="2033" actId="1076"/>
-          <ac:picMkLst>
-            <pc:docMk/>
-            <pc:sldMk cId="4175983484" sldId="2147483425"/>
-            <ac:picMk id="8" creationId="{C76994A1-15AF-01C8-EBD1-099ABC020FAF}"/>
-          </ac:picMkLst>
-        </pc:picChg>
       </pc:sldChg>
       <pc:sldChg chg="add">
         <pc:chgData name="Joseph Mata" userId="7bc4e0a3-43fe-410e-ab0b-dd6ac2ed59a7" providerId="ADAL" clId="{20AA238B-BA4D-59F0-BE88-0BD221C4FFE9}" dt="2026-03-17T22:42:46.185" v="2042" actId="2890"/>
@@ -1550,18 +1001,34 @@
           <pc:sldMk cId="1512180849" sldId="2147483426"/>
         </pc:sldMkLst>
       </pc:sldChg>
-      <pc:sldChg chg="addSp delSp modSp add mod">
-        <pc:chgData name="Joseph Mata" userId="7bc4e0a3-43fe-410e-ab0b-dd6ac2ed59a7" providerId="ADAL" clId="{20AA238B-BA4D-59F0-BE88-0BD221C4FFE9}" dt="2026-03-18T00:10:10.466" v="2066" actId="732"/>
+      <pc:sldChg chg="addSp delSp modSp add mod ord">
+        <pc:chgData name="Joseph Mata" userId="7bc4e0a3-43fe-410e-ab0b-dd6ac2ed59a7" providerId="ADAL" clId="{20AA238B-BA4D-59F0-BE88-0BD221C4FFE9}" dt="2026-03-18T04:13:29.528" v="2712" actId="20578"/>
         <pc:sldMkLst>
           <pc:docMk/>
           <pc:sldMk cId="98661325" sldId="2147483427"/>
         </pc:sldMkLst>
-        <pc:picChg chg="add mod modCrop">
-          <ac:chgData name="Joseph Mata" userId="7bc4e0a3-43fe-410e-ab0b-dd6ac2ed59a7" providerId="ADAL" clId="{20AA238B-BA4D-59F0-BE88-0BD221C4FFE9}" dt="2026-03-18T00:10:10.466" v="2066" actId="732"/>
+        <pc:picChg chg="add del mod modCrop">
+          <ac:chgData name="Joseph Mata" userId="7bc4e0a3-43fe-410e-ab0b-dd6ac2ed59a7" providerId="ADAL" clId="{20AA238B-BA4D-59F0-BE88-0BD221C4FFE9}" dt="2026-03-18T04:04:28.661" v="2688" actId="478"/>
           <ac:picMkLst>
             <pc:docMk/>
             <pc:sldMk cId="98661325" sldId="2147483427"/>
             <ac:picMk id="3" creationId="{8831B76D-E39D-C66B-1FFC-D36B4C0D30BD}"/>
+          </ac:picMkLst>
+        </pc:picChg>
+        <pc:picChg chg="add del mod">
+          <ac:chgData name="Joseph Mata" userId="7bc4e0a3-43fe-410e-ab0b-dd6ac2ed59a7" providerId="ADAL" clId="{20AA238B-BA4D-59F0-BE88-0BD221C4FFE9}" dt="2026-03-18T04:05:04.002" v="2690" actId="478"/>
+          <ac:picMkLst>
+            <pc:docMk/>
+            <pc:sldMk cId="98661325" sldId="2147483427"/>
+            <ac:picMk id="5" creationId="{C72C90DC-6B16-88A8-DCC1-126259A6DE7D}"/>
+          </ac:picMkLst>
+        </pc:picChg>
+        <pc:picChg chg="add del mod">
+          <ac:chgData name="Joseph Mata" userId="7bc4e0a3-43fe-410e-ab0b-dd6ac2ed59a7" providerId="ADAL" clId="{20AA238B-BA4D-59F0-BE88-0BD221C4FFE9}" dt="2026-03-18T04:08:27.414" v="2699" actId="478"/>
+          <ac:picMkLst>
+            <pc:docMk/>
+            <pc:sldMk cId="98661325" sldId="2147483427"/>
+            <ac:picMk id="7" creationId="{94902D0B-FC35-D81F-4CD0-E21F4FA2F3E2}"/>
           </ac:picMkLst>
         </pc:picChg>
         <pc:picChg chg="del">
@@ -1572,6 +1039,77 @@
             <ac:picMk id="8" creationId="{D2B18707-102C-CF10-6D0A-0B2E85ED086B}"/>
           </ac:picMkLst>
         </pc:picChg>
+        <pc:picChg chg="add del mod">
+          <ac:chgData name="Joseph Mata" userId="7bc4e0a3-43fe-410e-ab0b-dd6ac2ed59a7" providerId="ADAL" clId="{20AA238B-BA4D-59F0-BE88-0BD221C4FFE9}" dt="2026-03-18T04:08:15.680" v="2696" actId="478"/>
+          <ac:picMkLst>
+            <pc:docMk/>
+            <pc:sldMk cId="98661325" sldId="2147483427"/>
+            <ac:picMk id="11" creationId="{70E24EBD-83B7-3EAB-66F8-B80E3A6B2B81}"/>
+          </ac:picMkLst>
+        </pc:picChg>
+        <pc:picChg chg="add del mod">
+          <ac:chgData name="Joseph Mata" userId="7bc4e0a3-43fe-410e-ab0b-dd6ac2ed59a7" providerId="ADAL" clId="{20AA238B-BA4D-59F0-BE88-0BD221C4FFE9}" dt="2026-03-18T04:09:27.984" v="2702" actId="478"/>
+          <ac:picMkLst>
+            <pc:docMk/>
+            <pc:sldMk cId="98661325" sldId="2147483427"/>
+            <ac:picMk id="13" creationId="{18ACA528-E685-8372-EC8C-5F3658430163}"/>
+          </ac:picMkLst>
+        </pc:picChg>
+        <pc:picChg chg="add del mod">
+          <ac:chgData name="Joseph Mata" userId="7bc4e0a3-43fe-410e-ab0b-dd6ac2ed59a7" providerId="ADAL" clId="{20AA238B-BA4D-59F0-BE88-0BD221C4FFE9}" dt="2026-03-18T04:09:58.348" v="2704" actId="478"/>
+          <ac:picMkLst>
+            <pc:docMk/>
+            <pc:sldMk cId="98661325" sldId="2147483427"/>
+            <ac:picMk id="15" creationId="{17A65D12-BD72-270E-F1A8-3895DE1B5FFB}"/>
+          </ac:picMkLst>
+        </pc:picChg>
+        <pc:picChg chg="add mod">
+          <ac:chgData name="Joseph Mata" userId="7bc4e0a3-43fe-410e-ab0b-dd6ac2ed59a7" providerId="ADAL" clId="{20AA238B-BA4D-59F0-BE88-0BD221C4FFE9}" dt="2026-03-18T04:10:38.257" v="2711" actId="1076"/>
+          <ac:picMkLst>
+            <pc:docMk/>
+            <pc:sldMk cId="98661325" sldId="2147483427"/>
+            <ac:picMk id="17" creationId="{7F83CCD4-A2B5-F67A-990E-589DC7898A21}"/>
+          </ac:picMkLst>
+        </pc:picChg>
+      </pc:sldChg>
+      <pc:sldChg chg="delSp modSp add mod ord delAnim">
+        <pc:chgData name="Joseph Mata" userId="7bc4e0a3-43fe-410e-ab0b-dd6ac2ed59a7" providerId="ADAL" clId="{20AA238B-BA4D-59F0-BE88-0BD221C4FFE9}" dt="2026-03-18T04:33:41.830" v="2740" actId="478"/>
+        <pc:sldMkLst>
+          <pc:docMk/>
+          <pc:sldMk cId="4275385850" sldId="2147483428"/>
+        </pc:sldMkLst>
+        <pc:spChg chg="del">
+          <ac:chgData name="Joseph Mata" userId="7bc4e0a3-43fe-410e-ab0b-dd6ac2ed59a7" providerId="ADAL" clId="{20AA238B-BA4D-59F0-BE88-0BD221C4FFE9}" dt="2026-03-18T04:33:39.088" v="2739" actId="478"/>
+          <ac:spMkLst>
+            <pc:docMk/>
+            <pc:sldMk cId="4275385850" sldId="2147483428"/>
+            <ac:spMk id="13" creationId="{DDC468E6-577D-F7A7-CA4D-294898C05571}"/>
+          </ac:spMkLst>
+        </pc:spChg>
+        <pc:spChg chg="mod">
+          <ac:chgData name="Joseph Mata" userId="7bc4e0a3-43fe-410e-ab0b-dd6ac2ed59a7" providerId="ADAL" clId="{20AA238B-BA4D-59F0-BE88-0BD221C4FFE9}" dt="2026-03-18T04:33:19.362" v="2737" actId="20577"/>
+          <ac:spMkLst>
+            <pc:docMk/>
+            <pc:sldMk cId="4275385850" sldId="2147483428"/>
+            <ac:spMk id="14" creationId="{BA11CF18-A570-7598-8C41-228FED79393B}"/>
+          </ac:spMkLst>
+        </pc:spChg>
+        <pc:spChg chg="del">
+          <ac:chgData name="Joseph Mata" userId="7bc4e0a3-43fe-410e-ab0b-dd6ac2ed59a7" providerId="ADAL" clId="{20AA238B-BA4D-59F0-BE88-0BD221C4FFE9}" dt="2026-03-18T04:33:37.742" v="2738" actId="478"/>
+          <ac:spMkLst>
+            <pc:docMk/>
+            <pc:sldMk cId="4275385850" sldId="2147483428"/>
+            <ac:spMk id="15" creationId="{1959E908-31CF-D00A-08DB-A11CCDAA94FC}"/>
+          </ac:spMkLst>
+        </pc:spChg>
+        <pc:grpChg chg="del">
+          <ac:chgData name="Joseph Mata" userId="7bc4e0a3-43fe-410e-ab0b-dd6ac2ed59a7" providerId="ADAL" clId="{20AA238B-BA4D-59F0-BE88-0BD221C4FFE9}" dt="2026-03-18T04:33:41.830" v="2740" actId="478"/>
+          <ac:grpSpMkLst>
+            <pc:docMk/>
+            <pc:sldMk cId="4275385850" sldId="2147483428"/>
+            <ac:grpSpMk id="12" creationId="{40E1E631-59CC-A25B-EA4A-24A4CB1B7772}"/>
+          </ac:grpSpMkLst>
+        </pc:grpChg>
       </pc:sldChg>
     </pc:docChg>
   </pc:docChgLst>
@@ -1832,315 +1370,6 @@
 </p:notes>
 </file>
 
-<file path=ppt/notesSlides/notesSlide10.xml><?xml version="1.0" encoding="utf-8"?>
-<p:notes xmlns:a="http://schemas.openxmlformats.org/drawingml/2006/main" xmlns:r="http://schemas.openxmlformats.org/officeDocument/2006/relationships" xmlns:p="http://schemas.openxmlformats.org/presentationml/2006/main">
-  <p:cSld>
-    <p:spTree>
-      <p:nvGrpSpPr>
-        <p:cNvPr id="1" name="">
-          <a:extLst>
-            <a:ext uri="{FF2B5EF4-FFF2-40B4-BE49-F238E27FC236}">
-              <a16:creationId xmlns:a16="http://schemas.microsoft.com/office/drawing/2014/main" id="{2F23CBB3-2C3E-16CF-C440-C956A4C41264}"/>
-            </a:ext>
-          </a:extLst>
-        </p:cNvPr>
-        <p:cNvGrpSpPr/>
-        <p:nvPr/>
-      </p:nvGrpSpPr>
-      <p:grpSpPr>
-        <a:xfrm>
-          <a:off x="0" y="0"/>
-          <a:ext cx="0" cy="0"/>
-          <a:chOff x="0" y="0"/>
-          <a:chExt cx="0" cy="0"/>
-        </a:xfrm>
-      </p:grpSpPr>
-      <p:sp>
-        <p:nvSpPr>
-          <p:cNvPr id="2" name="Slide Image Placeholder 1">
-            <a:extLst>
-              <a:ext uri="{FF2B5EF4-FFF2-40B4-BE49-F238E27FC236}">
-                <a16:creationId xmlns:a16="http://schemas.microsoft.com/office/drawing/2014/main" id="{4065A950-1D18-A506-2EFD-EA649DD82F6D}"/>
-              </a:ext>
-            </a:extLst>
-          </p:cNvPr>
-          <p:cNvSpPr>
-            <a:spLocks noGrp="1" noRot="1" noChangeAspect="1"/>
-          </p:cNvSpPr>
-          <p:nvPr>
-            <p:ph type="sldImg"/>
-          </p:nvPr>
-        </p:nvSpPr>
-        <p:spPr/>
-      </p:sp>
-      <p:sp>
-        <p:nvSpPr>
-          <p:cNvPr id="3" name="Notes Placeholder 2">
-            <a:extLst>
-              <a:ext uri="{FF2B5EF4-FFF2-40B4-BE49-F238E27FC236}">
-                <a16:creationId xmlns:a16="http://schemas.microsoft.com/office/drawing/2014/main" id="{2F49A47B-6C35-1119-D381-021AB0D393D6}"/>
-              </a:ext>
-            </a:extLst>
-          </p:cNvPr>
-          <p:cNvSpPr>
-            <a:spLocks noGrp="1"/>
-          </p:cNvSpPr>
-          <p:nvPr>
-            <p:ph type="body" idx="1"/>
-          </p:nvPr>
-        </p:nvSpPr>
-        <p:spPr/>
-        <p:txBody>
-          <a:bodyPr/>
-          <a:lstStyle/>
-          <a:p>
-            <a:r>
-              <a:rPr lang="en-US" dirty="0"/>
-              <a:t>Open strong. One sentence intro, then straight into the problem. Don’t fumble with ‘can you see my screen’ — just go.</a:t>
-            </a:r>
-          </a:p>
-        </p:txBody>
-      </p:sp>
-      <p:sp>
-        <p:nvSpPr>
-          <p:cNvPr id="4" name="Slide Number Placeholder 3">
-            <a:extLst>
-              <a:ext uri="{FF2B5EF4-FFF2-40B4-BE49-F238E27FC236}">
-                <a16:creationId xmlns:a16="http://schemas.microsoft.com/office/drawing/2014/main" id="{20DB4C8D-9D8C-40EC-4F06-358B94083FE6}"/>
-              </a:ext>
-            </a:extLst>
-          </p:cNvPr>
-          <p:cNvSpPr>
-            <a:spLocks noGrp="1"/>
-          </p:cNvSpPr>
-          <p:nvPr>
-            <p:ph type="sldNum" sz="quarter" idx="10"/>
-          </p:nvPr>
-        </p:nvSpPr>
-        <p:spPr/>
-        <p:txBody>
-          <a:bodyPr/>
-          <a:lstStyle/>
-          <a:p>
-            <a:fld id="{F7021451-1387-4CA6-816F-3879F97B5CBC}" type="slidenum">
-              <a:rPr lang="en-US"/>
-              <a:t>10</a:t>
-            </a:fld>
-            <a:endParaRPr lang="en-US"/>
-          </a:p>
-        </p:txBody>
-      </p:sp>
-    </p:spTree>
-    <p:extLst>
-      <p:ext uri="{BB962C8B-B14F-4D97-AF65-F5344CB8AC3E}">
-        <p14:creationId xmlns:p14="http://schemas.microsoft.com/office/powerpoint/2010/main" val="2010213735"/>
-      </p:ext>
-    </p:extLst>
-  </p:cSld>
-  <p:clrMapOvr>
-    <a:masterClrMapping/>
-  </p:clrMapOvr>
-</p:notes>
-</file>
-
-<file path=ppt/notesSlides/notesSlide11.xml><?xml version="1.0" encoding="utf-8"?>
-<p:notes xmlns:a="http://schemas.openxmlformats.org/drawingml/2006/main" xmlns:r="http://schemas.openxmlformats.org/officeDocument/2006/relationships" xmlns:p="http://schemas.openxmlformats.org/presentationml/2006/main">
-  <p:cSld>
-    <p:spTree>
-      <p:nvGrpSpPr>
-        <p:cNvPr id="1" name=""/>
-        <p:cNvGrpSpPr/>
-        <p:nvPr/>
-      </p:nvGrpSpPr>
-      <p:grpSpPr>
-        <a:xfrm>
-          <a:off x="0" y="0"/>
-          <a:ext cx="0" cy="0"/>
-          <a:chOff x="0" y="0"/>
-          <a:chExt cx="0" cy="0"/>
-        </a:xfrm>
-      </p:grpSpPr>
-      <p:sp>
-        <p:nvSpPr>
-          <p:cNvPr id="2" name="Slide Image Placeholder 1"/>
-          <p:cNvSpPr>
-            <a:spLocks noGrp="1" noRot="1" noChangeAspect="1"/>
-          </p:cNvSpPr>
-          <p:nvPr>
-            <p:ph type="sldImg"/>
-          </p:nvPr>
-        </p:nvSpPr>
-        <p:spPr/>
-      </p:sp>
-      <p:sp>
-        <p:nvSpPr>
-          <p:cNvPr id="3" name="Notes Placeholder 2"/>
-          <p:cNvSpPr>
-            <a:spLocks noGrp="1"/>
-          </p:cNvSpPr>
-          <p:nvPr>
-            <p:ph type="body" idx="1"/>
-          </p:nvPr>
-        </p:nvSpPr>
-        <p:spPr/>
-        <p:txBody>
-          <a:bodyPr/>
-          <a:lstStyle/>
-          <a:p>
-            <a:r>
-              <a:rPr lang="en-US" dirty="0"/>
-              <a:t>Close strong. Open for questions. Have the live app ready.</a:t>
-            </a:r>
-          </a:p>
-        </p:txBody>
-      </p:sp>
-      <p:sp>
-        <p:nvSpPr>
-          <p:cNvPr id="4" name="Slide Number Placeholder 3"/>
-          <p:cNvSpPr>
-            <a:spLocks noGrp="1"/>
-          </p:cNvSpPr>
-          <p:nvPr>
-            <p:ph type="sldNum" sz="quarter" idx="10"/>
-          </p:nvPr>
-        </p:nvSpPr>
-        <p:spPr/>
-        <p:txBody>
-          <a:bodyPr/>
-          <a:lstStyle/>
-          <a:p>
-            <a:fld id="{F7021451-1387-4CA6-816F-3879F97B5CBC}" type="slidenum">
-              <a:rPr lang="en-US"/>
-              <a:t>11</a:t>
-            </a:fld>
-            <a:endParaRPr lang="en-US"/>
-          </a:p>
-        </p:txBody>
-      </p:sp>
-    </p:spTree>
-    <p:extLst>
-      <p:ext uri="{BB962C8B-B14F-4D97-AF65-F5344CB8AC3E}">
-        <p14:creationId xmlns:p14="http://schemas.microsoft.com/office/powerpoint/2010/main" val="1024086991"/>
-      </p:ext>
-    </p:extLst>
-  </p:cSld>
-  <p:clrMapOvr>
-    <a:masterClrMapping/>
-  </p:clrMapOvr>
-</p:notes>
-</file>
-
-<file path=ppt/notesSlides/notesSlide12.xml><?xml version="1.0" encoding="utf-8"?>
-<p:notes xmlns:a="http://schemas.openxmlformats.org/drawingml/2006/main" xmlns:r="http://schemas.openxmlformats.org/officeDocument/2006/relationships" xmlns:p="http://schemas.openxmlformats.org/presentationml/2006/main">
-  <p:cSld>
-    <p:spTree>
-      <p:nvGrpSpPr>
-        <p:cNvPr id="1" name="">
-          <a:extLst>
-            <a:ext uri="{FF2B5EF4-FFF2-40B4-BE49-F238E27FC236}">
-              <a16:creationId xmlns:a16="http://schemas.microsoft.com/office/drawing/2014/main" id="{FEA3F040-FBFA-0EE1-F196-6F593927A414}"/>
-            </a:ext>
-          </a:extLst>
-        </p:cNvPr>
-        <p:cNvGrpSpPr/>
-        <p:nvPr/>
-      </p:nvGrpSpPr>
-      <p:grpSpPr>
-        <a:xfrm>
-          <a:off x="0" y="0"/>
-          <a:ext cx="0" cy="0"/>
-          <a:chOff x="0" y="0"/>
-          <a:chExt cx="0" cy="0"/>
-        </a:xfrm>
-      </p:grpSpPr>
-      <p:sp>
-        <p:nvSpPr>
-          <p:cNvPr id="2" name="Slide Image Placeholder 1">
-            <a:extLst>
-              <a:ext uri="{FF2B5EF4-FFF2-40B4-BE49-F238E27FC236}">
-                <a16:creationId xmlns:a16="http://schemas.microsoft.com/office/drawing/2014/main" id="{1F304799-8B90-4A6A-0EE5-33160ED0C2F4}"/>
-              </a:ext>
-            </a:extLst>
-          </p:cNvPr>
-          <p:cNvSpPr>
-            <a:spLocks noGrp="1" noRot="1" noChangeAspect="1"/>
-          </p:cNvSpPr>
-          <p:nvPr>
-            <p:ph type="sldImg"/>
-          </p:nvPr>
-        </p:nvSpPr>
-        <p:spPr/>
-      </p:sp>
-      <p:sp>
-        <p:nvSpPr>
-          <p:cNvPr id="3" name="Notes Placeholder 2">
-            <a:extLst>
-              <a:ext uri="{FF2B5EF4-FFF2-40B4-BE49-F238E27FC236}">
-                <a16:creationId xmlns:a16="http://schemas.microsoft.com/office/drawing/2014/main" id="{845AF488-DED5-84A4-F33F-58484B1ED7EB}"/>
-              </a:ext>
-            </a:extLst>
-          </p:cNvPr>
-          <p:cNvSpPr>
-            <a:spLocks noGrp="1"/>
-          </p:cNvSpPr>
-          <p:nvPr>
-            <p:ph type="body" idx="1"/>
-          </p:nvPr>
-        </p:nvSpPr>
-        <p:spPr/>
-        <p:txBody>
-          <a:bodyPr/>
-          <a:lstStyle/>
-          <a:p>
-            <a:r>
-              <a:rPr lang="en-US" dirty="0"/>
-              <a:t>Open strong. One sentence intro, then straight into the problem. Don’t fumble with ‘can you see my screen’ — just go.</a:t>
-            </a:r>
-          </a:p>
-        </p:txBody>
-      </p:sp>
-      <p:sp>
-        <p:nvSpPr>
-          <p:cNvPr id="4" name="Slide Number Placeholder 3">
-            <a:extLst>
-              <a:ext uri="{FF2B5EF4-FFF2-40B4-BE49-F238E27FC236}">
-                <a16:creationId xmlns:a16="http://schemas.microsoft.com/office/drawing/2014/main" id="{FAC96C08-FCAB-70C6-CC3B-86CB131C337B}"/>
-              </a:ext>
-            </a:extLst>
-          </p:cNvPr>
-          <p:cNvSpPr>
-            <a:spLocks noGrp="1"/>
-          </p:cNvSpPr>
-          <p:nvPr>
-            <p:ph type="sldNum" sz="quarter" idx="10"/>
-          </p:nvPr>
-        </p:nvSpPr>
-        <p:spPr/>
-        <p:txBody>
-          <a:bodyPr/>
-          <a:lstStyle/>
-          <a:p>
-            <a:fld id="{F7021451-1387-4CA6-816F-3879F97B5CBC}" type="slidenum">
-              <a:rPr lang="en-US"/>
-              <a:t>12</a:t>
-            </a:fld>
-            <a:endParaRPr lang="en-US"/>
-          </a:p>
-        </p:txBody>
-      </p:sp>
-    </p:spTree>
-    <p:extLst>
-      <p:ext uri="{BB962C8B-B14F-4D97-AF65-F5344CB8AC3E}">
-        <p14:creationId xmlns:p14="http://schemas.microsoft.com/office/powerpoint/2010/main" val="3590224760"/>
-      </p:ext>
-    </p:extLst>
-  </p:cSld>
-  <p:clrMapOvr>
-    <a:masterClrMapping/>
-  </p:clrMapOvr>
-</p:notes>
-</file>
-
 <file path=ppt/notesSlides/notesSlide2.xml><?xml version="1.0" encoding="utf-8"?>
 <p:notes xmlns:a="http://schemas.openxmlformats.org/drawingml/2006/main" xmlns:r="http://schemas.openxmlformats.org/officeDocument/2006/relationships" xmlns:p="http://schemas.openxmlformats.org/presentationml/2006/main">
   <p:cSld>
@@ -2243,7 +1472,31 @@
                 <a:ea typeface="+mn-ea"/>
                 <a:cs typeface="+mn-cs"/>
               </a:rPr>
-              <a:t>Organizations today are rapidly adopting AI tools such as Microsoft Copilot, Claude, and other enterprise AI platforms. But adoption is not the same as proficiency.</a:t>
+              <a:t>Organizations today are rapidly adopting AI tools such as Microsoft Copilot, Claude, and </a:t>
+            </a:r>
+            <a:r>
+              <a:rPr lang="en-US" sz="1200" b="0" i="0" u="none" strike="noStrike" kern="1200" dirty="0" err="1">
+                <a:solidFill>
+                  <a:schemeClr val="tx1"/>
+                </a:solidFill>
+                <a:effectLst/>
+                <a:latin typeface="+mn-lt"/>
+                <a:ea typeface="+mn-ea"/>
+                <a:cs typeface="+mn-cs"/>
+              </a:rPr>
+              <a:t>otherI</a:t>
+            </a:r>
+            <a:r>
+              <a:rPr lang="en-US" sz="1200" b="0" i="0" u="none" strike="noStrike" kern="1200" dirty="0">
+                <a:solidFill>
+                  <a:schemeClr val="tx1"/>
+                </a:solidFill>
+                <a:effectLst/>
+                <a:latin typeface="+mn-lt"/>
+                <a:ea typeface="+mn-ea"/>
+                <a:cs typeface="+mn-cs"/>
+              </a:rPr>
+              <a:t> platforms. But adoption is not the same as proficiency.</a:t>
             </a:r>
             <a:endParaRPr lang="en-US" b="0" dirty="0">
               <a:effectLst/>
@@ -2684,7 +1937,153 @@
                 <a:ea typeface="+mn-ea"/>
                 <a:cs typeface="+mn-cs"/>
               </a:rPr>
-              <a:t>If only there was </a:t>
+              <a:t>If only there was system that enablement leads could use generate certification programs that are tailored to how AI tools should be used within our organization</a:t>
+            </a:r>
+          </a:p>
+          <a:p>
+            <a:pPr rtl="0"/>
+            <a:r>
+              <a:rPr lang="en-US" sz="1200" b="0" i="0" u="none" strike="noStrike" kern="1200" dirty="0">
+                <a:solidFill>
+                  <a:schemeClr val="tx1"/>
+                </a:solidFill>
+                <a:effectLst/>
+                <a:latin typeface="+mn-lt"/>
+                <a:ea typeface="+mn-ea"/>
+                <a:cs typeface="+mn-cs"/>
+              </a:rPr>
+              <a:t>builds on the previous.</a:t>
+            </a:r>
+            <a:endParaRPr lang="en-US" b="0" dirty="0">
+              <a:effectLst/>
+            </a:endParaRPr>
+          </a:p>
+          <a:p>
+            <a:endParaRPr lang="en-US" b="0" dirty="0">
+              <a:effectLst/>
+            </a:endParaRPr>
+          </a:p>
+          <a:p>
+            <a:endParaRPr lang="en-US" b="0" dirty="0">
+              <a:effectLst/>
+            </a:endParaRPr>
+          </a:p>
+          <a:p>
+            <a:r>
+              <a:rPr lang="en-US" b="0" dirty="0">
+                <a:effectLst/>
+              </a:rPr>
+              <a:t>SITE</a:t>
+            </a:r>
+          </a:p>
+          <a:p>
+            <a:endParaRPr lang="en-US" b="0" dirty="0">
+              <a:effectLst/>
+            </a:endParaRPr>
+          </a:p>
+          <a:p>
+            <a:pPr marL="0" marR="0" lvl="0" indent="0" algn="l" defTabSz="914400" rtl="0" eaLnBrk="1" fontAlgn="auto" latinLnBrk="0" hangingPunct="1">
+              <a:lnSpc>
+                <a:spcPct val="100000"/>
+              </a:lnSpc>
+              <a:spcBef>
+                <a:spcPts val="0"/>
+              </a:spcBef>
+              <a:spcAft>
+                <a:spcPts val="0"/>
+              </a:spcAft>
+              <a:buClrTx/>
+              <a:buSzTx/>
+              <a:buFontTx/>
+              <a:buNone/>
+              <a:tabLst/>
+              <a:defRPr/>
+            </a:pPr>
+            <a:r>
+              <a:rPr lang="en-US" sz="1200" b="0" i="0" u="none" strike="noStrike" kern="1200" dirty="0">
+                <a:solidFill>
+                  <a:schemeClr val="tx1"/>
+                </a:solidFill>
+                <a:effectLst/>
+                <a:latin typeface="+mn-lt"/>
+                <a:ea typeface="+mn-ea"/>
+                <a:cs typeface="+mn-cs"/>
+              </a:rPr>
+              <a:t>Behold, </a:t>
+            </a:r>
+            <a:r>
+              <a:rPr lang="en-US" dirty="0"/>
+              <a:t>Cert Ops Studio, an AI-powered platform that builds certification programs and delivers adaptive exams. You provide the content and the system generates a complete, structured program ready for learner assessment, analytics, and deployment.</a:t>
+            </a:r>
+          </a:p>
+          <a:p>
+            <a:endParaRPr lang="en-US" b="0" dirty="0">
+              <a:effectLst/>
+            </a:endParaRPr>
+          </a:p>
+          <a:p>
+            <a:r>
+              <a:rPr lang="en-US" sz="1200" b="0" i="0" u="none" strike="noStrike" kern="1200" dirty="0">
+                <a:solidFill>
+                  <a:schemeClr val="tx1"/>
+                </a:solidFill>
+                <a:effectLst/>
+                <a:latin typeface="+mn-lt"/>
+                <a:ea typeface="+mn-ea"/>
+                <a:cs typeface="+mn-cs"/>
+              </a:rPr>
+              <a:t>the studio has five main workflows: </a:t>
+            </a:r>
+            <a:r>
+              <a:rPr lang="en-US" sz="1200" b="1" i="0" u="none" strike="noStrike" kern="1200" dirty="0">
+                <a:solidFill>
+                  <a:schemeClr val="tx1"/>
+                </a:solidFill>
+                <a:effectLst/>
+                <a:latin typeface="+mn-lt"/>
+                <a:ea typeface="+mn-ea"/>
+                <a:cs typeface="+mn-cs"/>
+              </a:rPr>
+              <a:t>The first is is build.</a:t>
+            </a:r>
+          </a:p>
+          <a:p>
+            <a:pPr rtl="0"/>
+            <a:r>
+              <a:rPr lang="en-US" sz="1200" b="0" i="0" u="none" strike="noStrike" kern="1200" dirty="0">
+                <a:solidFill>
+                  <a:schemeClr val="tx1"/>
+                </a:solidFill>
+                <a:effectLst/>
+                <a:latin typeface="+mn-lt"/>
+                <a:ea typeface="+mn-ea"/>
+                <a:cs typeface="+mn-cs"/>
+              </a:rPr>
+              <a:t>Here you add a program name and a short description of the audience and what it should cover. alongside </a:t>
+            </a:r>
+            <a:r>
+              <a:rPr lang="en-US" sz="1200" b="1" i="0" u="none" strike="noStrike" kern="1200" dirty="0">
+                <a:solidFill>
+                  <a:schemeClr val="tx1"/>
+                </a:solidFill>
+                <a:effectLst/>
+                <a:latin typeface="+mn-lt"/>
+                <a:ea typeface="+mn-ea"/>
+                <a:cs typeface="+mn-cs"/>
+              </a:rPr>
+              <a:t>uploaded  internal and external content.</a:t>
+            </a:r>
+            <a:r>
+              <a:rPr lang="en-US" sz="1200" b="0" i="0" u="none" strike="noStrike" kern="1200" dirty="0">
+                <a:solidFill>
+                  <a:schemeClr val="tx1"/>
+                </a:solidFill>
+                <a:effectLst/>
+                <a:latin typeface="+mn-lt"/>
+                <a:ea typeface="+mn-ea"/>
+                <a:cs typeface="+mn-cs"/>
+              </a:rPr>
+              <a:t>  Using that information </a:t>
             </a:r>
             <a:r>
               <a:rPr lang="en-US" sz="1200" b="0" i="0" u="none" strike="noStrike" kern="1200" dirty="0" err="1">
@@ -2696,7 +2095,7 @@
                 <a:ea typeface="+mn-ea"/>
                 <a:cs typeface="+mn-cs"/>
               </a:rPr>
-              <a:t>ssystemw</a:t>
+              <a:t>CertOps</a:t>
             </a:r>
             <a:r>
               <a:rPr lang="en-US" sz="1200" b="0" i="0" u="none" strike="noStrike" kern="1200" dirty="0">
@@ -2708,7 +2107,512 @@
                 <a:ea typeface="+mn-ea"/>
                 <a:cs typeface="+mn-cs"/>
               </a:rPr>
-              <a:t> here enablement leads could generate certification programs that are tailored to how AI tools should be used within our organization</a:t>
+              <a:t> generates six artifacts</a:t>
+            </a:r>
+            <a:endParaRPr lang="en-US" b="0" dirty="0">
+              <a:effectLst/>
+            </a:endParaRPr>
+          </a:p>
+          <a:p>
+            <a:pPr rtl="0"/>
+            <a:endParaRPr lang="en-US" sz="1200" b="1" i="0" u="none" strike="noStrike" kern="1200" dirty="0">
+              <a:solidFill>
+                <a:schemeClr val="tx1"/>
+              </a:solidFill>
+              <a:effectLst/>
+              <a:latin typeface="+mn-lt"/>
+              <a:ea typeface="+mn-ea"/>
+              <a:cs typeface="+mn-cs"/>
+            </a:endParaRPr>
+          </a:p>
+          <a:p>
+            <a:pPr rtl="0"/>
+            <a:r>
+              <a:rPr lang="en-US" sz="1200" b="1" i="0" u="none" strike="noStrike" kern="1200" dirty="0">
+                <a:solidFill>
+                  <a:schemeClr val="tx1"/>
+                </a:solidFill>
+                <a:effectLst/>
+                <a:latin typeface="+mn-lt"/>
+                <a:ea typeface="+mn-ea"/>
+                <a:cs typeface="+mn-cs"/>
+              </a:rPr>
+              <a:t>The first is the blueprint or over all 5the artifacts generated. </a:t>
+            </a:r>
+          </a:p>
+          <a:p>
+            <a:pPr rtl="0"/>
+            <a:endParaRPr lang="en-US" sz="1200" b="1" i="0" u="none" strike="noStrike" kern="1200" dirty="0">
+              <a:solidFill>
+                <a:schemeClr val="tx1"/>
+              </a:solidFill>
+              <a:effectLst/>
+              <a:latin typeface="+mn-lt"/>
+              <a:ea typeface="+mn-ea"/>
+              <a:cs typeface="+mn-cs"/>
+            </a:endParaRPr>
+          </a:p>
+          <a:p>
+            <a:pPr rtl="0"/>
+            <a:r>
+              <a:rPr lang="en-US" sz="1200" b="1" i="0" u="none" strike="noStrike" kern="1200" dirty="0">
+                <a:solidFill>
+                  <a:schemeClr val="tx1"/>
+                </a:solidFill>
+                <a:effectLst/>
+                <a:latin typeface="+mn-lt"/>
+                <a:ea typeface="+mn-ea"/>
+                <a:cs typeface="+mn-cs"/>
+              </a:rPr>
+              <a:t>the first is the Competency Framework which </a:t>
+            </a:r>
+            <a:r>
+              <a:rPr lang="en-US" sz="1200" b="0" i="0" u="none" strike="noStrike" kern="1200" dirty="0">
+                <a:solidFill>
+                  <a:schemeClr val="tx1"/>
+                </a:solidFill>
+                <a:effectLst/>
+                <a:latin typeface="+mn-lt"/>
+                <a:ea typeface="+mn-ea"/>
+                <a:cs typeface="+mn-cs"/>
+              </a:rPr>
+              <a:t>defines the domains  the certification covers, the specific skills within each domain, and what novice, competent, and expert performance looks like for each skill.</a:t>
+            </a:r>
+            <a:endParaRPr lang="en-US" b="0" dirty="0">
+              <a:effectLst/>
+            </a:endParaRPr>
+          </a:p>
+          <a:p>
+            <a:br>
+              <a:rPr lang="en-US" b="0" dirty="0">
+                <a:effectLst/>
+              </a:rPr>
+            </a:br>
+            <a:r>
+              <a:rPr lang="en-US" b="0" dirty="0">
+                <a:effectLst/>
+              </a:rPr>
+              <a:t>The second </a:t>
+            </a:r>
+            <a:r>
+              <a:rPr lang="en-US" sz="1200" b="1" i="0" u="none" strike="noStrike" kern="1200" dirty="0">
+                <a:solidFill>
+                  <a:schemeClr val="tx1"/>
+                </a:solidFill>
+                <a:effectLst/>
+                <a:latin typeface="+mn-lt"/>
+                <a:ea typeface="+mn-ea"/>
+                <a:cs typeface="+mn-cs"/>
+              </a:rPr>
+              <a:t>Learning Progression </a:t>
+            </a:r>
+            <a:r>
+              <a:rPr lang="en-US" sz="1200" b="0" i="0" u="none" strike="noStrike" kern="1200" dirty="0">
+                <a:solidFill>
+                  <a:schemeClr val="tx1"/>
+                </a:solidFill>
+                <a:effectLst/>
+                <a:latin typeface="+mn-lt"/>
+                <a:ea typeface="+mn-ea"/>
+                <a:cs typeface="+mn-cs"/>
+              </a:rPr>
+              <a:t>which maps out how a learner should prepare for the certification. It covers, suggested activities, estimated time, prerequisites, and success criteria.</a:t>
+            </a:r>
+            <a:endParaRPr lang="en-US" b="0" dirty="0">
+              <a:effectLst/>
+            </a:endParaRPr>
+          </a:p>
+          <a:p>
+            <a:endParaRPr lang="en-US" b="0" dirty="0">
+              <a:effectLst/>
+            </a:endParaRPr>
+          </a:p>
+          <a:p>
+            <a:pPr rtl="0"/>
+            <a:r>
+              <a:rPr lang="en-US" sz="1200" b="1" i="0" u="none" strike="noStrike" kern="1200" dirty="0">
+                <a:solidFill>
+                  <a:schemeClr val="tx1"/>
+                </a:solidFill>
+                <a:effectLst/>
+                <a:latin typeface="+mn-lt"/>
+                <a:ea typeface="+mn-ea"/>
+                <a:cs typeface="+mn-cs"/>
+              </a:rPr>
+              <a:t>the third are artifact Performance Tasks </a:t>
+            </a:r>
+            <a:r>
+              <a:rPr lang="en-US" sz="1200" b="0" i="0" u="none" strike="noStrike" kern="1200" dirty="0">
+                <a:solidFill>
+                  <a:schemeClr val="tx1"/>
+                </a:solidFill>
+                <a:effectLst/>
+                <a:latin typeface="+mn-lt"/>
+                <a:ea typeface="+mn-ea"/>
+                <a:cs typeface="+mn-cs"/>
+              </a:rPr>
+              <a:t>Hands-on, projects that test whether a learner can apply their knowledge in realistic scenarios. Each of which </a:t>
+            </a:r>
+            <a:r>
+              <a:rPr lang="en-US" b="0" dirty="0">
+                <a:effectLst/>
+              </a:rPr>
+              <a:t>are accompanied by s</a:t>
+            </a:r>
+            <a:r>
+              <a:rPr lang="en-US" sz="1200" b="0" i="0" u="none" strike="noStrike" kern="1200" dirty="0">
+                <a:solidFill>
+                  <a:schemeClr val="tx1"/>
+                </a:solidFill>
+                <a:effectLst/>
+                <a:latin typeface="+mn-lt"/>
+                <a:ea typeface="+mn-ea"/>
+                <a:cs typeface="+mn-cs"/>
+              </a:rPr>
+              <a:t>coring guides. </a:t>
+            </a:r>
+          </a:p>
+          <a:p>
+            <a:endParaRPr lang="en-US" sz="1200" b="1" i="0" u="none" strike="noStrike" kern="1200" dirty="0">
+              <a:solidFill>
+                <a:schemeClr val="tx1"/>
+              </a:solidFill>
+              <a:effectLst/>
+              <a:latin typeface="+mn-lt"/>
+              <a:ea typeface="+mn-ea"/>
+              <a:cs typeface="+mn-cs"/>
+            </a:endParaRPr>
+          </a:p>
+          <a:p>
+            <a:pPr rtl="0"/>
+            <a:r>
+              <a:rPr lang="en-US" sz="1200" b="1" i="0" u="none" strike="noStrike" kern="1200" dirty="0">
+                <a:solidFill>
+                  <a:schemeClr val="tx1"/>
+                </a:solidFill>
+                <a:effectLst/>
+                <a:latin typeface="+mn-lt"/>
+                <a:ea typeface="+mn-ea"/>
+                <a:cs typeface="+mn-cs"/>
+              </a:rPr>
+              <a:t>Next are a </a:t>
+            </a:r>
+            <a:r>
+              <a:rPr lang="en-US" sz="1200" b="0" i="0" u="none" strike="noStrike" kern="1200" dirty="0">
+                <a:solidFill>
+                  <a:schemeClr val="tx1"/>
+                </a:solidFill>
+                <a:effectLst/>
+                <a:latin typeface="+mn-lt"/>
+                <a:ea typeface="+mn-ea"/>
+                <a:cs typeface="+mn-cs"/>
+              </a:rPr>
+              <a:t> pool of exam questions that our  automated exam will draw from. It contains both multiple-choice and open-ended questions. Each item includes the correct answer,  scoring notes, and which domain/skill it maps to. </a:t>
+            </a:r>
+          </a:p>
+          <a:p>
+            <a:pPr rtl="0"/>
+            <a:r>
+              <a:rPr lang="en-US" sz="1200" b="0" i="0" u="none" strike="noStrike" kern="1200" dirty="0">
+                <a:solidFill>
+                  <a:schemeClr val="tx1"/>
+                </a:solidFill>
+                <a:effectLst/>
+                <a:latin typeface="+mn-lt"/>
+                <a:ea typeface="+mn-ea"/>
+                <a:cs typeface="+mn-cs"/>
+              </a:rPr>
+              <a:t>All the </a:t>
+            </a:r>
+            <a:r>
+              <a:rPr lang="en-US" sz="1200" b="0" i="0" u="none" strike="noStrike" kern="1200" dirty="0" err="1">
+                <a:solidFill>
+                  <a:schemeClr val="tx1"/>
+                </a:solidFill>
+                <a:effectLst/>
+                <a:latin typeface="+mn-lt"/>
+                <a:ea typeface="+mn-ea"/>
+                <a:cs typeface="+mn-cs"/>
+              </a:rPr>
+              <a:t>atifact</a:t>
+            </a:r>
+            <a:r>
+              <a:rPr lang="en-US" sz="1200" b="0" i="0" u="none" strike="noStrike" kern="1200" dirty="0">
+                <a:solidFill>
+                  <a:schemeClr val="tx1"/>
+                </a:solidFill>
+                <a:effectLst/>
+                <a:latin typeface="+mn-lt"/>
+                <a:ea typeface="+mn-ea"/>
+                <a:cs typeface="+mn-cs"/>
+              </a:rPr>
+              <a:t> </a:t>
+            </a:r>
+            <a:r>
+              <a:rPr lang="en-US" sz="1200" b="0" i="0" u="none" strike="noStrike" kern="1200" dirty="0" err="1">
+                <a:solidFill>
+                  <a:schemeClr val="tx1"/>
+                </a:solidFill>
+                <a:effectLst/>
+                <a:latin typeface="+mn-lt"/>
+                <a:ea typeface="+mn-ea"/>
+                <a:cs typeface="+mn-cs"/>
+              </a:rPr>
+              <a:t>oare</a:t>
+            </a:r>
+            <a:r>
+              <a:rPr lang="en-US" sz="1200" b="0" i="0" u="none" strike="noStrike" kern="1200" dirty="0">
+                <a:solidFill>
+                  <a:schemeClr val="tx1"/>
+                </a:solidFill>
+                <a:effectLst/>
+                <a:latin typeface="+mn-lt"/>
+                <a:ea typeface="+mn-ea"/>
+                <a:cs typeface="+mn-cs"/>
+              </a:rPr>
+              <a:t> summarized in the blueprint</a:t>
+            </a:r>
+          </a:p>
+          <a:p>
+            <a:pPr rtl="0"/>
+            <a:endParaRPr lang="en-US" sz="1200" b="0" i="0" u="none" strike="noStrike" kern="1200" dirty="0">
+              <a:solidFill>
+                <a:schemeClr val="tx1"/>
+              </a:solidFill>
+              <a:effectLst/>
+              <a:latin typeface="+mn-lt"/>
+              <a:ea typeface="+mn-ea"/>
+              <a:cs typeface="+mn-cs"/>
+            </a:endParaRPr>
+          </a:p>
+          <a:p>
+            <a:pPr rtl="0"/>
+            <a:r>
+              <a:rPr lang="en-US" sz="1200" b="0" i="0" u="none" strike="noStrike" kern="1200" dirty="0">
+                <a:solidFill>
+                  <a:schemeClr val="tx1"/>
+                </a:solidFill>
+                <a:effectLst/>
+                <a:latin typeface="+mn-lt"/>
+                <a:ea typeface="+mn-ea"/>
+                <a:cs typeface="+mn-cs"/>
+              </a:rPr>
+              <a:t>After making any edits well save our program and move on to configuring our exam agent Once edited and approved</a:t>
+            </a:r>
+            <a:br>
+              <a:rPr lang="en-US" b="0" dirty="0">
+                <a:effectLst/>
+              </a:rPr>
+            </a:br>
+            <a:endParaRPr lang="en-US" b="0" dirty="0">
+              <a:effectLst/>
+            </a:endParaRPr>
+          </a:p>
+          <a:p>
+            <a:pPr rtl="0"/>
+            <a:endParaRPr lang="en-US" b="0" dirty="0">
+              <a:effectLst/>
+            </a:endParaRPr>
+          </a:p>
+          <a:p>
+            <a:pPr rtl="0"/>
+            <a:r>
+              <a:rPr lang="en-US" sz="1200" b="1" i="0" u="none" strike="noStrike" kern="1200" dirty="0">
+                <a:solidFill>
+                  <a:schemeClr val="tx1"/>
+                </a:solidFill>
+                <a:effectLst/>
+                <a:latin typeface="+mn-lt"/>
+                <a:ea typeface="+mn-ea"/>
+                <a:cs typeface="+mn-cs"/>
+              </a:rPr>
+              <a:t>Configure</a:t>
+            </a:r>
+          </a:p>
+          <a:p>
+            <a:r>
+              <a:rPr lang="en-US" dirty="0"/>
+              <a:t>We can customize how the exam agent behaves when learners take the test.</a:t>
+            </a:r>
+          </a:p>
+          <a:p>
+            <a:pPr marL="0" marR="0" lvl="0" indent="0" algn="l" defTabSz="914400" rtl="0" eaLnBrk="1" fontAlgn="auto" latinLnBrk="0" hangingPunct="1">
+              <a:lnSpc>
+                <a:spcPct val="100000"/>
+              </a:lnSpc>
+              <a:spcBef>
+                <a:spcPts val="0"/>
+              </a:spcBef>
+              <a:spcAft>
+                <a:spcPts val="0"/>
+              </a:spcAft>
+              <a:buClrTx/>
+              <a:buSzTx/>
+              <a:buFontTx/>
+              <a:buNone/>
+              <a:tabLst/>
+              <a:defRPr/>
+            </a:pPr>
+            <a:r>
+              <a:rPr lang="en-US" dirty="0"/>
+              <a:t>You can adjust  how the AI scores open-ended responses, it's summary style as well, as create custom welcome and farewell messages to mirror company language.</a:t>
+            </a:r>
+          </a:p>
+          <a:p>
+            <a:pPr marL="0" marR="0" lvl="0" indent="0" algn="l" defTabSz="914400" rtl="0" eaLnBrk="1" fontAlgn="auto" latinLnBrk="0" hangingPunct="1">
+              <a:lnSpc>
+                <a:spcPct val="100000"/>
+              </a:lnSpc>
+              <a:spcBef>
+                <a:spcPts val="0"/>
+              </a:spcBef>
+              <a:spcAft>
+                <a:spcPts val="0"/>
+              </a:spcAft>
+              <a:buClrTx/>
+              <a:buSzTx/>
+              <a:buFontTx/>
+              <a:buNone/>
+              <a:tabLst/>
+              <a:defRPr/>
+            </a:pPr>
+            <a:endParaRPr lang="en-US" dirty="0"/>
+          </a:p>
+          <a:p>
+            <a:pPr marL="0" marR="0" lvl="0" indent="0" algn="l" defTabSz="914400" rtl="0" eaLnBrk="1" fontAlgn="auto" latinLnBrk="0" hangingPunct="1">
+              <a:lnSpc>
+                <a:spcPct val="100000"/>
+              </a:lnSpc>
+              <a:spcBef>
+                <a:spcPts val="0"/>
+              </a:spcBef>
+              <a:spcAft>
+                <a:spcPts val="0"/>
+              </a:spcAft>
+              <a:buClrTx/>
+              <a:buSzTx/>
+              <a:buFontTx/>
+              <a:buNone/>
+              <a:tabLst/>
+              <a:defRPr/>
+            </a:pPr>
+            <a:r>
+              <a:rPr lang="en-US" b="1" dirty="0"/>
+              <a:t>You can s</a:t>
+            </a:r>
+            <a:r>
+              <a:rPr lang="en-US" dirty="0"/>
+              <a:t>et the pass/fall rate thresholds, define what score counts as "expert," "competent," or "novice." </a:t>
+            </a:r>
+            <a:r>
+              <a:rPr lang="en-US" b="1" dirty="0"/>
+              <a:t>, and h</a:t>
+            </a:r>
+            <a:r>
+              <a:rPr lang="en-US" dirty="0"/>
+              <a:t>ow many questions the exam administers with minimums per domain</a:t>
+            </a:r>
+            <a:endParaRPr lang="en-US" sz="1200" b="1" i="0" u="none" strike="noStrike" kern="1200" dirty="0">
+              <a:solidFill>
+                <a:schemeClr val="tx1"/>
+              </a:solidFill>
+              <a:effectLst/>
+              <a:latin typeface="+mn-lt"/>
+              <a:ea typeface="+mn-ea"/>
+              <a:cs typeface="+mn-cs"/>
+            </a:endParaRPr>
+          </a:p>
+          <a:p>
+            <a:pPr rtl="0"/>
+            <a:endParaRPr lang="en-US" sz="1200" b="1" i="0" u="none" strike="noStrike" kern="1200" dirty="0">
+              <a:solidFill>
+                <a:schemeClr val="tx1"/>
+              </a:solidFill>
+              <a:effectLst/>
+              <a:latin typeface="+mn-lt"/>
+              <a:ea typeface="+mn-ea"/>
+              <a:cs typeface="+mn-cs"/>
+            </a:endParaRPr>
+          </a:p>
+          <a:p>
+            <a:pPr rtl="0"/>
+            <a:r>
+              <a:rPr lang="en-US" sz="1200" b="1" i="0" u="none" strike="noStrike" kern="1200" dirty="0">
+                <a:solidFill>
+                  <a:schemeClr val="tx1"/>
+                </a:solidFill>
+                <a:effectLst/>
+                <a:latin typeface="+mn-lt"/>
+                <a:ea typeface="+mn-ea"/>
+                <a:cs typeface="+mn-cs"/>
+              </a:rPr>
+              <a:t>Test</a:t>
+            </a:r>
+            <a:endParaRPr lang="en-US" b="1" dirty="0">
+              <a:effectLst/>
+            </a:endParaRPr>
+          </a:p>
+          <a:p>
+            <a:pPr rtl="0"/>
+            <a:r>
+              <a:rPr lang="en-US" sz="1200" b="0" i="0" u="none" strike="noStrike" kern="1200" dirty="0">
+                <a:solidFill>
+                  <a:schemeClr val="tx1"/>
+                </a:solidFill>
+                <a:effectLst/>
+                <a:latin typeface="+mn-lt"/>
+                <a:ea typeface="+mn-ea"/>
+                <a:cs typeface="+mn-cs"/>
+              </a:rPr>
+              <a:t>This is the learner-facing experience, the adaptive exam.</a:t>
+            </a:r>
+            <a:endParaRPr lang="en-US" b="0" dirty="0">
+              <a:effectLst/>
+            </a:endParaRPr>
+          </a:p>
+          <a:p>
+            <a:pPr rtl="0" fontAlgn="base"/>
+            <a:r>
+              <a:rPr lang="en-US" sz="1200" b="0" i="0" u="none" strike="noStrike" kern="1200" dirty="0">
+                <a:solidFill>
+                  <a:schemeClr val="tx1"/>
+                </a:solidFill>
+                <a:effectLst/>
+                <a:latin typeface="+mn-lt"/>
+                <a:ea typeface="+mn-ea"/>
+                <a:cs typeface="+mn-cs"/>
+              </a:rPr>
+              <a:t>The learner enters their name and selects a saved certification program.</a:t>
+            </a:r>
+          </a:p>
+          <a:p>
+            <a:pPr rtl="0" fontAlgn="base"/>
+            <a:r>
+              <a:rPr lang="en-US" sz="1200" b="0" i="0" u="none" strike="noStrike" kern="1200" dirty="0">
+                <a:solidFill>
+                  <a:schemeClr val="tx1"/>
+                </a:solidFill>
+                <a:effectLst/>
+                <a:latin typeface="+mn-lt"/>
+                <a:ea typeface="+mn-ea"/>
+                <a:cs typeface="+mn-cs"/>
+              </a:rPr>
+              <a:t>The exam begins in a conversational chat interface. Questions appear one at a time.</a:t>
+            </a:r>
+          </a:p>
+          <a:p>
+            <a:pPr rtl="0" fontAlgn="base"/>
+            <a:r>
+              <a:rPr lang="en-US" sz="1200" b="0" i="0" u="none" strike="noStrike" kern="1200" dirty="0">
+                <a:solidFill>
+                  <a:schemeClr val="tx1"/>
+                </a:solidFill>
+                <a:effectLst/>
+                <a:latin typeface="+mn-lt"/>
+                <a:ea typeface="+mn-ea"/>
+                <a:cs typeface="+mn-cs"/>
+              </a:rPr>
+              <a:t>The system evaluates each answer in real time and selects the next question based on the learner's performance so far.</a:t>
             </a:r>
           </a:p>
           <a:p>
@@ -2724,6 +2628,29 @@
             </a:endParaRPr>
           </a:p>
           <a:p>
+            <a:pPr marL="0" marR="0" lvl="0" indent="0" algn="l" defTabSz="914400" rtl="0" eaLnBrk="1" fontAlgn="base" latinLnBrk="0" hangingPunct="1">
+              <a:lnSpc>
+                <a:spcPct val="100000"/>
+              </a:lnSpc>
+              <a:spcBef>
+                <a:spcPts val="0"/>
+              </a:spcBef>
+              <a:spcAft>
+                <a:spcPts val="0"/>
+              </a:spcAft>
+              <a:buClrTx/>
+              <a:buSzTx/>
+              <a:buFontTx/>
+              <a:buNone/>
+              <a:tabLst/>
+              <a:defRPr/>
+            </a:pPr>
+            <a:r>
+              <a:rPr lang="en-US" dirty="0"/>
+              <a:t>this means two learners taking the same certification will see different questions in different orders and at different difficulty levels.</a:t>
+            </a:r>
+          </a:p>
+          <a:p>
             <a:pPr rtl="0" fontAlgn="base"/>
             <a:endParaRPr lang="en-US" sz="1200" b="0" i="0" u="none" strike="noStrike" kern="1200" dirty="0">
               <a:solidFill>
@@ -2734,6 +2661,315 @@
               <a:ea typeface="+mn-ea"/>
               <a:cs typeface="+mn-cs"/>
             </a:endParaRPr>
+          </a:p>
+          <a:p>
+            <a:pPr rtl="0" fontAlgn="base"/>
+            <a:endParaRPr lang="en-US" sz="1200" b="0" i="0" u="none" strike="noStrike" kern="1200" dirty="0">
+              <a:solidFill>
+                <a:schemeClr val="tx1"/>
+              </a:solidFill>
+              <a:effectLst/>
+              <a:latin typeface="+mn-lt"/>
+              <a:ea typeface="+mn-ea"/>
+              <a:cs typeface="+mn-cs"/>
+            </a:endParaRPr>
+          </a:p>
+          <a:p>
+            <a:pPr rtl="0" fontAlgn="base"/>
+            <a:r>
+              <a:rPr lang="en-US" sz="1200" b="0" i="0" u="none" strike="noStrike" kern="1200" dirty="0">
+                <a:solidFill>
+                  <a:schemeClr val="tx1"/>
+                </a:solidFill>
+                <a:effectLst/>
+                <a:latin typeface="+mn-lt"/>
+                <a:ea typeface="+mn-ea"/>
+                <a:cs typeface="+mn-cs"/>
+              </a:rPr>
+              <a:t>When the exam ends, the learner sees their results: pass/fail, scores by domain, a narrative summary of strengths and gaps, and recommended next steps.</a:t>
+            </a:r>
+          </a:p>
+          <a:p>
+            <a:pPr rtl="0" fontAlgn="base"/>
+            <a:endParaRPr lang="en-US" sz="1200" b="0" i="0" u="none" strike="noStrike" kern="1200" dirty="0">
+              <a:solidFill>
+                <a:schemeClr val="tx1"/>
+              </a:solidFill>
+              <a:effectLst/>
+              <a:latin typeface="+mn-lt"/>
+              <a:ea typeface="+mn-ea"/>
+              <a:cs typeface="+mn-cs"/>
+            </a:endParaRPr>
+          </a:p>
+          <a:p>
+            <a:pPr rtl="0"/>
+            <a:r>
+              <a:rPr lang="en-US" sz="1200" b="1" i="0" u="none" strike="noStrike" kern="1200" dirty="0">
+                <a:solidFill>
+                  <a:schemeClr val="tx1"/>
+                </a:solidFill>
+                <a:effectLst/>
+                <a:latin typeface="+mn-lt"/>
+                <a:ea typeface="+mn-ea"/>
+                <a:cs typeface="+mn-cs"/>
+              </a:rPr>
+              <a:t>Deploy</a:t>
+            </a:r>
+            <a:endParaRPr lang="en-US" b="1" dirty="0">
+              <a:effectLst/>
+            </a:endParaRPr>
+          </a:p>
+          <a:p>
+            <a:pPr rtl="0" fontAlgn="base"/>
+            <a:r>
+              <a:rPr lang="en-US" sz="1200" b="1" i="0" u="none" strike="noStrike" kern="1200" dirty="0">
+                <a:solidFill>
+                  <a:schemeClr val="tx1"/>
+                </a:solidFill>
+                <a:effectLst/>
+                <a:latin typeface="+mn-lt"/>
+                <a:ea typeface="+mn-ea"/>
+                <a:cs typeface="+mn-cs"/>
+              </a:rPr>
+              <a:t>when you're ready to share head to </a:t>
+            </a:r>
+            <a:r>
+              <a:rPr lang="en-US" sz="1200" b="1" i="0" u="none" strike="noStrike" kern="1200" dirty="0" err="1">
+                <a:solidFill>
+                  <a:schemeClr val="tx1"/>
+                </a:solidFill>
+                <a:effectLst/>
+                <a:latin typeface="+mn-lt"/>
+                <a:ea typeface="+mn-ea"/>
+                <a:cs typeface="+mn-cs"/>
+              </a:rPr>
+              <a:t>dploy</a:t>
+            </a:r>
+            <a:r>
+              <a:rPr lang="en-US" sz="1200" b="1" i="0" u="none" strike="noStrike" kern="1200" dirty="0">
+                <a:solidFill>
+                  <a:schemeClr val="tx1"/>
+                </a:solidFill>
+                <a:effectLst/>
+                <a:latin typeface="+mn-lt"/>
+                <a:ea typeface="+mn-ea"/>
+                <a:cs typeface="+mn-cs"/>
+              </a:rPr>
+              <a:t> section to Download </a:t>
+            </a:r>
+            <a:r>
+              <a:rPr lang="en-US" sz="1200" b="0" i="0" u="none" strike="noStrike" kern="1200" dirty="0">
+                <a:solidFill>
+                  <a:schemeClr val="tx1"/>
+                </a:solidFill>
+                <a:effectLst/>
+                <a:latin typeface="+mn-lt"/>
+                <a:ea typeface="+mn-ea"/>
+                <a:cs typeface="+mn-cs"/>
+              </a:rPr>
+              <a:t> all the generated content for stakeholders.</a:t>
+            </a:r>
+          </a:p>
+          <a:p>
+            <a:pPr rtl="0" fontAlgn="base"/>
+            <a:r>
+              <a:rPr lang="en-US" sz="1200" b="0" i="0" u="none" strike="noStrike" kern="1200" dirty="0">
+                <a:solidFill>
+                  <a:schemeClr val="tx1"/>
+                </a:solidFill>
+                <a:effectLst/>
+                <a:latin typeface="+mn-lt"/>
+                <a:ea typeface="+mn-ea"/>
+                <a:cs typeface="+mn-cs"/>
+              </a:rPr>
+              <a:t>Share direct link to the exam lor embed it to an LMS of your choice.</a:t>
+            </a:r>
+          </a:p>
+          <a:p>
+            <a:pPr rtl="0" fontAlgn="base"/>
+            <a:endParaRPr lang="en-US" sz="1200" b="1" i="0" u="none" strike="noStrike" kern="1200" dirty="0">
+              <a:solidFill>
+                <a:schemeClr val="tx1"/>
+              </a:solidFill>
+              <a:effectLst/>
+              <a:latin typeface="+mn-lt"/>
+              <a:ea typeface="+mn-ea"/>
+              <a:cs typeface="+mn-cs"/>
+            </a:endParaRPr>
+          </a:p>
+          <a:p>
+            <a:pPr rtl="0" fontAlgn="base"/>
+            <a:r>
+              <a:rPr lang="en-US" sz="1200" b="1" i="0" u="none" strike="noStrike" kern="1200" dirty="0">
+                <a:solidFill>
+                  <a:schemeClr val="tx1"/>
+                </a:solidFill>
+                <a:effectLst/>
+                <a:latin typeface="+mn-lt"/>
+                <a:ea typeface="+mn-ea"/>
+                <a:cs typeface="+mn-cs"/>
+              </a:rPr>
+              <a:t>You can</a:t>
+            </a:r>
+            <a:r>
+              <a:rPr lang="en-US" sz="1200" b="0" i="0" u="none" strike="noStrike" kern="1200" dirty="0">
+                <a:solidFill>
+                  <a:schemeClr val="tx1"/>
+                </a:solidFill>
+                <a:effectLst/>
+                <a:latin typeface="+mn-lt"/>
+                <a:ea typeface="+mn-ea"/>
+                <a:cs typeface="+mn-cs"/>
+              </a:rPr>
+              <a:t> upload additional material knowledge base for when your ready to rebuild </a:t>
+            </a:r>
+            <a:r>
+              <a:rPr lang="en-US" sz="1200" b="0" i="0" u="none" strike="noStrike" kern="1200" dirty="0" err="1">
+                <a:solidFill>
+                  <a:schemeClr val="tx1"/>
+                </a:solidFill>
+                <a:effectLst/>
+                <a:latin typeface="+mn-lt"/>
+                <a:ea typeface="+mn-ea"/>
+                <a:cs typeface="+mn-cs"/>
+              </a:rPr>
+              <a:t>neever</a:t>
+            </a:r>
+            <a:r>
+              <a:rPr lang="en-US" sz="1200" b="0" i="0" u="none" strike="noStrike" kern="1200" dirty="0">
+                <a:solidFill>
+                  <a:schemeClr val="tx1"/>
+                </a:solidFill>
+                <a:effectLst/>
+                <a:latin typeface="+mn-lt"/>
+                <a:ea typeface="+mn-ea"/>
+                <a:cs typeface="+mn-cs"/>
+              </a:rPr>
+              <a:t> or varied version</a:t>
+            </a:r>
+          </a:p>
+          <a:p>
+            <a:pPr rtl="0" fontAlgn="base"/>
+            <a:endParaRPr lang="en-US" sz="1200" b="0" i="0" u="none" strike="noStrike" kern="1200" dirty="0">
+              <a:solidFill>
+                <a:schemeClr val="tx1"/>
+              </a:solidFill>
+              <a:effectLst/>
+              <a:latin typeface="+mn-lt"/>
+              <a:ea typeface="+mn-ea"/>
+              <a:cs typeface="+mn-cs"/>
+            </a:endParaRPr>
+          </a:p>
+          <a:p>
+            <a:pPr rtl="0" fontAlgn="base"/>
+            <a:r>
+              <a:rPr lang="en-US" sz="1200" b="0" i="0" u="none" strike="noStrike" kern="1200" dirty="0">
+                <a:solidFill>
+                  <a:schemeClr val="tx1"/>
+                </a:solidFill>
+                <a:effectLst/>
+                <a:latin typeface="+mn-lt"/>
+                <a:ea typeface="+mn-ea"/>
+                <a:cs typeface="+mn-cs"/>
+              </a:rPr>
+              <a:t>Once distributed head over to analyze</a:t>
+            </a:r>
+          </a:p>
+          <a:p>
+            <a:pPr rtl="0"/>
+            <a:r>
+              <a:rPr lang="en-US" sz="1200" b="1" i="0" u="none" strike="noStrike" kern="1200" dirty="0">
+                <a:solidFill>
+                  <a:schemeClr val="tx1"/>
+                </a:solidFill>
+                <a:effectLst/>
+                <a:latin typeface="+mn-lt"/>
+                <a:ea typeface="+mn-ea"/>
+                <a:cs typeface="+mn-cs"/>
+              </a:rPr>
+              <a:t>Analyze</a:t>
+            </a:r>
+            <a:endParaRPr lang="en-US" b="1" dirty="0">
+              <a:effectLst/>
+            </a:endParaRPr>
+          </a:p>
+          <a:p>
+            <a:pPr rtl="0"/>
+            <a:r>
+              <a:rPr lang="en-US" sz="1200" b="0" i="0" u="none" strike="noStrike" kern="1200" dirty="0">
+                <a:solidFill>
+                  <a:schemeClr val="tx1"/>
+                </a:solidFill>
+                <a:effectLst/>
+                <a:latin typeface="+mn-lt"/>
+                <a:ea typeface="+mn-ea"/>
+                <a:cs typeface="+mn-cs"/>
+              </a:rPr>
+              <a:t>to get a </a:t>
+            </a:r>
+            <a:r>
+              <a:rPr lang="en-US" sz="1200" b="1" i="0" u="none" strike="noStrike" kern="1200" dirty="0">
+                <a:solidFill>
+                  <a:schemeClr val="tx1"/>
+                </a:solidFill>
+                <a:effectLst/>
+                <a:latin typeface="+mn-lt"/>
+                <a:ea typeface="+mn-ea"/>
+                <a:cs typeface="+mn-cs"/>
+              </a:rPr>
+              <a:t>Summary view</a:t>
+            </a:r>
+            <a:r>
+              <a:rPr lang="en-US" sz="1200" b="0" i="0" u="none" strike="noStrike" kern="1200" dirty="0">
+                <a:solidFill>
+                  <a:schemeClr val="tx1"/>
+                </a:solidFill>
+                <a:effectLst/>
+                <a:latin typeface="+mn-lt"/>
+                <a:ea typeface="+mn-ea"/>
+                <a:cs typeface="+mn-cs"/>
+              </a:rPr>
+              <a:t> of learner attempts.</a:t>
+            </a:r>
+          </a:p>
+          <a:p>
+            <a:pPr rtl="0"/>
+            <a:r>
+              <a:rPr lang="en-US" sz="1200" b="0" i="0" u="none" strike="noStrike" kern="1200" dirty="0">
+                <a:solidFill>
+                  <a:schemeClr val="tx1"/>
+                </a:solidFill>
+                <a:effectLst/>
+                <a:latin typeface="+mn-lt"/>
+                <a:ea typeface="+mn-ea"/>
+                <a:cs typeface="+mn-cs"/>
+              </a:rPr>
+              <a:t>we have Pass/fail distribution, score distribution</a:t>
+            </a:r>
+            <a:r>
+              <a:rPr lang="en-US" sz="1200" b="0" i="0" u="none" strike="noStrike" kern="1200">
+                <a:solidFill>
+                  <a:schemeClr val="tx1"/>
+                </a:solidFill>
+                <a:effectLst/>
+                <a:latin typeface="+mn-lt"/>
+                <a:ea typeface="+mn-ea"/>
+                <a:cs typeface="+mn-cs"/>
+              </a:rPr>
+              <a:t>, domain </a:t>
+            </a:r>
+            <a:r>
+              <a:rPr lang="en-US" sz="1200" b="0" i="0" u="none" strike="noStrike" kern="1200" dirty="0">
+                <a:solidFill>
+                  <a:schemeClr val="tx1"/>
+                </a:solidFill>
+                <a:effectLst/>
+                <a:latin typeface="+mn-lt"/>
+                <a:ea typeface="+mn-ea"/>
+                <a:cs typeface="+mn-cs"/>
+              </a:rPr>
+              <a:t>performance, and learner results </a:t>
+            </a:r>
           </a:p>
           <a:p>
             <a:pPr rtl="0"/>
@@ -2876,6 +3112,108 @@
               <a:t>Behold, </a:t>
             </a:r>
             <a:r>
+              <a:rPr lang="en-US" dirty="0" err="1"/>
+              <a:t>CertOps</a:t>
+            </a:r>
+            <a:r>
+              <a:rPr lang="en-US" dirty="0"/>
+              <a:t> is an AI-powered platform that builds certification programs and delivers adaptive exams. You provide the source content and the system generates a complete, structured program ready for learner assessment, analytics, and deployment.</a:t>
+            </a:r>
+          </a:p>
+          <a:p>
+            <a:pPr rtl="0"/>
+            <a:br>
+              <a:rPr lang="en-US" dirty="0"/>
+            </a:br>
+            <a:r>
+              <a:rPr lang="en-US" sz="1200" b="0" i="0" u="none" strike="noStrike" kern="1200" dirty="0">
+                <a:solidFill>
+                  <a:schemeClr val="tx1"/>
+                </a:solidFill>
+                <a:effectLst/>
+                <a:latin typeface="+mn-lt"/>
+                <a:ea typeface="+mn-ea"/>
+                <a:cs typeface="+mn-cs"/>
+              </a:rPr>
+              <a:t>builds on the previous.</a:t>
+            </a:r>
+            <a:endParaRPr lang="en-US" b="0" dirty="0">
+              <a:effectLst/>
+            </a:endParaRPr>
+          </a:p>
+          <a:p>
+            <a:br>
+              <a:rPr lang="en-US" b="0" dirty="0">
+                <a:effectLst/>
+              </a:rPr>
+            </a:br>
+            <a:endParaRPr lang="en-US" b="0" dirty="0">
+              <a:effectLst/>
+            </a:endParaRPr>
+          </a:p>
+          <a:p>
+            <a:pPr rtl="0"/>
+            <a:r>
+              <a:rPr lang="en-US" sz="1200" b="1" i="0" u="none" strike="noStrike" kern="1200" dirty="0">
+                <a:solidFill>
+                  <a:schemeClr val="tx1"/>
+                </a:solidFill>
+                <a:effectLst/>
+                <a:latin typeface="+mn-lt"/>
+                <a:ea typeface="+mn-ea"/>
+                <a:cs typeface="+mn-cs"/>
+              </a:rPr>
+              <a:t>The first is is build This is where a certification program is created.</a:t>
+            </a:r>
+            <a:endParaRPr lang="en-US" b="0" dirty="0">
+              <a:effectLst/>
+            </a:endParaRPr>
+          </a:p>
+          <a:p>
+            <a:pPr rtl="0"/>
+            <a:r>
+              <a:rPr lang="en-US" sz="1200" b="1" i="0" u="none" strike="noStrike" kern="1200" dirty="0">
+                <a:solidFill>
+                  <a:schemeClr val="tx1"/>
+                </a:solidFill>
+                <a:effectLst/>
+                <a:latin typeface="+mn-lt"/>
+                <a:ea typeface="+mn-ea"/>
+                <a:cs typeface="+mn-cs"/>
+              </a:rPr>
+              <a:t>Upload your external and internal content.</a:t>
+            </a:r>
+            <a:r>
+              <a:rPr lang="en-US" sz="1200" b="0" i="0" u="none" strike="noStrike" kern="1200" dirty="0">
+                <a:solidFill>
+                  <a:schemeClr val="tx1"/>
+                </a:solidFill>
+                <a:effectLst/>
+                <a:latin typeface="+mn-lt"/>
+                <a:ea typeface="+mn-ea"/>
+                <a:cs typeface="+mn-cs"/>
+              </a:rPr>
+              <a:t> Add a program name and a short description of who the certification is for and what it should cover. The description steers which parts of the uploaded content are prioritized during generation.</a:t>
+            </a:r>
+            <a:endParaRPr lang="en-US" b="0" dirty="0">
+              <a:effectLst/>
+            </a:endParaRPr>
+          </a:p>
+          <a:p>
+            <a:pPr rtl="0"/>
+            <a:r>
+              <a:rPr lang="en-US" sz="1200" b="0" i="0" u="none" strike="noStrike" kern="1200" dirty="0">
+                <a:solidFill>
+                  <a:schemeClr val="tx1"/>
+                </a:solidFill>
+                <a:effectLst/>
+                <a:latin typeface="+mn-lt"/>
+                <a:ea typeface="+mn-ea"/>
+                <a:cs typeface="+mn-cs"/>
+              </a:rPr>
+              <a:t>Using that </a:t>
+            </a:r>
+            <a:r>
               <a:rPr lang="en-US" sz="1200" b="0" i="0" u="none" strike="noStrike" kern="1200" dirty="0" err="1">
                 <a:solidFill>
                   <a:schemeClr val="tx1"/>
@@ -2885,7 +3223,7 @@
                 <a:ea typeface="+mn-ea"/>
                 <a:cs typeface="+mn-cs"/>
               </a:rPr>
-              <a:t>CertOps</a:t>
+              <a:t>informationCertOps</a:t>
             </a:r>
             <a:r>
               <a:rPr lang="en-US" sz="1200" b="0" i="0" u="none" strike="noStrike" kern="1200" dirty="0">
@@ -2897,10 +3235,16 @@
                 <a:ea typeface="+mn-ea"/>
                 <a:cs typeface="+mn-cs"/>
               </a:rPr>
-              <a:t> Studios</a:t>
-            </a:r>
-            <a:r>
-              <a:rPr lang="en-US" sz="1200" b="0" i="0" u="none" strike="noStrike" kern="1200">
+              <a:t> generates six artifacts in order. </a:t>
+            </a:r>
+            <a:endParaRPr lang="en-US" b="0" dirty="0">
+              <a:effectLst/>
+            </a:endParaRPr>
+          </a:p>
+          <a:p>
+            <a:pPr rtl="0"/>
+            <a:r>
+              <a:rPr lang="en-US" sz="1200" b="1" i="0" u="none" strike="noStrike" kern="1200" dirty="0">
                 <a:solidFill>
                   <a:schemeClr val="tx1"/>
                 </a:solidFill>
@@ -2909,8 +3253,14 @@
                 <a:ea typeface="+mn-ea"/>
                 <a:cs typeface="+mn-cs"/>
               </a:rPr>
-              <a:t>, where enablement </a:t>
-            </a:r>
+              <a:t>1. Competency Framework</a:t>
+            </a:r>
+            <a:endParaRPr lang="en-US" b="1" dirty="0">
+              <a:effectLst/>
+            </a:endParaRPr>
+          </a:p>
+          <a:p>
+            <a:pPr rtl="0"/>
             <a:r>
               <a:rPr lang="en-US" sz="1200" b="0" i="0" u="none" strike="noStrike" kern="1200" dirty="0">
                 <a:solidFill>
@@ -2921,7 +3271,7 @@
                 <a:ea typeface="+mn-ea"/>
                 <a:cs typeface="+mn-cs"/>
               </a:rPr>
-              <a:t>becomes structured, relevant, and adaptive.</a:t>
+              <a:t>defines the domains (topic areas) the certification covers, the specific skills within each domain, and what novice, competent, and expert performance looks like for each skill.</a:t>
             </a:r>
             <a:endParaRPr lang="en-US" b="0" dirty="0">
               <a:effectLst/>
@@ -2929,8 +3279,810 @@
           </a:p>
           <a:p>
             <a:br>
-              <a:rPr lang="en-US" dirty="0"/>
+              <a:rPr lang="en-US" b="0" dirty="0">
+                <a:effectLst/>
+              </a:rPr>
             </a:br>
+            <a:endParaRPr lang="en-US" b="0" dirty="0">
+              <a:effectLst/>
+            </a:endParaRPr>
+          </a:p>
+          <a:p>
+            <a:pPr rtl="0"/>
+            <a:r>
+              <a:rPr lang="en-US" sz="1200" b="1" i="0" u="none" strike="noStrike" kern="1200" dirty="0">
+                <a:solidFill>
+                  <a:schemeClr val="tx1"/>
+                </a:solidFill>
+                <a:effectLst/>
+                <a:latin typeface="+mn-lt"/>
+                <a:ea typeface="+mn-ea"/>
+                <a:cs typeface="+mn-cs"/>
+              </a:rPr>
+              <a:t>2. Learning Progression</a:t>
+            </a:r>
+            <a:endParaRPr lang="en-US" b="1" dirty="0">
+              <a:effectLst/>
+            </a:endParaRPr>
+          </a:p>
+          <a:p>
+            <a:pPr rtl="0"/>
+            <a:r>
+              <a:rPr lang="en-US" sz="1200" b="0" i="0" u="none" strike="noStrike" kern="1200" dirty="0">
+                <a:solidFill>
+                  <a:schemeClr val="tx1"/>
+                </a:solidFill>
+                <a:effectLst/>
+                <a:latin typeface="+mn-lt"/>
+                <a:ea typeface="+mn-ea"/>
+                <a:cs typeface="+mn-cs"/>
+              </a:rPr>
+              <a:t>that maps out how a learner should prepare for the certification. Each step includes a title, which domain it covers, suggested activities, estimated time, prerequisites, and success criteria.</a:t>
+            </a:r>
+            <a:endParaRPr lang="en-US" b="0" dirty="0">
+              <a:effectLst/>
+            </a:endParaRPr>
+          </a:p>
+          <a:p>
+            <a:br>
+              <a:rPr lang="en-US" b="0" dirty="0">
+                <a:effectLst/>
+              </a:rPr>
+            </a:br>
+            <a:endParaRPr lang="en-US" b="0" dirty="0">
+              <a:effectLst/>
+            </a:endParaRPr>
+          </a:p>
+          <a:p>
+            <a:pPr rtl="0"/>
+            <a:r>
+              <a:rPr lang="en-US" sz="1200" b="1" i="0" u="none" strike="noStrike" kern="1200" dirty="0">
+                <a:solidFill>
+                  <a:schemeClr val="tx1"/>
+                </a:solidFill>
+                <a:effectLst/>
+                <a:latin typeface="+mn-lt"/>
+                <a:ea typeface="+mn-ea"/>
+                <a:cs typeface="+mn-cs"/>
+              </a:rPr>
+              <a:t>3. Performance Tasks</a:t>
+            </a:r>
+            <a:endParaRPr lang="en-US" b="1" dirty="0">
+              <a:effectLst/>
+            </a:endParaRPr>
+          </a:p>
+          <a:p>
+            <a:pPr rtl="0"/>
+            <a:r>
+              <a:rPr lang="en-US" sz="1200" b="0" i="0" u="none" strike="noStrike" kern="1200" dirty="0">
+                <a:solidFill>
+                  <a:schemeClr val="tx1"/>
+                </a:solidFill>
+                <a:effectLst/>
+                <a:latin typeface="+mn-lt"/>
+                <a:ea typeface="+mn-ea"/>
+                <a:cs typeface="+mn-cs"/>
+              </a:rPr>
+              <a:t>Hands-on, project-style tasks that test whether a learner can apply their knowledge in realistic scenarios. Each assessment includes a scenario description, step-by-step instructions, expected deliverables, and an evaluator guide.</a:t>
+            </a:r>
+            <a:endParaRPr lang="en-US" b="0" dirty="0">
+              <a:effectLst/>
+            </a:endParaRPr>
+          </a:p>
+          <a:p>
+            <a:br>
+              <a:rPr lang="en-US" b="0" dirty="0">
+                <a:effectLst/>
+              </a:rPr>
+            </a:br>
+            <a:endParaRPr lang="en-US" b="0" dirty="0">
+              <a:effectLst/>
+            </a:endParaRPr>
+          </a:p>
+          <a:p>
+            <a:pPr rtl="0"/>
+            <a:r>
+              <a:rPr lang="en-US" sz="1200" b="1" i="0" u="none" strike="noStrike" kern="1200" dirty="0">
+                <a:solidFill>
+                  <a:schemeClr val="tx1"/>
+                </a:solidFill>
+                <a:effectLst/>
+                <a:latin typeface="+mn-lt"/>
+                <a:ea typeface="+mn-ea"/>
+                <a:cs typeface="+mn-cs"/>
+              </a:rPr>
+              <a:t>4. Rubrics</a:t>
+            </a:r>
+            <a:endParaRPr lang="en-US" b="1" dirty="0">
+              <a:effectLst/>
+            </a:endParaRPr>
+          </a:p>
+          <a:p>
+            <a:pPr rtl="0"/>
+            <a:r>
+              <a:rPr lang="en-US" sz="1200" b="1" i="0" u="none" strike="noStrike" kern="1200" dirty="0">
+                <a:solidFill>
+                  <a:schemeClr val="tx1"/>
+                </a:solidFill>
+                <a:effectLst/>
+                <a:latin typeface="+mn-lt"/>
+                <a:ea typeface="+mn-ea"/>
+                <a:cs typeface="+mn-cs"/>
+              </a:rPr>
+              <a:t>What it is:</a:t>
+            </a:r>
+            <a:r>
+              <a:rPr lang="en-US" sz="1200" b="0" i="0" u="none" strike="noStrike" kern="1200" dirty="0">
+                <a:solidFill>
+                  <a:schemeClr val="tx1"/>
+                </a:solidFill>
+                <a:effectLst/>
+                <a:latin typeface="+mn-lt"/>
+                <a:ea typeface="+mn-ea"/>
+                <a:cs typeface="+mn-cs"/>
+              </a:rPr>
+              <a:t> Scoring guides for the </a:t>
+            </a:r>
+            <a:r>
+              <a:rPr lang="en-US" sz="1200" b="0" i="0" u="none" strike="noStrike" kern="1200" dirty="0" err="1">
+                <a:solidFill>
+                  <a:schemeClr val="tx1"/>
+                </a:solidFill>
+                <a:effectLst/>
+                <a:latin typeface="+mn-lt"/>
+                <a:ea typeface="+mn-ea"/>
+                <a:cs typeface="+mn-cs"/>
+              </a:rPr>
+              <a:t>taks</a:t>
+            </a:r>
+            <a:r>
+              <a:rPr lang="en-US" sz="1200" b="0" i="0" u="none" strike="noStrike" kern="1200" dirty="0">
+                <a:solidFill>
+                  <a:schemeClr val="tx1"/>
+                </a:solidFill>
+                <a:effectLst/>
+                <a:latin typeface="+mn-lt"/>
+                <a:ea typeface="+mn-ea"/>
+                <a:cs typeface="+mn-cs"/>
+              </a:rPr>
+              <a:t>. Each rubric lists weighted criteria and describes what novice, competent, and expert work looks like for each criterion.</a:t>
+            </a:r>
+            <a:endParaRPr lang="en-US" b="0" dirty="0">
+              <a:effectLst/>
+            </a:endParaRPr>
+          </a:p>
+          <a:p>
+            <a:pPr rtl="0"/>
+            <a:r>
+              <a:rPr lang="en-US" sz="1200" b="1" i="0" u="none" strike="noStrike" kern="1200" dirty="0">
+                <a:solidFill>
+                  <a:schemeClr val="tx1"/>
+                </a:solidFill>
+                <a:effectLst/>
+                <a:latin typeface="+mn-lt"/>
+                <a:ea typeface="+mn-ea"/>
+                <a:cs typeface="+mn-cs"/>
+              </a:rPr>
+              <a:t>Why it matters:</a:t>
+            </a:r>
+            <a:r>
+              <a:rPr lang="en-US" sz="1200" b="0" i="0" u="none" strike="noStrike" kern="1200" dirty="0">
+                <a:solidFill>
+                  <a:schemeClr val="tx1"/>
+                </a:solidFill>
+                <a:effectLst/>
+                <a:latin typeface="+mn-lt"/>
+                <a:ea typeface="+mn-ea"/>
+                <a:cs typeface="+mn-cs"/>
+              </a:rPr>
+              <a:t> Rubrics ensure consistent, fair grading across evaluators. They are also used by the adaptive exam's AI when scoring open-ended answers, so the same quality standards apply in both human and automated evaluation.</a:t>
+            </a:r>
+            <a:endParaRPr lang="en-US" b="0" dirty="0">
+              <a:effectLst/>
+            </a:endParaRPr>
+          </a:p>
+          <a:p>
+            <a:pPr rtl="0"/>
+            <a:r>
+              <a:rPr lang="en-US" sz="1200" b="1" i="0" u="none" strike="noStrike" kern="1200" dirty="0">
+                <a:solidFill>
+                  <a:schemeClr val="tx1"/>
+                </a:solidFill>
+                <a:effectLst/>
+                <a:latin typeface="+mn-lt"/>
+                <a:ea typeface="+mn-ea"/>
+                <a:cs typeface="+mn-cs"/>
+              </a:rPr>
+              <a:t>5. Item Bank</a:t>
+            </a:r>
+            <a:endParaRPr lang="en-US" b="1" dirty="0">
+              <a:effectLst/>
+            </a:endParaRPr>
+          </a:p>
+          <a:p>
+            <a:pPr rtl="0"/>
+            <a:r>
+              <a:rPr lang="en-US" sz="1200" b="1" i="0" u="none" strike="noStrike" kern="1200" dirty="0">
+                <a:solidFill>
+                  <a:schemeClr val="tx1"/>
+                </a:solidFill>
+                <a:effectLst/>
+                <a:latin typeface="+mn-lt"/>
+                <a:ea typeface="+mn-ea"/>
+                <a:cs typeface="+mn-cs"/>
+              </a:rPr>
+              <a:t>What it is:</a:t>
+            </a:r>
+            <a:r>
+              <a:rPr lang="en-US" sz="1200" b="0" i="0" u="none" strike="noStrike" kern="1200" dirty="0">
+                <a:solidFill>
+                  <a:schemeClr val="tx1"/>
+                </a:solidFill>
+                <a:effectLst/>
+                <a:latin typeface="+mn-lt"/>
+                <a:ea typeface="+mn-ea"/>
+                <a:cs typeface="+mn-cs"/>
+              </a:rPr>
+              <a:t> The pool of exam questions that the automated exam draws from. Contains both multiple-choice and open-ended questions. Each item includes the correct answer, a model answer, scoring notes, and which domain/skill it maps to.</a:t>
+            </a:r>
+            <a:endParaRPr lang="en-US" b="0" dirty="0">
+              <a:effectLst/>
+            </a:endParaRPr>
+          </a:p>
+          <a:p>
+            <a:pPr rtl="0"/>
+            <a:r>
+              <a:rPr lang="en-US" sz="1200" b="0" i="0" u="none" strike="noStrike" kern="1200" dirty="0">
+                <a:solidFill>
+                  <a:schemeClr val="tx1"/>
+                </a:solidFill>
+                <a:effectLst/>
+                <a:latin typeface="+mn-lt"/>
+                <a:ea typeface="+mn-ea"/>
+                <a:cs typeface="+mn-cs"/>
+              </a:rPr>
+              <a:t>Individual items can be deleted to curate the pool before saving. If the item bank is larger than the configured maximum exam items, the exam uses stratified random sampling to select a subset — ensuring all domains are represented while varying which specific questions appear each session.</a:t>
+            </a:r>
+            <a:endParaRPr lang="en-US" b="0" dirty="0">
+              <a:effectLst/>
+            </a:endParaRPr>
+          </a:p>
+          <a:p>
+            <a:br>
+              <a:rPr lang="en-US" b="0" dirty="0">
+                <a:effectLst/>
+              </a:rPr>
+            </a:br>
+            <a:endParaRPr lang="en-US" b="0" dirty="0">
+              <a:effectLst/>
+            </a:endParaRPr>
+          </a:p>
+          <a:p>
+            <a:pPr rtl="0"/>
+            <a:r>
+              <a:rPr lang="en-US" sz="1200" b="1" i="0" u="none" strike="noStrike" kern="1200" dirty="0">
+                <a:solidFill>
+                  <a:schemeClr val="tx1"/>
+                </a:solidFill>
+                <a:effectLst/>
+                <a:latin typeface="+mn-lt"/>
+                <a:ea typeface="+mn-ea"/>
+                <a:cs typeface="+mn-cs"/>
+              </a:rPr>
+              <a:t>Test</a:t>
+            </a:r>
+            <a:endParaRPr lang="en-US" b="1" dirty="0">
+              <a:effectLst/>
+            </a:endParaRPr>
+          </a:p>
+          <a:p>
+            <a:pPr rtl="0"/>
+            <a:r>
+              <a:rPr lang="en-US" sz="1200" b="0" i="0" u="none" strike="noStrike" kern="1200" dirty="0">
+                <a:solidFill>
+                  <a:schemeClr val="tx1"/>
+                </a:solidFill>
+                <a:effectLst/>
+                <a:latin typeface="+mn-lt"/>
+                <a:ea typeface="+mn-ea"/>
+                <a:cs typeface="+mn-cs"/>
+              </a:rPr>
+              <a:t>This is the learner-facing experience — the adaptive exam.</a:t>
+            </a:r>
+            <a:endParaRPr lang="en-US" b="0" dirty="0">
+              <a:effectLst/>
+            </a:endParaRPr>
+          </a:p>
+          <a:p>
+            <a:pPr rtl="0" fontAlgn="base"/>
+            <a:r>
+              <a:rPr lang="en-US" sz="1200" b="0" i="0" u="none" strike="noStrike" kern="1200" dirty="0">
+                <a:solidFill>
+                  <a:schemeClr val="tx1"/>
+                </a:solidFill>
+                <a:effectLst/>
+                <a:latin typeface="+mn-lt"/>
+                <a:ea typeface="+mn-ea"/>
+                <a:cs typeface="+mn-cs"/>
+              </a:rPr>
+              <a:t>The learner selects a saved certification program and enters their name.</a:t>
+            </a:r>
+          </a:p>
+          <a:p>
+            <a:pPr rtl="0" fontAlgn="base"/>
+            <a:r>
+              <a:rPr lang="en-US" sz="1200" b="0" i="0" u="none" strike="noStrike" kern="1200" dirty="0">
+                <a:solidFill>
+                  <a:schemeClr val="tx1"/>
+                </a:solidFill>
+                <a:effectLst/>
+                <a:latin typeface="+mn-lt"/>
+                <a:ea typeface="+mn-ea"/>
+                <a:cs typeface="+mn-cs"/>
+              </a:rPr>
+              <a:t>The exam begins in a conversational chat interface. Questions appear one at a time.</a:t>
+            </a:r>
+          </a:p>
+          <a:p>
+            <a:pPr rtl="0" fontAlgn="base"/>
+            <a:r>
+              <a:rPr lang="en-US" sz="1200" b="0" i="0" u="none" strike="noStrike" kern="1200" dirty="0">
+                <a:solidFill>
+                  <a:schemeClr val="tx1"/>
+                </a:solidFill>
+                <a:effectLst/>
+                <a:latin typeface="+mn-lt"/>
+                <a:ea typeface="+mn-ea"/>
+                <a:cs typeface="+mn-cs"/>
+              </a:rPr>
+              <a:t>The system evaluates each answer in real time and selects the next question based on the learner's performance so far.</a:t>
+            </a:r>
+          </a:p>
+          <a:p>
+            <a:pPr rtl="0" fontAlgn="base"/>
+            <a:r>
+              <a:rPr lang="en-US" sz="1200" b="0" i="0" u="none" strike="noStrike" kern="1200" dirty="0">
+                <a:solidFill>
+                  <a:schemeClr val="tx1"/>
+                </a:solidFill>
+                <a:effectLst/>
+                <a:latin typeface="+mn-lt"/>
+                <a:ea typeface="+mn-ea"/>
+                <a:cs typeface="+mn-cs"/>
+              </a:rPr>
+              <a:t>When the exam ends, the learner sees their results: pass/fail, scores by domain, a narrative summary of strengths and gaps, and recommended next steps.</a:t>
+            </a:r>
+          </a:p>
+          <a:p>
+            <a:pPr rtl="0"/>
+            <a:r>
+              <a:rPr lang="en-US" sz="1200" b="1" i="0" u="none" strike="noStrike" kern="1200" dirty="0">
+                <a:solidFill>
+                  <a:schemeClr val="tx1"/>
+                </a:solidFill>
+                <a:effectLst/>
+                <a:latin typeface="+mn-lt"/>
+                <a:ea typeface="+mn-ea"/>
+                <a:cs typeface="+mn-cs"/>
+              </a:rPr>
+              <a:t>Deploy</a:t>
+            </a:r>
+            <a:endParaRPr lang="en-US" b="1" dirty="0">
+              <a:effectLst/>
+            </a:endParaRPr>
+          </a:p>
+          <a:p>
+            <a:pPr rtl="0"/>
+            <a:r>
+              <a:rPr lang="en-US" sz="1200" b="0" i="0" u="none" strike="noStrike" kern="1200" dirty="0">
+                <a:solidFill>
+                  <a:schemeClr val="tx1"/>
+                </a:solidFill>
+                <a:effectLst/>
+                <a:latin typeface="+mn-lt"/>
+                <a:ea typeface="+mn-ea"/>
+                <a:cs typeface="+mn-cs"/>
+              </a:rPr>
+              <a:t>Saved programs are managed from the Deploy page.</a:t>
+            </a:r>
+            <a:endParaRPr lang="en-US" b="0" dirty="0">
+              <a:effectLst/>
+            </a:endParaRPr>
+          </a:p>
+          <a:p>
+            <a:pPr rtl="0" fontAlgn="base"/>
+            <a:r>
+              <a:rPr lang="en-US" sz="1200" b="1" i="0" u="none" strike="noStrike" kern="1200" dirty="0">
+                <a:solidFill>
+                  <a:schemeClr val="tx1"/>
+                </a:solidFill>
+                <a:effectLst/>
+                <a:latin typeface="+mn-lt"/>
+                <a:ea typeface="+mn-ea"/>
+                <a:cs typeface="+mn-cs"/>
+              </a:rPr>
+              <a:t>Browse saved </a:t>
+            </a:r>
+            <a:r>
+              <a:rPr lang="en-US" sz="1200" b="1" i="0" u="none" strike="noStrike" kern="1200" dirty="0" err="1">
+                <a:solidFill>
+                  <a:schemeClr val="tx1"/>
+                </a:solidFill>
+                <a:effectLst/>
+                <a:latin typeface="+mn-lt"/>
+                <a:ea typeface="+mn-ea"/>
+                <a:cs typeface="+mn-cs"/>
+              </a:rPr>
+              <a:t>progra</a:t>
+            </a:r>
+            <a:endParaRPr lang="en-US" sz="1200" b="0" i="0" u="none" strike="noStrike" kern="1200" dirty="0">
+              <a:solidFill>
+                <a:schemeClr val="tx1"/>
+              </a:solidFill>
+              <a:effectLst/>
+              <a:latin typeface="+mn-lt"/>
+              <a:ea typeface="+mn-ea"/>
+              <a:cs typeface="+mn-cs"/>
+            </a:endParaRPr>
+          </a:p>
+          <a:p>
+            <a:pPr rtl="0" fontAlgn="base"/>
+            <a:r>
+              <a:rPr lang="en-US" sz="1200" b="1" i="0" u="none" strike="noStrike" kern="1200" dirty="0">
+                <a:solidFill>
+                  <a:schemeClr val="tx1"/>
+                </a:solidFill>
+                <a:effectLst/>
+                <a:latin typeface="+mn-lt"/>
+                <a:ea typeface="+mn-ea"/>
+                <a:cs typeface="+mn-cs"/>
+              </a:rPr>
+              <a:t>Download reports</a:t>
+            </a:r>
+            <a:r>
+              <a:rPr lang="en-US" sz="1200" b="0" i="0" u="none" strike="noStrike" kern="1200" dirty="0">
+                <a:solidFill>
+                  <a:schemeClr val="tx1"/>
+                </a:solidFill>
+                <a:effectLst/>
+                <a:latin typeface="+mn-lt"/>
+                <a:ea typeface="+mn-ea"/>
+                <a:cs typeface="+mn-cs"/>
+              </a:rPr>
+              <a:t> the house all the content </a:t>
+            </a:r>
+            <a:r>
+              <a:rPr lang="en-US" sz="1200" b="0" i="0" u="none" strike="noStrike" kern="1200" dirty="0" err="1">
+                <a:solidFill>
+                  <a:schemeClr val="tx1"/>
+                </a:solidFill>
+                <a:effectLst/>
+                <a:latin typeface="+mn-lt"/>
+                <a:ea typeface="+mn-ea"/>
+                <a:cs typeface="+mn-cs"/>
+              </a:rPr>
+              <a:t>createsredaytos</a:t>
+            </a:r>
+            <a:r>
+              <a:rPr lang="en-US" sz="1200" b="0" i="0" u="none" strike="noStrike" kern="1200" dirty="0">
+                <a:solidFill>
+                  <a:schemeClr val="tx1"/>
+                </a:solidFill>
+                <a:effectLst/>
+                <a:latin typeface="+mn-lt"/>
+                <a:ea typeface="+mn-ea"/>
+                <a:cs typeface="+mn-cs"/>
+              </a:rPr>
+              <a:t> hare with shared with stakeholders.</a:t>
+            </a:r>
+          </a:p>
+          <a:p>
+            <a:pPr rtl="0" fontAlgn="base"/>
+            <a:r>
+              <a:rPr lang="en-US" sz="1200" b="1" i="0" u="none" strike="noStrike" kern="1200" dirty="0">
+                <a:solidFill>
+                  <a:schemeClr val="tx1"/>
+                </a:solidFill>
+                <a:effectLst/>
+                <a:latin typeface="+mn-lt"/>
+                <a:ea typeface="+mn-ea"/>
+                <a:cs typeface="+mn-cs"/>
+              </a:rPr>
+              <a:t>Share exams</a:t>
+            </a:r>
+            <a:r>
+              <a:rPr lang="en-US" sz="1200" b="0" i="0" u="none" strike="noStrike" kern="1200" dirty="0">
+                <a:solidFill>
+                  <a:schemeClr val="tx1"/>
+                </a:solidFill>
+                <a:effectLst/>
+                <a:latin typeface="+mn-lt"/>
+                <a:ea typeface="+mn-ea"/>
+                <a:cs typeface="+mn-cs"/>
+              </a:rPr>
+              <a:t> — Copy a direct link to the exam or grab an embeddable </a:t>
+            </a:r>
+            <a:r>
+              <a:rPr lang="en-US" sz="1200" b="0" i="0" u="none" strike="noStrike" kern="1200" dirty="0" err="1">
+                <a:solidFill>
+                  <a:schemeClr val="tx1"/>
+                </a:solidFill>
+                <a:effectLst/>
+                <a:latin typeface="+mn-lt"/>
+                <a:ea typeface="+mn-ea"/>
+                <a:cs typeface="+mn-cs"/>
+              </a:rPr>
+              <a:t>iframe</a:t>
+            </a:r>
+            <a:r>
+              <a:rPr lang="en-US" sz="1200" b="0" i="0" u="none" strike="noStrike" kern="1200" dirty="0">
+                <a:solidFill>
+                  <a:schemeClr val="tx1"/>
+                </a:solidFill>
+                <a:effectLst/>
+                <a:latin typeface="+mn-lt"/>
+                <a:ea typeface="+mn-ea"/>
+                <a:cs typeface="+mn-cs"/>
+              </a:rPr>
+              <a:t> snippet for LMS integration.</a:t>
+            </a:r>
+          </a:p>
+          <a:p>
+            <a:pPr rtl="0" fontAlgn="base"/>
+            <a:r>
+              <a:rPr lang="en-US" sz="1200" b="1" i="0" u="none" strike="noStrike" kern="1200" dirty="0">
+                <a:solidFill>
+                  <a:schemeClr val="tx1"/>
+                </a:solidFill>
+                <a:effectLst/>
+                <a:latin typeface="+mn-lt"/>
+                <a:ea typeface="+mn-ea"/>
+                <a:cs typeface="+mn-cs"/>
+              </a:rPr>
+              <a:t>Add documents</a:t>
+            </a:r>
+            <a:r>
+              <a:rPr lang="en-US" sz="1200" b="0" i="0" u="none" strike="noStrike" kern="1200" dirty="0">
+                <a:solidFill>
+                  <a:schemeClr val="tx1"/>
+                </a:solidFill>
+                <a:effectLst/>
+                <a:latin typeface="+mn-lt"/>
+                <a:ea typeface="+mn-ea"/>
+                <a:cs typeface="+mn-cs"/>
+              </a:rPr>
+              <a:t> — Upload additional rich a program's knowledge base for when your ready to rebuild New documents are embedded into the existing vector store, so the program can be rebuilt with a richer corpus.</a:t>
+            </a:r>
+          </a:p>
+          <a:p>
+            <a:pPr rtl="0"/>
+            <a:r>
+              <a:rPr lang="en-US" sz="1200" b="1" i="0" u="none" strike="noStrike" kern="1200" dirty="0">
+                <a:solidFill>
+                  <a:schemeClr val="tx1"/>
+                </a:solidFill>
+                <a:effectLst/>
+                <a:latin typeface="+mn-lt"/>
+                <a:ea typeface="+mn-ea"/>
+                <a:cs typeface="+mn-cs"/>
+              </a:rPr>
+              <a:t>Analyze</a:t>
+            </a:r>
+            <a:endParaRPr lang="en-US" b="1" dirty="0">
+              <a:effectLst/>
+            </a:endParaRPr>
+          </a:p>
+          <a:p>
+            <a:pPr rtl="0"/>
+            <a:r>
+              <a:rPr lang="en-US" sz="1200" b="0" i="0" u="none" strike="noStrike" kern="1200" dirty="0">
+                <a:solidFill>
+                  <a:schemeClr val="tx1"/>
+                </a:solidFill>
+                <a:effectLst/>
+                <a:latin typeface="+mn-lt"/>
+                <a:ea typeface="+mn-ea"/>
+                <a:cs typeface="+mn-cs"/>
+              </a:rPr>
+              <a:t>The Analyze page provides aggregate analytics across all learner attempts.</a:t>
+            </a:r>
+            <a:endParaRPr lang="en-US" b="0" dirty="0">
+              <a:effectLst/>
+            </a:endParaRPr>
+          </a:p>
+          <a:p>
+            <a:pPr rtl="0" fontAlgn="base"/>
+            <a:r>
+              <a:rPr lang="en-US" sz="1200" b="1" i="0" u="none" strike="noStrike" kern="1200" dirty="0">
+                <a:solidFill>
+                  <a:schemeClr val="tx1"/>
+                </a:solidFill>
+                <a:effectLst/>
+                <a:latin typeface="+mn-lt"/>
+                <a:ea typeface="+mn-ea"/>
+                <a:cs typeface="+mn-cs"/>
+              </a:rPr>
+              <a:t>Summary view</a:t>
+            </a:r>
+            <a:r>
+              <a:rPr lang="en-US" sz="1200" b="0" i="0" u="none" strike="noStrike" kern="1200" dirty="0">
+                <a:solidFill>
+                  <a:schemeClr val="tx1"/>
+                </a:solidFill>
+                <a:effectLst/>
+                <a:latin typeface="+mn-lt"/>
+                <a:ea typeface="+mn-ea"/>
+                <a:cs typeface="+mn-cs"/>
+              </a:rPr>
+              <a:t> — Cards for each program showing total attempts, pass rate, and average score.</a:t>
+            </a:r>
+          </a:p>
+          <a:p>
+            <a:pPr rtl="0" fontAlgn="base"/>
+            <a:r>
+              <a:rPr lang="en-US" sz="1200" b="1" i="0" u="none" strike="noStrike" kern="1200" dirty="0">
+                <a:solidFill>
+                  <a:schemeClr val="tx1"/>
+                </a:solidFill>
+                <a:effectLst/>
+                <a:latin typeface="+mn-lt"/>
+                <a:ea typeface="+mn-ea"/>
+                <a:cs typeface="+mn-cs"/>
+              </a:rPr>
+              <a:t>Program drill-down</a:t>
+            </a:r>
+            <a:r>
+              <a:rPr lang="en-US" sz="1200" b="0" i="0" u="none" strike="noStrike" kern="1200" dirty="0">
+                <a:solidFill>
+                  <a:schemeClr val="tx1"/>
+                </a:solidFill>
+                <a:effectLst/>
+                <a:latin typeface="+mn-lt"/>
+                <a:ea typeface="+mn-ea"/>
+                <a:cs typeface="+mn-cs"/>
+              </a:rPr>
+              <a:t> — Click a program to see detailed analytics:</a:t>
+            </a:r>
+          </a:p>
+          <a:p>
+            <a:pPr lvl="1" rtl="0" fontAlgn="base"/>
+            <a:r>
+              <a:rPr lang="en-US" sz="1200" b="0" i="0" u="none" strike="noStrike" kern="1200" dirty="0">
+                <a:solidFill>
+                  <a:schemeClr val="tx1"/>
+                </a:solidFill>
+                <a:effectLst/>
+                <a:latin typeface="+mn-lt"/>
+                <a:ea typeface="+mn-ea"/>
+                <a:cs typeface="+mn-cs"/>
+              </a:rPr>
+              <a:t>Pass/fail distribution (donut chart with pass rate percentage)</a:t>
+            </a:r>
+          </a:p>
+          <a:p>
+            <a:pPr lvl="1" rtl="0" fontAlgn="base"/>
+            <a:r>
+              <a:rPr lang="en-US" sz="1200" b="0" i="0" u="none" strike="noStrike" kern="1200" dirty="0">
+                <a:solidFill>
+                  <a:schemeClr val="tx1"/>
+                </a:solidFill>
+                <a:effectLst/>
+                <a:latin typeface="+mn-lt"/>
+                <a:ea typeface="+mn-ea"/>
+                <a:cs typeface="+mn-cs"/>
+              </a:rPr>
+              <a:t>Score distribution (histogram of learner scores)</a:t>
+            </a:r>
+          </a:p>
+          <a:p>
+            <a:pPr lvl="1" rtl="0" fontAlgn="base"/>
+            <a:r>
+              <a:rPr lang="en-US" sz="1200" b="0" i="0" u="none" strike="noStrike" kern="1200" dirty="0">
+                <a:solidFill>
+                  <a:schemeClr val="tx1"/>
+                </a:solidFill>
+                <a:effectLst/>
+                <a:latin typeface="+mn-lt"/>
+                <a:ea typeface="+mn-ea"/>
+                <a:cs typeface="+mn-cs"/>
+              </a:rPr>
+              <a:t>Domain performance (per-domain average scores)</a:t>
+            </a:r>
+          </a:p>
+          <a:p>
+            <a:pPr lvl="1" rtl="0" fontAlgn="base"/>
+            <a:r>
+              <a:rPr lang="en-US" sz="1200" b="0" i="0" u="none" strike="noStrike" kern="1200" dirty="0">
+                <a:solidFill>
+                  <a:schemeClr val="tx1"/>
+                </a:solidFill>
+                <a:effectLst/>
+                <a:latin typeface="+mn-lt"/>
+                <a:ea typeface="+mn-ea"/>
+                <a:cs typeface="+mn-cs"/>
+              </a:rPr>
+              <a:t>Proficiency distribution (novice/competent/expert counts per domain)</a:t>
+            </a:r>
+          </a:p>
+          <a:p>
+            <a:pPr lvl="1" rtl="0" fontAlgn="base"/>
+            <a:r>
+              <a:rPr lang="en-US" sz="1200" b="0" i="0" u="none" strike="noStrike" kern="1200" dirty="0">
+                <a:solidFill>
+                  <a:schemeClr val="tx1"/>
+                </a:solidFill>
+                <a:effectLst/>
+                <a:latin typeface="+mn-lt"/>
+                <a:ea typeface="+mn-ea"/>
+                <a:cs typeface="+mn-cs"/>
+              </a:rPr>
+              <a:t>Score trend over time</a:t>
+            </a:r>
+          </a:p>
+          <a:p>
+            <a:pPr lvl="1" rtl="0" fontAlgn="base"/>
+            <a:r>
+              <a:rPr lang="en-US" sz="1200" b="0" i="0" u="none" strike="noStrike" kern="1200" dirty="0">
+                <a:solidFill>
+                  <a:schemeClr val="tx1"/>
+                </a:solidFill>
+                <a:effectLst/>
+                <a:latin typeface="+mn-lt"/>
+                <a:ea typeface="+mn-ea"/>
+                <a:cs typeface="+mn-cs"/>
+              </a:rPr>
+              <a:t>Learner results table (alphabetically sorted, with per-learner domain breakdown)</a:t>
+            </a:r>
+          </a:p>
+          <a:p>
+            <a:r>
+              <a:rPr lang="en-US" sz="1200" b="1" i="0" u="none" strike="noStrike" kern="1200" dirty="0">
+                <a:solidFill>
+                  <a:schemeClr val="tx1"/>
+                </a:solidFill>
+                <a:effectLst/>
+                <a:latin typeface="+mn-lt"/>
+                <a:ea typeface="+mn-ea"/>
+                <a:cs typeface="+mn-cs"/>
+              </a:rPr>
+              <a:t>All </a:t>
+            </a:r>
+            <a:r>
+              <a:rPr lang="en-US" sz="1200" b="1" i="0" u="none" strike="noStrike" kern="1200" dirty="0" err="1">
+                <a:solidFill>
+                  <a:schemeClr val="tx1"/>
+                </a:solidFill>
+                <a:effectLst/>
+                <a:latin typeface="+mn-lt"/>
+                <a:ea typeface="+mn-ea"/>
+                <a:cs typeface="+mn-cs"/>
+              </a:rPr>
+              <a:t>resultscan</a:t>
+            </a:r>
+            <a:r>
+              <a:rPr lang="en-US" sz="1200" b="1" i="0" u="none" strike="noStrike" kern="1200" dirty="0">
+                <a:solidFill>
+                  <a:schemeClr val="tx1"/>
+                </a:solidFill>
+                <a:effectLst/>
+                <a:latin typeface="+mn-lt"/>
+                <a:ea typeface="+mn-ea"/>
+                <a:cs typeface="+mn-cs"/>
+              </a:rPr>
+              <a:t> e exported for </a:t>
+            </a:r>
+            <a:r>
+              <a:rPr lang="en-US" sz="1200" b="0" i="0" u="none" strike="noStrike" kern="1200" dirty="0">
+                <a:solidFill>
+                  <a:schemeClr val="tx1"/>
+                </a:solidFill>
+                <a:effectLst/>
+                <a:latin typeface="+mn-lt"/>
+                <a:ea typeface="+mn-ea"/>
+                <a:cs typeface="+mn-cs"/>
+              </a:rPr>
+              <a:t>offline analysis or reporting.</a:t>
+            </a:r>
             <a:endParaRPr lang="en-US" dirty="0"/>
           </a:p>
         </p:txBody>
@@ -2978,6 +4130,117 @@
 </file>
 
 <file path=ppt/notesSlides/notesSlide5.xml><?xml version="1.0" encoding="utf-8"?>
+<p:notes xmlns:a="http://schemas.openxmlformats.org/drawingml/2006/main" xmlns:r="http://schemas.openxmlformats.org/officeDocument/2006/relationships" xmlns:p="http://schemas.openxmlformats.org/presentationml/2006/main">
+  <p:cSld>
+    <p:spTree>
+      <p:nvGrpSpPr>
+        <p:cNvPr id="1" name="">
+          <a:extLst>
+            <a:ext uri="{FF2B5EF4-FFF2-40B4-BE49-F238E27FC236}">
+              <a16:creationId xmlns:a16="http://schemas.microsoft.com/office/drawing/2014/main" id="{9776B5EC-E721-A9E5-70D3-F0D545FF7F58}"/>
+            </a:ext>
+          </a:extLst>
+        </p:cNvPr>
+        <p:cNvGrpSpPr/>
+        <p:nvPr/>
+      </p:nvGrpSpPr>
+      <p:grpSpPr>
+        <a:xfrm>
+          <a:off x="0" y="0"/>
+          <a:ext cx="0" cy="0"/>
+          <a:chOff x="0" y="0"/>
+          <a:chExt cx="0" cy="0"/>
+        </a:xfrm>
+      </p:grpSpPr>
+      <p:sp>
+        <p:nvSpPr>
+          <p:cNvPr id="2" name="Slide Image Placeholder 1">
+            <a:extLst>
+              <a:ext uri="{FF2B5EF4-FFF2-40B4-BE49-F238E27FC236}">
+                <a16:creationId xmlns:a16="http://schemas.microsoft.com/office/drawing/2014/main" id="{FDC71275-4B4D-BD71-73F3-EF94EF4AB259}"/>
+              </a:ext>
+            </a:extLst>
+          </p:cNvPr>
+          <p:cNvSpPr>
+            <a:spLocks noGrp="1" noRot="1" noChangeAspect="1"/>
+          </p:cNvSpPr>
+          <p:nvPr>
+            <p:ph type="sldImg"/>
+          </p:nvPr>
+        </p:nvSpPr>
+        <p:spPr/>
+      </p:sp>
+      <p:sp>
+        <p:nvSpPr>
+          <p:cNvPr id="3" name="Notes Placeholder 2">
+            <a:extLst>
+              <a:ext uri="{FF2B5EF4-FFF2-40B4-BE49-F238E27FC236}">
+                <a16:creationId xmlns:a16="http://schemas.microsoft.com/office/drawing/2014/main" id="{3E92C8E9-EC27-5931-C660-DAFD64DA94AC}"/>
+              </a:ext>
+            </a:extLst>
+          </p:cNvPr>
+          <p:cNvSpPr>
+            <a:spLocks noGrp="1"/>
+          </p:cNvSpPr>
+          <p:nvPr>
+            <p:ph type="body" idx="1"/>
+          </p:nvPr>
+        </p:nvSpPr>
+        <p:spPr/>
+        <p:txBody>
+          <a:bodyPr/>
+          <a:lstStyle/>
+          <a:p>
+            <a:r>
+              <a:rPr lang="en-US" dirty="0"/>
+              <a:t>Open strong. One sentence intro, then straight into the problem. Don’t fumble with ‘can you see my screen’ — just go.</a:t>
+            </a:r>
+          </a:p>
+        </p:txBody>
+      </p:sp>
+      <p:sp>
+        <p:nvSpPr>
+          <p:cNvPr id="4" name="Slide Number Placeholder 3">
+            <a:extLst>
+              <a:ext uri="{FF2B5EF4-FFF2-40B4-BE49-F238E27FC236}">
+                <a16:creationId xmlns:a16="http://schemas.microsoft.com/office/drawing/2014/main" id="{72078525-B8C1-F9D6-1F20-60FAA8B8F32C}"/>
+              </a:ext>
+            </a:extLst>
+          </p:cNvPr>
+          <p:cNvSpPr>
+            <a:spLocks noGrp="1"/>
+          </p:cNvSpPr>
+          <p:nvPr>
+            <p:ph type="sldNum" sz="quarter" idx="10"/>
+          </p:nvPr>
+        </p:nvSpPr>
+        <p:spPr/>
+        <p:txBody>
+          <a:bodyPr/>
+          <a:lstStyle/>
+          <a:p>
+            <a:fld id="{F7021451-1387-4CA6-816F-3879F97B5CBC}" type="slidenum">
+              <a:rPr lang="en-US"/>
+              <a:t>5</a:t>
+            </a:fld>
+            <a:endParaRPr lang="en-US"/>
+          </a:p>
+        </p:txBody>
+      </p:sp>
+    </p:spTree>
+    <p:extLst>
+      <p:ext uri="{BB962C8B-B14F-4D97-AF65-F5344CB8AC3E}">
+        <p14:creationId xmlns:p14="http://schemas.microsoft.com/office/powerpoint/2010/main" val="90924063"/>
+      </p:ext>
+    </p:extLst>
+  </p:cSld>
+  <p:clrMapOvr>
+    <a:masterClrMapping/>
+  </p:clrMapOvr>
+</p:notes>
+</file>
+
+<file path=ppt/notesSlides/notesSlide6.xml><?xml version="1.0" encoding="utf-8"?>
 <p:notes xmlns:a="http://schemas.openxmlformats.org/drawingml/2006/main" xmlns:r="http://schemas.openxmlformats.org/officeDocument/2006/relationships" xmlns:p="http://schemas.openxmlformats.org/presentationml/2006/main">
   <p:cSld>
     <p:spTree>
@@ -3069,7 +4332,7 @@
           <a:p>
             <a:fld id="{F7021451-1387-4CA6-816F-3879F97B5CBC}" type="slidenum">
               <a:rPr lang="en-US"/>
-              <a:t>5</a:t>
+              <a:t>6</a:t>
             </a:fld>
             <a:endParaRPr lang="en-US"/>
           </a:p>
@@ -3088,7 +4351,7 @@
 </p:notes>
 </file>
 
-<file path=ppt/notesSlides/notesSlide6.xml><?xml version="1.0" encoding="utf-8"?>
+<file path=ppt/notesSlides/notesSlide7.xml><?xml version="1.0" encoding="utf-8"?>
 <p:notes xmlns:a="http://schemas.openxmlformats.org/drawingml/2006/main" xmlns:r="http://schemas.openxmlformats.org/officeDocument/2006/relationships" xmlns:p="http://schemas.openxmlformats.org/presentationml/2006/main">
   <p:cSld>
     <p:spTree>
@@ -3096,7 +4359,7 @@
         <p:cNvPr id="1" name="">
           <a:extLst>
             <a:ext uri="{FF2B5EF4-FFF2-40B4-BE49-F238E27FC236}">
-              <a16:creationId xmlns:a16="http://schemas.microsoft.com/office/drawing/2014/main" id="{0BE9A588-7B2B-2114-8F02-791F8382FE0E}"/>
+              <a16:creationId xmlns:a16="http://schemas.microsoft.com/office/drawing/2014/main" id="{4D67BA68-B53B-2A27-EE9B-76DE08922F38}"/>
             </a:ext>
           </a:extLst>
         </p:cNvPr>
@@ -3116,7 +4379,7 @@
           <p:cNvPr id="2" name="Slide Image Placeholder 1">
             <a:extLst>
               <a:ext uri="{FF2B5EF4-FFF2-40B4-BE49-F238E27FC236}">
-                <a16:creationId xmlns:a16="http://schemas.microsoft.com/office/drawing/2014/main" id="{34A929AF-B608-1D54-8409-0065011A299D}"/>
+                <a16:creationId xmlns:a16="http://schemas.microsoft.com/office/drawing/2014/main" id="{0554F04C-C4EC-CCBD-47D9-7112A9EF7F6C}"/>
               </a:ext>
             </a:extLst>
           </p:cNvPr>
@@ -3134,7 +4397,7 @@
           <p:cNvPr id="3" name="Notes Placeholder 2">
             <a:extLst>
               <a:ext uri="{FF2B5EF4-FFF2-40B4-BE49-F238E27FC236}">
-                <a16:creationId xmlns:a16="http://schemas.microsoft.com/office/drawing/2014/main" id="{53325681-3C19-6DDE-D0EA-31EB49C0914A}"/>
+                <a16:creationId xmlns:a16="http://schemas.microsoft.com/office/drawing/2014/main" id="{DE6FE18C-9C18-287D-218A-C122889EB514}"/>
               </a:ext>
             </a:extLst>
           </p:cNvPr>
@@ -3150,10 +4413,93 @@
           <a:bodyPr/>
           <a:lstStyle/>
           <a:p>
-            <a:r>
-              <a:rPr lang="en-US" dirty="0"/>
-              <a:t>Open strong. One sentence intro, then straight into the problem. Don’t fumble with ‘can you see my screen’ — just go.</a:t>
-            </a:r>
+            <a:endParaRPr lang="en-US" sz="1200" b="0" i="0" u="none" strike="noStrike" kern="1200" dirty="0">
+              <a:solidFill>
+                <a:schemeClr val="tx1"/>
+              </a:solidFill>
+              <a:effectLst/>
+              <a:latin typeface="+mn-lt"/>
+              <a:ea typeface="+mn-ea"/>
+              <a:cs typeface="+mn-cs"/>
+            </a:endParaRPr>
+          </a:p>
+          <a:p>
+            <a:pPr rtl="0"/>
+            <a:r>
+              <a:rPr lang="en-US" sz="1200" b="0" i="0" u="none" strike="noStrike" kern="1200" dirty="0">
+                <a:solidFill>
+                  <a:schemeClr val="tx1"/>
+                </a:solidFill>
+                <a:effectLst/>
+                <a:latin typeface="+mn-lt"/>
+                <a:ea typeface="+mn-ea"/>
+                <a:cs typeface="+mn-cs"/>
+              </a:rPr>
+              <a:t>CLICK</a:t>
+            </a:r>
+            <a:endParaRPr lang="en-US" b="0" dirty="0">
+              <a:effectLst/>
+            </a:endParaRPr>
+          </a:p>
+          <a:p>
+            <a:pPr rtl="0"/>
+            <a:r>
+              <a:rPr lang="en-US" sz="1200" b="0" i="0" u="none" strike="noStrike" kern="1200" dirty="0">
+                <a:solidFill>
+                  <a:schemeClr val="tx1"/>
+                </a:solidFill>
+                <a:effectLst/>
+                <a:latin typeface="+mn-lt"/>
+                <a:ea typeface="+mn-ea"/>
+                <a:cs typeface="+mn-cs"/>
+              </a:rPr>
+              <a:t>Organizations today are rapidly adopting AI tools such as Microsoft Copilot, Claude, and other enterprise AI platforms. But adoption is not the same as proficiency.</a:t>
+            </a:r>
+            <a:endParaRPr lang="en-US" b="0" dirty="0">
+              <a:effectLst/>
+            </a:endParaRPr>
+          </a:p>
+          <a:p>
+            <a:pPr rtl="0"/>
+            <a:endParaRPr lang="en-US" sz="1200" b="0" i="0" u="none" strike="noStrike" kern="1200" dirty="0">
+              <a:solidFill>
+                <a:schemeClr val="tx1"/>
+              </a:solidFill>
+              <a:effectLst/>
+              <a:latin typeface="+mn-lt"/>
+              <a:ea typeface="+mn-ea"/>
+              <a:cs typeface="+mn-cs"/>
+            </a:endParaRPr>
+          </a:p>
+          <a:p>
+            <a:pPr rtl="0"/>
+            <a:r>
+              <a:rPr lang="en-US" sz="1200" b="0" i="0" u="none" strike="noStrike" kern="1200" dirty="0">
+                <a:solidFill>
+                  <a:schemeClr val="tx1"/>
+                </a:solidFill>
+                <a:effectLst/>
+                <a:latin typeface="+mn-lt"/>
+                <a:ea typeface="+mn-ea"/>
+                <a:cs typeface="+mn-cs"/>
+              </a:rPr>
+              <a:t>CLICK</a:t>
+            </a:r>
+          </a:p>
+          <a:p>
+            <a:r>
+              <a:rPr lang="en-US" sz="1200" b="0" i="0" u="none" strike="noStrike" kern="1200" dirty="0">
+                <a:solidFill>
+                  <a:schemeClr val="tx1"/>
+                </a:solidFill>
+                <a:effectLst/>
+                <a:latin typeface="+mn-lt"/>
+                <a:ea typeface="+mn-ea"/>
+                <a:cs typeface="+mn-cs"/>
+              </a:rPr>
+              <a:t>According to McKinsey &amp; Company, while over half of organizations are adopting AI, only about a quarter have actually scaled it to deliver meaningful business impact. A big part of that gap comes down to how people are using these tools.</a:t>
+            </a:r>
+            <a:endParaRPr lang="en-US" dirty="0"/>
           </a:p>
         </p:txBody>
       </p:sp>
@@ -3162,7 +4508,7 @@
           <p:cNvPr id="4" name="Slide Number Placeholder 3">
             <a:extLst>
               <a:ext uri="{FF2B5EF4-FFF2-40B4-BE49-F238E27FC236}">
-                <a16:creationId xmlns:a16="http://schemas.microsoft.com/office/drawing/2014/main" id="{A9BA1A11-0F85-8A63-D43F-C17AB16341CF}"/>
+                <a16:creationId xmlns:a16="http://schemas.microsoft.com/office/drawing/2014/main" id="{B4F7F008-AE4F-ABC1-BAC0-B62714B71984}"/>
               </a:ext>
             </a:extLst>
           </p:cNvPr>
@@ -3180,7 +4526,7 @@
           <a:p>
             <a:fld id="{F7021451-1387-4CA6-816F-3879F97B5CBC}" type="slidenum">
               <a:rPr lang="en-US"/>
-              <a:t>6</a:t>
+              <a:t>7</a:t>
             </a:fld>
             <a:endParaRPr lang="en-US"/>
           </a:p>
@@ -3189,7 +4535,7 @@
     </p:spTree>
     <p:extLst>
       <p:ext uri="{BB962C8B-B14F-4D97-AF65-F5344CB8AC3E}">
-        <p14:creationId xmlns:p14="http://schemas.microsoft.com/office/powerpoint/2010/main" val="99965107"/>
+        <p14:creationId xmlns:p14="http://schemas.microsoft.com/office/powerpoint/2010/main" val="2904522705"/>
       </p:ext>
     </p:extLst>
   </p:cSld>
@@ -3199,7 +4545,7 @@
 </p:notes>
 </file>
 
-<file path=ppt/notesSlides/notesSlide7.xml><?xml version="1.0" encoding="utf-8"?>
+<file path=ppt/notesSlides/notesSlide8.xml><?xml version="1.0" encoding="utf-8"?>
 <p:notes xmlns:a="http://schemas.openxmlformats.org/drawingml/2006/main" xmlns:r="http://schemas.openxmlformats.org/officeDocument/2006/relationships" xmlns:p="http://schemas.openxmlformats.org/presentationml/2006/main">
   <p:cSld>
     <p:spTree>
@@ -3207,7 +4553,7 @@
         <p:cNvPr id="1" name="">
           <a:extLst>
             <a:ext uri="{FF2B5EF4-FFF2-40B4-BE49-F238E27FC236}">
-              <a16:creationId xmlns:a16="http://schemas.microsoft.com/office/drawing/2014/main" id="{7534AC89-0A1A-85AA-EBEF-C9AF4270A78C}"/>
+              <a16:creationId xmlns:a16="http://schemas.microsoft.com/office/drawing/2014/main" id="{2F23CBB3-2C3E-16CF-C440-C956A4C41264}"/>
             </a:ext>
           </a:extLst>
         </p:cNvPr>
@@ -3227,7 +4573,7 @@
           <p:cNvPr id="2" name="Slide Image Placeholder 1">
             <a:extLst>
               <a:ext uri="{FF2B5EF4-FFF2-40B4-BE49-F238E27FC236}">
-                <a16:creationId xmlns:a16="http://schemas.microsoft.com/office/drawing/2014/main" id="{69C6AF9A-C022-76DA-A162-91868E1400B2}"/>
+                <a16:creationId xmlns:a16="http://schemas.microsoft.com/office/drawing/2014/main" id="{4065A950-1D18-A506-2EFD-EA649DD82F6D}"/>
               </a:ext>
             </a:extLst>
           </p:cNvPr>
@@ -3245,7 +4591,7 @@
           <p:cNvPr id="3" name="Notes Placeholder 2">
             <a:extLst>
               <a:ext uri="{FF2B5EF4-FFF2-40B4-BE49-F238E27FC236}">
-                <a16:creationId xmlns:a16="http://schemas.microsoft.com/office/drawing/2014/main" id="{8C1C9318-A46A-F933-F9A2-E5CDE48C4999}"/>
+                <a16:creationId xmlns:a16="http://schemas.microsoft.com/office/drawing/2014/main" id="{2F49A47B-6C35-1119-D381-021AB0D393D6}"/>
               </a:ext>
             </a:extLst>
           </p:cNvPr>
@@ -3273,7 +4619,7 @@
           <p:cNvPr id="4" name="Slide Number Placeholder 3">
             <a:extLst>
               <a:ext uri="{FF2B5EF4-FFF2-40B4-BE49-F238E27FC236}">
-                <a16:creationId xmlns:a16="http://schemas.microsoft.com/office/drawing/2014/main" id="{13F90D01-1974-1012-9BA7-FC8FE39EE780}"/>
+                <a16:creationId xmlns:a16="http://schemas.microsoft.com/office/drawing/2014/main" id="{20DB4C8D-9D8C-40EC-4F06-358B94083FE6}"/>
               </a:ext>
             </a:extLst>
           </p:cNvPr>
@@ -3291,7 +4637,7 @@
           <a:p>
             <a:fld id="{F7021451-1387-4CA6-816F-3879F97B5CBC}" type="slidenum">
               <a:rPr lang="en-US"/>
-              <a:t>7</a:t>
+              <a:t>8</a:t>
             </a:fld>
             <a:endParaRPr lang="en-US"/>
           </a:p>
@@ -3300,118 +4646,7 @@
     </p:spTree>
     <p:extLst>
       <p:ext uri="{BB962C8B-B14F-4D97-AF65-F5344CB8AC3E}">
-        <p14:creationId xmlns:p14="http://schemas.microsoft.com/office/powerpoint/2010/main" val="3500519882"/>
-      </p:ext>
-    </p:extLst>
-  </p:cSld>
-  <p:clrMapOvr>
-    <a:masterClrMapping/>
-  </p:clrMapOvr>
-</p:notes>
-</file>
-
-<file path=ppt/notesSlides/notesSlide8.xml><?xml version="1.0" encoding="utf-8"?>
-<p:notes xmlns:a="http://schemas.openxmlformats.org/drawingml/2006/main" xmlns:r="http://schemas.openxmlformats.org/officeDocument/2006/relationships" xmlns:p="http://schemas.openxmlformats.org/presentationml/2006/main">
-  <p:cSld>
-    <p:spTree>
-      <p:nvGrpSpPr>
-        <p:cNvPr id="1" name="">
-          <a:extLst>
-            <a:ext uri="{FF2B5EF4-FFF2-40B4-BE49-F238E27FC236}">
-              <a16:creationId xmlns:a16="http://schemas.microsoft.com/office/drawing/2014/main" id="{9776B5EC-E721-A9E5-70D3-F0D545FF7F58}"/>
-            </a:ext>
-          </a:extLst>
-        </p:cNvPr>
-        <p:cNvGrpSpPr/>
-        <p:nvPr/>
-      </p:nvGrpSpPr>
-      <p:grpSpPr>
-        <a:xfrm>
-          <a:off x="0" y="0"/>
-          <a:ext cx="0" cy="0"/>
-          <a:chOff x="0" y="0"/>
-          <a:chExt cx="0" cy="0"/>
-        </a:xfrm>
-      </p:grpSpPr>
-      <p:sp>
-        <p:nvSpPr>
-          <p:cNvPr id="2" name="Slide Image Placeholder 1">
-            <a:extLst>
-              <a:ext uri="{FF2B5EF4-FFF2-40B4-BE49-F238E27FC236}">
-                <a16:creationId xmlns:a16="http://schemas.microsoft.com/office/drawing/2014/main" id="{FDC71275-4B4D-BD71-73F3-EF94EF4AB259}"/>
-              </a:ext>
-            </a:extLst>
-          </p:cNvPr>
-          <p:cNvSpPr>
-            <a:spLocks noGrp="1" noRot="1" noChangeAspect="1"/>
-          </p:cNvSpPr>
-          <p:nvPr>
-            <p:ph type="sldImg"/>
-          </p:nvPr>
-        </p:nvSpPr>
-        <p:spPr/>
-      </p:sp>
-      <p:sp>
-        <p:nvSpPr>
-          <p:cNvPr id="3" name="Notes Placeholder 2">
-            <a:extLst>
-              <a:ext uri="{FF2B5EF4-FFF2-40B4-BE49-F238E27FC236}">
-                <a16:creationId xmlns:a16="http://schemas.microsoft.com/office/drawing/2014/main" id="{3E92C8E9-EC27-5931-C660-DAFD64DA94AC}"/>
-              </a:ext>
-            </a:extLst>
-          </p:cNvPr>
-          <p:cNvSpPr>
-            <a:spLocks noGrp="1"/>
-          </p:cNvSpPr>
-          <p:nvPr>
-            <p:ph type="body" idx="1"/>
-          </p:nvPr>
-        </p:nvSpPr>
-        <p:spPr/>
-        <p:txBody>
-          <a:bodyPr/>
-          <a:lstStyle/>
-          <a:p>
-            <a:r>
-              <a:rPr lang="en-US" dirty="0"/>
-              <a:t>Open strong. One sentence intro, then straight into the problem. Don’t fumble with ‘can you see my screen’ — just go.</a:t>
-            </a:r>
-          </a:p>
-        </p:txBody>
-      </p:sp>
-      <p:sp>
-        <p:nvSpPr>
-          <p:cNvPr id="4" name="Slide Number Placeholder 3">
-            <a:extLst>
-              <a:ext uri="{FF2B5EF4-FFF2-40B4-BE49-F238E27FC236}">
-                <a16:creationId xmlns:a16="http://schemas.microsoft.com/office/drawing/2014/main" id="{72078525-B8C1-F9D6-1F20-60FAA8B8F32C}"/>
-              </a:ext>
-            </a:extLst>
-          </p:cNvPr>
-          <p:cNvSpPr>
-            <a:spLocks noGrp="1"/>
-          </p:cNvSpPr>
-          <p:nvPr>
-            <p:ph type="sldNum" sz="quarter" idx="10"/>
-          </p:nvPr>
-        </p:nvSpPr>
-        <p:spPr/>
-        <p:txBody>
-          <a:bodyPr/>
-          <a:lstStyle/>
-          <a:p>
-            <a:fld id="{F7021451-1387-4CA6-816F-3879F97B5CBC}" type="slidenum">
-              <a:rPr lang="en-US"/>
-              <a:t>8</a:t>
-            </a:fld>
-            <a:endParaRPr lang="en-US"/>
-          </a:p>
-        </p:txBody>
-      </p:sp>
-    </p:spTree>
-    <p:extLst>
-      <p:ext uri="{BB962C8B-B14F-4D97-AF65-F5344CB8AC3E}">
-        <p14:creationId xmlns:p14="http://schemas.microsoft.com/office/powerpoint/2010/main" val="90924063"/>
+        <p14:creationId xmlns:p14="http://schemas.microsoft.com/office/powerpoint/2010/main" val="2010213735"/>
       </p:ext>
     </p:extLst>
   </p:cSld>
@@ -3426,13 +4661,7 @@
   <p:cSld>
     <p:spTree>
       <p:nvGrpSpPr>
-        <p:cNvPr id="1" name="">
-          <a:extLst>
-            <a:ext uri="{FF2B5EF4-FFF2-40B4-BE49-F238E27FC236}">
-              <a16:creationId xmlns:a16="http://schemas.microsoft.com/office/drawing/2014/main" id="{8489FA73-5CDD-A5A8-46C1-C59D84F6D700}"/>
-            </a:ext>
-          </a:extLst>
-        </p:cNvPr>
+        <p:cNvPr id="1" name=""/>
         <p:cNvGrpSpPr/>
         <p:nvPr/>
       </p:nvGrpSpPr>
@@ -3446,13 +4675,7 @@
       </p:grpSpPr>
       <p:sp>
         <p:nvSpPr>
-          <p:cNvPr id="2" name="Slide Image Placeholder 1">
-            <a:extLst>
-              <a:ext uri="{FF2B5EF4-FFF2-40B4-BE49-F238E27FC236}">
-                <a16:creationId xmlns:a16="http://schemas.microsoft.com/office/drawing/2014/main" id="{0EA897C8-E7A4-76AC-EE02-0E3644B713B8}"/>
-              </a:ext>
-            </a:extLst>
-          </p:cNvPr>
+          <p:cNvPr id="2" name="Slide Image Placeholder 1"/>
           <p:cNvSpPr>
             <a:spLocks noGrp="1" noRot="1" noChangeAspect="1"/>
           </p:cNvSpPr>
@@ -3464,13 +4687,7 @@
       </p:sp>
       <p:sp>
         <p:nvSpPr>
-          <p:cNvPr id="3" name="Notes Placeholder 2">
-            <a:extLst>
-              <a:ext uri="{FF2B5EF4-FFF2-40B4-BE49-F238E27FC236}">
-                <a16:creationId xmlns:a16="http://schemas.microsoft.com/office/drawing/2014/main" id="{390E8E22-7D92-E5DD-9095-A8A56B3D76D3}"/>
-              </a:ext>
-            </a:extLst>
-          </p:cNvPr>
+          <p:cNvPr id="3" name="Notes Placeholder 2"/>
           <p:cNvSpPr>
             <a:spLocks noGrp="1"/>
           </p:cNvSpPr>
@@ -3485,20 +4702,14 @@
           <a:p>
             <a:r>
               <a:rPr lang="en-US" dirty="0"/>
-              <a:t>Open strong. One sentence intro, then straight into the problem. Don’t fumble with ‘can you see my screen’ — just go.</a:t>
+              <a:t>Close strong. Open for questions. Have the live app ready.</a:t>
             </a:r>
           </a:p>
         </p:txBody>
       </p:sp>
       <p:sp>
         <p:nvSpPr>
-          <p:cNvPr id="4" name="Slide Number Placeholder 3">
-            <a:extLst>
-              <a:ext uri="{FF2B5EF4-FFF2-40B4-BE49-F238E27FC236}">
-                <a16:creationId xmlns:a16="http://schemas.microsoft.com/office/drawing/2014/main" id="{89F4C9BB-86B4-4C4E-3403-DAAE9948D275}"/>
-              </a:ext>
-            </a:extLst>
-          </p:cNvPr>
+          <p:cNvPr id="4" name="Slide Number Placeholder 3"/>
           <p:cNvSpPr>
             <a:spLocks noGrp="1"/>
           </p:cNvSpPr>
@@ -3522,7 +4733,7 @@
     </p:spTree>
     <p:extLst>
       <p:ext uri="{BB962C8B-B14F-4D97-AF65-F5344CB8AC3E}">
-        <p14:creationId xmlns:p14="http://schemas.microsoft.com/office/powerpoint/2010/main" val="2687576830"/>
+        <p14:creationId xmlns:p14="http://schemas.microsoft.com/office/powerpoint/2010/main" val="1024086991"/>
       </p:ext>
     </p:extLst>
   </p:cSld>
@@ -3663,7 +4874,7 @@
           <a:p>
             <a:fld id="{E0D6D881-E361-9D4C-B245-86AC355DC6C1}" type="datetimeFigureOut">
               <a:rPr lang="en-US" smtClean="0"/>
-              <a:t>3/17/26</a:t>
+              <a:t>3/18/26</a:t>
             </a:fld>
             <a:endParaRPr lang="en-US"/>
           </a:p>
@@ -3834,7 +5045,7 @@
           <a:p>
             <a:fld id="{E0D6D881-E361-9D4C-B245-86AC355DC6C1}" type="datetimeFigureOut">
               <a:rPr lang="en-US" smtClean="0"/>
-              <a:t>3/17/26</a:t>
+              <a:t>3/18/26</a:t>
             </a:fld>
             <a:endParaRPr lang="en-US"/>
           </a:p>
@@ -4015,7 +5226,7 @@
           <a:p>
             <a:fld id="{E0D6D881-E361-9D4C-B245-86AC355DC6C1}" type="datetimeFigureOut">
               <a:rPr lang="en-US" smtClean="0"/>
-              <a:t>3/17/26</a:t>
+              <a:t>3/18/26</a:t>
             </a:fld>
             <a:endParaRPr lang="en-US"/>
           </a:p>
@@ -4221,7 +5432,7 @@
           <a:p>
             <a:fld id="{E0D6D881-E361-9D4C-B245-86AC355DC6C1}" type="datetimeFigureOut">
               <a:rPr lang="en-US" smtClean="0"/>
-              <a:t>3/17/26</a:t>
+              <a:t>3/18/26</a:t>
             </a:fld>
             <a:endParaRPr lang="en-US"/>
           </a:p>
@@ -4468,7 +5679,7 @@
           <a:p>
             <a:fld id="{E0D6D881-E361-9D4C-B245-86AC355DC6C1}" type="datetimeFigureOut">
               <a:rPr lang="en-US" smtClean="0"/>
-              <a:t>3/17/26</a:t>
+              <a:t>3/18/26</a:t>
             </a:fld>
             <a:endParaRPr lang="en-US"/>
           </a:p>
@@ -4701,7 +5912,7 @@
           <a:p>
             <a:fld id="{E0D6D881-E361-9D4C-B245-86AC355DC6C1}" type="datetimeFigureOut">
               <a:rPr lang="en-US" smtClean="0"/>
-              <a:t>3/17/26</a:t>
+              <a:t>3/18/26</a:t>
             </a:fld>
             <a:endParaRPr lang="en-US"/>
           </a:p>
@@ -5069,7 +6280,7 @@
           <a:p>
             <a:fld id="{E0D6D881-E361-9D4C-B245-86AC355DC6C1}" type="datetimeFigureOut">
               <a:rPr lang="en-US" smtClean="0"/>
-              <a:t>3/17/26</a:t>
+              <a:t>3/18/26</a:t>
             </a:fld>
             <a:endParaRPr lang="en-US"/>
           </a:p>
@@ -5188,7 +6399,7 @@
           <a:p>
             <a:fld id="{E0D6D881-E361-9D4C-B245-86AC355DC6C1}" type="datetimeFigureOut">
               <a:rPr lang="en-US" smtClean="0"/>
-              <a:t>3/17/26</a:t>
+              <a:t>3/18/26</a:t>
             </a:fld>
             <a:endParaRPr lang="en-US"/>
           </a:p>
@@ -5284,7 +6495,7 @@
           <a:p>
             <a:fld id="{E0D6D881-E361-9D4C-B245-86AC355DC6C1}" type="datetimeFigureOut">
               <a:rPr lang="en-US" smtClean="0"/>
-              <a:t>3/17/26</a:t>
+              <a:t>3/18/26</a:t>
             </a:fld>
             <a:endParaRPr lang="en-US"/>
           </a:p>
@@ -5562,7 +6773,7 @@
           <a:p>
             <a:fld id="{E0D6D881-E361-9D4C-B245-86AC355DC6C1}" type="datetimeFigureOut">
               <a:rPr lang="en-US" smtClean="0"/>
-              <a:t>3/17/26</a:t>
+              <a:t>3/18/26</a:t>
             </a:fld>
             <a:endParaRPr lang="en-US"/>
           </a:p>
@@ -5820,7 +7031,7 @@
           <a:p>
             <a:fld id="{E0D6D881-E361-9D4C-B245-86AC355DC6C1}" type="datetimeFigureOut">
               <a:rPr lang="en-US" smtClean="0"/>
-              <a:t>3/17/26</a:t>
+              <a:t>3/18/26</a:t>
             </a:fld>
             <a:endParaRPr lang="en-US"/>
           </a:p>
@@ -6034,7 +7245,7 @@
           <a:p>
             <a:fld id="{E0D6D881-E361-9D4C-B245-86AC355DC6C1}" type="datetimeFigureOut">
               <a:rPr lang="en-US" smtClean="0"/>
-              <a:t>3/17/26</a:t>
+              <a:t>3/18/26</a:t>
             </a:fld>
             <a:endParaRPr lang="en-US"/>
           </a:p>
@@ -6632,2492 +7843,6 @@
         </p:txBody>
       </p:sp>
     </p:spTree>
-  </p:cSld>
-  <p:clrMapOvr>
-    <a:masterClrMapping/>
-  </p:clrMapOvr>
-</p:sld>
-</file>
-
-<file path=ppt/slides/slide10.xml><?xml version="1.0" encoding="utf-8"?>
-<p:sld xmlns:a="http://schemas.openxmlformats.org/drawingml/2006/main" xmlns:r="http://schemas.openxmlformats.org/officeDocument/2006/relationships" xmlns:p="http://schemas.openxmlformats.org/presentationml/2006/main">
-  <p:cSld>
-    <p:bg>
-      <p:bgPr>
-        <a:solidFill>
-          <a:schemeClr val="bg1"/>
-        </a:solidFill>
-        <a:effectLst/>
-      </p:bgPr>
-    </p:bg>
-    <p:spTree>
-      <p:nvGrpSpPr>
-        <p:cNvPr id="1" name="">
-          <a:extLst>
-            <a:ext uri="{FF2B5EF4-FFF2-40B4-BE49-F238E27FC236}">
-              <a16:creationId xmlns:a16="http://schemas.microsoft.com/office/drawing/2014/main" id="{1021FA4D-5C74-9EED-D69B-7A3DD9348937}"/>
-            </a:ext>
-          </a:extLst>
-        </p:cNvPr>
-        <p:cNvGrpSpPr/>
-        <p:nvPr/>
-      </p:nvGrpSpPr>
-      <p:grpSpPr>
-        <a:xfrm>
-          <a:off x="0" y="0"/>
-          <a:ext cx="0" cy="0"/>
-          <a:chOff x="0" y="0"/>
-          <a:chExt cx="0" cy="0"/>
-        </a:xfrm>
-      </p:grpSpPr>
-      <p:pic>
-        <p:nvPicPr>
-          <p:cNvPr id="15" name="Google Shape;859;p7" descr="Badge Question Mark with solid fill">
-            <a:extLst>
-              <a:ext uri="{FF2B5EF4-FFF2-40B4-BE49-F238E27FC236}">
-                <a16:creationId xmlns:a16="http://schemas.microsoft.com/office/drawing/2014/main" id="{7223A2E1-CCE9-C304-754A-4A3D4368C2BD}"/>
-              </a:ext>
-            </a:extLst>
-          </p:cNvPr>
-          <p:cNvPicPr preferRelativeResize="0"/>
-          <p:nvPr/>
-        </p:nvPicPr>
-        <p:blipFill rotWithShape="1">
-          <a:blip r:embed="rId3">
-            <a:alphaModFix/>
-          </a:blip>
-          <a:srcRect/>
-          <a:stretch/>
-        </p:blipFill>
-        <p:spPr>
-          <a:xfrm>
-            <a:off x="4115668" y="2456257"/>
-            <a:ext cx="914400" cy="914400"/>
-          </a:xfrm>
-          <a:prstGeom prst="rect">
-            <a:avLst/>
-          </a:prstGeom>
-          <a:noFill/>
-          <a:ln>
-            <a:noFill/>
-          </a:ln>
-        </p:spPr>
-      </p:pic>
-      <p:sp>
-        <p:nvSpPr>
-          <p:cNvPr id="16" name="Google Shape;860;p7">
-            <a:extLst>
-              <a:ext uri="{FF2B5EF4-FFF2-40B4-BE49-F238E27FC236}">
-                <a16:creationId xmlns:a16="http://schemas.microsoft.com/office/drawing/2014/main" id="{E4389AE7-5793-2421-4E94-36F0D73FCF98}"/>
-              </a:ext>
-            </a:extLst>
-          </p:cNvPr>
-          <p:cNvSpPr txBox="1"/>
-          <p:nvPr/>
-        </p:nvSpPr>
-        <p:spPr>
-          <a:xfrm>
-            <a:off x="2501240" y="1396181"/>
-            <a:ext cx="4141520" cy="1064482"/>
-          </a:xfrm>
-          <a:prstGeom prst="rect">
-            <a:avLst/>
-          </a:prstGeom>
-          <a:noFill/>
-          <a:ln>
-            <a:noFill/>
-          </a:ln>
-        </p:spPr>
-        <p:txBody>
-          <a:bodyPr spcFirstLastPara="1" wrap="square" lIns="0" tIns="0" rIns="0" bIns="0" anchor="b" anchorCtr="0">
-            <a:normAutofit/>
-          </a:bodyPr>
-          <a:lstStyle/>
-          <a:p>
-            <a:pPr marL="0" marR="0" lvl="0" indent="0" algn="l" rtl="0">
-              <a:lnSpc>
-                <a:spcPct val="90000"/>
-              </a:lnSpc>
-              <a:spcBef>
-                <a:spcPts val="0"/>
-              </a:spcBef>
-              <a:spcAft>
-                <a:spcPts val="0"/>
-              </a:spcAft>
-              <a:buClr>
-                <a:schemeClr val="lt1"/>
-              </a:buClr>
-              <a:buSzPts val="7000"/>
-              <a:buFont typeface="Lato Black"/>
-              <a:buNone/>
-            </a:pPr>
-            <a:r>
-              <a:rPr lang="en-US" sz="7000" b="0" i="0" dirty="0">
-                <a:solidFill>
-                  <a:schemeClr val="lt1"/>
-                </a:solidFill>
-                <a:latin typeface="Lato Black"/>
-                <a:ea typeface="Lato Black"/>
-                <a:cs typeface="Lato Black"/>
-                <a:sym typeface="Lato Black"/>
-              </a:rPr>
-              <a:t>Questions</a:t>
-            </a:r>
-            <a:endParaRPr sz="7000" b="0" i="0" dirty="0">
-              <a:solidFill>
-                <a:schemeClr val="lt1"/>
-              </a:solidFill>
-              <a:latin typeface="Lato Black"/>
-              <a:ea typeface="Lato Black"/>
-              <a:cs typeface="Lato Black"/>
-              <a:sym typeface="Lato Black"/>
-            </a:endParaRPr>
-          </a:p>
-        </p:txBody>
-      </p:sp>
-    </p:spTree>
-    <p:extLst>
-      <p:ext uri="{BB962C8B-B14F-4D97-AF65-F5344CB8AC3E}">
-        <p14:creationId xmlns:p14="http://schemas.microsoft.com/office/powerpoint/2010/main" val="1512180849"/>
-      </p:ext>
-    </p:extLst>
-  </p:cSld>
-  <p:clrMapOvr>
-    <a:masterClrMapping/>
-  </p:clrMapOvr>
-</p:sld>
-</file>
-
-<file path=ppt/slides/slide11.xml><?xml version="1.0" encoding="utf-8"?>
-<p:sld xmlns:a="http://schemas.openxmlformats.org/drawingml/2006/main" xmlns:r="http://schemas.openxmlformats.org/officeDocument/2006/relationships" xmlns:p="http://schemas.openxmlformats.org/presentationml/2006/main">
-  <p:cSld name="Slide 10">
-    <p:bg>
-      <p:bgPr>
-        <a:solidFill>
-          <a:schemeClr val="bg1"/>
-        </a:solidFill>
-        <a:effectLst/>
-      </p:bgPr>
-    </p:bg>
-    <p:spTree>
-      <p:nvGrpSpPr>
-        <p:cNvPr id="1" name=""/>
-        <p:cNvGrpSpPr/>
-        <p:nvPr/>
-      </p:nvGrpSpPr>
-      <p:grpSpPr>
-        <a:xfrm>
-          <a:off x="0" y="0"/>
-          <a:ext cx="0" cy="0"/>
-          <a:chOff x="0" y="0"/>
-          <a:chExt cx="0" cy="0"/>
-        </a:xfrm>
-      </p:grpSpPr>
-      <p:sp>
-        <p:nvSpPr>
-          <p:cNvPr id="2" name="Text 0"/>
-          <p:cNvSpPr/>
-          <p:nvPr/>
-        </p:nvSpPr>
-        <p:spPr>
-          <a:xfrm>
-            <a:off x="914400" y="1188720"/>
-            <a:ext cx="7315200" cy="914400"/>
-          </a:xfrm>
-          <a:prstGeom prst="rect">
-            <a:avLst/>
-          </a:prstGeom>
-          <a:noFill/>
-          <a:ln/>
-        </p:spPr>
-        <p:txBody>
-          <a:bodyPr wrap="square" rtlCol="0" anchor="ctr"/>
-          <a:lstStyle/>
-          <a:p>
-            <a:pPr marL="0" indent="0" algn="ctr">
-              <a:buNone/>
-            </a:pPr>
-            <a:r>
-              <a:rPr lang="en-US" sz="4400" b="1" dirty="0">
-                <a:solidFill>
-                  <a:srgbClr val="3B82F6"/>
-                </a:solidFill>
-                <a:latin typeface="Calibri" pitchFamily="34" charset="0"/>
-                <a:ea typeface="Calibri" pitchFamily="34" charset="-122"/>
-                <a:cs typeface="Calibri" pitchFamily="34" charset="-120"/>
-              </a:rPr>
-              <a:t>Thank You</a:t>
-            </a:r>
-            <a:r>
-              <a:rPr lang="en-US" sz="4400" b="1" dirty="0">
-                <a:solidFill>
-                  <a:srgbClr val="FAFAFA"/>
-                </a:solidFill>
-                <a:latin typeface="Calibri" pitchFamily="34" charset="0"/>
-                <a:ea typeface="Calibri" pitchFamily="34" charset="-122"/>
-                <a:cs typeface="Calibri" pitchFamily="34" charset="-120"/>
-              </a:rPr>
-              <a:t> </a:t>
-            </a:r>
-            <a:endParaRPr lang="en-US" sz="4400" dirty="0"/>
-          </a:p>
-        </p:txBody>
-      </p:sp>
-      <p:sp>
-        <p:nvSpPr>
-          <p:cNvPr id="3" name="Text 1"/>
-          <p:cNvSpPr/>
-          <p:nvPr/>
-        </p:nvSpPr>
-        <p:spPr>
-          <a:xfrm>
-            <a:off x="914400" y="2194560"/>
-            <a:ext cx="7315200" cy="457200"/>
-          </a:xfrm>
-          <a:prstGeom prst="rect">
-            <a:avLst/>
-          </a:prstGeom>
-          <a:noFill/>
-          <a:ln/>
-        </p:spPr>
-        <p:txBody>
-          <a:bodyPr wrap="square" rtlCol="0" anchor="ctr"/>
-          <a:lstStyle/>
-          <a:p>
-            <a:pPr marL="0" indent="0" algn="ctr">
-              <a:buNone/>
-            </a:pPr>
-            <a:r>
-              <a:rPr lang="en-US" sz="1600" i="1" dirty="0">
-                <a:solidFill>
-                  <a:srgbClr val="A3A3A3"/>
-                </a:solidFill>
-                <a:latin typeface="Calibri" pitchFamily="34" charset="0"/>
-                <a:ea typeface="Calibri" pitchFamily="34" charset="-122"/>
-                <a:cs typeface="Calibri" pitchFamily="34" charset="-120"/>
-              </a:rPr>
-              <a:t>Design. Assess. Certify. — All AI-powered.</a:t>
-            </a:r>
-            <a:endParaRPr lang="en-US" sz="1600" dirty="0"/>
-          </a:p>
-        </p:txBody>
-      </p:sp>
-    </p:spTree>
-  </p:cSld>
-  <p:clrMapOvr>
-    <a:masterClrMapping/>
-  </p:clrMapOvr>
-</p:sld>
-</file>
-
-<file path=ppt/slides/slide12.xml><?xml version="1.0" encoding="utf-8"?>
-<p:sld xmlns:a="http://schemas.openxmlformats.org/drawingml/2006/main" xmlns:r="http://schemas.openxmlformats.org/officeDocument/2006/relationships" xmlns:p="http://schemas.openxmlformats.org/presentationml/2006/main">
-  <p:cSld>
-    <p:bg>
-      <p:bgPr>
-        <a:solidFill>
-          <a:schemeClr val="bg1"/>
-        </a:solidFill>
-        <a:effectLst/>
-      </p:bgPr>
-    </p:bg>
-    <p:spTree>
-      <p:nvGrpSpPr>
-        <p:cNvPr id="1" name="">
-          <a:extLst>
-            <a:ext uri="{FF2B5EF4-FFF2-40B4-BE49-F238E27FC236}">
-              <a16:creationId xmlns:a16="http://schemas.microsoft.com/office/drawing/2014/main" id="{6B733B31-D24F-4E68-27AE-7B7129ECDE55}"/>
-            </a:ext>
-          </a:extLst>
-        </p:cNvPr>
-        <p:cNvGrpSpPr/>
-        <p:nvPr/>
-      </p:nvGrpSpPr>
-      <p:grpSpPr>
-        <a:xfrm>
-          <a:off x="0" y="0"/>
-          <a:ext cx="0" cy="0"/>
-          <a:chOff x="0" y="0"/>
-          <a:chExt cx="0" cy="0"/>
-        </a:xfrm>
-      </p:grpSpPr>
-      <p:sp>
-        <p:nvSpPr>
-          <p:cNvPr id="2" name="Google Shape;12219;p87">
-            <a:extLst>
-              <a:ext uri="{FF2B5EF4-FFF2-40B4-BE49-F238E27FC236}">
-                <a16:creationId xmlns:a16="http://schemas.microsoft.com/office/drawing/2014/main" id="{39E73F47-5AFB-1223-9419-52001A83374D}"/>
-              </a:ext>
-            </a:extLst>
-          </p:cNvPr>
-          <p:cNvSpPr>
-            <a:spLocks noChangeAspect="1"/>
-          </p:cNvSpPr>
-          <p:nvPr/>
-        </p:nvSpPr>
-        <p:spPr>
-          <a:xfrm>
-            <a:off x="1020726" y="1931193"/>
-            <a:ext cx="1964846" cy="1968974"/>
-          </a:xfrm>
-          <a:custGeom>
-            <a:avLst/>
-            <a:gdLst/>
-            <a:ahLst/>
-            <a:cxnLst/>
-            <a:rect l="l" t="t" r="r" b="b"/>
-            <a:pathLst>
-              <a:path w="11419" h="11443" extrusionOk="0">
-                <a:moveTo>
-                  <a:pt x="4644" y="3560"/>
-                </a:moveTo>
-                <a:lnTo>
-                  <a:pt x="4727" y="3655"/>
-                </a:lnTo>
-                <a:lnTo>
-                  <a:pt x="4132" y="4263"/>
-                </a:lnTo>
-                <a:cubicBezTo>
-                  <a:pt x="3989" y="4084"/>
-                  <a:pt x="3965" y="3834"/>
-                  <a:pt x="4108" y="3655"/>
-                </a:cubicBezTo>
-                <a:lnTo>
-                  <a:pt x="4120" y="3655"/>
-                </a:lnTo>
-                <a:cubicBezTo>
-                  <a:pt x="4298" y="3655"/>
-                  <a:pt x="4465" y="3620"/>
-                  <a:pt x="4644" y="3560"/>
-                </a:cubicBezTo>
-                <a:close/>
-                <a:moveTo>
-                  <a:pt x="8751" y="5739"/>
-                </a:moveTo>
-                <a:lnTo>
-                  <a:pt x="8918" y="5906"/>
-                </a:lnTo>
-                <a:cubicBezTo>
-                  <a:pt x="8944" y="5932"/>
-                  <a:pt x="8994" y="5951"/>
-                  <a:pt x="9043" y="5951"/>
-                </a:cubicBezTo>
-                <a:cubicBezTo>
-                  <a:pt x="9061" y="5951"/>
-                  <a:pt x="9080" y="5948"/>
-                  <a:pt x="9097" y="5941"/>
-                </a:cubicBezTo>
-                <a:cubicBezTo>
-                  <a:pt x="9275" y="5894"/>
-                  <a:pt x="9430" y="5858"/>
-                  <a:pt x="9597" y="5846"/>
-                </a:cubicBezTo>
-                <a:lnTo>
-                  <a:pt x="9704" y="5858"/>
-                </a:lnTo>
-                <a:cubicBezTo>
-                  <a:pt x="10478" y="5918"/>
-                  <a:pt x="11073" y="6561"/>
-                  <a:pt x="11073" y="7335"/>
-                </a:cubicBezTo>
-                <a:cubicBezTo>
-                  <a:pt x="11085" y="7454"/>
-                  <a:pt x="11073" y="7585"/>
-                  <a:pt x="11025" y="7716"/>
-                </a:cubicBezTo>
-                <a:lnTo>
-                  <a:pt x="10121" y="6811"/>
-                </a:lnTo>
-                <a:cubicBezTo>
-                  <a:pt x="10061" y="6739"/>
-                  <a:pt x="9966" y="6692"/>
-                  <a:pt x="9870" y="6644"/>
-                </a:cubicBezTo>
-                <a:cubicBezTo>
-                  <a:pt x="9787" y="6620"/>
-                  <a:pt x="9704" y="6608"/>
-                  <a:pt x="9609" y="6608"/>
-                </a:cubicBezTo>
-                <a:cubicBezTo>
-                  <a:pt x="9418" y="6608"/>
-                  <a:pt x="9239" y="6680"/>
-                  <a:pt x="9108" y="6811"/>
-                </a:cubicBezTo>
-                <a:cubicBezTo>
-                  <a:pt x="8918" y="7001"/>
-                  <a:pt x="8858" y="7299"/>
-                  <a:pt x="8942" y="7573"/>
-                </a:cubicBezTo>
-                <a:cubicBezTo>
-                  <a:pt x="8978" y="7680"/>
-                  <a:pt x="9037" y="7763"/>
-                  <a:pt x="9108" y="7823"/>
-                </a:cubicBezTo>
-                <a:lnTo>
-                  <a:pt x="10013" y="8728"/>
-                </a:lnTo>
-                <a:cubicBezTo>
-                  <a:pt x="9882" y="8775"/>
-                  <a:pt x="9751" y="8787"/>
-                  <a:pt x="9609" y="8787"/>
-                </a:cubicBezTo>
-                <a:cubicBezTo>
-                  <a:pt x="8835" y="8787"/>
-                  <a:pt x="8204" y="8180"/>
-                  <a:pt x="8156" y="7418"/>
-                </a:cubicBezTo>
-                <a:lnTo>
-                  <a:pt x="8144" y="7323"/>
-                </a:lnTo>
-                <a:cubicBezTo>
-                  <a:pt x="8144" y="7156"/>
-                  <a:pt x="8168" y="6977"/>
-                  <a:pt x="8227" y="6811"/>
-                </a:cubicBezTo>
-                <a:cubicBezTo>
-                  <a:pt x="8263" y="6751"/>
-                  <a:pt x="8239" y="6680"/>
-                  <a:pt x="8180" y="6632"/>
-                </a:cubicBezTo>
-                <a:lnTo>
-                  <a:pt x="8025" y="6465"/>
-                </a:lnTo>
-                <a:lnTo>
-                  <a:pt x="8751" y="5739"/>
-                </a:lnTo>
-                <a:close/>
-                <a:moveTo>
-                  <a:pt x="2393" y="6537"/>
-                </a:moveTo>
-                <a:lnTo>
-                  <a:pt x="2751" y="6894"/>
-                </a:lnTo>
-                <a:lnTo>
-                  <a:pt x="4632" y="8775"/>
-                </a:lnTo>
-                <a:lnTo>
-                  <a:pt x="4894" y="9037"/>
-                </a:lnTo>
-                <a:lnTo>
-                  <a:pt x="4358" y="9573"/>
-                </a:lnTo>
-                <a:lnTo>
-                  <a:pt x="1858" y="7084"/>
-                </a:lnTo>
-                <a:lnTo>
-                  <a:pt x="2393" y="6537"/>
-                </a:lnTo>
-                <a:close/>
-                <a:moveTo>
-                  <a:pt x="4155" y="0"/>
-                </a:moveTo>
-                <a:cubicBezTo>
-                  <a:pt x="3882" y="0"/>
-                  <a:pt x="3632" y="60"/>
-                  <a:pt x="3382" y="179"/>
-                </a:cubicBezTo>
-                <a:cubicBezTo>
-                  <a:pt x="3334" y="203"/>
-                  <a:pt x="3286" y="250"/>
-                  <a:pt x="3286" y="298"/>
-                </a:cubicBezTo>
-                <a:cubicBezTo>
-                  <a:pt x="3274" y="357"/>
-                  <a:pt x="3298" y="393"/>
-                  <a:pt x="3334" y="441"/>
-                </a:cubicBezTo>
-                <a:lnTo>
-                  <a:pt x="4417" y="1524"/>
-                </a:lnTo>
-                <a:cubicBezTo>
-                  <a:pt x="4453" y="1560"/>
-                  <a:pt x="4477" y="1608"/>
-                  <a:pt x="4513" y="1667"/>
-                </a:cubicBezTo>
-                <a:cubicBezTo>
-                  <a:pt x="4548" y="1810"/>
-                  <a:pt x="4525" y="1965"/>
-                  <a:pt x="4417" y="2060"/>
-                </a:cubicBezTo>
-                <a:cubicBezTo>
-                  <a:pt x="4346" y="2143"/>
-                  <a:pt x="4251" y="2167"/>
-                  <a:pt x="4155" y="2167"/>
-                </a:cubicBezTo>
-                <a:cubicBezTo>
-                  <a:pt x="4108" y="2167"/>
-                  <a:pt x="4060" y="2155"/>
-                  <a:pt x="4013" y="2143"/>
-                </a:cubicBezTo>
-                <a:cubicBezTo>
-                  <a:pt x="3953" y="2108"/>
-                  <a:pt x="3917" y="2096"/>
-                  <a:pt x="3882" y="2048"/>
-                </a:cubicBezTo>
-                <a:lnTo>
-                  <a:pt x="2798" y="965"/>
-                </a:lnTo>
-                <a:cubicBezTo>
-                  <a:pt x="2762" y="928"/>
-                  <a:pt x="2725" y="913"/>
-                  <a:pt x="2684" y="913"/>
-                </a:cubicBezTo>
-                <a:cubicBezTo>
-                  <a:pt x="2671" y="913"/>
-                  <a:pt x="2657" y="914"/>
-                  <a:pt x="2643" y="917"/>
-                </a:cubicBezTo>
-                <a:cubicBezTo>
-                  <a:pt x="2584" y="929"/>
-                  <a:pt x="2548" y="965"/>
-                  <a:pt x="2524" y="1012"/>
-                </a:cubicBezTo>
-                <a:cubicBezTo>
-                  <a:pt x="2405" y="1262"/>
-                  <a:pt x="2346" y="1512"/>
-                  <a:pt x="2346" y="1786"/>
-                </a:cubicBezTo>
-                <a:cubicBezTo>
-                  <a:pt x="2346" y="2239"/>
-                  <a:pt x="2524" y="2679"/>
-                  <a:pt x="2846" y="3013"/>
-                </a:cubicBezTo>
-                <a:cubicBezTo>
-                  <a:pt x="3096" y="3286"/>
-                  <a:pt x="3417" y="3465"/>
-                  <a:pt x="3798" y="3548"/>
-                </a:cubicBezTo>
-                <a:cubicBezTo>
-                  <a:pt x="3655" y="3846"/>
-                  <a:pt x="3715" y="4203"/>
-                  <a:pt x="3941" y="4465"/>
-                </a:cubicBezTo>
-                <a:lnTo>
-                  <a:pt x="3560" y="4846"/>
-                </a:lnTo>
-                <a:cubicBezTo>
-                  <a:pt x="3405" y="5001"/>
-                  <a:pt x="3334" y="5191"/>
-                  <a:pt x="3334" y="5394"/>
-                </a:cubicBezTo>
-                <a:cubicBezTo>
-                  <a:pt x="3334" y="5596"/>
-                  <a:pt x="3405" y="5775"/>
-                  <a:pt x="3524" y="5906"/>
-                </a:cubicBezTo>
-                <a:lnTo>
-                  <a:pt x="2917" y="6513"/>
-                </a:lnTo>
-                <a:lnTo>
-                  <a:pt x="2560" y="6156"/>
-                </a:lnTo>
-                <a:cubicBezTo>
-                  <a:pt x="2530" y="6126"/>
-                  <a:pt x="2486" y="6111"/>
-                  <a:pt x="2441" y="6111"/>
-                </a:cubicBezTo>
-                <a:cubicBezTo>
-                  <a:pt x="2396" y="6111"/>
-                  <a:pt x="2352" y="6126"/>
-                  <a:pt x="2322" y="6156"/>
-                </a:cubicBezTo>
-                <a:lnTo>
-                  <a:pt x="1417" y="7061"/>
-                </a:lnTo>
-                <a:lnTo>
-                  <a:pt x="60" y="8418"/>
-                </a:lnTo>
-                <a:cubicBezTo>
-                  <a:pt x="0" y="8478"/>
-                  <a:pt x="0" y="8597"/>
-                  <a:pt x="60" y="8656"/>
-                </a:cubicBezTo>
-                <a:lnTo>
-                  <a:pt x="1096" y="9704"/>
-                </a:lnTo>
-                <a:cubicBezTo>
-                  <a:pt x="1125" y="9734"/>
-                  <a:pt x="1170" y="9748"/>
-                  <a:pt x="1215" y="9748"/>
-                </a:cubicBezTo>
-                <a:cubicBezTo>
-                  <a:pt x="1259" y="9748"/>
-                  <a:pt x="1304" y="9734"/>
-                  <a:pt x="1334" y="9704"/>
-                </a:cubicBezTo>
-                <a:cubicBezTo>
-                  <a:pt x="1393" y="9644"/>
-                  <a:pt x="1393" y="9525"/>
-                  <a:pt x="1334" y="9466"/>
-                </a:cubicBezTo>
-                <a:lnTo>
-                  <a:pt x="417" y="8537"/>
-                </a:lnTo>
-                <a:lnTo>
-                  <a:pt x="1667" y="7287"/>
-                </a:lnTo>
-                <a:lnTo>
-                  <a:pt x="4167" y="9787"/>
-                </a:lnTo>
-                <a:lnTo>
-                  <a:pt x="2917" y="11037"/>
-                </a:lnTo>
-                <a:lnTo>
-                  <a:pt x="1810" y="9942"/>
-                </a:lnTo>
-                <a:cubicBezTo>
-                  <a:pt x="1780" y="9912"/>
-                  <a:pt x="1736" y="9897"/>
-                  <a:pt x="1691" y="9897"/>
-                </a:cubicBezTo>
-                <a:cubicBezTo>
-                  <a:pt x="1646" y="9897"/>
-                  <a:pt x="1602" y="9912"/>
-                  <a:pt x="1572" y="9942"/>
-                </a:cubicBezTo>
-                <a:cubicBezTo>
-                  <a:pt x="1512" y="10002"/>
-                  <a:pt x="1512" y="10121"/>
-                  <a:pt x="1572" y="10180"/>
-                </a:cubicBezTo>
-                <a:lnTo>
-                  <a:pt x="2798" y="11395"/>
-                </a:lnTo>
-                <a:cubicBezTo>
-                  <a:pt x="2822" y="11430"/>
-                  <a:pt x="2870" y="11442"/>
-                  <a:pt x="2917" y="11442"/>
-                </a:cubicBezTo>
-                <a:cubicBezTo>
-                  <a:pt x="2965" y="11442"/>
-                  <a:pt x="3001" y="11430"/>
-                  <a:pt x="3036" y="11395"/>
-                </a:cubicBezTo>
-                <a:lnTo>
-                  <a:pt x="4394" y="10037"/>
-                </a:lnTo>
-                <a:lnTo>
-                  <a:pt x="5298" y="9132"/>
-                </a:lnTo>
-                <a:cubicBezTo>
-                  <a:pt x="5322" y="9109"/>
-                  <a:pt x="5346" y="9061"/>
-                  <a:pt x="5346" y="9013"/>
-                </a:cubicBezTo>
-                <a:cubicBezTo>
-                  <a:pt x="5346" y="8966"/>
-                  <a:pt x="5322" y="8930"/>
-                  <a:pt x="5298" y="8894"/>
-                </a:cubicBezTo>
-                <a:lnTo>
-                  <a:pt x="5025" y="8632"/>
-                </a:lnTo>
-                <a:lnTo>
-                  <a:pt x="5644" y="8013"/>
-                </a:lnTo>
-                <a:cubicBezTo>
-                  <a:pt x="5770" y="8094"/>
-                  <a:pt x="5916" y="8135"/>
-                  <a:pt x="6062" y="8135"/>
-                </a:cubicBezTo>
-                <a:cubicBezTo>
-                  <a:pt x="6217" y="8135"/>
-                  <a:pt x="6372" y="8088"/>
-                  <a:pt x="6501" y="7989"/>
-                </a:cubicBezTo>
-                <a:cubicBezTo>
-                  <a:pt x="6572" y="7930"/>
-                  <a:pt x="6596" y="7823"/>
-                  <a:pt x="6537" y="7751"/>
-                </a:cubicBezTo>
-                <a:cubicBezTo>
-                  <a:pt x="6500" y="7708"/>
-                  <a:pt x="6446" y="7682"/>
-                  <a:pt x="6393" y="7682"/>
-                </a:cubicBezTo>
-                <a:cubicBezTo>
-                  <a:pt x="6360" y="7682"/>
-                  <a:pt x="6326" y="7692"/>
-                  <a:pt x="6299" y="7716"/>
-                </a:cubicBezTo>
-                <a:cubicBezTo>
-                  <a:pt x="6220" y="7778"/>
-                  <a:pt x="6131" y="7806"/>
-                  <a:pt x="6041" y="7806"/>
-                </a:cubicBezTo>
-                <a:cubicBezTo>
-                  <a:pt x="5927" y="7806"/>
-                  <a:pt x="5814" y="7760"/>
-                  <a:pt x="5727" y="7680"/>
-                </a:cubicBezTo>
-                <a:cubicBezTo>
-                  <a:pt x="5703" y="7644"/>
-                  <a:pt x="5656" y="7632"/>
-                  <a:pt x="5608" y="7632"/>
-                </a:cubicBezTo>
-                <a:cubicBezTo>
-                  <a:pt x="5560" y="7632"/>
-                  <a:pt x="5525" y="7644"/>
-                  <a:pt x="5489" y="7680"/>
-                </a:cubicBezTo>
-                <a:lnTo>
-                  <a:pt x="4763" y="8406"/>
-                </a:lnTo>
-                <a:lnTo>
-                  <a:pt x="3108" y="6799"/>
-                </a:lnTo>
-                <a:lnTo>
-                  <a:pt x="3834" y="6072"/>
-                </a:lnTo>
-                <a:cubicBezTo>
-                  <a:pt x="3894" y="6013"/>
-                  <a:pt x="3894" y="5894"/>
-                  <a:pt x="3834" y="5834"/>
-                </a:cubicBezTo>
-                <a:lnTo>
-                  <a:pt x="3751" y="5739"/>
-                </a:lnTo>
-                <a:cubicBezTo>
-                  <a:pt x="3655" y="5644"/>
-                  <a:pt x="3620" y="5549"/>
-                  <a:pt x="3620" y="5430"/>
-                </a:cubicBezTo>
-                <a:cubicBezTo>
-                  <a:pt x="3620" y="5310"/>
-                  <a:pt x="3655" y="5203"/>
-                  <a:pt x="3751" y="5108"/>
-                </a:cubicBezTo>
-                <a:lnTo>
-                  <a:pt x="4251" y="4608"/>
-                </a:lnTo>
-                <a:lnTo>
-                  <a:pt x="5096" y="3763"/>
-                </a:lnTo>
-                <a:lnTo>
-                  <a:pt x="6013" y="2846"/>
-                </a:lnTo>
-                <a:cubicBezTo>
-                  <a:pt x="6025" y="2834"/>
-                  <a:pt x="6037" y="2822"/>
-                  <a:pt x="6049" y="2822"/>
-                </a:cubicBezTo>
-                <a:cubicBezTo>
-                  <a:pt x="6106" y="2780"/>
-                  <a:pt x="6170" y="2761"/>
-                  <a:pt x="6233" y="2761"/>
-                </a:cubicBezTo>
-                <a:cubicBezTo>
-                  <a:pt x="6314" y="2761"/>
-                  <a:pt x="6393" y="2792"/>
-                  <a:pt x="6453" y="2846"/>
-                </a:cubicBezTo>
-                <a:lnTo>
-                  <a:pt x="6477" y="2870"/>
-                </a:lnTo>
-                <a:cubicBezTo>
-                  <a:pt x="6572" y="2965"/>
-                  <a:pt x="6596" y="3132"/>
-                  <a:pt x="6501" y="3263"/>
-                </a:cubicBezTo>
-                <a:cubicBezTo>
-                  <a:pt x="6489" y="3286"/>
-                  <a:pt x="6477" y="3298"/>
-                  <a:pt x="6477" y="3310"/>
-                </a:cubicBezTo>
-                <a:lnTo>
-                  <a:pt x="5477" y="4310"/>
-                </a:lnTo>
-                <a:cubicBezTo>
-                  <a:pt x="5418" y="4370"/>
-                  <a:pt x="5418" y="4489"/>
-                  <a:pt x="5477" y="4548"/>
-                </a:cubicBezTo>
-                <a:cubicBezTo>
-                  <a:pt x="5501" y="4584"/>
-                  <a:pt x="5549" y="4596"/>
-                  <a:pt x="5596" y="4596"/>
-                </a:cubicBezTo>
-                <a:cubicBezTo>
-                  <a:pt x="5644" y="4596"/>
-                  <a:pt x="5679" y="4572"/>
-                  <a:pt x="5715" y="4548"/>
-                </a:cubicBezTo>
-                <a:lnTo>
-                  <a:pt x="6715" y="3548"/>
-                </a:lnTo>
-                <a:cubicBezTo>
-                  <a:pt x="6727" y="3536"/>
-                  <a:pt x="6739" y="3525"/>
-                  <a:pt x="6751" y="3525"/>
-                </a:cubicBezTo>
-                <a:cubicBezTo>
-                  <a:pt x="6805" y="3481"/>
-                  <a:pt x="6872" y="3460"/>
-                  <a:pt x="6939" y="3460"/>
-                </a:cubicBezTo>
-                <a:cubicBezTo>
-                  <a:pt x="7018" y="3460"/>
-                  <a:pt x="7098" y="3490"/>
-                  <a:pt x="7156" y="3548"/>
-                </a:cubicBezTo>
-                <a:lnTo>
-                  <a:pt x="7168" y="3560"/>
-                </a:lnTo>
-                <a:cubicBezTo>
-                  <a:pt x="7275" y="3667"/>
-                  <a:pt x="7287" y="3834"/>
-                  <a:pt x="7203" y="3965"/>
-                </a:cubicBezTo>
-                <a:cubicBezTo>
-                  <a:pt x="7192" y="3989"/>
-                  <a:pt x="7192" y="4001"/>
-                  <a:pt x="7168" y="4013"/>
-                </a:cubicBezTo>
-                <a:lnTo>
-                  <a:pt x="6180" y="5013"/>
-                </a:lnTo>
-                <a:cubicBezTo>
-                  <a:pt x="6120" y="5072"/>
-                  <a:pt x="6120" y="5191"/>
-                  <a:pt x="6180" y="5251"/>
-                </a:cubicBezTo>
-                <a:cubicBezTo>
-                  <a:pt x="6203" y="5275"/>
-                  <a:pt x="6251" y="5299"/>
-                  <a:pt x="6299" y="5299"/>
-                </a:cubicBezTo>
-                <a:cubicBezTo>
-                  <a:pt x="6334" y="5299"/>
-                  <a:pt x="6382" y="5275"/>
-                  <a:pt x="6418" y="5251"/>
-                </a:cubicBezTo>
-                <a:lnTo>
-                  <a:pt x="7406" y="4251"/>
-                </a:lnTo>
-                <a:cubicBezTo>
-                  <a:pt x="7430" y="4239"/>
-                  <a:pt x="7442" y="4215"/>
-                  <a:pt x="7454" y="4215"/>
-                </a:cubicBezTo>
-                <a:cubicBezTo>
-                  <a:pt x="7506" y="4179"/>
-                  <a:pt x="7569" y="4160"/>
-                  <a:pt x="7633" y="4160"/>
-                </a:cubicBezTo>
-                <a:cubicBezTo>
-                  <a:pt x="7715" y="4160"/>
-                  <a:pt x="7798" y="4191"/>
-                  <a:pt x="7858" y="4251"/>
-                </a:cubicBezTo>
-                <a:lnTo>
-                  <a:pt x="7870" y="4263"/>
-                </a:lnTo>
-                <a:cubicBezTo>
-                  <a:pt x="7977" y="4370"/>
-                  <a:pt x="7989" y="4537"/>
-                  <a:pt x="7906" y="4668"/>
-                </a:cubicBezTo>
-                <a:cubicBezTo>
-                  <a:pt x="7882" y="4679"/>
-                  <a:pt x="7882" y="4703"/>
-                  <a:pt x="7870" y="4715"/>
-                </a:cubicBezTo>
-                <a:lnTo>
-                  <a:pt x="6870" y="5715"/>
-                </a:lnTo>
-                <a:cubicBezTo>
-                  <a:pt x="6811" y="5775"/>
-                  <a:pt x="6811" y="5894"/>
-                  <a:pt x="6870" y="5953"/>
-                </a:cubicBezTo>
-                <a:cubicBezTo>
-                  <a:pt x="6906" y="5977"/>
-                  <a:pt x="6953" y="5989"/>
-                  <a:pt x="6989" y="5989"/>
-                </a:cubicBezTo>
-                <a:cubicBezTo>
-                  <a:pt x="7037" y="5989"/>
-                  <a:pt x="7084" y="5977"/>
-                  <a:pt x="7108" y="5953"/>
-                </a:cubicBezTo>
-                <a:lnTo>
-                  <a:pt x="8108" y="4953"/>
-                </a:lnTo>
-                <a:cubicBezTo>
-                  <a:pt x="8120" y="4941"/>
-                  <a:pt x="8144" y="4918"/>
-                  <a:pt x="8156" y="4918"/>
-                </a:cubicBezTo>
-                <a:cubicBezTo>
-                  <a:pt x="8208" y="4881"/>
-                  <a:pt x="8272" y="4863"/>
-                  <a:pt x="8335" y="4863"/>
-                </a:cubicBezTo>
-                <a:cubicBezTo>
-                  <a:pt x="8418" y="4863"/>
-                  <a:pt x="8501" y="4893"/>
-                  <a:pt x="8561" y="4953"/>
-                </a:cubicBezTo>
-                <a:lnTo>
-                  <a:pt x="8573" y="4965"/>
-                </a:lnTo>
-                <a:cubicBezTo>
-                  <a:pt x="8680" y="5072"/>
-                  <a:pt x="8692" y="5239"/>
-                  <a:pt x="8597" y="5370"/>
-                </a:cubicBezTo>
-                <a:cubicBezTo>
-                  <a:pt x="8585" y="5382"/>
-                  <a:pt x="8573" y="5394"/>
-                  <a:pt x="8573" y="5418"/>
-                </a:cubicBezTo>
-                <a:lnTo>
-                  <a:pt x="6715" y="7275"/>
-                </a:lnTo>
-                <a:cubicBezTo>
-                  <a:pt x="6656" y="7335"/>
-                  <a:pt x="6656" y="7454"/>
-                  <a:pt x="6715" y="7513"/>
-                </a:cubicBezTo>
-                <a:cubicBezTo>
-                  <a:pt x="6739" y="7537"/>
-                  <a:pt x="6787" y="7561"/>
-                  <a:pt x="6834" y="7561"/>
-                </a:cubicBezTo>
-                <a:cubicBezTo>
-                  <a:pt x="6870" y="7561"/>
-                  <a:pt x="6918" y="7537"/>
-                  <a:pt x="6953" y="7513"/>
-                </a:cubicBezTo>
-                <a:lnTo>
-                  <a:pt x="7787" y="6680"/>
-                </a:lnTo>
-                <a:lnTo>
-                  <a:pt x="7870" y="6763"/>
-                </a:lnTo>
-                <a:cubicBezTo>
-                  <a:pt x="7811" y="6942"/>
-                  <a:pt x="7787" y="7120"/>
-                  <a:pt x="7787" y="7287"/>
-                </a:cubicBezTo>
-                <a:lnTo>
-                  <a:pt x="7787" y="7299"/>
-                </a:lnTo>
-                <a:lnTo>
-                  <a:pt x="7799" y="7406"/>
-                </a:lnTo>
-                <a:cubicBezTo>
-                  <a:pt x="7823" y="7870"/>
-                  <a:pt x="8037" y="8287"/>
-                  <a:pt x="8358" y="8597"/>
-                </a:cubicBezTo>
-                <a:cubicBezTo>
-                  <a:pt x="8692" y="8906"/>
-                  <a:pt x="9132" y="9085"/>
-                  <a:pt x="9597" y="9085"/>
-                </a:cubicBezTo>
-                <a:cubicBezTo>
-                  <a:pt x="9870" y="9085"/>
-                  <a:pt x="10121" y="9025"/>
-                  <a:pt x="10371" y="8906"/>
-                </a:cubicBezTo>
-                <a:cubicBezTo>
-                  <a:pt x="10418" y="8882"/>
-                  <a:pt x="10466" y="8835"/>
-                  <a:pt x="10466" y="8787"/>
-                </a:cubicBezTo>
-                <a:cubicBezTo>
-                  <a:pt x="10478" y="8728"/>
-                  <a:pt x="10442" y="8692"/>
-                  <a:pt x="10418" y="8644"/>
-                </a:cubicBezTo>
-                <a:lnTo>
-                  <a:pt x="9335" y="7537"/>
-                </a:lnTo>
-                <a:cubicBezTo>
-                  <a:pt x="9287" y="7501"/>
-                  <a:pt x="9251" y="7454"/>
-                  <a:pt x="9251" y="7406"/>
-                </a:cubicBezTo>
-                <a:cubicBezTo>
-                  <a:pt x="9192" y="7263"/>
-                  <a:pt x="9239" y="7108"/>
-                  <a:pt x="9347" y="7001"/>
-                </a:cubicBezTo>
-                <a:cubicBezTo>
-                  <a:pt x="9418" y="6930"/>
-                  <a:pt x="9513" y="6882"/>
-                  <a:pt x="9609" y="6882"/>
-                </a:cubicBezTo>
-                <a:cubicBezTo>
-                  <a:pt x="9656" y="6882"/>
-                  <a:pt x="9704" y="6906"/>
-                  <a:pt x="9751" y="6918"/>
-                </a:cubicBezTo>
-                <a:cubicBezTo>
-                  <a:pt x="9811" y="6942"/>
-                  <a:pt x="9847" y="6965"/>
-                  <a:pt x="9882" y="7001"/>
-                </a:cubicBezTo>
-                <a:lnTo>
-                  <a:pt x="10966" y="8097"/>
-                </a:lnTo>
-                <a:cubicBezTo>
-                  <a:pt x="11000" y="8122"/>
-                  <a:pt x="11034" y="8142"/>
-                  <a:pt x="11073" y="8142"/>
-                </a:cubicBezTo>
-                <a:cubicBezTo>
-                  <a:pt x="11088" y="8142"/>
-                  <a:pt x="11104" y="8139"/>
-                  <a:pt x="11121" y="8132"/>
-                </a:cubicBezTo>
-                <a:cubicBezTo>
-                  <a:pt x="11180" y="8120"/>
-                  <a:pt x="11216" y="8097"/>
-                  <a:pt x="11240" y="8049"/>
-                </a:cubicBezTo>
-                <a:cubicBezTo>
-                  <a:pt x="11359" y="7799"/>
-                  <a:pt x="11418" y="7537"/>
-                  <a:pt x="11418" y="7275"/>
-                </a:cubicBezTo>
-                <a:cubicBezTo>
-                  <a:pt x="11418" y="6858"/>
-                  <a:pt x="11252" y="6430"/>
-                  <a:pt x="10918" y="6084"/>
-                </a:cubicBezTo>
-                <a:cubicBezTo>
-                  <a:pt x="10609" y="5751"/>
-                  <a:pt x="10180" y="5549"/>
-                  <a:pt x="9728" y="5513"/>
-                </a:cubicBezTo>
-                <a:lnTo>
-                  <a:pt x="9632" y="5501"/>
-                </a:lnTo>
-                <a:lnTo>
-                  <a:pt x="9609" y="5501"/>
-                </a:lnTo>
-                <a:cubicBezTo>
-                  <a:pt x="9454" y="5501"/>
-                  <a:pt x="9275" y="5537"/>
-                  <a:pt x="9097" y="5596"/>
-                </a:cubicBezTo>
-                <a:lnTo>
-                  <a:pt x="8954" y="5453"/>
-                </a:lnTo>
-                <a:cubicBezTo>
-                  <a:pt x="9049" y="5215"/>
-                  <a:pt x="9001" y="4953"/>
-                  <a:pt x="8811" y="4763"/>
-                </a:cubicBezTo>
-                <a:lnTo>
-                  <a:pt x="8799" y="4739"/>
-                </a:lnTo>
-                <a:cubicBezTo>
-                  <a:pt x="8656" y="4608"/>
-                  <a:pt x="8477" y="4548"/>
-                  <a:pt x="8299" y="4548"/>
-                </a:cubicBezTo>
-                <a:cubicBezTo>
-                  <a:pt x="8323" y="4370"/>
-                  <a:pt x="8239" y="4191"/>
-                  <a:pt x="8108" y="4060"/>
-                </a:cubicBezTo>
-                <a:lnTo>
-                  <a:pt x="8096" y="4048"/>
-                </a:lnTo>
-                <a:cubicBezTo>
-                  <a:pt x="7965" y="3906"/>
-                  <a:pt x="7775" y="3846"/>
-                  <a:pt x="7596" y="3846"/>
-                </a:cubicBezTo>
-                <a:cubicBezTo>
-                  <a:pt x="7620" y="3667"/>
-                  <a:pt x="7537" y="3489"/>
-                  <a:pt x="7406" y="3358"/>
-                </a:cubicBezTo>
-                <a:lnTo>
-                  <a:pt x="7394" y="3346"/>
-                </a:lnTo>
-                <a:cubicBezTo>
-                  <a:pt x="7263" y="3215"/>
-                  <a:pt x="7084" y="3155"/>
-                  <a:pt x="6906" y="3155"/>
-                </a:cubicBezTo>
-                <a:cubicBezTo>
-                  <a:pt x="6918" y="2977"/>
-                  <a:pt x="6846" y="2798"/>
-                  <a:pt x="6703" y="2655"/>
-                </a:cubicBezTo>
-                <a:lnTo>
-                  <a:pt x="6692" y="2643"/>
-                </a:lnTo>
-                <a:cubicBezTo>
-                  <a:pt x="6565" y="2516"/>
-                  <a:pt x="6400" y="2453"/>
-                  <a:pt x="6235" y="2453"/>
-                </a:cubicBezTo>
-                <a:cubicBezTo>
-                  <a:pt x="6152" y="2453"/>
-                  <a:pt x="6068" y="2469"/>
-                  <a:pt x="5989" y="2501"/>
-                </a:cubicBezTo>
-                <a:lnTo>
-                  <a:pt x="5858" y="2358"/>
-                </a:lnTo>
-                <a:cubicBezTo>
-                  <a:pt x="5918" y="2179"/>
-                  <a:pt x="5953" y="2001"/>
-                  <a:pt x="5953" y="1846"/>
-                </a:cubicBezTo>
-                <a:lnTo>
-                  <a:pt x="5953" y="1822"/>
-                </a:lnTo>
-                <a:lnTo>
-                  <a:pt x="5930" y="1727"/>
-                </a:lnTo>
-                <a:cubicBezTo>
-                  <a:pt x="5918" y="1465"/>
-                  <a:pt x="5846" y="1215"/>
-                  <a:pt x="5727" y="988"/>
-                </a:cubicBezTo>
-                <a:cubicBezTo>
-                  <a:pt x="5693" y="937"/>
-                  <a:pt x="5628" y="898"/>
-                  <a:pt x="5567" y="898"/>
-                </a:cubicBezTo>
-                <a:cubicBezTo>
-                  <a:pt x="5544" y="898"/>
-                  <a:pt x="5521" y="904"/>
-                  <a:pt x="5501" y="917"/>
-                </a:cubicBezTo>
-                <a:cubicBezTo>
-                  <a:pt x="5429" y="965"/>
-                  <a:pt x="5382" y="1072"/>
-                  <a:pt x="5429" y="1143"/>
-                </a:cubicBezTo>
-                <a:cubicBezTo>
-                  <a:pt x="5537" y="1334"/>
-                  <a:pt x="5596" y="1524"/>
-                  <a:pt x="5608" y="1739"/>
-                </a:cubicBezTo>
-                <a:lnTo>
-                  <a:pt x="5620" y="1846"/>
-                </a:lnTo>
-                <a:cubicBezTo>
-                  <a:pt x="5620" y="2001"/>
-                  <a:pt x="5596" y="2167"/>
-                  <a:pt x="5513" y="2346"/>
-                </a:cubicBezTo>
-                <a:cubicBezTo>
-                  <a:pt x="5489" y="2405"/>
-                  <a:pt x="5513" y="2477"/>
-                  <a:pt x="5560" y="2524"/>
-                </a:cubicBezTo>
-                <a:lnTo>
-                  <a:pt x="5727" y="2691"/>
-                </a:lnTo>
-                <a:lnTo>
-                  <a:pt x="5001" y="3417"/>
-                </a:lnTo>
-                <a:lnTo>
-                  <a:pt x="4834" y="3251"/>
-                </a:lnTo>
-                <a:cubicBezTo>
-                  <a:pt x="4800" y="3225"/>
-                  <a:pt x="4753" y="3205"/>
-                  <a:pt x="4707" y="3205"/>
-                </a:cubicBezTo>
-                <a:cubicBezTo>
-                  <a:pt x="4690" y="3205"/>
-                  <a:pt x="4672" y="3208"/>
-                  <a:pt x="4656" y="3215"/>
-                </a:cubicBezTo>
-                <a:cubicBezTo>
-                  <a:pt x="4477" y="3274"/>
-                  <a:pt x="4310" y="3298"/>
-                  <a:pt x="4155" y="3298"/>
-                </a:cubicBezTo>
-                <a:lnTo>
-                  <a:pt x="4048" y="3286"/>
-                </a:lnTo>
-                <a:cubicBezTo>
-                  <a:pt x="3274" y="3227"/>
-                  <a:pt x="2679" y="2584"/>
-                  <a:pt x="2679" y="1822"/>
-                </a:cubicBezTo>
-                <a:cubicBezTo>
-                  <a:pt x="2679" y="1691"/>
-                  <a:pt x="2691" y="1560"/>
-                  <a:pt x="2739" y="1429"/>
-                </a:cubicBezTo>
-                <a:lnTo>
-                  <a:pt x="3644" y="2334"/>
-                </a:lnTo>
-                <a:cubicBezTo>
-                  <a:pt x="3703" y="2405"/>
-                  <a:pt x="3798" y="2453"/>
-                  <a:pt x="3894" y="2501"/>
-                </a:cubicBezTo>
-                <a:cubicBezTo>
-                  <a:pt x="3989" y="2524"/>
-                  <a:pt x="4060" y="2536"/>
-                  <a:pt x="4155" y="2536"/>
-                </a:cubicBezTo>
-                <a:cubicBezTo>
-                  <a:pt x="4346" y="2536"/>
-                  <a:pt x="4525" y="2465"/>
-                  <a:pt x="4656" y="2334"/>
-                </a:cubicBezTo>
-                <a:cubicBezTo>
-                  <a:pt x="4846" y="2143"/>
-                  <a:pt x="4929" y="1846"/>
-                  <a:pt x="4822" y="1572"/>
-                </a:cubicBezTo>
-                <a:lnTo>
-                  <a:pt x="4822" y="1560"/>
-                </a:lnTo>
-                <a:cubicBezTo>
-                  <a:pt x="4787" y="1489"/>
-                  <a:pt x="4751" y="1393"/>
-                  <a:pt x="4656" y="1310"/>
-                </a:cubicBezTo>
-                <a:lnTo>
-                  <a:pt x="3751" y="393"/>
-                </a:lnTo>
-                <a:cubicBezTo>
-                  <a:pt x="3882" y="357"/>
-                  <a:pt x="4013" y="334"/>
-                  <a:pt x="4144" y="334"/>
-                </a:cubicBezTo>
-                <a:cubicBezTo>
-                  <a:pt x="4489" y="334"/>
-                  <a:pt x="4798" y="441"/>
-                  <a:pt x="5060" y="655"/>
-                </a:cubicBezTo>
-                <a:cubicBezTo>
-                  <a:pt x="5088" y="678"/>
-                  <a:pt x="5121" y="689"/>
-                  <a:pt x="5155" y="689"/>
-                </a:cubicBezTo>
-                <a:cubicBezTo>
-                  <a:pt x="5208" y="689"/>
-                  <a:pt x="5262" y="663"/>
-                  <a:pt x="5298" y="619"/>
-                </a:cubicBezTo>
-                <a:cubicBezTo>
-                  <a:pt x="5358" y="548"/>
-                  <a:pt x="5346" y="441"/>
-                  <a:pt x="5263" y="381"/>
-                </a:cubicBezTo>
-                <a:cubicBezTo>
-                  <a:pt x="4941" y="131"/>
-                  <a:pt x="4548" y="0"/>
-                  <a:pt x="4155" y="0"/>
-                </a:cubicBezTo>
-                <a:close/>
-              </a:path>
-            </a:pathLst>
-          </a:custGeom>
-          <a:solidFill>
-            <a:srgbClr val="657E93"/>
-          </a:solidFill>
-          <a:ln>
-            <a:noFill/>
-          </a:ln>
-        </p:spPr>
-        <p:txBody>
-          <a:bodyPr spcFirstLastPara="1" wrap="square" lIns="91425" tIns="91425" rIns="91425" bIns="91425" anchor="ctr" anchorCtr="0">
-            <a:noAutofit/>
-          </a:bodyPr>
-          <a:lstStyle/>
-          <a:p>
-            <a:pPr marL="0" lvl="0" indent="0" algn="l" rtl="0">
-              <a:spcBef>
-                <a:spcPts val="0"/>
-              </a:spcBef>
-              <a:spcAft>
-                <a:spcPts val="0"/>
-              </a:spcAft>
-              <a:buNone/>
-            </a:pPr>
-            <a:endParaRPr/>
-          </a:p>
-        </p:txBody>
-      </p:sp>
-      <p:grpSp>
-        <p:nvGrpSpPr>
-          <p:cNvPr id="3" name="Google Shape;12449;p87">
-            <a:extLst>
-              <a:ext uri="{FF2B5EF4-FFF2-40B4-BE49-F238E27FC236}">
-                <a16:creationId xmlns:a16="http://schemas.microsoft.com/office/drawing/2014/main" id="{73ACECE8-8FE5-2A7C-49FE-893DB2474BA2}"/>
-              </a:ext>
-            </a:extLst>
-          </p:cNvPr>
-          <p:cNvGrpSpPr>
-            <a:grpSpLocks noChangeAspect="1"/>
-          </p:cNvGrpSpPr>
-          <p:nvPr/>
-        </p:nvGrpSpPr>
-        <p:grpSpPr>
-          <a:xfrm>
-            <a:off x="4436599" y="1934418"/>
-            <a:ext cx="1067447" cy="1152168"/>
-            <a:chOff x="2662884" y="1513044"/>
-            <a:chExt cx="322914" cy="348543"/>
-          </a:xfrm>
-        </p:grpSpPr>
-        <p:sp>
-          <p:nvSpPr>
-            <p:cNvPr id="4" name="Google Shape;12450;p87">
-              <a:extLst>
-                <a:ext uri="{FF2B5EF4-FFF2-40B4-BE49-F238E27FC236}">
-                  <a16:creationId xmlns:a16="http://schemas.microsoft.com/office/drawing/2014/main" id="{AA57F91F-3217-0920-610D-B74EF3BBD11A}"/>
-                </a:ext>
-              </a:extLst>
-            </p:cNvPr>
-            <p:cNvSpPr/>
-            <p:nvPr/>
-          </p:nvSpPr>
-          <p:spPr>
-            <a:xfrm>
-              <a:off x="2662884" y="1513044"/>
-              <a:ext cx="260663" cy="348543"/>
-            </a:xfrm>
-            <a:custGeom>
-              <a:avLst/>
-              <a:gdLst/>
-              <a:ahLst/>
-              <a:cxnLst/>
-              <a:rect l="l" t="t" r="r" b="b"/>
-              <a:pathLst>
-                <a:path w="8228" h="11002" extrusionOk="0">
-                  <a:moveTo>
-                    <a:pt x="5692" y="0"/>
-                  </a:moveTo>
-                  <a:cubicBezTo>
-                    <a:pt x="5597" y="0"/>
-                    <a:pt x="5525" y="72"/>
-                    <a:pt x="5525" y="167"/>
-                  </a:cubicBezTo>
-                  <a:cubicBezTo>
-                    <a:pt x="5525" y="250"/>
-                    <a:pt x="5597" y="322"/>
-                    <a:pt x="5692" y="322"/>
-                  </a:cubicBezTo>
-                  <a:lnTo>
-                    <a:pt x="7907" y="322"/>
-                  </a:lnTo>
-                  <a:lnTo>
-                    <a:pt x="7907" y="10668"/>
-                  </a:lnTo>
-                  <a:lnTo>
-                    <a:pt x="334" y="10668"/>
-                  </a:lnTo>
-                  <a:lnTo>
-                    <a:pt x="334" y="9406"/>
-                  </a:lnTo>
-                  <a:cubicBezTo>
-                    <a:pt x="334" y="9311"/>
-                    <a:pt x="251" y="9240"/>
-                    <a:pt x="167" y="9240"/>
-                  </a:cubicBezTo>
-                  <a:cubicBezTo>
-                    <a:pt x="72" y="9240"/>
-                    <a:pt x="1" y="9311"/>
-                    <a:pt x="1" y="9406"/>
-                  </a:cubicBezTo>
-                  <a:lnTo>
-                    <a:pt x="1" y="10835"/>
-                  </a:lnTo>
-                  <a:cubicBezTo>
-                    <a:pt x="1" y="10918"/>
-                    <a:pt x="72" y="11002"/>
-                    <a:pt x="167" y="11002"/>
-                  </a:cubicBezTo>
-                  <a:lnTo>
-                    <a:pt x="8049" y="11002"/>
-                  </a:lnTo>
-                  <a:cubicBezTo>
-                    <a:pt x="8145" y="11002"/>
-                    <a:pt x="8216" y="10918"/>
-                    <a:pt x="8216" y="10835"/>
-                  </a:cubicBezTo>
-                  <a:lnTo>
-                    <a:pt x="8216" y="179"/>
-                  </a:lnTo>
-                  <a:cubicBezTo>
-                    <a:pt x="8228" y="60"/>
-                    <a:pt x="8157" y="0"/>
-                    <a:pt x="8073" y="0"/>
-                  </a:cubicBezTo>
-                  <a:close/>
-                </a:path>
-              </a:pathLst>
-            </a:custGeom>
-            <a:solidFill>
-              <a:srgbClr val="657E93"/>
-            </a:solidFill>
-            <a:ln>
-              <a:noFill/>
-            </a:ln>
-          </p:spPr>
-          <p:txBody>
-            <a:bodyPr spcFirstLastPara="1" wrap="square" lIns="91425" tIns="91425" rIns="91425" bIns="91425" anchor="ctr" anchorCtr="0">
-              <a:noAutofit/>
-            </a:bodyPr>
-            <a:lstStyle/>
-            <a:p>
-              <a:pPr marL="0" lvl="0" indent="0" algn="l" rtl="0">
-                <a:spcBef>
-                  <a:spcPts val="0"/>
-                </a:spcBef>
-                <a:spcAft>
-                  <a:spcPts val="0"/>
-                </a:spcAft>
-                <a:buNone/>
-              </a:pPr>
-              <a:endParaRPr/>
-            </a:p>
-          </p:txBody>
-        </p:sp>
-        <p:sp>
-          <p:nvSpPr>
-            <p:cNvPr id="5" name="Google Shape;12451;p87">
-              <a:extLst>
-                <a:ext uri="{FF2B5EF4-FFF2-40B4-BE49-F238E27FC236}">
-                  <a16:creationId xmlns:a16="http://schemas.microsoft.com/office/drawing/2014/main" id="{1CA7F34A-F9ED-C471-B77E-5E91438D142A}"/>
-                </a:ext>
-              </a:extLst>
-            </p:cNvPr>
-            <p:cNvSpPr/>
-            <p:nvPr/>
-          </p:nvSpPr>
-          <p:spPr>
-            <a:xfrm>
-              <a:off x="2663264" y="1513044"/>
-              <a:ext cx="165243" cy="282554"/>
-            </a:xfrm>
-            <a:custGeom>
-              <a:avLst/>
-              <a:gdLst/>
-              <a:ahLst/>
-              <a:cxnLst/>
-              <a:rect l="l" t="t" r="r" b="b"/>
-              <a:pathLst>
-                <a:path w="5216" h="8919" extrusionOk="0">
-                  <a:moveTo>
-                    <a:pt x="2358" y="548"/>
-                  </a:moveTo>
-                  <a:lnTo>
-                    <a:pt x="2358" y="2346"/>
-                  </a:lnTo>
-                  <a:lnTo>
-                    <a:pt x="560" y="2346"/>
-                  </a:lnTo>
-                  <a:lnTo>
-                    <a:pt x="2358" y="548"/>
-                  </a:lnTo>
-                  <a:close/>
-                  <a:moveTo>
-                    <a:pt x="2537" y="0"/>
-                  </a:moveTo>
-                  <a:cubicBezTo>
-                    <a:pt x="2418" y="0"/>
-                    <a:pt x="2299" y="167"/>
-                    <a:pt x="2227" y="238"/>
-                  </a:cubicBezTo>
-                  <a:lnTo>
-                    <a:pt x="108" y="2346"/>
-                  </a:lnTo>
-                  <a:cubicBezTo>
-                    <a:pt x="60" y="2393"/>
-                    <a:pt x="1" y="2441"/>
-                    <a:pt x="1" y="2513"/>
-                  </a:cubicBezTo>
-                  <a:lnTo>
-                    <a:pt x="1" y="8751"/>
-                  </a:lnTo>
-                  <a:cubicBezTo>
-                    <a:pt x="1" y="8835"/>
-                    <a:pt x="72" y="8918"/>
-                    <a:pt x="167" y="8918"/>
-                  </a:cubicBezTo>
-                  <a:cubicBezTo>
-                    <a:pt x="263" y="8918"/>
-                    <a:pt x="334" y="8835"/>
-                    <a:pt x="334" y="8751"/>
-                  </a:cubicBezTo>
-                  <a:lnTo>
-                    <a:pt x="334" y="2667"/>
-                  </a:lnTo>
-                  <a:lnTo>
-                    <a:pt x="2525" y="2667"/>
-                  </a:lnTo>
-                  <a:cubicBezTo>
-                    <a:pt x="2608" y="2667"/>
-                    <a:pt x="2680" y="2584"/>
-                    <a:pt x="2680" y="2501"/>
-                  </a:cubicBezTo>
-                  <a:lnTo>
-                    <a:pt x="2680" y="310"/>
-                  </a:lnTo>
-                  <a:lnTo>
-                    <a:pt x="5049" y="310"/>
-                  </a:lnTo>
-                  <a:cubicBezTo>
-                    <a:pt x="5144" y="310"/>
-                    <a:pt x="5216" y="238"/>
-                    <a:pt x="5216" y="143"/>
-                  </a:cubicBezTo>
-                  <a:cubicBezTo>
-                    <a:pt x="5216" y="60"/>
-                    <a:pt x="5132" y="0"/>
-                    <a:pt x="5049" y="0"/>
-                  </a:cubicBezTo>
-                  <a:close/>
-                </a:path>
-              </a:pathLst>
-            </a:custGeom>
-            <a:solidFill>
-              <a:srgbClr val="657E93"/>
-            </a:solidFill>
-            <a:ln>
-              <a:noFill/>
-            </a:ln>
-          </p:spPr>
-          <p:txBody>
-            <a:bodyPr spcFirstLastPara="1" wrap="square" lIns="91425" tIns="91425" rIns="91425" bIns="91425" anchor="ctr" anchorCtr="0">
-              <a:noAutofit/>
-            </a:bodyPr>
-            <a:lstStyle/>
-            <a:p>
-              <a:pPr marL="0" lvl="0" indent="0" algn="l" rtl="0">
-                <a:spcBef>
-                  <a:spcPts val="0"/>
-                </a:spcBef>
-                <a:spcAft>
-                  <a:spcPts val="0"/>
-                </a:spcAft>
-                <a:buNone/>
-              </a:pPr>
-              <a:endParaRPr/>
-            </a:p>
-          </p:txBody>
-        </p:sp>
-        <p:sp>
-          <p:nvSpPr>
-            <p:cNvPr id="7" name="Google Shape;12452;p87">
-              <a:extLst>
-                <a:ext uri="{FF2B5EF4-FFF2-40B4-BE49-F238E27FC236}">
-                  <a16:creationId xmlns:a16="http://schemas.microsoft.com/office/drawing/2014/main" id="{8F3CC2E3-812C-D3E5-D6C8-CCB4AF989889}"/>
-                </a:ext>
-              </a:extLst>
-            </p:cNvPr>
-            <p:cNvSpPr/>
-            <p:nvPr/>
-          </p:nvSpPr>
-          <p:spPr>
-            <a:xfrm>
-              <a:off x="2717596" y="1747634"/>
-              <a:ext cx="152412" cy="10613"/>
-            </a:xfrm>
-            <a:custGeom>
-              <a:avLst/>
-              <a:gdLst/>
-              <a:ahLst/>
-              <a:cxnLst/>
-              <a:rect l="l" t="t" r="r" b="b"/>
-              <a:pathLst>
-                <a:path w="4811" h="335" extrusionOk="0">
-                  <a:moveTo>
-                    <a:pt x="167" y="1"/>
-                  </a:moveTo>
-                  <a:cubicBezTo>
-                    <a:pt x="72" y="1"/>
-                    <a:pt x="0" y="84"/>
-                    <a:pt x="0" y="168"/>
-                  </a:cubicBezTo>
-                  <a:cubicBezTo>
-                    <a:pt x="0" y="263"/>
-                    <a:pt x="72" y="334"/>
-                    <a:pt x="167" y="334"/>
-                  </a:cubicBezTo>
-                  <a:lnTo>
-                    <a:pt x="4644" y="334"/>
-                  </a:lnTo>
-                  <a:cubicBezTo>
-                    <a:pt x="4739" y="334"/>
-                    <a:pt x="4810" y="263"/>
-                    <a:pt x="4810" y="168"/>
-                  </a:cubicBezTo>
-                  <a:cubicBezTo>
-                    <a:pt x="4798" y="84"/>
-                    <a:pt x="4739" y="1"/>
-                    <a:pt x="4644" y="1"/>
-                  </a:cubicBezTo>
-                  <a:close/>
-                </a:path>
-              </a:pathLst>
-            </a:custGeom>
-            <a:solidFill>
-              <a:srgbClr val="657E93"/>
-            </a:solidFill>
-            <a:ln>
-              <a:noFill/>
-            </a:ln>
-          </p:spPr>
-          <p:txBody>
-            <a:bodyPr spcFirstLastPara="1" wrap="square" lIns="91425" tIns="91425" rIns="91425" bIns="91425" anchor="ctr" anchorCtr="0">
-              <a:noAutofit/>
-            </a:bodyPr>
-            <a:lstStyle/>
-            <a:p>
-              <a:pPr marL="0" lvl="0" indent="0" algn="l" rtl="0">
-                <a:spcBef>
-                  <a:spcPts val="0"/>
-                </a:spcBef>
-                <a:spcAft>
-                  <a:spcPts val="0"/>
-                </a:spcAft>
-                <a:buNone/>
-              </a:pPr>
-              <a:endParaRPr/>
-            </a:p>
-          </p:txBody>
-        </p:sp>
-        <p:sp>
-          <p:nvSpPr>
-            <p:cNvPr id="8" name="Google Shape;12453;p87">
-              <a:extLst>
-                <a:ext uri="{FF2B5EF4-FFF2-40B4-BE49-F238E27FC236}">
-                  <a16:creationId xmlns:a16="http://schemas.microsoft.com/office/drawing/2014/main" id="{8CEF66D4-67BC-88D2-06FF-CC7A5ACAB40C}"/>
-                </a:ext>
-              </a:extLst>
-            </p:cNvPr>
-            <p:cNvSpPr/>
-            <p:nvPr/>
-          </p:nvSpPr>
-          <p:spPr>
-            <a:xfrm>
-              <a:off x="2788876" y="1809886"/>
-              <a:ext cx="81132" cy="10581"/>
-            </a:xfrm>
-            <a:custGeom>
-              <a:avLst/>
-              <a:gdLst/>
-              <a:ahLst/>
-              <a:cxnLst/>
-              <a:rect l="l" t="t" r="r" b="b"/>
-              <a:pathLst>
-                <a:path w="2561" h="334" extrusionOk="0">
-                  <a:moveTo>
-                    <a:pt x="167" y="1"/>
-                  </a:moveTo>
-                  <a:cubicBezTo>
-                    <a:pt x="72" y="1"/>
-                    <a:pt x="0" y="84"/>
-                    <a:pt x="0" y="167"/>
-                  </a:cubicBezTo>
-                  <a:cubicBezTo>
-                    <a:pt x="0" y="262"/>
-                    <a:pt x="72" y="334"/>
-                    <a:pt x="167" y="334"/>
-                  </a:cubicBezTo>
-                  <a:lnTo>
-                    <a:pt x="2394" y="334"/>
-                  </a:lnTo>
-                  <a:cubicBezTo>
-                    <a:pt x="2489" y="334"/>
-                    <a:pt x="2560" y="262"/>
-                    <a:pt x="2560" y="167"/>
-                  </a:cubicBezTo>
-                  <a:cubicBezTo>
-                    <a:pt x="2560" y="84"/>
-                    <a:pt x="2489" y="1"/>
-                    <a:pt x="2394" y="1"/>
-                  </a:cubicBezTo>
-                  <a:close/>
-                </a:path>
-              </a:pathLst>
-            </a:custGeom>
-            <a:solidFill>
-              <a:srgbClr val="657E93"/>
-            </a:solidFill>
-            <a:ln>
-              <a:noFill/>
-            </a:ln>
-          </p:spPr>
-          <p:txBody>
-            <a:bodyPr spcFirstLastPara="1" wrap="square" lIns="91425" tIns="91425" rIns="91425" bIns="91425" anchor="ctr" anchorCtr="0">
-              <a:noAutofit/>
-            </a:bodyPr>
-            <a:lstStyle/>
-            <a:p>
-              <a:pPr marL="0" lvl="0" indent="0" algn="l" rtl="0">
-                <a:spcBef>
-                  <a:spcPts val="0"/>
-                </a:spcBef>
-                <a:spcAft>
-                  <a:spcPts val="0"/>
-                </a:spcAft>
-                <a:buNone/>
-              </a:pPr>
-              <a:endParaRPr/>
-            </a:p>
-          </p:txBody>
-        </p:sp>
-        <p:sp>
-          <p:nvSpPr>
-            <p:cNvPr id="9" name="Google Shape;12454;p87">
-              <a:extLst>
-                <a:ext uri="{FF2B5EF4-FFF2-40B4-BE49-F238E27FC236}">
-                  <a16:creationId xmlns:a16="http://schemas.microsoft.com/office/drawing/2014/main" id="{B7701AA3-726E-285E-09B7-17A94E1980D6}"/>
-                </a:ext>
-              </a:extLst>
-            </p:cNvPr>
-            <p:cNvSpPr/>
-            <p:nvPr/>
-          </p:nvSpPr>
-          <p:spPr>
-            <a:xfrm>
-              <a:off x="2717596" y="1722385"/>
-              <a:ext cx="152412" cy="10201"/>
-            </a:xfrm>
-            <a:custGeom>
-              <a:avLst/>
-              <a:gdLst/>
-              <a:ahLst/>
-              <a:cxnLst/>
-              <a:rect l="l" t="t" r="r" b="b"/>
-              <a:pathLst>
-                <a:path w="4811" h="322" extrusionOk="0">
-                  <a:moveTo>
-                    <a:pt x="167" y="0"/>
-                  </a:moveTo>
-                  <a:cubicBezTo>
-                    <a:pt x="72" y="0"/>
-                    <a:pt x="0" y="72"/>
-                    <a:pt x="0" y="167"/>
-                  </a:cubicBezTo>
-                  <a:cubicBezTo>
-                    <a:pt x="0" y="250"/>
-                    <a:pt x="72" y="322"/>
-                    <a:pt x="167" y="322"/>
-                  </a:cubicBezTo>
-                  <a:lnTo>
-                    <a:pt x="4644" y="322"/>
-                  </a:lnTo>
-                  <a:cubicBezTo>
-                    <a:pt x="4739" y="322"/>
-                    <a:pt x="4810" y="250"/>
-                    <a:pt x="4810" y="167"/>
-                  </a:cubicBezTo>
-                  <a:cubicBezTo>
-                    <a:pt x="4798" y="60"/>
-                    <a:pt x="4739" y="0"/>
-                    <a:pt x="4644" y="0"/>
-                  </a:cubicBezTo>
-                  <a:close/>
-                </a:path>
-              </a:pathLst>
-            </a:custGeom>
-            <a:solidFill>
-              <a:srgbClr val="657E93"/>
-            </a:solidFill>
-            <a:ln>
-              <a:noFill/>
-            </a:ln>
-          </p:spPr>
-          <p:txBody>
-            <a:bodyPr spcFirstLastPara="1" wrap="square" lIns="91425" tIns="91425" rIns="91425" bIns="91425" anchor="ctr" anchorCtr="0">
-              <a:noAutofit/>
-            </a:bodyPr>
-            <a:lstStyle/>
-            <a:p>
-              <a:pPr marL="0" lvl="0" indent="0" algn="l" rtl="0">
-                <a:spcBef>
-                  <a:spcPts val="0"/>
-                </a:spcBef>
-                <a:spcAft>
-                  <a:spcPts val="0"/>
-                </a:spcAft>
-                <a:buNone/>
-              </a:pPr>
-              <a:endParaRPr/>
-            </a:p>
-          </p:txBody>
-        </p:sp>
-        <p:sp>
-          <p:nvSpPr>
-            <p:cNvPr id="10" name="Google Shape;12455;p87">
-              <a:extLst>
-                <a:ext uri="{FF2B5EF4-FFF2-40B4-BE49-F238E27FC236}">
-                  <a16:creationId xmlns:a16="http://schemas.microsoft.com/office/drawing/2014/main" id="{FFA7DED3-A03F-7F06-E4A2-3A835020279D}"/>
-                </a:ext>
-              </a:extLst>
-            </p:cNvPr>
-            <p:cNvSpPr/>
-            <p:nvPr/>
-          </p:nvSpPr>
-          <p:spPr>
-            <a:xfrm>
-              <a:off x="2717596" y="1696344"/>
-              <a:ext cx="152412" cy="10613"/>
-            </a:xfrm>
-            <a:custGeom>
-              <a:avLst/>
-              <a:gdLst/>
-              <a:ahLst/>
-              <a:cxnLst/>
-              <a:rect l="l" t="t" r="r" b="b"/>
-              <a:pathLst>
-                <a:path w="4811" h="335" extrusionOk="0">
-                  <a:moveTo>
-                    <a:pt x="167" y="1"/>
-                  </a:moveTo>
-                  <a:cubicBezTo>
-                    <a:pt x="72" y="1"/>
-                    <a:pt x="0" y="72"/>
-                    <a:pt x="0" y="167"/>
-                  </a:cubicBezTo>
-                  <a:cubicBezTo>
-                    <a:pt x="0" y="251"/>
-                    <a:pt x="72" y="334"/>
-                    <a:pt x="167" y="334"/>
-                  </a:cubicBezTo>
-                  <a:lnTo>
-                    <a:pt x="4644" y="334"/>
-                  </a:lnTo>
-                  <a:cubicBezTo>
-                    <a:pt x="4739" y="334"/>
-                    <a:pt x="4810" y="251"/>
-                    <a:pt x="4810" y="167"/>
-                  </a:cubicBezTo>
-                  <a:cubicBezTo>
-                    <a:pt x="4798" y="72"/>
-                    <a:pt x="4739" y="1"/>
-                    <a:pt x="4644" y="1"/>
-                  </a:cubicBezTo>
-                  <a:close/>
-                </a:path>
-              </a:pathLst>
-            </a:custGeom>
-            <a:solidFill>
-              <a:srgbClr val="657E93"/>
-            </a:solidFill>
-            <a:ln>
-              <a:noFill/>
-            </a:ln>
-          </p:spPr>
-          <p:txBody>
-            <a:bodyPr spcFirstLastPara="1" wrap="square" lIns="91425" tIns="91425" rIns="91425" bIns="91425" anchor="ctr" anchorCtr="0">
-              <a:noAutofit/>
-            </a:bodyPr>
-            <a:lstStyle/>
-            <a:p>
-              <a:pPr marL="0" lvl="0" indent="0" algn="l" rtl="0">
-                <a:spcBef>
-                  <a:spcPts val="0"/>
-                </a:spcBef>
-                <a:spcAft>
-                  <a:spcPts val="0"/>
-                </a:spcAft>
-                <a:buNone/>
-              </a:pPr>
-              <a:endParaRPr/>
-            </a:p>
-          </p:txBody>
-        </p:sp>
-        <p:sp>
-          <p:nvSpPr>
-            <p:cNvPr id="11" name="Google Shape;12456;p87">
-              <a:extLst>
-                <a:ext uri="{FF2B5EF4-FFF2-40B4-BE49-F238E27FC236}">
-                  <a16:creationId xmlns:a16="http://schemas.microsoft.com/office/drawing/2014/main" id="{8B0A0095-CBDF-EDCE-53D4-E052A9681564}"/>
-                </a:ext>
-              </a:extLst>
-            </p:cNvPr>
-            <p:cNvSpPr/>
-            <p:nvPr/>
-          </p:nvSpPr>
-          <p:spPr>
-            <a:xfrm>
-              <a:off x="2717596" y="1670335"/>
-              <a:ext cx="152412" cy="10581"/>
-            </a:xfrm>
-            <a:custGeom>
-              <a:avLst/>
-              <a:gdLst/>
-              <a:ahLst/>
-              <a:cxnLst/>
-              <a:rect l="l" t="t" r="r" b="b"/>
-              <a:pathLst>
-                <a:path w="4811" h="334" extrusionOk="0">
-                  <a:moveTo>
-                    <a:pt x="167" y="0"/>
-                  </a:moveTo>
-                  <a:cubicBezTo>
-                    <a:pt x="72" y="0"/>
-                    <a:pt x="0" y="84"/>
-                    <a:pt x="0" y="167"/>
-                  </a:cubicBezTo>
-                  <a:cubicBezTo>
-                    <a:pt x="0" y="262"/>
-                    <a:pt x="72" y="334"/>
-                    <a:pt x="167" y="334"/>
-                  </a:cubicBezTo>
-                  <a:lnTo>
-                    <a:pt x="4644" y="334"/>
-                  </a:lnTo>
-                  <a:cubicBezTo>
-                    <a:pt x="4739" y="334"/>
-                    <a:pt x="4810" y="262"/>
-                    <a:pt x="4810" y="167"/>
-                  </a:cubicBezTo>
-                  <a:cubicBezTo>
-                    <a:pt x="4810" y="84"/>
-                    <a:pt x="4739" y="0"/>
-                    <a:pt x="4644" y="0"/>
-                  </a:cubicBezTo>
-                  <a:close/>
-                </a:path>
-              </a:pathLst>
-            </a:custGeom>
-            <a:solidFill>
-              <a:srgbClr val="657E93"/>
-            </a:solidFill>
-            <a:ln>
-              <a:noFill/>
-            </a:ln>
-          </p:spPr>
-          <p:txBody>
-            <a:bodyPr spcFirstLastPara="1" wrap="square" lIns="91425" tIns="91425" rIns="91425" bIns="91425" anchor="ctr" anchorCtr="0">
-              <a:noAutofit/>
-            </a:bodyPr>
-            <a:lstStyle/>
-            <a:p>
-              <a:pPr marL="0" lvl="0" indent="0" algn="l" rtl="0">
-                <a:spcBef>
-                  <a:spcPts val="0"/>
-                </a:spcBef>
-                <a:spcAft>
-                  <a:spcPts val="0"/>
-                </a:spcAft>
-                <a:buNone/>
-              </a:pPr>
-              <a:endParaRPr/>
-            </a:p>
-          </p:txBody>
-        </p:sp>
-        <p:sp>
-          <p:nvSpPr>
-            <p:cNvPr id="12" name="Google Shape;12457;p87">
-              <a:extLst>
-                <a:ext uri="{FF2B5EF4-FFF2-40B4-BE49-F238E27FC236}">
-                  <a16:creationId xmlns:a16="http://schemas.microsoft.com/office/drawing/2014/main" id="{D9E20228-30AB-166A-8116-F975C5AB1B30}"/>
-                </a:ext>
-              </a:extLst>
-            </p:cNvPr>
-            <p:cNvSpPr/>
-            <p:nvPr/>
-          </p:nvSpPr>
-          <p:spPr>
-            <a:xfrm>
-              <a:off x="2778326" y="1594145"/>
-              <a:ext cx="31332" cy="61111"/>
-            </a:xfrm>
-            <a:custGeom>
-              <a:avLst/>
-              <a:gdLst/>
-              <a:ahLst/>
-              <a:cxnLst/>
-              <a:rect l="l" t="t" r="r" b="b"/>
-              <a:pathLst>
-                <a:path w="989" h="1929" extrusionOk="0">
-                  <a:moveTo>
-                    <a:pt x="179" y="0"/>
-                  </a:moveTo>
-                  <a:cubicBezTo>
-                    <a:pt x="95" y="0"/>
-                    <a:pt x="12" y="72"/>
-                    <a:pt x="12" y="167"/>
-                  </a:cubicBezTo>
-                  <a:cubicBezTo>
-                    <a:pt x="12" y="250"/>
-                    <a:pt x="95" y="322"/>
-                    <a:pt x="179" y="322"/>
-                  </a:cubicBezTo>
-                  <a:lnTo>
-                    <a:pt x="333" y="322"/>
-                  </a:lnTo>
-                  <a:lnTo>
-                    <a:pt x="333" y="1607"/>
-                  </a:lnTo>
-                  <a:lnTo>
-                    <a:pt x="167" y="1607"/>
-                  </a:lnTo>
-                  <a:cubicBezTo>
-                    <a:pt x="72" y="1607"/>
-                    <a:pt x="0" y="1679"/>
-                    <a:pt x="0" y="1774"/>
-                  </a:cubicBezTo>
-                  <a:cubicBezTo>
-                    <a:pt x="0" y="1858"/>
-                    <a:pt x="72" y="1929"/>
-                    <a:pt x="167" y="1929"/>
-                  </a:cubicBezTo>
-                  <a:lnTo>
-                    <a:pt x="822" y="1929"/>
-                  </a:lnTo>
-                  <a:cubicBezTo>
-                    <a:pt x="905" y="1929"/>
-                    <a:pt x="988" y="1858"/>
-                    <a:pt x="988" y="1774"/>
-                  </a:cubicBezTo>
-                  <a:cubicBezTo>
-                    <a:pt x="976" y="1679"/>
-                    <a:pt x="893" y="1607"/>
-                    <a:pt x="810" y="1607"/>
-                  </a:cubicBezTo>
-                  <a:lnTo>
-                    <a:pt x="643" y="1607"/>
-                  </a:lnTo>
-                  <a:lnTo>
-                    <a:pt x="643" y="167"/>
-                  </a:lnTo>
-                  <a:cubicBezTo>
-                    <a:pt x="643" y="72"/>
-                    <a:pt x="572" y="0"/>
-                    <a:pt x="476" y="0"/>
-                  </a:cubicBezTo>
-                  <a:close/>
-                </a:path>
-              </a:pathLst>
-            </a:custGeom>
-            <a:solidFill>
-              <a:srgbClr val="657E93"/>
-            </a:solidFill>
-            <a:ln>
-              <a:noFill/>
-            </a:ln>
-          </p:spPr>
-          <p:txBody>
-            <a:bodyPr spcFirstLastPara="1" wrap="square" lIns="91425" tIns="91425" rIns="91425" bIns="91425" anchor="ctr" anchorCtr="0">
-              <a:noAutofit/>
-            </a:bodyPr>
-            <a:lstStyle/>
-            <a:p>
-              <a:pPr marL="0" lvl="0" indent="0" algn="l" rtl="0">
-                <a:spcBef>
-                  <a:spcPts val="0"/>
-                </a:spcBef>
-                <a:spcAft>
-                  <a:spcPts val="0"/>
-                </a:spcAft>
-                <a:buNone/>
-              </a:pPr>
-              <a:endParaRPr/>
-            </a:p>
-          </p:txBody>
-        </p:sp>
-        <p:sp>
-          <p:nvSpPr>
-            <p:cNvPr id="13" name="Google Shape;12458;p87">
-              <a:extLst>
-                <a:ext uri="{FF2B5EF4-FFF2-40B4-BE49-F238E27FC236}">
-                  <a16:creationId xmlns:a16="http://schemas.microsoft.com/office/drawing/2014/main" id="{C936E11D-AE75-7DC6-071B-A60E65B3D506}"/>
-                </a:ext>
-              </a:extLst>
-            </p:cNvPr>
-            <p:cNvSpPr/>
-            <p:nvPr/>
-          </p:nvSpPr>
-          <p:spPr>
-            <a:xfrm>
-              <a:off x="2782476" y="1575263"/>
-              <a:ext cx="16220" cy="15872"/>
-            </a:xfrm>
-            <a:custGeom>
-              <a:avLst/>
-              <a:gdLst/>
-              <a:ahLst/>
-              <a:cxnLst/>
-              <a:rect l="l" t="t" r="r" b="b"/>
-              <a:pathLst>
-                <a:path w="512" h="501" extrusionOk="0">
-                  <a:moveTo>
-                    <a:pt x="262" y="1"/>
-                  </a:moveTo>
-                  <a:cubicBezTo>
-                    <a:pt x="131" y="1"/>
-                    <a:pt x="0" y="120"/>
-                    <a:pt x="0" y="251"/>
-                  </a:cubicBezTo>
-                  <a:cubicBezTo>
-                    <a:pt x="0" y="382"/>
-                    <a:pt x="119" y="501"/>
-                    <a:pt x="262" y="501"/>
-                  </a:cubicBezTo>
-                  <a:cubicBezTo>
-                    <a:pt x="393" y="501"/>
-                    <a:pt x="512" y="382"/>
-                    <a:pt x="512" y="251"/>
-                  </a:cubicBezTo>
-                  <a:cubicBezTo>
-                    <a:pt x="512" y="120"/>
-                    <a:pt x="393" y="1"/>
-                    <a:pt x="262" y="1"/>
-                  </a:cubicBezTo>
-                  <a:close/>
-                </a:path>
-              </a:pathLst>
-            </a:custGeom>
-            <a:solidFill>
-              <a:srgbClr val="657E93"/>
-            </a:solidFill>
-            <a:ln>
-              <a:noFill/>
-            </a:ln>
-          </p:spPr>
-          <p:txBody>
-            <a:bodyPr spcFirstLastPara="1" wrap="square" lIns="91425" tIns="91425" rIns="91425" bIns="91425" anchor="ctr" anchorCtr="0">
-              <a:noAutofit/>
-            </a:bodyPr>
-            <a:lstStyle/>
-            <a:p>
-              <a:pPr marL="0" lvl="0" indent="0" algn="l" rtl="0">
-                <a:spcBef>
-                  <a:spcPts val="0"/>
-                </a:spcBef>
-                <a:spcAft>
-                  <a:spcPts val="0"/>
-                </a:spcAft>
-                <a:buNone/>
-              </a:pPr>
-              <a:endParaRPr/>
-            </a:p>
-          </p:txBody>
-        </p:sp>
-        <p:sp>
-          <p:nvSpPr>
-            <p:cNvPr id="14" name="Google Shape;12459;p87">
-              <a:extLst>
-                <a:ext uri="{FF2B5EF4-FFF2-40B4-BE49-F238E27FC236}">
-                  <a16:creationId xmlns:a16="http://schemas.microsoft.com/office/drawing/2014/main" id="{643B147C-0B2C-1903-5126-86C2DC36E662}"/>
-                </a:ext>
-              </a:extLst>
-            </p:cNvPr>
-            <p:cNvSpPr/>
-            <p:nvPr/>
-          </p:nvSpPr>
-          <p:spPr>
-            <a:xfrm>
-              <a:off x="2943537" y="1513044"/>
-              <a:ext cx="42261" cy="347783"/>
-            </a:xfrm>
-            <a:custGeom>
-              <a:avLst/>
-              <a:gdLst/>
-              <a:ahLst/>
-              <a:cxnLst/>
-              <a:rect l="l" t="t" r="r" b="b"/>
-              <a:pathLst>
-                <a:path w="1334" h="10978" extrusionOk="0">
-                  <a:moveTo>
-                    <a:pt x="667" y="310"/>
-                  </a:moveTo>
-                  <a:cubicBezTo>
-                    <a:pt x="857" y="310"/>
-                    <a:pt x="1012" y="477"/>
-                    <a:pt x="1012" y="655"/>
-                  </a:cubicBezTo>
-                  <a:lnTo>
-                    <a:pt x="1012" y="1477"/>
-                  </a:lnTo>
-                  <a:lnTo>
-                    <a:pt x="321" y="1477"/>
-                  </a:lnTo>
-                  <a:lnTo>
-                    <a:pt x="321" y="655"/>
-                  </a:lnTo>
-                  <a:cubicBezTo>
-                    <a:pt x="321" y="465"/>
-                    <a:pt x="488" y="310"/>
-                    <a:pt x="667" y="310"/>
-                  </a:cubicBezTo>
-                  <a:close/>
-                  <a:moveTo>
-                    <a:pt x="1024" y="1798"/>
-                  </a:moveTo>
-                  <a:lnTo>
-                    <a:pt x="1024" y="2453"/>
-                  </a:lnTo>
-                  <a:lnTo>
-                    <a:pt x="321" y="2453"/>
-                  </a:lnTo>
-                  <a:lnTo>
-                    <a:pt x="321" y="1798"/>
-                  </a:lnTo>
-                  <a:close/>
-                  <a:moveTo>
-                    <a:pt x="964" y="9597"/>
-                  </a:moveTo>
-                  <a:lnTo>
-                    <a:pt x="833" y="10525"/>
-                  </a:lnTo>
-                  <a:cubicBezTo>
-                    <a:pt x="810" y="10597"/>
-                    <a:pt x="750" y="10656"/>
-                    <a:pt x="679" y="10656"/>
-                  </a:cubicBezTo>
-                  <a:cubicBezTo>
-                    <a:pt x="607" y="10656"/>
-                    <a:pt x="536" y="10597"/>
-                    <a:pt x="536" y="10525"/>
-                  </a:cubicBezTo>
-                  <a:lnTo>
-                    <a:pt x="417" y="9597"/>
-                  </a:lnTo>
-                  <a:close/>
-                  <a:moveTo>
-                    <a:pt x="667" y="0"/>
-                  </a:moveTo>
-                  <a:cubicBezTo>
-                    <a:pt x="298" y="0"/>
-                    <a:pt x="0" y="298"/>
-                    <a:pt x="0" y="667"/>
-                  </a:cubicBezTo>
-                  <a:lnTo>
-                    <a:pt x="0" y="1631"/>
-                  </a:lnTo>
-                  <a:lnTo>
-                    <a:pt x="0" y="2822"/>
-                  </a:lnTo>
-                  <a:lnTo>
-                    <a:pt x="0" y="4810"/>
-                  </a:lnTo>
-                  <a:cubicBezTo>
-                    <a:pt x="0" y="4894"/>
-                    <a:pt x="71" y="4965"/>
-                    <a:pt x="167" y="4965"/>
-                  </a:cubicBezTo>
-                  <a:cubicBezTo>
-                    <a:pt x="250" y="4965"/>
-                    <a:pt x="321" y="4894"/>
-                    <a:pt x="321" y="4810"/>
-                  </a:cubicBezTo>
-                  <a:lnTo>
-                    <a:pt x="321" y="2763"/>
-                  </a:lnTo>
-                  <a:lnTo>
-                    <a:pt x="1024" y="2763"/>
-                  </a:lnTo>
-                  <a:lnTo>
-                    <a:pt x="1024" y="9275"/>
-                  </a:lnTo>
-                  <a:lnTo>
-                    <a:pt x="321" y="9275"/>
-                  </a:lnTo>
-                  <a:lnTo>
-                    <a:pt x="321" y="5430"/>
-                  </a:lnTo>
-                  <a:cubicBezTo>
-                    <a:pt x="321" y="5346"/>
-                    <a:pt x="250" y="5263"/>
-                    <a:pt x="167" y="5263"/>
-                  </a:cubicBezTo>
-                  <a:cubicBezTo>
-                    <a:pt x="71" y="5263"/>
-                    <a:pt x="0" y="5346"/>
-                    <a:pt x="0" y="5430"/>
-                  </a:cubicBezTo>
-                  <a:lnTo>
-                    <a:pt x="0" y="9430"/>
-                  </a:lnTo>
-                  <a:cubicBezTo>
-                    <a:pt x="0" y="9490"/>
-                    <a:pt x="24" y="9537"/>
-                    <a:pt x="60" y="9561"/>
-                  </a:cubicBezTo>
-                  <a:lnTo>
-                    <a:pt x="191" y="10561"/>
-                  </a:lnTo>
-                  <a:cubicBezTo>
-                    <a:pt x="226" y="10799"/>
-                    <a:pt x="429" y="10978"/>
-                    <a:pt x="667" y="10978"/>
-                  </a:cubicBezTo>
-                  <a:cubicBezTo>
-                    <a:pt x="905" y="10978"/>
-                    <a:pt x="1119" y="10799"/>
-                    <a:pt x="1143" y="10561"/>
-                  </a:cubicBezTo>
-                  <a:lnTo>
-                    <a:pt x="1274" y="9561"/>
-                  </a:lnTo>
-                  <a:cubicBezTo>
-                    <a:pt x="1322" y="9537"/>
-                    <a:pt x="1334" y="9490"/>
-                    <a:pt x="1334" y="9430"/>
-                  </a:cubicBezTo>
-                  <a:lnTo>
-                    <a:pt x="1334" y="2822"/>
-                  </a:lnTo>
-                  <a:lnTo>
-                    <a:pt x="1334" y="1631"/>
-                  </a:lnTo>
-                  <a:lnTo>
-                    <a:pt x="1334" y="667"/>
-                  </a:lnTo>
-                  <a:cubicBezTo>
-                    <a:pt x="1334" y="298"/>
-                    <a:pt x="1036" y="0"/>
-                    <a:pt x="667" y="0"/>
-                  </a:cubicBezTo>
-                  <a:close/>
-                </a:path>
-              </a:pathLst>
-            </a:custGeom>
-            <a:solidFill>
-              <a:srgbClr val="657E93"/>
-            </a:solidFill>
-            <a:ln>
-              <a:noFill/>
-            </a:ln>
-          </p:spPr>
-          <p:txBody>
-            <a:bodyPr spcFirstLastPara="1" wrap="square" lIns="91425" tIns="91425" rIns="91425" bIns="91425" anchor="ctr" anchorCtr="0">
-              <a:noAutofit/>
-            </a:bodyPr>
-            <a:lstStyle/>
-            <a:p>
-              <a:pPr marL="0" lvl="0" indent="0" algn="l" rtl="0">
-                <a:spcBef>
-                  <a:spcPts val="0"/>
-                </a:spcBef>
-                <a:spcAft>
-                  <a:spcPts val="0"/>
-                </a:spcAft>
-                <a:buNone/>
-              </a:pPr>
-              <a:endParaRPr/>
-            </a:p>
-          </p:txBody>
-        </p:sp>
-      </p:grpSp>
-      <p:pic>
-        <p:nvPicPr>
-          <p:cNvPr id="15" name="Google Shape;859;p7" descr="Badge Question Mark with solid fill">
-            <a:extLst>
-              <a:ext uri="{FF2B5EF4-FFF2-40B4-BE49-F238E27FC236}">
-                <a16:creationId xmlns:a16="http://schemas.microsoft.com/office/drawing/2014/main" id="{A750E607-98DE-01DA-9AD5-F145F29255E1}"/>
-              </a:ext>
-            </a:extLst>
-          </p:cNvPr>
-          <p:cNvPicPr preferRelativeResize="0"/>
-          <p:nvPr/>
-        </p:nvPicPr>
-        <p:blipFill rotWithShape="1">
-          <a:blip r:embed="rId3">
-            <a:alphaModFix/>
-          </a:blip>
-          <a:srcRect/>
-          <a:stretch/>
-        </p:blipFill>
-        <p:spPr>
-          <a:xfrm>
-            <a:off x="5638800" y="3535910"/>
-            <a:ext cx="914400" cy="914400"/>
-          </a:xfrm>
-          <a:prstGeom prst="rect">
-            <a:avLst/>
-          </a:prstGeom>
-          <a:noFill/>
-          <a:ln>
-            <a:noFill/>
-          </a:ln>
-        </p:spPr>
-      </p:pic>
-      <p:sp>
-        <p:nvSpPr>
-          <p:cNvPr id="16" name="Google Shape;860;p7">
-            <a:extLst>
-              <a:ext uri="{FF2B5EF4-FFF2-40B4-BE49-F238E27FC236}">
-                <a16:creationId xmlns:a16="http://schemas.microsoft.com/office/drawing/2014/main" id="{7E870609-F3F9-9349-F024-ACB4436AB602}"/>
-              </a:ext>
-            </a:extLst>
-          </p:cNvPr>
-          <p:cNvSpPr txBox="1"/>
-          <p:nvPr/>
-        </p:nvSpPr>
-        <p:spPr>
-          <a:xfrm>
-            <a:off x="4024372" y="2475834"/>
-            <a:ext cx="4141520" cy="1064482"/>
-          </a:xfrm>
-          <a:prstGeom prst="rect">
-            <a:avLst/>
-          </a:prstGeom>
-          <a:noFill/>
-          <a:ln>
-            <a:noFill/>
-          </a:ln>
-        </p:spPr>
-        <p:txBody>
-          <a:bodyPr spcFirstLastPara="1" wrap="square" lIns="0" tIns="0" rIns="0" bIns="0" anchor="b" anchorCtr="0">
-            <a:normAutofit/>
-          </a:bodyPr>
-          <a:lstStyle/>
-          <a:p>
-            <a:pPr marL="0" marR="0" lvl="0" indent="0" algn="l" rtl="0">
-              <a:lnSpc>
-                <a:spcPct val="90000"/>
-              </a:lnSpc>
-              <a:spcBef>
-                <a:spcPts val="0"/>
-              </a:spcBef>
-              <a:spcAft>
-                <a:spcPts val="0"/>
-              </a:spcAft>
-              <a:buClr>
-                <a:schemeClr val="lt1"/>
-              </a:buClr>
-              <a:buSzPts val="7000"/>
-              <a:buFont typeface="Lato Black"/>
-              <a:buNone/>
-            </a:pPr>
-            <a:r>
-              <a:rPr lang="en-US" sz="7000" b="0" i="0" dirty="0">
-                <a:solidFill>
-                  <a:schemeClr val="lt1"/>
-                </a:solidFill>
-                <a:latin typeface="Lato Black"/>
-                <a:ea typeface="Lato Black"/>
-                <a:cs typeface="Lato Black"/>
-                <a:sym typeface="Lato Black"/>
-              </a:rPr>
-              <a:t>Questions</a:t>
-            </a:r>
-            <a:endParaRPr sz="7000" b="0" i="0" dirty="0">
-              <a:solidFill>
-                <a:schemeClr val="lt1"/>
-              </a:solidFill>
-              <a:latin typeface="Lato Black"/>
-              <a:ea typeface="Lato Black"/>
-              <a:cs typeface="Lato Black"/>
-              <a:sym typeface="Lato Black"/>
-            </a:endParaRPr>
-          </a:p>
-        </p:txBody>
-      </p:sp>
-    </p:spTree>
-    <p:extLst>
-      <p:ext uri="{BB962C8B-B14F-4D97-AF65-F5344CB8AC3E}">
-        <p14:creationId xmlns:p14="http://schemas.microsoft.com/office/powerpoint/2010/main" val="243306271"/>
-      </p:ext>
-    </p:extLst>
   </p:cSld>
   <p:clrMapOvr>
     <a:masterClrMapping/>
@@ -19518,440 +18243,6 @@
         <p:cNvPr id="1" name="">
           <a:extLst>
             <a:ext uri="{FF2B5EF4-FFF2-40B4-BE49-F238E27FC236}">
-              <a16:creationId xmlns:a16="http://schemas.microsoft.com/office/drawing/2014/main" id="{77F85726-B934-7937-0274-8A9F9BBAF195}"/>
-            </a:ext>
-          </a:extLst>
-        </p:cNvPr>
-        <p:cNvGrpSpPr/>
-        <p:nvPr/>
-      </p:nvGrpSpPr>
-      <p:grpSpPr>
-        <a:xfrm>
-          <a:off x="0" y="0"/>
-          <a:ext cx="0" cy="0"/>
-          <a:chOff x="0" y="0"/>
-          <a:chExt cx="0" cy="0"/>
-        </a:xfrm>
-      </p:grpSpPr>
-      <p:pic>
-        <p:nvPicPr>
-          <p:cNvPr id="8" name="Picture 7">
-            <a:extLst>
-              <a:ext uri="{FF2B5EF4-FFF2-40B4-BE49-F238E27FC236}">
-                <a16:creationId xmlns:a16="http://schemas.microsoft.com/office/drawing/2014/main" id="{D13EDA46-1535-4F57-15B1-8131E6B1EE5B}"/>
-              </a:ext>
-            </a:extLst>
-          </p:cNvPr>
-          <p:cNvPicPr>
-            <a:picLocks noChangeAspect="1"/>
-          </p:cNvPicPr>
-          <p:nvPr/>
-        </p:nvPicPr>
-        <p:blipFill>
-          <a:blip r:embed="rId3"/>
-          <a:srcRect b="26484"/>
-          <a:stretch>
-            <a:fillRect/>
-          </a:stretch>
-        </p:blipFill>
-        <p:spPr>
-          <a:xfrm>
-            <a:off x="148181" y="340146"/>
-            <a:ext cx="8847638" cy="2231604"/>
-          </a:xfrm>
-          <a:prstGeom prst="rect">
-            <a:avLst/>
-          </a:prstGeom>
-        </p:spPr>
-      </p:pic>
-      <p:pic>
-        <p:nvPicPr>
-          <p:cNvPr id="10" name="Image 0" descr="/tmp/certops-slides/screenshots/homepage.png">
-            <a:extLst>
-              <a:ext uri="{FF2B5EF4-FFF2-40B4-BE49-F238E27FC236}">
-                <a16:creationId xmlns:a16="http://schemas.microsoft.com/office/drawing/2014/main" id="{AD8DF6D9-9172-4468-9FBC-D9A62497CC86}"/>
-              </a:ext>
-            </a:extLst>
-          </p:cNvPr>
-          <p:cNvPicPr>
-            <a:picLocks noChangeAspect="1"/>
-          </p:cNvPicPr>
-          <p:nvPr/>
-        </p:nvPicPr>
-        <p:blipFill>
-          <a:blip r:embed="rId4"/>
-          <a:srcRect l="17298" t="29706" r="17441" b="42067"/>
-          <a:stretch>
-            <a:fillRect/>
-          </a:stretch>
-        </p:blipFill>
-        <p:spPr>
-          <a:xfrm>
-            <a:off x="2065662" y="3402835"/>
-            <a:ext cx="5012675" cy="1355076"/>
-          </a:xfrm>
-          <a:prstGeom prst="rect">
-            <a:avLst/>
-          </a:prstGeom>
-          <a:effectLst>
-            <a:softEdge rad="63500"/>
-          </a:effectLst>
-        </p:spPr>
-      </p:pic>
-    </p:spTree>
-    <p:extLst>
-      <p:ext uri="{BB962C8B-B14F-4D97-AF65-F5344CB8AC3E}">
-        <p14:creationId xmlns:p14="http://schemas.microsoft.com/office/powerpoint/2010/main" val="4148440160"/>
-      </p:ext>
-    </p:extLst>
-  </p:cSld>
-  <p:clrMapOvr>
-    <a:masterClrMapping/>
-  </p:clrMapOvr>
-  <p:timing>
-    <p:tnLst>
-      <p:par>
-        <p:cTn id="1" dur="indefinite" restart="never" nodeType="tmRoot">
-          <p:childTnLst>
-            <p:seq concurrent="1" nextAc="seek">
-              <p:cTn id="2" dur="indefinite" nodeType="mainSeq">
-                <p:childTnLst>
-                  <p:par>
-                    <p:cTn id="3" fill="hold">
-                      <p:stCondLst>
-                        <p:cond delay="indefinite"/>
-                      </p:stCondLst>
-                      <p:childTnLst>
-                        <p:par>
-                          <p:cTn id="4" fill="hold">
-                            <p:stCondLst>
-                              <p:cond delay="0"/>
-                            </p:stCondLst>
-                            <p:childTnLst>
-                              <p:par>
-                                <p:cTn id="5" presetID="22" presetClass="entr" presetSubtype="8" fill="hold" nodeType="clickEffect">
-                                  <p:stCondLst>
-                                    <p:cond delay="0"/>
-                                  </p:stCondLst>
-                                  <p:childTnLst>
-                                    <p:set>
-                                      <p:cBhvr>
-                                        <p:cTn id="6" dur="1" fill="hold">
-                                          <p:stCondLst>
-                                            <p:cond delay="0"/>
-                                          </p:stCondLst>
-                                        </p:cTn>
-                                        <p:tgtEl>
-                                          <p:spTgt spid="8"/>
-                                        </p:tgtEl>
-                                        <p:attrNameLst>
-                                          <p:attrName>style.visibility</p:attrName>
-                                        </p:attrNameLst>
-                                      </p:cBhvr>
-                                      <p:to>
-                                        <p:strVal val="visible"/>
-                                      </p:to>
-                                    </p:set>
-                                    <p:animEffect transition="in" filter="wipe(left)">
-                                      <p:cBhvr>
-                                        <p:cTn id="7" dur="1000"/>
-                                        <p:tgtEl>
-                                          <p:spTgt spid="8"/>
-                                        </p:tgtEl>
-                                      </p:cBhvr>
-                                    </p:animEffect>
-                                  </p:childTnLst>
-                                </p:cTn>
-                              </p:par>
-                            </p:childTnLst>
-                          </p:cTn>
-                        </p:par>
-                      </p:childTnLst>
-                    </p:cTn>
-                  </p:par>
-                </p:childTnLst>
-              </p:cTn>
-              <p:prevCondLst>
-                <p:cond evt="onPrev" delay="0">
-                  <p:tgtEl>
-                    <p:sldTgt/>
-                  </p:tgtEl>
-                </p:cond>
-              </p:prevCondLst>
-              <p:nextCondLst>
-                <p:cond evt="onNext" delay="0">
-                  <p:tgtEl>
-                    <p:sldTgt/>
-                  </p:tgtEl>
-                </p:cond>
-              </p:nextCondLst>
-            </p:seq>
-          </p:childTnLst>
-        </p:cTn>
-      </p:par>
-    </p:tnLst>
-  </p:timing>
-</p:sld>
-</file>
-
-<file path=ppt/slides/slide6.xml><?xml version="1.0" encoding="utf-8"?>
-<p:sld xmlns:a="http://schemas.openxmlformats.org/drawingml/2006/main" xmlns:r="http://schemas.openxmlformats.org/officeDocument/2006/relationships" xmlns:p="http://schemas.openxmlformats.org/presentationml/2006/main">
-  <p:cSld>
-    <p:bg>
-      <p:bgPr>
-        <a:solidFill>
-          <a:schemeClr val="bg1"/>
-        </a:solidFill>
-        <a:effectLst/>
-      </p:bgPr>
-    </p:bg>
-    <p:spTree>
-      <p:nvGrpSpPr>
-        <p:cNvPr id="1" name="">
-          <a:extLst>
-            <a:ext uri="{FF2B5EF4-FFF2-40B4-BE49-F238E27FC236}">
-              <a16:creationId xmlns:a16="http://schemas.microsoft.com/office/drawing/2014/main" id="{FE303D30-BAA4-7F32-122B-4A4E76163F20}"/>
-            </a:ext>
-          </a:extLst>
-        </p:cNvPr>
-        <p:cNvGrpSpPr/>
-        <p:nvPr/>
-      </p:nvGrpSpPr>
-      <p:grpSpPr>
-        <a:xfrm>
-          <a:off x="0" y="0"/>
-          <a:ext cx="0" cy="0"/>
-          <a:chOff x="0" y="0"/>
-          <a:chExt cx="0" cy="0"/>
-        </a:xfrm>
-      </p:grpSpPr>
-      <p:pic>
-        <p:nvPicPr>
-          <p:cNvPr id="8" name="Picture 7">
-            <a:extLst>
-              <a:ext uri="{FF2B5EF4-FFF2-40B4-BE49-F238E27FC236}">
-                <a16:creationId xmlns:a16="http://schemas.microsoft.com/office/drawing/2014/main" id="{1E9D1B04-AD45-1D14-C48D-45CAB1CFCE79}"/>
-              </a:ext>
-            </a:extLst>
-          </p:cNvPr>
-          <p:cNvPicPr>
-            <a:picLocks noChangeAspect="1"/>
-          </p:cNvPicPr>
-          <p:nvPr/>
-        </p:nvPicPr>
-        <p:blipFill>
-          <a:blip r:embed="rId3"/>
-          <a:srcRect l="-1" r="65103" b="26484"/>
-          <a:stretch>
-            <a:fillRect/>
-          </a:stretch>
-        </p:blipFill>
-        <p:spPr>
-          <a:xfrm>
-            <a:off x="2487142" y="-1076319"/>
-            <a:ext cx="6656858" cy="4811371"/>
-          </a:xfrm>
-          <a:prstGeom prst="rect">
-            <a:avLst/>
-          </a:prstGeom>
-        </p:spPr>
-      </p:pic>
-      <p:pic>
-        <p:nvPicPr>
-          <p:cNvPr id="2" name="Image 0" descr="/tmp/certops-slides/screenshots/homepage.png">
-            <a:extLst>
-              <a:ext uri="{FF2B5EF4-FFF2-40B4-BE49-F238E27FC236}">
-                <a16:creationId xmlns:a16="http://schemas.microsoft.com/office/drawing/2014/main" id="{A07970D8-0946-0AC7-6F88-DF80EE6ED979}"/>
-              </a:ext>
-            </a:extLst>
-          </p:cNvPr>
-          <p:cNvPicPr>
-            <a:picLocks noChangeAspect="1"/>
-          </p:cNvPicPr>
-          <p:nvPr/>
-        </p:nvPicPr>
-        <p:blipFill>
-          <a:blip r:embed="rId4"/>
-          <a:srcRect l="17298" t="29706" r="17441" b="42067"/>
-          <a:stretch>
-            <a:fillRect/>
-          </a:stretch>
-        </p:blipFill>
-        <p:spPr>
-          <a:xfrm>
-            <a:off x="2065662" y="3402835"/>
-            <a:ext cx="5012675" cy="1355076"/>
-          </a:xfrm>
-          <a:prstGeom prst="rect">
-            <a:avLst/>
-          </a:prstGeom>
-          <a:effectLst>
-            <a:softEdge rad="63500"/>
-          </a:effectLst>
-        </p:spPr>
-      </p:pic>
-    </p:spTree>
-    <p:extLst>
-      <p:ext uri="{BB962C8B-B14F-4D97-AF65-F5344CB8AC3E}">
-        <p14:creationId xmlns:p14="http://schemas.microsoft.com/office/powerpoint/2010/main" val="1990532883"/>
-      </p:ext>
-    </p:extLst>
-  </p:cSld>
-  <p:clrMapOvr>
-    <a:masterClrMapping/>
-  </p:clrMapOvr>
-  <mc:AlternateContent xmlns:mc="http://schemas.openxmlformats.org/markup-compatibility/2006">
-    <mc:Choice xmlns:p14="http://schemas.microsoft.com/office/powerpoint/2010/main" Requires="p14">
-      <p:transition spd="med" p14:dur="700">
-        <p:fade/>
-      </p:transition>
-    </mc:Choice>
-    <mc:Fallback>
-      <p:transition spd="med">
-        <p:fade/>
-      </p:transition>
-    </mc:Fallback>
-  </mc:AlternateContent>
-</p:sld>
-</file>
-
-<file path=ppt/slides/slide7.xml><?xml version="1.0" encoding="utf-8"?>
-<p:sld xmlns:a="http://schemas.openxmlformats.org/drawingml/2006/main" xmlns:r="http://schemas.openxmlformats.org/officeDocument/2006/relationships" xmlns:p="http://schemas.openxmlformats.org/presentationml/2006/main">
-  <p:cSld>
-    <p:bg>
-      <p:bgPr>
-        <a:solidFill>
-          <a:schemeClr val="bg1"/>
-        </a:solidFill>
-        <a:effectLst/>
-      </p:bgPr>
-    </p:bg>
-    <p:spTree>
-      <p:nvGrpSpPr>
-        <p:cNvPr id="1" name="">
-          <a:extLst>
-            <a:ext uri="{FF2B5EF4-FFF2-40B4-BE49-F238E27FC236}">
-              <a16:creationId xmlns:a16="http://schemas.microsoft.com/office/drawing/2014/main" id="{EC2A3B46-0FC5-2E85-F360-2C0E7256C017}"/>
-            </a:ext>
-          </a:extLst>
-        </p:cNvPr>
-        <p:cNvGrpSpPr/>
-        <p:nvPr/>
-      </p:nvGrpSpPr>
-      <p:grpSpPr>
-        <a:xfrm>
-          <a:off x="0" y="0"/>
-          <a:ext cx="0" cy="0"/>
-          <a:chOff x="0" y="0"/>
-          <a:chExt cx="0" cy="0"/>
-        </a:xfrm>
-      </p:grpSpPr>
-      <p:pic>
-        <p:nvPicPr>
-          <p:cNvPr id="8" name="Picture 7">
-            <a:extLst>
-              <a:ext uri="{FF2B5EF4-FFF2-40B4-BE49-F238E27FC236}">
-                <a16:creationId xmlns:a16="http://schemas.microsoft.com/office/drawing/2014/main" id="{C76994A1-15AF-01C8-EBD1-099ABC020FAF}"/>
-              </a:ext>
-            </a:extLst>
-          </p:cNvPr>
-          <p:cNvPicPr>
-            <a:picLocks noChangeAspect="1"/>
-          </p:cNvPicPr>
-          <p:nvPr/>
-        </p:nvPicPr>
-        <p:blipFill>
-          <a:blip r:embed="rId3"/>
-          <a:srcRect l="23659" t="-139" r="76" b="26623"/>
-          <a:stretch>
-            <a:fillRect/>
-          </a:stretch>
-        </p:blipFill>
-        <p:spPr>
-          <a:xfrm>
-            <a:off x="-106878" y="0"/>
-            <a:ext cx="9132125" cy="3020190"/>
-          </a:xfrm>
-          <a:prstGeom prst="rect">
-            <a:avLst/>
-          </a:prstGeom>
-        </p:spPr>
-      </p:pic>
-      <p:pic>
-        <p:nvPicPr>
-          <p:cNvPr id="9" name="Image 0" descr="/tmp/certops-slides/screenshots/homepage.png">
-            <a:extLst>
-              <a:ext uri="{FF2B5EF4-FFF2-40B4-BE49-F238E27FC236}">
-                <a16:creationId xmlns:a16="http://schemas.microsoft.com/office/drawing/2014/main" id="{528DA08C-B6F7-66FE-8FCA-8A48D262348D}"/>
-              </a:ext>
-            </a:extLst>
-          </p:cNvPr>
-          <p:cNvPicPr>
-            <a:picLocks noChangeAspect="1"/>
-          </p:cNvPicPr>
-          <p:nvPr/>
-        </p:nvPicPr>
-        <p:blipFill>
-          <a:blip r:embed="rId4"/>
-          <a:srcRect l="17298" t="29706" r="17441" b="42067"/>
-          <a:stretch>
-            <a:fillRect/>
-          </a:stretch>
-        </p:blipFill>
-        <p:spPr>
-          <a:xfrm>
-            <a:off x="2065662" y="3402835"/>
-            <a:ext cx="5012675" cy="1355076"/>
-          </a:xfrm>
-          <a:prstGeom prst="rect">
-            <a:avLst/>
-          </a:prstGeom>
-          <a:effectLst>
-            <a:softEdge rad="63500"/>
-          </a:effectLst>
-        </p:spPr>
-      </p:pic>
-    </p:spTree>
-    <p:extLst>
-      <p:ext uri="{BB962C8B-B14F-4D97-AF65-F5344CB8AC3E}">
-        <p14:creationId xmlns:p14="http://schemas.microsoft.com/office/powerpoint/2010/main" val="4175983484"/>
-      </p:ext>
-    </p:extLst>
-  </p:cSld>
-  <p:clrMapOvr>
-    <a:masterClrMapping/>
-  </p:clrMapOvr>
-  <mc:AlternateContent xmlns:mc="http://schemas.openxmlformats.org/markup-compatibility/2006">
-    <mc:Choice xmlns:p14="http://schemas.microsoft.com/office/powerpoint/2010/main" Requires="p14">
-      <p:transition spd="med" p14:dur="700">
-        <p:fade/>
-      </p:transition>
-    </mc:Choice>
-    <mc:Fallback>
-      <p:transition spd="med">
-        <p:fade/>
-      </p:transition>
-    </mc:Fallback>
-  </mc:AlternateContent>
-</p:sld>
-</file>
-
-<file path=ppt/slides/slide8.xml><?xml version="1.0" encoding="utf-8"?>
-<p:sld xmlns:a="http://schemas.openxmlformats.org/drawingml/2006/main" xmlns:r="http://schemas.openxmlformats.org/officeDocument/2006/relationships" xmlns:p="http://schemas.openxmlformats.org/presentationml/2006/main">
-  <p:cSld>
-    <p:bg>
-      <p:bgPr>
-        <a:solidFill>
-          <a:schemeClr val="bg1"/>
-        </a:solidFill>
-        <a:effectLst/>
-      </p:bgPr>
-    </p:bg>
-    <p:spTree>
-      <p:nvGrpSpPr>
-        <p:cNvPr id="1" name="">
-          <a:extLst>
-            <a:ext uri="{FF2B5EF4-FFF2-40B4-BE49-F238E27FC236}">
               <a16:creationId xmlns:a16="http://schemas.microsoft.com/office/drawing/2014/main" id="{4F7500F8-1F7C-BC28-1FE5-37499FC773CA}"/>
             </a:ext>
           </a:extLst>
@@ -20003,10 +18294,10 @@
       </p:pic>
       <p:pic>
         <p:nvPicPr>
-          <p:cNvPr id="3" name="Picture 2">
+          <p:cNvPr id="17" name="Picture 16">
             <a:extLst>
               <a:ext uri="{FF2B5EF4-FFF2-40B4-BE49-F238E27FC236}">
-                <a16:creationId xmlns:a16="http://schemas.microsoft.com/office/drawing/2014/main" id="{8831B76D-E39D-C66B-1FFC-D36B4C0D30BD}"/>
+                <a16:creationId xmlns:a16="http://schemas.microsoft.com/office/drawing/2014/main" id="{7F83CCD4-A2B5-F67A-990E-589DC7898A21}"/>
               </a:ext>
             </a:extLst>
           </p:cNvPr>
@@ -20017,15 +18308,14 @@
         </p:nvPicPr>
         <p:blipFill>
           <a:blip r:embed="rId4"/>
-          <a:srcRect b="36773"/>
           <a:stretch>
             <a:fillRect/>
           </a:stretch>
         </p:blipFill>
         <p:spPr>
           <a:xfrm>
-            <a:off x="666750" y="1752600"/>
-            <a:ext cx="7772400" cy="1030793"/>
+            <a:off x="-1841939" y="-326562"/>
+            <a:ext cx="12827876" cy="5212888"/>
           </a:xfrm>
           <a:prstGeom prst="rect">
             <a:avLst/>
@@ -20042,13 +18332,13 @@
   <p:clrMapOvr>
     <a:masterClrMapping/>
   </p:clrMapOvr>
-  <mc:AlternateContent xmlns:mc="http://schemas.openxmlformats.org/markup-compatibility/2006">
-    <mc:Choice xmlns:p14="http://schemas.microsoft.com/office/powerpoint/2010/main" Requires="p14">
+  <mc:AlternateContent xmlns:mc="http://schemas.openxmlformats.org/markup-compatibility/2006" xmlns:p14="http://schemas.microsoft.com/office/powerpoint/2010/main">
+    <mc:Choice Requires="p14">
       <p:transition spd="med" p14:dur="700">
         <p:fade/>
       </p:transition>
     </mc:Choice>
-    <mc:Fallback>
+    <mc:Fallback xmlns="">
       <p:transition spd="med">
         <p:fade/>
       </p:transition>
@@ -20057,7 +18347,7 @@
 </p:sld>
 </file>
 
-<file path=ppt/slides/slide9.xml><?xml version="1.0" encoding="utf-8"?>
+<file path=ppt/slides/slide6.xml><?xml version="1.0" encoding="utf-8"?>
 <p:sld xmlns:a="http://schemas.openxmlformats.org/drawingml/2006/main" xmlns:r="http://schemas.openxmlformats.org/officeDocument/2006/relationships" xmlns:p="http://schemas.openxmlformats.org/presentationml/2006/main">
   <p:cSld>
     <p:bg>
@@ -20073,7 +18363,280 @@
         <p:cNvPr id="1" name="">
           <a:extLst>
             <a:ext uri="{FF2B5EF4-FFF2-40B4-BE49-F238E27FC236}">
-              <a16:creationId xmlns:a16="http://schemas.microsoft.com/office/drawing/2014/main" id="{53BA1302-4CE3-880B-3391-FB47729CBA72}"/>
+              <a16:creationId xmlns:a16="http://schemas.microsoft.com/office/drawing/2014/main" id="{77F85726-B934-7937-0274-8A9F9BBAF195}"/>
+            </a:ext>
+          </a:extLst>
+        </p:cNvPr>
+        <p:cNvGrpSpPr/>
+        <p:nvPr/>
+      </p:nvGrpSpPr>
+      <p:grpSpPr>
+        <a:xfrm>
+          <a:off x="0" y="0"/>
+          <a:ext cx="0" cy="0"/>
+          <a:chOff x="0" y="0"/>
+          <a:chExt cx="0" cy="0"/>
+        </a:xfrm>
+      </p:grpSpPr>
+      <p:pic>
+        <p:nvPicPr>
+          <p:cNvPr id="10" name="Image 0" descr="/tmp/certops-slides/screenshots/homepage.png">
+            <a:extLst>
+              <a:ext uri="{FF2B5EF4-FFF2-40B4-BE49-F238E27FC236}">
+                <a16:creationId xmlns:a16="http://schemas.microsoft.com/office/drawing/2014/main" id="{AD8DF6D9-9172-4468-9FBC-D9A62497CC86}"/>
+              </a:ext>
+            </a:extLst>
+          </p:cNvPr>
+          <p:cNvPicPr>
+            <a:picLocks noChangeAspect="1"/>
+          </p:cNvPicPr>
+          <p:nvPr/>
+        </p:nvPicPr>
+        <p:blipFill>
+          <a:blip r:embed="rId3"/>
+          <a:srcRect l="17298" t="29706" r="17441" b="42067"/>
+          <a:stretch>
+            <a:fillRect/>
+          </a:stretch>
+        </p:blipFill>
+        <p:spPr>
+          <a:xfrm>
+            <a:off x="2065662" y="3402835"/>
+            <a:ext cx="5012675" cy="1355076"/>
+          </a:xfrm>
+          <a:prstGeom prst="rect">
+            <a:avLst/>
+          </a:prstGeom>
+          <a:effectLst>
+            <a:softEdge rad="63500"/>
+          </a:effectLst>
+        </p:spPr>
+      </p:pic>
+      <p:pic>
+        <p:nvPicPr>
+          <p:cNvPr id="12" name="Picture 11">
+            <a:extLst>
+              <a:ext uri="{FF2B5EF4-FFF2-40B4-BE49-F238E27FC236}">
+                <a16:creationId xmlns:a16="http://schemas.microsoft.com/office/drawing/2014/main" id="{B0AD99A7-EB42-97AD-DD87-6F6A9D8219D2}"/>
+              </a:ext>
+            </a:extLst>
+          </p:cNvPr>
+          <p:cNvPicPr>
+            <a:picLocks noChangeAspect="1"/>
+          </p:cNvPicPr>
+          <p:nvPr/>
+        </p:nvPicPr>
+        <p:blipFill>
+          <a:blip r:embed="rId4"/>
+          <a:srcRect l="10858" r="17754"/>
+          <a:stretch>
+            <a:fillRect/>
+          </a:stretch>
+        </p:blipFill>
+        <p:spPr>
+          <a:xfrm>
+            <a:off x="0" y="-246993"/>
+            <a:ext cx="8360206" cy="3954747"/>
+          </a:xfrm>
+          <a:prstGeom prst="rect">
+            <a:avLst/>
+          </a:prstGeom>
+        </p:spPr>
+      </p:pic>
+    </p:spTree>
+    <p:extLst>
+      <p:ext uri="{BB962C8B-B14F-4D97-AF65-F5344CB8AC3E}">
+        <p14:creationId xmlns:p14="http://schemas.microsoft.com/office/powerpoint/2010/main" val="4148440160"/>
+      </p:ext>
+    </p:extLst>
+  </p:cSld>
+  <p:clrMapOvr>
+    <a:masterClrMapping/>
+  </p:clrMapOvr>
+</p:sld>
+</file>
+
+<file path=ppt/slides/slide7.xml><?xml version="1.0" encoding="utf-8"?>
+<p:sld xmlns:a="http://schemas.openxmlformats.org/drawingml/2006/main" xmlns:r="http://schemas.openxmlformats.org/officeDocument/2006/relationships" xmlns:p="http://schemas.openxmlformats.org/presentationml/2006/main">
+  <p:cSld>
+    <p:bg>
+      <p:bgPr>
+        <a:solidFill>
+          <a:schemeClr val="bg1"/>
+        </a:solidFill>
+        <a:effectLst/>
+      </p:bgPr>
+    </p:bg>
+    <p:spTree>
+      <p:nvGrpSpPr>
+        <p:cNvPr id="1" name="">
+          <a:extLst>
+            <a:ext uri="{FF2B5EF4-FFF2-40B4-BE49-F238E27FC236}">
+              <a16:creationId xmlns:a16="http://schemas.microsoft.com/office/drawing/2014/main" id="{C4D96AFD-FEA1-E1E9-B2C7-0C9FF1819623}"/>
+            </a:ext>
+          </a:extLst>
+        </p:cNvPr>
+        <p:cNvGrpSpPr/>
+        <p:nvPr/>
+      </p:nvGrpSpPr>
+      <p:grpSpPr>
+        <a:xfrm>
+          <a:off x="0" y="0"/>
+          <a:ext cx="0" cy="0"/>
+          <a:chOff x="0" y="0"/>
+          <a:chExt cx="0" cy="0"/>
+        </a:xfrm>
+      </p:grpSpPr>
+      <p:sp>
+        <p:nvSpPr>
+          <p:cNvPr id="7" name="TextBox 6">
+            <a:extLst>
+              <a:ext uri="{FF2B5EF4-FFF2-40B4-BE49-F238E27FC236}">
+                <a16:creationId xmlns:a16="http://schemas.microsoft.com/office/drawing/2014/main" id="{EC83DDE6-3126-57B1-2F7A-EBE2BF4DD0B8}"/>
+              </a:ext>
+            </a:extLst>
+          </p:cNvPr>
+          <p:cNvSpPr txBox="1"/>
+          <p:nvPr/>
+        </p:nvSpPr>
+        <p:spPr>
+          <a:xfrm>
+            <a:off x="11439868" y="1138066"/>
+            <a:ext cx="184731" cy="369332"/>
+          </a:xfrm>
+          <a:prstGeom prst="rect">
+            <a:avLst/>
+          </a:prstGeom>
+          <a:noFill/>
+        </p:spPr>
+        <p:txBody>
+          <a:bodyPr wrap="none" rtlCol="0">
+            <a:spAutoFit/>
+          </a:bodyPr>
+          <a:lstStyle/>
+          <a:p>
+            <a:endParaRPr lang="en-US" dirty="0"/>
+          </a:p>
+        </p:txBody>
+      </p:sp>
+      <p:sp>
+        <p:nvSpPr>
+          <p:cNvPr id="14" name="Google Shape;796;g35c258be8e5_0_199">
+            <a:extLst>
+              <a:ext uri="{FF2B5EF4-FFF2-40B4-BE49-F238E27FC236}">
+                <a16:creationId xmlns:a16="http://schemas.microsoft.com/office/drawing/2014/main" id="{BA11CF18-A570-7598-8C41-228FED79393B}"/>
+              </a:ext>
+            </a:extLst>
+          </p:cNvPr>
+          <p:cNvSpPr txBox="1">
+            <a:spLocks/>
+          </p:cNvSpPr>
+          <p:nvPr/>
+        </p:nvSpPr>
+        <p:spPr>
+          <a:xfrm>
+            <a:off x="603764" y="206607"/>
+            <a:ext cx="7198323" cy="1325700"/>
+          </a:xfrm>
+          <a:prstGeom prst="rect">
+            <a:avLst/>
+          </a:prstGeom>
+          <a:noFill/>
+          <a:ln>
+            <a:noFill/>
+          </a:ln>
+        </p:spPr>
+        <p:txBody>
+          <a:bodyPr spcFirstLastPara="1" wrap="square" lIns="0" tIns="0" rIns="0" bIns="0" anchor="b" anchorCtr="0">
+            <a:normAutofit/>
+          </a:bodyPr>
+          <a:lstStyle>
+            <a:lvl1pPr algn="l" defTabSz="914400" rtl="0" eaLnBrk="1" latinLnBrk="0" hangingPunct="1">
+              <a:lnSpc>
+                <a:spcPct val="90000"/>
+              </a:lnSpc>
+              <a:spcBef>
+                <a:spcPct val="0"/>
+              </a:spcBef>
+              <a:buNone/>
+              <a:defRPr lang="en-US" sz="3200" b="0" i="0" kern="1200">
+                <a:solidFill>
+                  <a:schemeClr val="tx1"/>
+                </a:solidFill>
+                <a:latin typeface="Lato Black" panose="020F0502020204030203" pitchFamily="34" charset="77"/>
+                <a:ea typeface="+mj-ea"/>
+                <a:cs typeface="Prompt" pitchFamily="2" charset="-34"/>
+              </a:defRPr>
+            </a:lvl1pPr>
+          </a:lstStyle>
+          <a:p>
+            <a:pPr>
+              <a:spcBef>
+                <a:spcPts val="0"/>
+              </a:spcBef>
+              <a:buClr>
+                <a:schemeClr val="dk1"/>
+              </a:buClr>
+              <a:buSzPts val="4000"/>
+              <a:buFont typeface="Lato"/>
+              <a:buNone/>
+            </a:pPr>
+            <a:r>
+              <a:rPr lang="en-US" sz="4000" b="1" dirty="0">
+                <a:latin typeface="Lato"/>
+                <a:ea typeface="Lato"/>
+                <a:cs typeface="Lato"/>
+                <a:sym typeface="Lato"/>
+              </a:rPr>
+              <a:t>Next Steps</a:t>
+            </a:r>
+            <a:br>
+              <a:rPr lang="en-US" sz="4000" b="1" dirty="0">
+                <a:latin typeface="Lato"/>
+                <a:ea typeface="Lato"/>
+                <a:cs typeface="Lato"/>
+                <a:sym typeface="Lato"/>
+              </a:rPr>
+            </a:br>
+            <a:endParaRPr lang="en-US" sz="4000" b="1" dirty="0">
+              <a:latin typeface="Lato"/>
+              <a:ea typeface="Lato"/>
+              <a:cs typeface="Lato"/>
+              <a:sym typeface="Lato"/>
+            </a:endParaRPr>
+          </a:p>
+        </p:txBody>
+      </p:sp>
+    </p:spTree>
+    <p:extLst>
+      <p:ext uri="{BB962C8B-B14F-4D97-AF65-F5344CB8AC3E}">
+        <p14:creationId xmlns:p14="http://schemas.microsoft.com/office/powerpoint/2010/main" val="4275385850"/>
+      </p:ext>
+    </p:extLst>
+  </p:cSld>
+  <p:clrMapOvr>
+    <a:masterClrMapping/>
+  </p:clrMapOvr>
+</p:sld>
+</file>
+
+<file path=ppt/slides/slide8.xml><?xml version="1.0" encoding="utf-8"?>
+<p:sld xmlns:a="http://schemas.openxmlformats.org/drawingml/2006/main" xmlns:r="http://schemas.openxmlformats.org/officeDocument/2006/relationships" xmlns:p="http://schemas.openxmlformats.org/presentationml/2006/main">
+  <p:cSld>
+    <p:bg>
+      <p:bgPr>
+        <a:solidFill>
+          <a:schemeClr val="bg1"/>
+        </a:solidFill>
+        <a:effectLst/>
+      </p:bgPr>
+    </p:bg>
+    <p:spTree>
+      <p:nvGrpSpPr>
+        <p:cNvPr id="1" name="">
+          <a:extLst>
+            <a:ext uri="{FF2B5EF4-FFF2-40B4-BE49-F238E27FC236}">
+              <a16:creationId xmlns:a16="http://schemas.microsoft.com/office/drawing/2014/main" id="{1021FA4D-5C74-9EED-D69B-7A3DD9348937}"/>
             </a:ext>
           </a:extLst>
         </p:cNvPr>
@@ -20093,7 +18656,7 @@
           <p:cNvPr id="15" name="Google Shape;859;p7" descr="Badge Question Mark with solid fill">
             <a:extLst>
               <a:ext uri="{FF2B5EF4-FFF2-40B4-BE49-F238E27FC236}">
-                <a16:creationId xmlns:a16="http://schemas.microsoft.com/office/drawing/2014/main" id="{D02F25E2-AA80-93DE-0025-FC07E44B2EB6}"/>
+                <a16:creationId xmlns:a16="http://schemas.microsoft.com/office/drawing/2014/main" id="{7223A2E1-CCE9-C304-754A-4A3D4368C2BD}"/>
               </a:ext>
             </a:extLst>
           </p:cNvPr>
@@ -20126,7 +18689,7 @@
           <p:cNvPr id="16" name="Google Shape;860;p7">
             <a:extLst>
               <a:ext uri="{FF2B5EF4-FFF2-40B4-BE49-F238E27FC236}">
-                <a16:creationId xmlns:a16="http://schemas.microsoft.com/office/drawing/2014/main" id="{7A04B7E3-4873-9F1B-B2B0-D016176D0BC0}"/>
+                <a16:creationId xmlns:a16="http://schemas.microsoft.com/office/drawing/2014/main" id="{E4389AE7-5793-2421-4E94-36F0D73FCF98}"/>
               </a:ext>
             </a:extLst>
           </p:cNvPr>
@@ -20196,9 +18759,92 @@
     </p:spTree>
     <p:extLst>
       <p:ext uri="{BB962C8B-B14F-4D97-AF65-F5344CB8AC3E}">
-        <p14:creationId xmlns:p14="http://schemas.microsoft.com/office/powerpoint/2010/main" val="2111548839"/>
+        <p14:creationId xmlns:p14="http://schemas.microsoft.com/office/powerpoint/2010/main" val="1512180849"/>
       </p:ext>
     </p:extLst>
+  </p:cSld>
+  <p:clrMapOvr>
+    <a:masterClrMapping/>
+  </p:clrMapOvr>
+</p:sld>
+</file>
+
+<file path=ppt/slides/slide9.xml><?xml version="1.0" encoding="utf-8"?>
+<p:sld xmlns:a="http://schemas.openxmlformats.org/drawingml/2006/main" xmlns:r="http://schemas.openxmlformats.org/officeDocument/2006/relationships" xmlns:p="http://schemas.openxmlformats.org/presentationml/2006/main">
+  <p:cSld name="Slide 10">
+    <p:bg>
+      <p:bgPr>
+        <a:solidFill>
+          <a:schemeClr val="bg1"/>
+        </a:solidFill>
+        <a:effectLst/>
+      </p:bgPr>
+    </p:bg>
+    <p:spTree>
+      <p:nvGrpSpPr>
+        <p:cNvPr id="1" name=""/>
+        <p:cNvGrpSpPr/>
+        <p:nvPr/>
+      </p:nvGrpSpPr>
+      <p:grpSpPr>
+        <a:xfrm>
+          <a:off x="0" y="0"/>
+          <a:ext cx="0" cy="0"/>
+          <a:chOff x="0" y="0"/>
+          <a:chExt cx="0" cy="0"/>
+        </a:xfrm>
+      </p:grpSpPr>
+      <p:sp>
+        <p:nvSpPr>
+          <p:cNvPr id="2" name="Text 0"/>
+          <p:cNvSpPr/>
+          <p:nvPr/>
+        </p:nvSpPr>
+        <p:spPr>
+          <a:xfrm>
+            <a:off x="914400" y="1188720"/>
+            <a:ext cx="7315200" cy="914400"/>
+          </a:xfrm>
+          <a:prstGeom prst="rect">
+            <a:avLst/>
+          </a:prstGeom>
+          <a:noFill/>
+          <a:ln/>
+        </p:spPr>
+        <p:txBody>
+          <a:bodyPr wrap="square" rtlCol="0" anchor="ctr"/>
+          <a:lstStyle/>
+          <a:p>
+            <a:pPr marL="0" indent="0" algn="ctr">
+              <a:buNone/>
+            </a:pPr>
+            <a:r>
+              <a:rPr lang="en-US" sz="4400" b="1" dirty="0">
+                <a:solidFill>
+                  <a:srgbClr val="3B82F6"/>
+                </a:solidFill>
+                <a:latin typeface="Calibri" pitchFamily="34" charset="0"/>
+                <a:ea typeface="Calibri" pitchFamily="34" charset="-122"/>
+                <a:cs typeface="Calibri" pitchFamily="34" charset="-120"/>
+              </a:rPr>
+              <a:t>Thank You</a:t>
+            </a:r>
+            <a:r>
+              <a:rPr lang="en-US" sz="4400" b="1" dirty="0">
+                <a:solidFill>
+                  <a:srgbClr val="FAFAFA"/>
+                </a:solidFill>
+                <a:latin typeface="Calibri" pitchFamily="34" charset="0"/>
+                <a:ea typeface="Calibri" pitchFamily="34" charset="-122"/>
+                <a:cs typeface="Calibri" pitchFamily="34" charset="-120"/>
+              </a:rPr>
+              <a:t> </a:t>
+            </a:r>
+            <a:endParaRPr lang="en-US" sz="4400" dirty="0"/>
+          </a:p>
+        </p:txBody>
+      </p:sp>
+    </p:spTree>
   </p:cSld>
   <p:clrMapOvr>
     <a:masterClrMapping/>

--- a/CertOps_Studio_Demo_Day.pptx
+++ b/CertOps_Studio_Demo_Day.pptx
@@ -136,7 +136,7 @@
   <pc:docChgLst>
     <pc:chgData name="Joseph Mata" userId="7bc4e0a3-43fe-410e-ab0b-dd6ac2ed59a7" providerId="ADAL" clId="{20AA238B-BA4D-59F0-BE88-0BD221C4FFE9}"/>
     <pc:docChg chg="undo custSel mod addSld delSld modSld sldOrd">
-      <pc:chgData name="Joseph Mata" userId="7bc4e0a3-43fe-410e-ab0b-dd6ac2ed59a7" providerId="ADAL" clId="{20AA238B-BA4D-59F0-BE88-0BD221C4FFE9}" dt="2026-03-19T02:45:41.395" v="5148" actId="20577"/>
+      <pc:chgData name="Joseph Mata" userId="7bc4e0a3-43fe-410e-ab0b-dd6ac2ed59a7" providerId="ADAL" clId="{20AA238B-BA4D-59F0-BE88-0BD221C4FFE9}" dt="2026-03-19T03:05:39.221" v="5193" actId="478"/>
       <pc:docMkLst>
         <pc:docMk/>
       </pc:docMkLst>
@@ -210,7 +210,7 @@
         </pc:sldMkLst>
       </pc:sldChg>
       <pc:sldChg chg="addSp delSp modSp add mod setBg delAnim modAnim">
-        <pc:chgData name="Joseph Mata" userId="7bc4e0a3-43fe-410e-ab0b-dd6ac2ed59a7" providerId="ADAL" clId="{20AA238B-BA4D-59F0-BE88-0BD221C4FFE9}" dt="2026-03-18T03:57:24.033" v="2687" actId="14100"/>
+        <pc:chgData name="Joseph Mata" userId="7bc4e0a3-43fe-410e-ab0b-dd6ac2ed59a7" providerId="ADAL" clId="{20AA238B-BA4D-59F0-BE88-0BD221C4FFE9}" dt="2026-03-19T03:05:29.745" v="5190" actId="478"/>
         <pc:sldMkLst>
           <pc:docMk/>
           <pc:sldMk cId="4148440160" sldId="268"/>
@@ -223,16 +223,16 @@
             <ac:picMk id="8" creationId="{D13EDA46-1535-4F57-15B1-8131E6B1EE5B}"/>
           </ac:picMkLst>
         </pc:picChg>
-        <pc:picChg chg="add mod">
-          <ac:chgData name="Joseph Mata" userId="7bc4e0a3-43fe-410e-ab0b-dd6ac2ed59a7" providerId="ADAL" clId="{20AA238B-BA4D-59F0-BE88-0BD221C4FFE9}" dt="2026-03-17T22:38:56.781" v="2037"/>
+        <pc:picChg chg="add del mod">
+          <ac:chgData name="Joseph Mata" userId="7bc4e0a3-43fe-410e-ab0b-dd6ac2ed59a7" providerId="ADAL" clId="{20AA238B-BA4D-59F0-BE88-0BD221C4FFE9}" dt="2026-03-19T03:05:29.745" v="5190" actId="478"/>
           <ac:picMkLst>
             <pc:docMk/>
             <pc:sldMk cId="4148440160" sldId="268"/>
             <ac:picMk id="10" creationId="{AD8DF6D9-9172-4468-9FBC-D9A62497CC86}"/>
           </ac:picMkLst>
         </pc:picChg>
-        <pc:picChg chg="add mod modCrop">
-          <ac:chgData name="Joseph Mata" userId="7bc4e0a3-43fe-410e-ab0b-dd6ac2ed59a7" providerId="ADAL" clId="{20AA238B-BA4D-59F0-BE88-0BD221C4FFE9}" dt="2026-03-18T03:57:24.033" v="2687" actId="14100"/>
+        <pc:picChg chg="add del mod modCrop">
+          <ac:chgData name="Joseph Mata" userId="7bc4e0a3-43fe-410e-ab0b-dd6ac2ed59a7" providerId="ADAL" clId="{20AA238B-BA4D-59F0-BE88-0BD221C4FFE9}" dt="2026-03-19T03:05:28.205" v="5189" actId="478"/>
           <ac:picMkLst>
             <pc:docMk/>
             <pc:sldMk cId="4148440160" sldId="268"/>
@@ -312,7 +312,7 @@
         </pc:picChg>
       </pc:sldChg>
       <pc:sldChg chg="addSp delSp modSp add mod modAnim modNotesTx">
-        <pc:chgData name="Joseph Mata" userId="7bc4e0a3-43fe-410e-ab0b-dd6ac2ed59a7" providerId="ADAL" clId="{20AA238B-BA4D-59F0-BE88-0BD221C4FFE9}" dt="2026-03-19T02:45:41.395" v="5148" actId="20577"/>
+        <pc:chgData name="Joseph Mata" userId="7bc4e0a3-43fe-410e-ab0b-dd6ac2ed59a7" providerId="ADAL" clId="{20AA238B-BA4D-59F0-BE88-0BD221C4FFE9}" dt="2026-03-19T02:53:56.116" v="5188" actId="20577"/>
         <pc:sldMkLst>
           <pc:docMk/>
           <pc:sldMk cId="229041283" sldId="2147483418"/>
@@ -967,7 +967,7 @@
         </pc:cxnChg>
       </pc:sldChg>
       <pc:sldChg chg="add ord modNotesTx">
-        <pc:chgData name="Joseph Mata" userId="7bc4e0a3-43fe-410e-ab0b-dd6ac2ed59a7" providerId="ADAL" clId="{20AA238B-BA4D-59F0-BE88-0BD221C4FFE9}" dt="2026-03-19T00:50:52.299" v="2908" actId="20577"/>
+        <pc:chgData name="Joseph Mata" userId="7bc4e0a3-43fe-410e-ab0b-dd6ac2ed59a7" providerId="ADAL" clId="{20AA238B-BA4D-59F0-BE88-0BD221C4FFE9}" dt="2026-03-19T02:49:05.847" v="5173" actId="20577"/>
         <pc:sldMkLst>
           <pc:docMk/>
           <pc:sldMk cId="468562430" sldId="2147483422"/>
@@ -1002,7 +1002,7 @@
         </pc:sldMkLst>
       </pc:sldChg>
       <pc:sldChg chg="addSp delSp modSp add mod ord">
-        <pc:chgData name="Joseph Mata" userId="7bc4e0a3-43fe-410e-ab0b-dd6ac2ed59a7" providerId="ADAL" clId="{20AA238B-BA4D-59F0-BE88-0BD221C4FFE9}" dt="2026-03-18T04:13:29.528" v="2712" actId="20578"/>
+        <pc:chgData name="Joseph Mata" userId="7bc4e0a3-43fe-410e-ab0b-dd6ac2ed59a7" providerId="ADAL" clId="{20AA238B-BA4D-59F0-BE88-0BD221C4FFE9}" dt="2026-03-19T03:05:39.221" v="5193" actId="478"/>
         <pc:sldMkLst>
           <pc:docMk/>
           <pc:sldMk cId="98661325" sldId="2147483427"/>
@@ -1039,6 +1039,14 @@
             <ac:picMk id="8" creationId="{D2B18707-102C-CF10-6D0A-0B2E85ED086B}"/>
           </ac:picMkLst>
         </pc:picChg>
+        <pc:picChg chg="del">
+          <ac:chgData name="Joseph Mata" userId="7bc4e0a3-43fe-410e-ab0b-dd6ac2ed59a7" providerId="ADAL" clId="{20AA238B-BA4D-59F0-BE88-0BD221C4FFE9}" dt="2026-03-19T03:05:39.221" v="5193" actId="478"/>
+          <ac:picMkLst>
+            <pc:docMk/>
+            <pc:sldMk cId="98661325" sldId="2147483427"/>
+            <ac:picMk id="9" creationId="{BD2C7557-2F95-E7EA-0890-D4C5983AAA4F}"/>
+          </ac:picMkLst>
+        </pc:picChg>
         <pc:picChg chg="add del mod">
           <ac:chgData name="Joseph Mata" userId="7bc4e0a3-43fe-410e-ab0b-dd6ac2ed59a7" providerId="ADAL" clId="{20AA238B-BA4D-59F0-BE88-0BD221C4FFE9}" dt="2026-03-18T04:08:15.680" v="2696" actId="478"/>
           <ac:picMkLst>
@@ -1063,8 +1071,8 @@
             <ac:picMk id="15" creationId="{17A65D12-BD72-270E-F1A8-3895DE1B5FFB}"/>
           </ac:picMkLst>
         </pc:picChg>
-        <pc:picChg chg="add mod">
-          <ac:chgData name="Joseph Mata" userId="7bc4e0a3-43fe-410e-ab0b-dd6ac2ed59a7" providerId="ADAL" clId="{20AA238B-BA4D-59F0-BE88-0BD221C4FFE9}" dt="2026-03-18T04:10:38.257" v="2711" actId="1076"/>
+        <pc:picChg chg="add del mod">
+          <ac:chgData name="Joseph Mata" userId="7bc4e0a3-43fe-410e-ab0b-dd6ac2ed59a7" providerId="ADAL" clId="{20AA238B-BA4D-59F0-BE88-0BD221C4FFE9}" dt="2026-03-19T03:05:37.328" v="5192" actId="478"/>
           <ac:picMkLst>
             <pc:docMk/>
             <pc:sldMk cId="98661325" sldId="2147483427"/>
@@ -1942,18 +1950,6 @@
           </a:p>
           <a:p>
             <a:pPr rtl="0"/>
-            <a:r>
-              <a:rPr lang="en-US" sz="1200" b="0" i="0" u="none" strike="noStrike" kern="1200" dirty="0">
-                <a:solidFill>
-                  <a:schemeClr val="tx1"/>
-                </a:solidFill>
-                <a:effectLst/>
-                <a:latin typeface="+mn-lt"/>
-                <a:ea typeface="+mn-ea"/>
-                <a:cs typeface="+mn-cs"/>
-              </a:rPr>
-              <a:t>builds on the previous.</a:t>
-            </a:r>
             <a:endParaRPr lang="en-US" b="0" dirty="0">
               <a:effectLst/>
             </a:endParaRPr>
@@ -2312,69 +2308,6 @@
           </a:p>
           <a:p>
             <a:pPr rtl="0"/>
-            <a:r>
-              <a:rPr lang="en-US" sz="1200" b="0" i="0" u="none" strike="noStrike" kern="1200" dirty="0">
-                <a:solidFill>
-                  <a:schemeClr val="tx1"/>
-                </a:solidFill>
-                <a:effectLst/>
-                <a:latin typeface="+mn-lt"/>
-                <a:ea typeface="+mn-ea"/>
-                <a:cs typeface="+mn-cs"/>
-              </a:rPr>
-              <a:t>All the </a:t>
-            </a:r>
-            <a:r>
-              <a:rPr lang="en-US" sz="1200" b="0" i="0" u="none" strike="noStrike" kern="1200" dirty="0" err="1">
-                <a:solidFill>
-                  <a:schemeClr val="tx1"/>
-                </a:solidFill>
-                <a:effectLst/>
-                <a:latin typeface="+mn-lt"/>
-                <a:ea typeface="+mn-ea"/>
-                <a:cs typeface="+mn-cs"/>
-              </a:rPr>
-              <a:t>atifact</a:t>
-            </a:r>
-            <a:r>
-              <a:rPr lang="en-US" sz="1200" b="0" i="0" u="none" strike="noStrike" kern="1200" dirty="0">
-                <a:solidFill>
-                  <a:schemeClr val="tx1"/>
-                </a:solidFill>
-                <a:effectLst/>
-                <a:latin typeface="+mn-lt"/>
-                <a:ea typeface="+mn-ea"/>
-                <a:cs typeface="+mn-cs"/>
-              </a:rPr>
-              <a:t> </a:t>
-            </a:r>
-            <a:r>
-              <a:rPr lang="en-US" sz="1200" b="0" i="0" u="none" strike="noStrike" kern="1200" dirty="0" err="1">
-                <a:solidFill>
-                  <a:schemeClr val="tx1"/>
-                </a:solidFill>
-                <a:effectLst/>
-                <a:latin typeface="+mn-lt"/>
-                <a:ea typeface="+mn-ea"/>
-                <a:cs typeface="+mn-cs"/>
-              </a:rPr>
-              <a:t>oare</a:t>
-            </a:r>
-            <a:r>
-              <a:rPr lang="en-US" sz="1200" b="0" i="0" u="none" strike="noStrike" kern="1200" dirty="0">
-                <a:solidFill>
-                  <a:schemeClr val="tx1"/>
-                </a:solidFill>
-                <a:effectLst/>
-                <a:latin typeface="+mn-lt"/>
-                <a:ea typeface="+mn-ea"/>
-                <a:cs typeface="+mn-cs"/>
-              </a:rPr>
-              <a:t> summarized in the blueprint</a:t>
-            </a:r>
-          </a:p>
-          <a:p>
-            <a:pPr rtl="0"/>
             <a:endParaRPr lang="en-US" sz="1200" b="0" i="0" u="none" strike="noStrike" kern="1200" dirty="0">
               <a:solidFill>
                 <a:schemeClr val="tx1"/>
@@ -2397,7 +2330,7 @@
                 <a:ea typeface="+mn-ea"/>
                 <a:cs typeface="+mn-cs"/>
               </a:rPr>
-              <a:t>After making any edits well save our program and move on to configuring our exam agent Once edited and approved</a:t>
+              <a:t>After making any edits well save our program and move on to configuring our exam agent</a:t>
             </a:r>
             <a:br>
               <a:rPr lang="en-US" b="0" dirty="0">
@@ -2455,7 +2388,7 @@
             </a:pPr>
             <a:r>
               <a:rPr lang="en-US" dirty="0"/>
-              <a:t>You can adjust  how the AI scores open-ended responses, it's summary style as well, as create custom welcome and farewell messages to mirror company language.</a:t>
+              <a:t>You can adjust  how the agent scores open-ended responses, it's summary style as well, as create custom welcome and farewell messages to mirror company language.</a:t>
             </a:r>
           </a:p>
           <a:p>
@@ -2944,31 +2877,7 @@
                 <a:ea typeface="+mn-ea"/>
                 <a:cs typeface="+mn-cs"/>
               </a:rPr>
-              <a:t>we have Pass/fail distribution, score distribution</a:t>
-            </a:r>
-            <a:r>
-              <a:rPr lang="en-US" sz="1200" b="0" i="0" u="none" strike="noStrike" kern="1200">
-                <a:solidFill>
-                  <a:schemeClr val="tx1"/>
-                </a:solidFill>
-                <a:effectLst/>
-                <a:latin typeface="+mn-lt"/>
-                <a:ea typeface="+mn-ea"/>
-                <a:cs typeface="+mn-cs"/>
-              </a:rPr>
-              <a:t>, domain </a:t>
-            </a:r>
-            <a:r>
-              <a:rPr lang="en-US" sz="1200" b="0" i="0" u="none" strike="noStrike" kern="1200" dirty="0">
-                <a:solidFill>
-                  <a:schemeClr val="tx1"/>
-                </a:solidFill>
-                <a:effectLst/>
-                <a:latin typeface="+mn-lt"/>
-                <a:ea typeface="+mn-ea"/>
-                <a:cs typeface="+mn-cs"/>
-              </a:rPr>
-              <a:t>performance, and learner results </a:t>
+              <a:t>we have Pass/fail distribution, score distribution, domain performance, and learner results </a:t>
             </a:r>
           </a:p>
           <a:p>
@@ -3098,456 +3007,6 @@
           <a:bodyPr/>
           <a:lstStyle/>
           <a:p>
-            <a:pPr rtl="0"/>
-            <a:r>
-              <a:rPr lang="en-US" sz="1200" b="0" i="0" u="none" strike="noStrike" kern="1200" dirty="0">
-                <a:solidFill>
-                  <a:schemeClr val="tx1"/>
-                </a:solidFill>
-                <a:effectLst/>
-                <a:latin typeface="+mn-lt"/>
-                <a:ea typeface="+mn-ea"/>
-                <a:cs typeface="+mn-cs"/>
-              </a:rPr>
-              <a:t>Behold, </a:t>
-            </a:r>
-            <a:r>
-              <a:rPr lang="en-US" dirty="0" err="1"/>
-              <a:t>CertOps</a:t>
-            </a:r>
-            <a:r>
-              <a:rPr lang="en-US" dirty="0"/>
-              <a:t> is an AI-powered platform that builds certification programs and delivers adaptive exams. You provide the source content and the system generates a complete, structured program ready for learner assessment, analytics, and deployment.</a:t>
-            </a:r>
-          </a:p>
-          <a:p>
-            <a:pPr rtl="0"/>
-            <a:br>
-              <a:rPr lang="en-US" dirty="0"/>
-            </a:br>
-            <a:r>
-              <a:rPr lang="en-US" sz="1200" b="0" i="0" u="none" strike="noStrike" kern="1200" dirty="0">
-                <a:solidFill>
-                  <a:schemeClr val="tx1"/>
-                </a:solidFill>
-                <a:effectLst/>
-                <a:latin typeface="+mn-lt"/>
-                <a:ea typeface="+mn-ea"/>
-                <a:cs typeface="+mn-cs"/>
-              </a:rPr>
-              <a:t>builds on the previous.</a:t>
-            </a:r>
-            <a:endParaRPr lang="en-US" b="0" dirty="0">
-              <a:effectLst/>
-            </a:endParaRPr>
-          </a:p>
-          <a:p>
-            <a:br>
-              <a:rPr lang="en-US" b="0" dirty="0">
-                <a:effectLst/>
-              </a:rPr>
-            </a:br>
-            <a:endParaRPr lang="en-US" b="0" dirty="0">
-              <a:effectLst/>
-            </a:endParaRPr>
-          </a:p>
-          <a:p>
-            <a:pPr rtl="0"/>
-            <a:r>
-              <a:rPr lang="en-US" sz="1200" b="1" i="0" u="none" strike="noStrike" kern="1200" dirty="0">
-                <a:solidFill>
-                  <a:schemeClr val="tx1"/>
-                </a:solidFill>
-                <a:effectLst/>
-                <a:latin typeface="+mn-lt"/>
-                <a:ea typeface="+mn-ea"/>
-                <a:cs typeface="+mn-cs"/>
-              </a:rPr>
-              <a:t>The first is is build This is where a certification program is created.</a:t>
-            </a:r>
-            <a:endParaRPr lang="en-US" b="0" dirty="0">
-              <a:effectLst/>
-            </a:endParaRPr>
-          </a:p>
-          <a:p>
-            <a:pPr rtl="0"/>
-            <a:r>
-              <a:rPr lang="en-US" sz="1200" b="1" i="0" u="none" strike="noStrike" kern="1200" dirty="0">
-                <a:solidFill>
-                  <a:schemeClr val="tx1"/>
-                </a:solidFill>
-                <a:effectLst/>
-                <a:latin typeface="+mn-lt"/>
-                <a:ea typeface="+mn-ea"/>
-                <a:cs typeface="+mn-cs"/>
-              </a:rPr>
-              <a:t>Upload your external and internal content.</a:t>
-            </a:r>
-            <a:r>
-              <a:rPr lang="en-US" sz="1200" b="0" i="0" u="none" strike="noStrike" kern="1200" dirty="0">
-                <a:solidFill>
-                  <a:schemeClr val="tx1"/>
-                </a:solidFill>
-                <a:effectLst/>
-                <a:latin typeface="+mn-lt"/>
-                <a:ea typeface="+mn-ea"/>
-                <a:cs typeface="+mn-cs"/>
-              </a:rPr>
-              <a:t> Add a program name and a short description of who the certification is for and what it should cover. The description steers which parts of the uploaded content are prioritized during generation.</a:t>
-            </a:r>
-            <a:endParaRPr lang="en-US" b="0" dirty="0">
-              <a:effectLst/>
-            </a:endParaRPr>
-          </a:p>
-          <a:p>
-            <a:pPr rtl="0"/>
-            <a:r>
-              <a:rPr lang="en-US" sz="1200" b="0" i="0" u="none" strike="noStrike" kern="1200" dirty="0">
-                <a:solidFill>
-                  <a:schemeClr val="tx1"/>
-                </a:solidFill>
-                <a:effectLst/>
-                <a:latin typeface="+mn-lt"/>
-                <a:ea typeface="+mn-ea"/>
-                <a:cs typeface="+mn-cs"/>
-              </a:rPr>
-              <a:t>Using that </a:t>
-            </a:r>
-            <a:r>
-              <a:rPr lang="en-US" sz="1200" b="0" i="0" u="none" strike="noStrike" kern="1200" dirty="0" err="1">
-                <a:solidFill>
-                  <a:schemeClr val="tx1"/>
-                </a:solidFill>
-                <a:effectLst/>
-                <a:latin typeface="+mn-lt"/>
-                <a:ea typeface="+mn-ea"/>
-                <a:cs typeface="+mn-cs"/>
-              </a:rPr>
-              <a:t>informationCertOps</a:t>
-            </a:r>
-            <a:r>
-              <a:rPr lang="en-US" sz="1200" b="0" i="0" u="none" strike="noStrike" kern="1200" dirty="0">
-                <a:solidFill>
-                  <a:schemeClr val="tx1"/>
-                </a:solidFill>
-                <a:effectLst/>
-                <a:latin typeface="+mn-lt"/>
-                <a:ea typeface="+mn-ea"/>
-                <a:cs typeface="+mn-cs"/>
-              </a:rPr>
-              <a:t> generates six artifacts in order. </a:t>
-            </a:r>
-            <a:endParaRPr lang="en-US" b="0" dirty="0">
-              <a:effectLst/>
-            </a:endParaRPr>
-          </a:p>
-          <a:p>
-            <a:pPr rtl="0"/>
-            <a:r>
-              <a:rPr lang="en-US" sz="1200" b="1" i="0" u="none" strike="noStrike" kern="1200" dirty="0">
-                <a:solidFill>
-                  <a:schemeClr val="tx1"/>
-                </a:solidFill>
-                <a:effectLst/>
-                <a:latin typeface="+mn-lt"/>
-                <a:ea typeface="+mn-ea"/>
-                <a:cs typeface="+mn-cs"/>
-              </a:rPr>
-              <a:t>1. Competency Framework</a:t>
-            </a:r>
-            <a:endParaRPr lang="en-US" b="1" dirty="0">
-              <a:effectLst/>
-            </a:endParaRPr>
-          </a:p>
-          <a:p>
-            <a:pPr rtl="0"/>
-            <a:r>
-              <a:rPr lang="en-US" sz="1200" b="0" i="0" u="none" strike="noStrike" kern="1200" dirty="0">
-                <a:solidFill>
-                  <a:schemeClr val="tx1"/>
-                </a:solidFill>
-                <a:effectLst/>
-                <a:latin typeface="+mn-lt"/>
-                <a:ea typeface="+mn-ea"/>
-                <a:cs typeface="+mn-cs"/>
-              </a:rPr>
-              <a:t>defines the domains (topic areas) the certification covers, the specific skills within each domain, and what novice, competent, and expert performance looks like for each skill.</a:t>
-            </a:r>
-            <a:endParaRPr lang="en-US" b="0" dirty="0">
-              <a:effectLst/>
-            </a:endParaRPr>
-          </a:p>
-          <a:p>
-            <a:br>
-              <a:rPr lang="en-US" b="0" dirty="0">
-                <a:effectLst/>
-              </a:rPr>
-            </a:br>
-            <a:endParaRPr lang="en-US" b="0" dirty="0">
-              <a:effectLst/>
-            </a:endParaRPr>
-          </a:p>
-          <a:p>
-            <a:pPr rtl="0"/>
-            <a:r>
-              <a:rPr lang="en-US" sz="1200" b="1" i="0" u="none" strike="noStrike" kern="1200" dirty="0">
-                <a:solidFill>
-                  <a:schemeClr val="tx1"/>
-                </a:solidFill>
-                <a:effectLst/>
-                <a:latin typeface="+mn-lt"/>
-                <a:ea typeface="+mn-ea"/>
-                <a:cs typeface="+mn-cs"/>
-              </a:rPr>
-              <a:t>2. Learning Progression</a:t>
-            </a:r>
-            <a:endParaRPr lang="en-US" b="1" dirty="0">
-              <a:effectLst/>
-            </a:endParaRPr>
-          </a:p>
-          <a:p>
-            <a:pPr rtl="0"/>
-            <a:r>
-              <a:rPr lang="en-US" sz="1200" b="0" i="0" u="none" strike="noStrike" kern="1200" dirty="0">
-                <a:solidFill>
-                  <a:schemeClr val="tx1"/>
-                </a:solidFill>
-                <a:effectLst/>
-                <a:latin typeface="+mn-lt"/>
-                <a:ea typeface="+mn-ea"/>
-                <a:cs typeface="+mn-cs"/>
-              </a:rPr>
-              <a:t>that maps out how a learner should prepare for the certification. Each step includes a title, which domain it covers, suggested activities, estimated time, prerequisites, and success criteria.</a:t>
-            </a:r>
-            <a:endParaRPr lang="en-US" b="0" dirty="0">
-              <a:effectLst/>
-            </a:endParaRPr>
-          </a:p>
-          <a:p>
-            <a:br>
-              <a:rPr lang="en-US" b="0" dirty="0">
-                <a:effectLst/>
-              </a:rPr>
-            </a:br>
-            <a:endParaRPr lang="en-US" b="0" dirty="0">
-              <a:effectLst/>
-            </a:endParaRPr>
-          </a:p>
-          <a:p>
-            <a:pPr rtl="0"/>
-            <a:r>
-              <a:rPr lang="en-US" sz="1200" b="1" i="0" u="none" strike="noStrike" kern="1200" dirty="0">
-                <a:solidFill>
-                  <a:schemeClr val="tx1"/>
-                </a:solidFill>
-                <a:effectLst/>
-                <a:latin typeface="+mn-lt"/>
-                <a:ea typeface="+mn-ea"/>
-                <a:cs typeface="+mn-cs"/>
-              </a:rPr>
-              <a:t>3. Performance Tasks</a:t>
-            </a:r>
-            <a:endParaRPr lang="en-US" b="1" dirty="0">
-              <a:effectLst/>
-            </a:endParaRPr>
-          </a:p>
-          <a:p>
-            <a:pPr rtl="0"/>
-            <a:r>
-              <a:rPr lang="en-US" sz="1200" b="0" i="0" u="none" strike="noStrike" kern="1200" dirty="0">
-                <a:solidFill>
-                  <a:schemeClr val="tx1"/>
-                </a:solidFill>
-                <a:effectLst/>
-                <a:latin typeface="+mn-lt"/>
-                <a:ea typeface="+mn-ea"/>
-                <a:cs typeface="+mn-cs"/>
-              </a:rPr>
-              <a:t>Hands-on, project-style tasks that test whether a learner can apply their knowledge in realistic scenarios. Each assessment includes a scenario description, step-by-step instructions, expected deliverables, and an evaluator guide.</a:t>
-            </a:r>
-            <a:endParaRPr lang="en-US" b="0" dirty="0">
-              <a:effectLst/>
-            </a:endParaRPr>
-          </a:p>
-          <a:p>
-            <a:br>
-              <a:rPr lang="en-US" b="0" dirty="0">
-                <a:effectLst/>
-              </a:rPr>
-            </a:br>
-            <a:endParaRPr lang="en-US" b="0" dirty="0">
-              <a:effectLst/>
-            </a:endParaRPr>
-          </a:p>
-          <a:p>
-            <a:pPr rtl="0"/>
-            <a:r>
-              <a:rPr lang="en-US" sz="1200" b="1" i="0" u="none" strike="noStrike" kern="1200" dirty="0">
-                <a:solidFill>
-                  <a:schemeClr val="tx1"/>
-                </a:solidFill>
-                <a:effectLst/>
-                <a:latin typeface="+mn-lt"/>
-                <a:ea typeface="+mn-ea"/>
-                <a:cs typeface="+mn-cs"/>
-              </a:rPr>
-              <a:t>4. Rubrics</a:t>
-            </a:r>
-            <a:endParaRPr lang="en-US" b="1" dirty="0">
-              <a:effectLst/>
-            </a:endParaRPr>
-          </a:p>
-          <a:p>
-            <a:pPr rtl="0"/>
-            <a:r>
-              <a:rPr lang="en-US" sz="1200" b="1" i="0" u="none" strike="noStrike" kern="1200" dirty="0">
-                <a:solidFill>
-                  <a:schemeClr val="tx1"/>
-                </a:solidFill>
-                <a:effectLst/>
-                <a:latin typeface="+mn-lt"/>
-                <a:ea typeface="+mn-ea"/>
-                <a:cs typeface="+mn-cs"/>
-              </a:rPr>
-              <a:t>What it is:</a:t>
-            </a:r>
-            <a:r>
-              <a:rPr lang="en-US" sz="1200" b="0" i="0" u="none" strike="noStrike" kern="1200" dirty="0">
-                <a:solidFill>
-                  <a:schemeClr val="tx1"/>
-                </a:solidFill>
-                <a:effectLst/>
-                <a:latin typeface="+mn-lt"/>
-                <a:ea typeface="+mn-ea"/>
-                <a:cs typeface="+mn-cs"/>
-              </a:rPr>
-              <a:t> Scoring guides for the </a:t>
-            </a:r>
-            <a:r>
-              <a:rPr lang="en-US" sz="1200" b="0" i="0" u="none" strike="noStrike" kern="1200" dirty="0" err="1">
-                <a:solidFill>
-                  <a:schemeClr val="tx1"/>
-                </a:solidFill>
-                <a:effectLst/>
-                <a:latin typeface="+mn-lt"/>
-                <a:ea typeface="+mn-ea"/>
-                <a:cs typeface="+mn-cs"/>
-              </a:rPr>
-              <a:t>taks</a:t>
-            </a:r>
-            <a:r>
-              <a:rPr lang="en-US" sz="1200" b="0" i="0" u="none" strike="noStrike" kern="1200" dirty="0">
-                <a:solidFill>
-                  <a:schemeClr val="tx1"/>
-                </a:solidFill>
-                <a:effectLst/>
-                <a:latin typeface="+mn-lt"/>
-                <a:ea typeface="+mn-ea"/>
-                <a:cs typeface="+mn-cs"/>
-              </a:rPr>
-              <a:t>. Each rubric lists weighted criteria and describes what novice, competent, and expert work looks like for each criterion.</a:t>
-            </a:r>
-            <a:endParaRPr lang="en-US" b="0" dirty="0">
-              <a:effectLst/>
-            </a:endParaRPr>
-          </a:p>
-          <a:p>
-            <a:pPr rtl="0"/>
-            <a:r>
-              <a:rPr lang="en-US" sz="1200" b="1" i="0" u="none" strike="noStrike" kern="1200" dirty="0">
-                <a:solidFill>
-                  <a:schemeClr val="tx1"/>
-                </a:solidFill>
-                <a:effectLst/>
-                <a:latin typeface="+mn-lt"/>
-                <a:ea typeface="+mn-ea"/>
-                <a:cs typeface="+mn-cs"/>
-              </a:rPr>
-              <a:t>Why it matters:</a:t>
-            </a:r>
-            <a:r>
-              <a:rPr lang="en-US" sz="1200" b="0" i="0" u="none" strike="noStrike" kern="1200" dirty="0">
-                <a:solidFill>
-                  <a:schemeClr val="tx1"/>
-                </a:solidFill>
-                <a:effectLst/>
-                <a:latin typeface="+mn-lt"/>
-                <a:ea typeface="+mn-ea"/>
-                <a:cs typeface="+mn-cs"/>
-              </a:rPr>
-              <a:t> Rubrics ensure consistent, fair grading across evaluators. They are also used by the adaptive exam's AI when scoring open-ended answers, so the same quality standards apply in both human and automated evaluation.</a:t>
-            </a:r>
-            <a:endParaRPr lang="en-US" b="0" dirty="0">
-              <a:effectLst/>
-            </a:endParaRPr>
-          </a:p>
-          <a:p>
-            <a:pPr rtl="0"/>
-            <a:r>
-              <a:rPr lang="en-US" sz="1200" b="1" i="0" u="none" strike="noStrike" kern="1200" dirty="0">
-                <a:solidFill>
-                  <a:schemeClr val="tx1"/>
-                </a:solidFill>
-                <a:effectLst/>
-                <a:latin typeface="+mn-lt"/>
-                <a:ea typeface="+mn-ea"/>
-                <a:cs typeface="+mn-cs"/>
-              </a:rPr>
-              <a:t>5. Item Bank</a:t>
-            </a:r>
-            <a:endParaRPr lang="en-US" b="1" dirty="0">
-              <a:effectLst/>
-            </a:endParaRPr>
-          </a:p>
-          <a:p>
-            <a:pPr rtl="0"/>
-            <a:r>
-              <a:rPr lang="en-US" sz="1200" b="1" i="0" u="none" strike="noStrike" kern="1200" dirty="0">
-                <a:solidFill>
-                  <a:schemeClr val="tx1"/>
-                </a:solidFill>
-                <a:effectLst/>
-                <a:latin typeface="+mn-lt"/>
-                <a:ea typeface="+mn-ea"/>
-                <a:cs typeface="+mn-cs"/>
-              </a:rPr>
-              <a:t>What it is:</a:t>
-            </a:r>
-            <a:r>
-              <a:rPr lang="en-US" sz="1200" b="0" i="0" u="none" strike="noStrike" kern="1200" dirty="0">
-                <a:solidFill>
-                  <a:schemeClr val="tx1"/>
-                </a:solidFill>
-                <a:effectLst/>
-                <a:latin typeface="+mn-lt"/>
-                <a:ea typeface="+mn-ea"/>
-                <a:cs typeface="+mn-cs"/>
-              </a:rPr>
-              <a:t> The pool of exam questions that the automated exam draws from. Contains both multiple-choice and open-ended questions. Each item includes the correct answer, a model answer, scoring notes, and which domain/skill it maps to.</a:t>
-            </a:r>
-            <a:endParaRPr lang="en-US" b="0" dirty="0">
-              <a:effectLst/>
-            </a:endParaRPr>
-          </a:p>
-          <a:p>
-            <a:pPr rtl="0"/>
-            <a:r>
-              <a:rPr lang="en-US" sz="1200" b="0" i="0" u="none" strike="noStrike" kern="1200" dirty="0">
-                <a:solidFill>
-                  <a:schemeClr val="tx1"/>
-                </a:solidFill>
-                <a:effectLst/>
-                <a:latin typeface="+mn-lt"/>
-                <a:ea typeface="+mn-ea"/>
-                <a:cs typeface="+mn-cs"/>
-              </a:rPr>
-              <a:t>Individual items can be deleted to curate the pool before saving. If the item bank is larger than the configured maximum exam items, the exam uses stratified random sampling to select a subset — ensuring all domains are represented while varying which specific questions appear each session.</a:t>
-            </a:r>
-            <a:endParaRPr lang="en-US" b="0" dirty="0">
-              <a:effectLst/>
-            </a:endParaRPr>
-          </a:p>
-          <a:p>
             <a:br>
               <a:rPr lang="en-US" b="0" dirty="0">
                 <a:effectLst/>
@@ -3587,501 +3046,7 @@
                 <a:ea typeface="+mn-ea"/>
                 <a:cs typeface="+mn-cs"/>
               </a:rPr>
-              <a:t>This is the learner-facing experience — the adaptive exam.</a:t>
-            </a:r>
-            <a:endParaRPr lang="en-US" b="0" dirty="0">
-              <a:effectLst/>
-            </a:endParaRPr>
-          </a:p>
-          <a:p>
-            <a:pPr rtl="0" fontAlgn="base"/>
-            <a:r>
-              <a:rPr lang="en-US" sz="1200" b="0" i="0" u="none" strike="noStrike" kern="1200" dirty="0">
-                <a:solidFill>
-                  <a:schemeClr val="tx1"/>
-                </a:solidFill>
-                <a:effectLst/>
-                <a:latin typeface="+mn-lt"/>
-                <a:ea typeface="+mn-ea"/>
-                <a:cs typeface="+mn-cs"/>
-              </a:rPr>
-              <a:t>The learner selects a saved certification program and enters their name.</a:t>
-            </a:r>
-          </a:p>
-          <a:p>
-            <a:pPr rtl="0" fontAlgn="base"/>
-            <a:r>
-              <a:rPr lang="en-US" sz="1200" b="0" i="0" u="none" strike="noStrike" kern="1200" dirty="0">
-                <a:solidFill>
-                  <a:schemeClr val="tx1"/>
-                </a:solidFill>
-                <a:effectLst/>
-                <a:latin typeface="+mn-lt"/>
-                <a:ea typeface="+mn-ea"/>
-                <a:cs typeface="+mn-cs"/>
-              </a:rPr>
-              <a:t>The exam begins in a conversational chat interface. Questions appear one at a time.</a:t>
-            </a:r>
-          </a:p>
-          <a:p>
-            <a:pPr rtl="0" fontAlgn="base"/>
-            <a:r>
-              <a:rPr lang="en-US" sz="1200" b="0" i="0" u="none" strike="noStrike" kern="1200" dirty="0">
-                <a:solidFill>
-                  <a:schemeClr val="tx1"/>
-                </a:solidFill>
-                <a:effectLst/>
-                <a:latin typeface="+mn-lt"/>
-                <a:ea typeface="+mn-ea"/>
-                <a:cs typeface="+mn-cs"/>
-              </a:rPr>
-              <a:t>The system evaluates each answer in real time and selects the next question based on the learner's performance so far.</a:t>
-            </a:r>
-          </a:p>
-          <a:p>
-            <a:pPr rtl="0" fontAlgn="base"/>
-            <a:r>
-              <a:rPr lang="en-US" sz="1200" b="0" i="0" u="none" strike="noStrike" kern="1200" dirty="0">
-                <a:solidFill>
-                  <a:schemeClr val="tx1"/>
-                </a:solidFill>
-                <a:effectLst/>
-                <a:latin typeface="+mn-lt"/>
-                <a:ea typeface="+mn-ea"/>
-                <a:cs typeface="+mn-cs"/>
-              </a:rPr>
-              <a:t>When the exam ends, the learner sees their results: pass/fail, scores by domain, a narrative summary of strengths and gaps, and recommended next steps.</a:t>
-            </a:r>
-          </a:p>
-          <a:p>
-            <a:pPr rtl="0"/>
-            <a:r>
-              <a:rPr lang="en-US" sz="1200" b="1" i="0" u="none" strike="noStrike" kern="1200" dirty="0">
-                <a:solidFill>
-                  <a:schemeClr val="tx1"/>
-                </a:solidFill>
-                <a:effectLst/>
-                <a:latin typeface="+mn-lt"/>
-                <a:ea typeface="+mn-ea"/>
-                <a:cs typeface="+mn-cs"/>
-              </a:rPr>
-              <a:t>Deploy</a:t>
-            </a:r>
-            <a:endParaRPr lang="en-US" b="1" dirty="0">
-              <a:effectLst/>
-            </a:endParaRPr>
-          </a:p>
-          <a:p>
-            <a:pPr rtl="0"/>
-            <a:r>
-              <a:rPr lang="en-US" sz="1200" b="0" i="0" u="none" strike="noStrike" kern="1200" dirty="0">
-                <a:solidFill>
-                  <a:schemeClr val="tx1"/>
-                </a:solidFill>
-                <a:effectLst/>
-                <a:latin typeface="+mn-lt"/>
-                <a:ea typeface="+mn-ea"/>
-                <a:cs typeface="+mn-cs"/>
-              </a:rPr>
-              <a:t>Saved programs are managed from the Deploy page.</a:t>
-            </a:r>
-            <a:endParaRPr lang="en-US" b="0" dirty="0">
-              <a:effectLst/>
-            </a:endParaRPr>
-          </a:p>
-          <a:p>
-            <a:pPr rtl="0" fontAlgn="base"/>
-            <a:r>
-              <a:rPr lang="en-US" sz="1200" b="1" i="0" u="none" strike="noStrike" kern="1200" dirty="0">
-                <a:solidFill>
-                  <a:schemeClr val="tx1"/>
-                </a:solidFill>
-                <a:effectLst/>
-                <a:latin typeface="+mn-lt"/>
-                <a:ea typeface="+mn-ea"/>
-                <a:cs typeface="+mn-cs"/>
-              </a:rPr>
-              <a:t>Browse saved </a:t>
-            </a:r>
-            <a:r>
-              <a:rPr lang="en-US" sz="1200" b="1" i="0" u="none" strike="noStrike" kern="1200" dirty="0" err="1">
-                <a:solidFill>
-                  <a:schemeClr val="tx1"/>
-                </a:solidFill>
-                <a:effectLst/>
-                <a:latin typeface="+mn-lt"/>
-                <a:ea typeface="+mn-ea"/>
-                <a:cs typeface="+mn-cs"/>
-              </a:rPr>
-              <a:t>progra</a:t>
-            </a:r>
-            <a:endParaRPr lang="en-US" sz="1200" b="0" i="0" u="none" strike="noStrike" kern="1200" dirty="0">
-              <a:solidFill>
-                <a:schemeClr val="tx1"/>
-              </a:solidFill>
-              <a:effectLst/>
-              <a:latin typeface="+mn-lt"/>
-              <a:ea typeface="+mn-ea"/>
-              <a:cs typeface="+mn-cs"/>
-            </a:endParaRPr>
-          </a:p>
-          <a:p>
-            <a:pPr rtl="0" fontAlgn="base"/>
-            <a:r>
-              <a:rPr lang="en-US" sz="1200" b="1" i="0" u="none" strike="noStrike" kern="1200" dirty="0">
-                <a:solidFill>
-                  <a:schemeClr val="tx1"/>
-                </a:solidFill>
-                <a:effectLst/>
-                <a:latin typeface="+mn-lt"/>
-                <a:ea typeface="+mn-ea"/>
-                <a:cs typeface="+mn-cs"/>
-              </a:rPr>
-              <a:t>Download reports</a:t>
-            </a:r>
-            <a:r>
-              <a:rPr lang="en-US" sz="1200" b="0" i="0" u="none" strike="noStrike" kern="1200" dirty="0">
-                <a:solidFill>
-                  <a:schemeClr val="tx1"/>
-                </a:solidFill>
-                <a:effectLst/>
-                <a:latin typeface="+mn-lt"/>
-                <a:ea typeface="+mn-ea"/>
-                <a:cs typeface="+mn-cs"/>
-              </a:rPr>
-              <a:t> the house all the content </a:t>
-            </a:r>
-            <a:r>
-              <a:rPr lang="en-US" sz="1200" b="0" i="0" u="none" strike="noStrike" kern="1200" dirty="0" err="1">
-                <a:solidFill>
-                  <a:schemeClr val="tx1"/>
-                </a:solidFill>
-                <a:effectLst/>
-                <a:latin typeface="+mn-lt"/>
-                <a:ea typeface="+mn-ea"/>
-                <a:cs typeface="+mn-cs"/>
-              </a:rPr>
-              <a:t>createsredaytos</a:t>
-            </a:r>
-            <a:r>
-              <a:rPr lang="en-US" sz="1200" b="0" i="0" u="none" strike="noStrike" kern="1200" dirty="0">
-                <a:solidFill>
-                  <a:schemeClr val="tx1"/>
-                </a:solidFill>
-                <a:effectLst/>
-                <a:latin typeface="+mn-lt"/>
-                <a:ea typeface="+mn-ea"/>
-                <a:cs typeface="+mn-cs"/>
-              </a:rPr>
-              <a:t> hare with shared with stakeholders.</a:t>
-            </a:r>
-          </a:p>
-          <a:p>
-            <a:pPr rtl="0" fontAlgn="base"/>
-            <a:r>
-              <a:rPr lang="en-US" sz="1200" b="1" i="0" u="none" strike="noStrike" kern="1200" dirty="0">
-                <a:solidFill>
-                  <a:schemeClr val="tx1"/>
-                </a:solidFill>
-                <a:effectLst/>
-                <a:latin typeface="+mn-lt"/>
-                <a:ea typeface="+mn-ea"/>
-                <a:cs typeface="+mn-cs"/>
-              </a:rPr>
-              <a:t>Share exams</a:t>
-            </a:r>
-            <a:r>
-              <a:rPr lang="en-US" sz="1200" b="0" i="0" u="none" strike="noStrike" kern="1200" dirty="0">
-                <a:solidFill>
-                  <a:schemeClr val="tx1"/>
-                </a:solidFill>
-                <a:effectLst/>
-                <a:latin typeface="+mn-lt"/>
-                <a:ea typeface="+mn-ea"/>
-                <a:cs typeface="+mn-cs"/>
-              </a:rPr>
-              <a:t> — Copy a direct link to the exam or grab an embeddable </a:t>
-            </a:r>
-            <a:r>
-              <a:rPr lang="en-US" sz="1200" b="0" i="0" u="none" strike="noStrike" kern="1200" dirty="0" err="1">
-                <a:solidFill>
-                  <a:schemeClr val="tx1"/>
-                </a:solidFill>
-                <a:effectLst/>
-                <a:latin typeface="+mn-lt"/>
-                <a:ea typeface="+mn-ea"/>
-                <a:cs typeface="+mn-cs"/>
-              </a:rPr>
-              <a:t>iframe</a:t>
-            </a:r>
-            <a:r>
-              <a:rPr lang="en-US" sz="1200" b="0" i="0" u="none" strike="noStrike" kern="1200" dirty="0">
-                <a:solidFill>
-                  <a:schemeClr val="tx1"/>
-                </a:solidFill>
-                <a:effectLst/>
-                <a:latin typeface="+mn-lt"/>
-                <a:ea typeface="+mn-ea"/>
-                <a:cs typeface="+mn-cs"/>
-              </a:rPr>
-              <a:t> snippet for LMS integration.</a:t>
-            </a:r>
-          </a:p>
-          <a:p>
-            <a:pPr rtl="0" fontAlgn="base"/>
-            <a:r>
-              <a:rPr lang="en-US" sz="1200" b="1" i="0" u="none" strike="noStrike" kern="1200" dirty="0">
-                <a:solidFill>
-                  <a:schemeClr val="tx1"/>
-                </a:solidFill>
-                <a:effectLst/>
-                <a:latin typeface="+mn-lt"/>
-                <a:ea typeface="+mn-ea"/>
-                <a:cs typeface="+mn-cs"/>
-              </a:rPr>
-              <a:t>Add documents</a:t>
-            </a:r>
-            <a:r>
-              <a:rPr lang="en-US" sz="1200" b="0" i="0" u="none" strike="noStrike" kern="1200" dirty="0">
-                <a:solidFill>
-                  <a:schemeClr val="tx1"/>
-                </a:solidFill>
-                <a:effectLst/>
-                <a:latin typeface="+mn-lt"/>
-                <a:ea typeface="+mn-ea"/>
-                <a:cs typeface="+mn-cs"/>
-              </a:rPr>
-              <a:t> — Upload additional rich a program's knowledge base for when your ready to rebuild New documents are embedded into the existing vector store, so the program can be rebuilt with a richer corpus.</a:t>
-            </a:r>
-          </a:p>
-          <a:p>
-            <a:pPr rtl="0"/>
-            <a:r>
-              <a:rPr lang="en-US" sz="1200" b="1" i="0" u="none" strike="noStrike" kern="1200" dirty="0">
-                <a:solidFill>
-                  <a:schemeClr val="tx1"/>
-                </a:solidFill>
-                <a:effectLst/>
-                <a:latin typeface="+mn-lt"/>
-                <a:ea typeface="+mn-ea"/>
-                <a:cs typeface="+mn-cs"/>
-              </a:rPr>
-              <a:t>Analyze</a:t>
-            </a:r>
-            <a:endParaRPr lang="en-US" b="1" dirty="0">
-              <a:effectLst/>
-            </a:endParaRPr>
-          </a:p>
-          <a:p>
-            <a:pPr rtl="0"/>
-            <a:r>
-              <a:rPr lang="en-US" sz="1200" b="0" i="0" u="none" strike="noStrike" kern="1200" dirty="0">
-                <a:solidFill>
-                  <a:schemeClr val="tx1"/>
-                </a:solidFill>
-                <a:effectLst/>
-                <a:latin typeface="+mn-lt"/>
-                <a:ea typeface="+mn-ea"/>
-                <a:cs typeface="+mn-cs"/>
-              </a:rPr>
-              <a:t>The Analyze page provides aggregate analytics across all learner attempts.</a:t>
-            </a:r>
-            <a:endParaRPr lang="en-US" b="0" dirty="0">
-              <a:effectLst/>
-            </a:endParaRPr>
-          </a:p>
-          <a:p>
-            <a:pPr rtl="0" fontAlgn="base"/>
-            <a:r>
-              <a:rPr lang="en-US" sz="1200" b="1" i="0" u="none" strike="noStrike" kern="1200" dirty="0">
-                <a:solidFill>
-                  <a:schemeClr val="tx1"/>
-                </a:solidFill>
-                <a:effectLst/>
-                <a:latin typeface="+mn-lt"/>
-                <a:ea typeface="+mn-ea"/>
-                <a:cs typeface="+mn-cs"/>
-              </a:rPr>
-              <a:t>Summary view</a:t>
-            </a:r>
-            <a:r>
-              <a:rPr lang="en-US" sz="1200" b="0" i="0" u="none" strike="noStrike" kern="1200" dirty="0">
-                <a:solidFill>
-                  <a:schemeClr val="tx1"/>
-                </a:solidFill>
-                <a:effectLst/>
-                <a:latin typeface="+mn-lt"/>
-                <a:ea typeface="+mn-ea"/>
-                <a:cs typeface="+mn-cs"/>
-              </a:rPr>
-              <a:t> — Cards for each program showing total attempts, pass rate, and average score.</a:t>
-            </a:r>
-          </a:p>
-          <a:p>
-            <a:pPr rtl="0" fontAlgn="base"/>
-            <a:r>
-              <a:rPr lang="en-US" sz="1200" b="1" i="0" u="none" strike="noStrike" kern="1200" dirty="0">
-                <a:solidFill>
-                  <a:schemeClr val="tx1"/>
-                </a:solidFill>
-                <a:effectLst/>
-                <a:latin typeface="+mn-lt"/>
-                <a:ea typeface="+mn-ea"/>
-                <a:cs typeface="+mn-cs"/>
-              </a:rPr>
-              <a:t>Program drill-down</a:t>
-            </a:r>
-            <a:r>
-              <a:rPr lang="en-US" sz="1200" b="0" i="0" u="none" strike="noStrike" kern="1200" dirty="0">
-                <a:solidFill>
-                  <a:schemeClr val="tx1"/>
-                </a:solidFill>
-                <a:effectLst/>
-                <a:latin typeface="+mn-lt"/>
-                <a:ea typeface="+mn-ea"/>
-                <a:cs typeface="+mn-cs"/>
-              </a:rPr>
-              <a:t> — Click a program to see detailed analytics:</a:t>
-            </a:r>
-          </a:p>
-          <a:p>
-            <a:pPr lvl="1" rtl="0" fontAlgn="base"/>
-            <a:r>
-              <a:rPr lang="en-US" sz="1200" b="0" i="0" u="none" strike="noStrike" kern="1200" dirty="0">
-                <a:solidFill>
-                  <a:schemeClr val="tx1"/>
-                </a:solidFill>
-                <a:effectLst/>
-                <a:latin typeface="+mn-lt"/>
-                <a:ea typeface="+mn-ea"/>
-                <a:cs typeface="+mn-cs"/>
-              </a:rPr>
-              <a:t>Pass/fail distribution (donut chart with pass rate percentage)</a:t>
-            </a:r>
-          </a:p>
-          <a:p>
-            <a:pPr lvl="1" rtl="0" fontAlgn="base"/>
-            <a:r>
-              <a:rPr lang="en-US" sz="1200" b="0" i="0" u="none" strike="noStrike" kern="1200" dirty="0">
-                <a:solidFill>
-                  <a:schemeClr val="tx1"/>
-                </a:solidFill>
-                <a:effectLst/>
-                <a:latin typeface="+mn-lt"/>
-                <a:ea typeface="+mn-ea"/>
-                <a:cs typeface="+mn-cs"/>
-              </a:rPr>
-              <a:t>Score distribution (histogram of learner scores)</a:t>
-            </a:r>
-          </a:p>
-          <a:p>
-            <a:pPr lvl="1" rtl="0" fontAlgn="base"/>
-            <a:r>
-              <a:rPr lang="en-US" sz="1200" b="0" i="0" u="none" strike="noStrike" kern="1200" dirty="0">
-                <a:solidFill>
-                  <a:schemeClr val="tx1"/>
-                </a:solidFill>
-                <a:effectLst/>
-                <a:latin typeface="+mn-lt"/>
-                <a:ea typeface="+mn-ea"/>
-                <a:cs typeface="+mn-cs"/>
-              </a:rPr>
-              <a:t>Domain performance (per-domain average scores)</a:t>
-            </a:r>
-          </a:p>
-          <a:p>
-            <a:pPr lvl="1" rtl="0" fontAlgn="base"/>
-            <a:r>
-              <a:rPr lang="en-US" sz="1200" b="0" i="0" u="none" strike="noStrike" kern="1200" dirty="0">
-                <a:solidFill>
-                  <a:schemeClr val="tx1"/>
-                </a:solidFill>
-                <a:effectLst/>
-                <a:latin typeface="+mn-lt"/>
-                <a:ea typeface="+mn-ea"/>
-                <a:cs typeface="+mn-cs"/>
-              </a:rPr>
-              <a:t>Proficiency distribution (novice/competent/expert counts per domain)</a:t>
-            </a:r>
-          </a:p>
-          <a:p>
-            <a:pPr lvl="1" rtl="0" fontAlgn="base"/>
-            <a:r>
-              <a:rPr lang="en-US" sz="1200" b="0" i="0" u="none" strike="noStrike" kern="1200" dirty="0">
-                <a:solidFill>
-                  <a:schemeClr val="tx1"/>
-                </a:solidFill>
-                <a:effectLst/>
-                <a:latin typeface="+mn-lt"/>
-                <a:ea typeface="+mn-ea"/>
-                <a:cs typeface="+mn-cs"/>
-              </a:rPr>
-              <a:t>Score trend over time</a:t>
-            </a:r>
-          </a:p>
-          <a:p>
-            <a:pPr lvl="1" rtl="0" fontAlgn="base"/>
-            <a:r>
-              <a:rPr lang="en-US" sz="1200" b="0" i="0" u="none" strike="noStrike" kern="1200" dirty="0">
-                <a:solidFill>
-                  <a:schemeClr val="tx1"/>
-                </a:solidFill>
-                <a:effectLst/>
-                <a:latin typeface="+mn-lt"/>
-                <a:ea typeface="+mn-ea"/>
-                <a:cs typeface="+mn-cs"/>
-              </a:rPr>
-              <a:t>Learner results table (alphabetically sorted, with per-learner domain breakdown)</a:t>
-            </a:r>
-          </a:p>
-          <a:p>
-            <a:r>
-              <a:rPr lang="en-US" sz="1200" b="1" i="0" u="none" strike="noStrike" kern="1200" dirty="0">
-                <a:solidFill>
-                  <a:schemeClr val="tx1"/>
-                </a:solidFill>
-                <a:effectLst/>
-                <a:latin typeface="+mn-lt"/>
-                <a:ea typeface="+mn-ea"/>
-                <a:cs typeface="+mn-cs"/>
-              </a:rPr>
-              <a:t>All </a:t>
-            </a:r>
-            <a:r>
-              <a:rPr lang="en-US" sz="1200" b="1" i="0" u="none" strike="noStrike" kern="1200" dirty="0" err="1">
-                <a:solidFill>
-                  <a:schemeClr val="tx1"/>
-                </a:solidFill>
-                <a:effectLst/>
-                <a:latin typeface="+mn-lt"/>
-                <a:ea typeface="+mn-ea"/>
-                <a:cs typeface="+mn-cs"/>
-              </a:rPr>
-              <a:t>resultscan</a:t>
-            </a:r>
-            <a:r>
-              <a:rPr lang="en-US" sz="1200" b="1" i="0" u="none" strike="noStrike" kern="1200" dirty="0">
-                <a:solidFill>
-                  <a:schemeClr val="tx1"/>
-                </a:solidFill>
-                <a:effectLst/>
-                <a:latin typeface="+mn-lt"/>
-                <a:ea typeface="+mn-ea"/>
-                <a:cs typeface="+mn-cs"/>
-              </a:rPr>
-              <a:t> e exported for </a:t>
-            </a:r>
-            <a:r>
-              <a:rPr lang="en-US" sz="1200" b="0" i="0" u="none" strike="noStrike" kern="1200" dirty="0">
-                <a:solidFill>
-                  <a:schemeClr val="tx1"/>
-                </a:solidFill>
-                <a:effectLst/>
-                <a:latin typeface="+mn-lt"/>
-                <a:ea typeface="+mn-ea"/>
-                <a:cs typeface="+mn-cs"/>
-              </a:rPr>
-              <a:t>offline analysis or reporting.</a:t>
+              <a:t>This is the</a:t>
             </a:r>
             <a:endParaRPr lang="en-US" dirty="0"/>
           </a:p>
@@ -18258,70 +17223,6 @@
           <a:chExt cx="0" cy="0"/>
         </a:xfrm>
       </p:grpSpPr>
-      <p:pic>
-        <p:nvPicPr>
-          <p:cNvPr id="9" name="Image 0" descr="/tmp/certops-slides/screenshots/homepage.png">
-            <a:extLst>
-              <a:ext uri="{FF2B5EF4-FFF2-40B4-BE49-F238E27FC236}">
-                <a16:creationId xmlns:a16="http://schemas.microsoft.com/office/drawing/2014/main" id="{BD2C7557-2F95-E7EA-0890-D4C5983AAA4F}"/>
-              </a:ext>
-            </a:extLst>
-          </p:cNvPr>
-          <p:cNvPicPr>
-            <a:picLocks noChangeAspect="1"/>
-          </p:cNvPicPr>
-          <p:nvPr/>
-        </p:nvPicPr>
-        <p:blipFill>
-          <a:blip r:embed="rId3"/>
-          <a:srcRect l="17298" t="29706" r="17441" b="42067"/>
-          <a:stretch>
-            <a:fillRect/>
-          </a:stretch>
-        </p:blipFill>
-        <p:spPr>
-          <a:xfrm>
-            <a:off x="2065662" y="3402835"/>
-            <a:ext cx="5012675" cy="1355076"/>
-          </a:xfrm>
-          <a:prstGeom prst="rect">
-            <a:avLst/>
-          </a:prstGeom>
-          <a:effectLst>
-            <a:softEdge rad="63500"/>
-          </a:effectLst>
-        </p:spPr>
-      </p:pic>
-      <p:pic>
-        <p:nvPicPr>
-          <p:cNvPr id="17" name="Picture 16">
-            <a:extLst>
-              <a:ext uri="{FF2B5EF4-FFF2-40B4-BE49-F238E27FC236}">
-                <a16:creationId xmlns:a16="http://schemas.microsoft.com/office/drawing/2014/main" id="{7F83CCD4-A2B5-F67A-990E-589DC7898A21}"/>
-              </a:ext>
-            </a:extLst>
-          </p:cNvPr>
-          <p:cNvPicPr>
-            <a:picLocks noChangeAspect="1"/>
-          </p:cNvPicPr>
-          <p:nvPr/>
-        </p:nvPicPr>
-        <p:blipFill>
-          <a:blip r:embed="rId4"/>
-          <a:stretch>
-            <a:fillRect/>
-          </a:stretch>
-        </p:blipFill>
-        <p:spPr>
-          <a:xfrm>
-            <a:off x="-1841939" y="-326562"/>
-            <a:ext cx="12827876" cy="5212888"/>
-          </a:xfrm>
-          <a:prstGeom prst="rect">
-            <a:avLst/>
-          </a:prstGeom>
-        </p:spPr>
-      </p:pic>
     </p:spTree>
     <p:extLst>
       <p:ext uri="{BB962C8B-B14F-4D97-AF65-F5344CB8AC3E}">
@@ -18378,71 +17279,6 @@
           <a:chExt cx="0" cy="0"/>
         </a:xfrm>
       </p:grpSpPr>
-      <p:pic>
-        <p:nvPicPr>
-          <p:cNvPr id="10" name="Image 0" descr="/tmp/certops-slides/screenshots/homepage.png">
-            <a:extLst>
-              <a:ext uri="{FF2B5EF4-FFF2-40B4-BE49-F238E27FC236}">
-                <a16:creationId xmlns:a16="http://schemas.microsoft.com/office/drawing/2014/main" id="{AD8DF6D9-9172-4468-9FBC-D9A62497CC86}"/>
-              </a:ext>
-            </a:extLst>
-          </p:cNvPr>
-          <p:cNvPicPr>
-            <a:picLocks noChangeAspect="1"/>
-          </p:cNvPicPr>
-          <p:nvPr/>
-        </p:nvPicPr>
-        <p:blipFill>
-          <a:blip r:embed="rId3"/>
-          <a:srcRect l="17298" t="29706" r="17441" b="42067"/>
-          <a:stretch>
-            <a:fillRect/>
-          </a:stretch>
-        </p:blipFill>
-        <p:spPr>
-          <a:xfrm>
-            <a:off x="2065662" y="3402835"/>
-            <a:ext cx="5012675" cy="1355076"/>
-          </a:xfrm>
-          <a:prstGeom prst="rect">
-            <a:avLst/>
-          </a:prstGeom>
-          <a:effectLst>
-            <a:softEdge rad="63500"/>
-          </a:effectLst>
-        </p:spPr>
-      </p:pic>
-      <p:pic>
-        <p:nvPicPr>
-          <p:cNvPr id="12" name="Picture 11">
-            <a:extLst>
-              <a:ext uri="{FF2B5EF4-FFF2-40B4-BE49-F238E27FC236}">
-                <a16:creationId xmlns:a16="http://schemas.microsoft.com/office/drawing/2014/main" id="{B0AD99A7-EB42-97AD-DD87-6F6A9D8219D2}"/>
-              </a:ext>
-            </a:extLst>
-          </p:cNvPr>
-          <p:cNvPicPr>
-            <a:picLocks noChangeAspect="1"/>
-          </p:cNvPicPr>
-          <p:nvPr/>
-        </p:nvPicPr>
-        <p:blipFill>
-          <a:blip r:embed="rId4"/>
-          <a:srcRect l="10858" r="17754"/>
-          <a:stretch>
-            <a:fillRect/>
-          </a:stretch>
-        </p:blipFill>
-        <p:spPr>
-          <a:xfrm>
-            <a:off x="0" y="-246993"/>
-            <a:ext cx="8360206" cy="3954747"/>
-          </a:xfrm>
-          <a:prstGeom prst="rect">
-            <a:avLst/>
-          </a:prstGeom>
-        </p:spPr>
-      </p:pic>
     </p:spTree>
     <p:extLst>
       <p:ext uri="{BB962C8B-B14F-4D97-AF65-F5344CB8AC3E}">
